--- a/Curso Gas B/05 - ITC-ICG 08 - Aparatos de gas/05 - ITC-ICG 08 - Aparatos de gas - Vídeo 1.pptx
+++ b/Curso Gas B/05 - ITC-ICG 08 - Aparatos de gas/05 - ITC-ICG 08 - Aparatos de gas - Vídeo 1.pptx
@@ -520,7 +520,7 @@
           </a:p>
           <a:p>
             <a:r>
-              <a:t>N2: Esta instrucción, la ITC-ICG cero ocho. Regula qué aparatos pueden venderse, cómo se demuestra que son seguros, qué papeles y advertencias los acompañan y cómo se marcan. En este primer vídeo vemos las cuatro primeras piezas, la parte más de fábrica: objeto, comercialización, conformidad y marcado. Es lo que la norma exige antes de que el aparato llegue a tus manos.</a:t>
+              <a:t>N2: Manda esta instrucción, la ITC-ICG cero ocho. Hasta ahora hemos hablado mucho del tubo, de la instalación; ahora nos vamos al final del recorrido, a la caldera o al calentador que quema el gas. Esta norma regula cuatro cosas: qué aparatos pueden venderse, cómo se demuestra que son seguros, qué papeles y advertencias los acompañan, y cómo se marcan. En este primer vídeo vemos la parte más de fábrica: objeto, comercialización, conformidad y marcado. Es decir, todo lo que la norma exige antes de que el aparato llegue a tus manos.</a:t>
             </a:r>
           </a:p>
         </p:txBody>
@@ -590,12 +590,12 @@
           <a:lstStyle/>
           <a:p>
             <a:r>
-              <a:t>N1: ¿Dónde va cada advertencia y qué dice?</a:t>
-            </a:r>
-          </a:p>
-          <a:p>
-            <a:r>
-              <a:t>N2: Ojo a dónde va cada cosa. Las advertencias del aparato siguen las reglas del anexo dos, la placa de características. Las del embalaje llevan como mínimo tipo de gas, presión de suministro y las restricciones de uso, en particular no instalar el aparato en locales sin ventilación suficiente o al aire libre según proceda. Truco: en la caja te fijas en qué gas, a qué presión y dónde no lo puedo poner.</a:t>
+              <a:t>N1: Hay advertencias en el aparato y en la caja. ¿Dónde va cada cosa?</a:t>
+            </a:r>
+          </a:p>
+          <a:p>
+            <a:r>
+              <a:t>N2: Ojo a no mezclarlas, porque el examen juega con eso. Las advertencias que van en el aparato siguen las reglas del anexo dos, que es la placa de características; lo veremos entero en el cuarto vídeo. Las advertencias que van en el embalaje, en la caja, llevan como mínimo tres cosas: tipo de gas, presión de suministro y las restricciones de uso, en particular la de no instalar el aparato en locales sin ventilación suficiente o al aire libre, según proceda. Truco para recordarlo: en la caja te fijas en qué gas, a qué presión y dónde no lo puedo poner.</a:t>
             </a:r>
           </a:p>
         </p:txBody>
@@ -665,12 +665,12 @@
           <a:lstStyle/>
           <a:p>
             <a:r>
-              <a:t>N1: La norma habla de aparatos y de equipos. ¿Qué diferencia hay?</a:t>
-            </a:r>
-          </a:p>
-          <a:p>
-            <a:r>
-              <a:t>N2: El aparato es el conjunto terminado, la caldera. El equipo es una pieza que se integra en él: un quemador, una válvula, un programador. La norma exige que cada equipo, por separado, venga también con sus instrucciones de instalación, regulación, empleo y mantenimiento, y funcione bien montado según manda su fabricante. Así, la seguridad del aparato final no se rompe por una pieza mal documentada.</a:t>
+              <a:t>N1: La norma habla de aparatos y también de equipos. ¿Qué diferencia hay?</a:t>
+            </a:r>
+          </a:p>
+          <a:p>
+            <a:r>
+              <a:t>N2: Es una distinción sencilla pero que conviene tener clara. El aparato es el conjunto terminado, la caldera completa. El equipo es una pieza que se integra dentro de él: un quemador, una válvula, un programador. Pues bien, la norma exige que cada equipo, por separado, también venga con sus instrucciones de instalación, regulación, empleo y mantenimiento, y que funcione bien montado según manda su fabricante. ¿Por qué? Porque la seguridad del aparato final no se puede romper por una pieza mal documentada o mal montada. La cadena es tan fuerte como su eslabón más débil.</a:t>
             </a:r>
           </a:p>
         </p:txBody>
@@ -745,7 +745,7 @@
           </a:p>
           <a:p>
             <a:r>
-              <a:t>N2: El orden manda. Primero se busca la norma UNE, UNE-EN o EN que le aplique; solo si no existe se recurre a las prescripciones del anexo tres. Y se certifica por dos caminos, no por tres sueltos: el de la serie, examen de tipo más verificación de la producción, que es la a más la b; o el de la pieza única, la verificación por unidad, que es la c. Fórmula para memorizar: a más b, o bien c. Los detalles de cada uno están en el anexo uno, que verás en el vídeo tres.</a:t>
+              <a:t>N2: Vamos por partes. Primero, qué tiene que cumplir: el orden manda. Se busca la norma española UNE, la UNE-EN o la europea EN que le aplique; y solo si no existe ninguna, se recurre a las prescripciones de seguridad del anexo tres. Es la misma lógica de todo el Reglamento: la norma técnica primero, y las reglas propias de la ITC como red de seguridad. Segundo, cómo se certifica: hay dos caminos, no tres sueltos. El camino de la serie, que es examen de tipo, la a, más verificación de la producción, la b. O el camino de la pieza única, la verificación por unidad, la c. La fórmula que tienes que memorizar es a más b, o bien c. Los detalles de cada procedimiento están en el anexo uno, y los desmenuzamos en el vídeo tres.</a:t>
             </a:r>
           </a:p>
         </p:txBody>
@@ -815,12 +815,12 @@
           <a:lstStyle/>
           <a:p>
             <a:r>
-              <a:t>N1: ¿Qué obliga la ITC en cuanto a marcado?</a:t>
-            </a:r>
-          </a:p>
-          <a:p>
-            <a:r>
-              <a:t>N2: Dos obligaciones cortas. Una placa de características en lugar visible, cuyo contenido está en el anexo dos. E instrucciones, cuyo contenido está en las normas que apliquen o, si no hay, como mínimo en el anexo tres. Es una sección puente: te dice que hay que marcar e instruir y te manda a los anexos para el qué y el cómo. La placa es el DNI del aparato: de ella sacas el gas, la presión de reglaje y la potencia que necesitarás para rellenar el certificado de puesta en marcha.</a:t>
+              <a:t>N1: Y para cerrar el vídeo, ¿qué obliga la ITC en cuanto a marcado?</a:t>
+            </a:r>
+          </a:p>
+          <a:p>
+            <a:r>
+              <a:t>N2: Solo dos obligaciones, cortas pero importantes. Una: una placa de características en lugar visible, cuyo contenido detallado está en el anexo dos. Dos: instrucciones, cuyo contenido está en las normas que apliquen o, si no hay, como mínimo en el anexo tres. Fíjate en que es una sección puente: te dice que hay que marcar e instruir, y te manda a los anexos para el qué y el cómo. Asocia siempre placa con anexo dos, e instrucciones con normas o anexo tres. Y recuerda para qué sirve la placa: es el DNI del aparato; de ella sacas el gas, la presión de reglaje y la potencia que necesitarás para rellenar el certificado de puesta en marcha.</a:t>
             </a:r>
           </a:p>
         </p:txBody>
@@ -890,12 +890,22 @@
           <a:lstStyle/>
           <a:p>
             <a:r>
-              <a:t>N1: Si te quedas con tres cosas de este vídeo, ¿cuáles serían?</a:t>
-            </a:r>
-          </a:p>
-          <a:p>
-            <a:r>
-              <a:t>N2: Primero, esta ITC es la norma del aparato, no del tubo: regula su seguridad y certificación solo para los que no tienen directiva europea propia, y la documentación y puesta en marcha de todos los aparatos a gas. Segundo, antes de tocar nada exige los dos manuales y la placa, en español, y arranca el aparato en su ubicación definitiva, porque el tiro, la ventilación y la presión reales mandan. Y tercero, no montes ni pongas en marcha un aparato sin certificar: sin eso no podrás emitir el certificado de puesta en marcha ni responder si hay un siniestro.</a:t>
+              <a:t>N1: Cerramos fuerte. Si me quedo con lo esencial de este primer vídeo, ¿qué es?</a:t>
+            </a:r>
+          </a:p>
+          <a:p>
+            <a:r>
+              <a:t>N2: Reconstruyamos el hilo, que así se te queda. Empezamos situando la norma: la ITC-ICG cero ocho es la del aparato en sí, no la de la tubería; y tiene dos puertas, seguridad solo para los que no tienen directiva europea propia, pero documentación y puesta en marcha para todos. De ahí salió lo segundo: antes de tocar nada exiges los dos manuales, el técnico y el de uso, y la placa, todo en español, porque sin esos papeles no puedes ni regular ni dejar la instalación en regla. Lo tercero, las condiciones normales: bien instalado, con el gas correcto en Wobbe y presión, y usado para su fin; si falla una pata, la combustión se descontrola. Y lo cuarto, la conformidad: normas UNE o EN, y si no hay, el anexo tres; certificada con a más b, o bien c.</a:t>
+            </a:r>
+          </a:p>
+          <a:p>
+            <a:r>
+              <a:t>N1: ¿Y cómo se traduce esto en el examen y en la obra?</a:t>
+            </a:r>
+          </a:p>
+          <a:p>
+            <a:r>
+              <a:t>N2: En el examen te lo preguntan cruzado: te ponen un aparato en inglés, o te dicen que basta un solo manual, o mezclan la placa con el embalaje, a ver si caes. En la obra la regla es tajante: no montes ni pongas en marcha un aparato sin certificar, porque no podrás emitir el certificado de puesta en marcha ni responder si hay un siniestro. Hoy ya eres más gasista que ayer: sabes qué exige la norma antes de que el aparato llegue a tus manos. En el siguiente vídeo dejamos la fábrica y bajamos al piso: los tipos A, B y C, quién conecta y arranca, y el papel que cierra el trabajo. Te espero allí.</a:t>
             </a:r>
           </a:p>
         </p:txBody>
@@ -965,12 +975,12 @@
           <a:lstStyle/>
           <a:p>
             <a:r>
-              <a:t>N1: ¿Qué números conviene tener en la cabeza al empezar?</a:t>
-            </a:r>
-          </a:p>
-          <a:p>
-            <a:r>
-              <a:t>N2: Cuatro apartados: objeto, comercialización, conformidad y marcado. Dos manuales distintos que van con todo aparato, el técnico y el de uso. Y tres patas para estar en condiciones normales de funcionamiento. Si retienes estos tres números, el vídeo entra solo.</a:t>
+              <a:t>N1: ¿Qué números conviene tener en la cabeza antes de empezar?</a:t>
+            </a:r>
+          </a:p>
+          <a:p>
+            <a:r>
+              <a:t>N2: Tres. Cuatro apartados, que son objeto, comercialización, conformidad y marcado, el esqueleto del vídeo. Dos manuales distintos que van con todo aparato: el técnico, para ti, y el de uso, para el cliente. Y tres patas, las tres condiciones que se tienen que dar a la vez para que un aparato esté en condiciones normales de funcionamiento. Si retienes estos tres números, el vídeo entra solo.</a:t>
             </a:r>
           </a:p>
         </p:txBody>
@@ -1045,7 +1055,7 @@
           </a:p>
           <a:p>
             <a:r>
-              <a:t>N2: Va del aparato en sí: calderas, calentadores, quemadores, no de la tubería. Fija los criterios técnicos y documentales, los requisitos esenciales de seguridad y los medios de certificación. Y deja fuera los aparatos que ya tienen su propia directiva europea, los que llevan marcado CE por su directiva, porque esos van por otro camino. Ejemplo: una caldera doméstica con CE por su directiva ya está cubierta; un aparato sin directiva específica cae aquí.</a:t>
+              <a:t>N2: Empecemos por lo más básico: hasta ahora, cada ITC regulaba una parte de la instalación, la tubería, la acometida, el contador. Esta va del aparato en sí, la caldera, el calentador, el quemador. Fija tres cosas: los criterios técnicos y documentales, los requisitos esenciales de seguridad y los medios de certificación. Y aquí está la clave: deja fuera de la parte de seguridad los aparatos que ya tienen su propia directiva europea, los que llevan marcado CE por esa directiva, porque esos ya van certificados por otro camino. Ejemplo: una caldera doméstica con CE por su directiva ya está cubierta; un aparato sin directiva específica cae aquí.</a:t>
             </a:r>
           </a:p>
         </p:txBody>
@@ -1115,12 +1125,12 @@
           <a:lstStyle/>
           <a:p>
             <a:r>
-              <a:t>N1: ¿A qué aparatos se les aplica cada parte de la ITC?</a:t>
-            </a:r>
-          </a:p>
-          <a:p>
-            <a:r>
-              <a:t>N2: Fíjate en la doble puerta. La parte de seguridad y certificación solo se aplica a los aparatos que no están cubiertos por una directiva europea propia. Pero la parte de documentación y puesta en marcha se aplica a todos los aparatos a gas, tengan CE o no. Y la puesta en marcha es verificar que el aparato funciona según los parámetros del fabricante en su ubicación e instalación definitivas: no en el taller ni en la tienda, sino montado y conectado en su sitio. Un calentador que va fino en el mostrador puede darte llama amarilla, hollín y CO en un baño mal ventilado.</a:t>
+              <a:t>N1: ¿A qué aparatos se les aplica cada parte de la norma?</a:t>
+            </a:r>
+          </a:p>
+          <a:p>
+            <a:r>
+              <a:t>N2: Aquí hay que fijarse, porque tiene truco. La ITC tiene dos puertas. La parte de seguridad y certificación solo se aplica a los aparatos que no están cubiertos por una directiva europea propia. Pero la parte de documentación y puesta en marcha se aplica a todos los aparatos a gas, tengan CE o no. Regla mental: seguridad de fábrica, solo a los que no tienen directiva propia; arrancar el aparato en casa del cliente, a todos. Y una palabra importante: la puesta en marcha es verificar que el aparato funciona según los parámetros del fabricante en su ubicación e instalación definitivas. Es decir, no en el taller ni en la tienda, sino ya montado y conectado en su sitio, porque el tiro, la ventilación y la presión reales mandan. Un calentador que va fino en el mostrador puede darte llama amarilla, hollín y monóxido de carbono en un baño mal ventilado.</a:t>
             </a:r>
           </a:p>
         </p:txBody>
@@ -1195,7 +1205,7 @@
           </a:p>
           <a:p>
             <a:r>
-              <a:t>N2: Solo si, en condiciones normales de funcionamiento, no pone en peligro la seguridad de personas, animales ni bienes. Si un aparato cumple esta ITC, nadie puede prohibir, limitar ni obstaculizar su venta. Pero si se comprueba que entraña riesgos, la Administración competente adopta medidas para retirarlo del mercado o restringir su comercialización. Ejemplo: un modelo con un defecto de fábrica que provoca fugas puede ser retirado por la comunidad autónoma.</a:t>
+              <a:t>N2: La idea es de sentido común y luego la norma la afina. Solo se permite comercializar y poner en marcha aparatos que, en condiciones normales de funcionamiento, no pongan en peligro la seguridad de personas, animales ni bienes. La otra cara: si un aparato cumple esta ITC, nadie puede prohibir, limitar ni obstaculizar su venta; sería competencia desleal. Pero si se comprueba que un aparato entraña riesgos, la Administración competente, que es la comunidad autónoma, adopta medidas para retirarlo del mercado o restringir su comercialización. Ejemplo: un modelo con un defecto de fábrica que provoca fugas puede ser retirado de las tiendas por la comunidad autónoma.</a:t>
             </a:r>
           </a:p>
         </p:txBody>
@@ -1265,12 +1275,12 @@
           <a:lstStyle/>
           <a:p>
             <a:r>
-              <a:t>N1: Esta fórmula se repite por toda la ITC. ¿Cuáles son sus tres patas?</a:t>
-            </a:r>
-          </a:p>
-          <a:p>
-            <a:r>
-              <a:t>N2: Estar en condiciones normales exige cumplir las tres a la vez: bien instalado y con mantenimiento periódico según el fabricante; usado con el gas dentro del Índice de Wobbe y la presión de suministro previstos; y empleado para sus fines. El Índice de Wobbe mide la energía que entrega el gas por el quemador; si el gas de la red se sale del rango, el aparato deja de estar en condiciones normales. No hace falta saber calcularlo: basta con saber que define qué gases valen. Ejemplo: enganchar un aparato de butano a una red de natural sin adecuarlo da llamas amarillas e inquemados.</a:t>
+              <a:t>N1: Esa fórmula, condiciones normales de funcionamiento, se repite por toda la ITC. ¿Qué significa?</a:t>
+            </a:r>
+          </a:p>
+          <a:p>
+            <a:r>
+              <a:t>N2: Grábate que son tres patas, y tienen que darse las tres a la vez. Una: que esté bien instalado y con mantenimiento periódico, según las instrucciones del fabricante. Dos: que se use con el gas correcto, dentro del Índice de Wobbe y la presión de suministro previstos. Y tres: que se use para lo que es, sus fines previstos. El Índice de Wobbe, para que nos entendamos, es un número que mide la energía que entrega un gas por el quemador; no necesitas calcularlo, solo saber que define qué gases valen para ese aparato. Si el gas de la red se sale de ese rango, el aparato deja de estar en condiciones normales. Ejemplo: enganchar un aparato preparado para butano a una red de gas natural sin adecuarlo te da llamas amarillas e inquemados.</a:t>
             </a:r>
           </a:p>
         </p:txBody>
@@ -1340,12 +1350,12 @@
           <a:lstStyle/>
           <a:p>
             <a:r>
-              <a:t>N1: ¿Qué papeles tienen que acompañar al aparato en la venta?</a:t>
-            </a:r>
-          </a:p>
-          <a:p>
-            <a:r>
-              <a:t>N2: Son dos manuales distintos que conviene no confundir: el técnico, para ti el instalador, con cómo instalar, regular y mantener; y el de uso y mantenimiento, para el cliente, con cómo encenderlo y usarlo sin peligro. Más las advertencias en el propio aparato y en su embalaje. Y todo, como mínimo, en español. Si en un examen te dicen que basta con que venga en inglés, es falso.</a:t>
+              <a:t>N1: ¿Qué papeles tienen que acompañar al aparato cuando se vende?</a:t>
+            </a:r>
+          </a:p>
+          <a:p>
+            <a:r>
+              <a:t>N2: Piénsalo así: un aparato no se vende solo, se vende con su documentación. Y son dos manuales distintos que conviene no confundir. El manual de información técnica, que es para ti, el instalador: cómo instalar, regular y mantener. Y el manual de instrucciones de uso y mantenimiento, que es para el cliente: cómo encenderlo y usarlo sin peligro. Más las advertencias, que van en el propio aparato y en su embalaje. Y todo, como mínimo, en español. Truco de examen: si te ofrecen la opción de que basta con que venga en inglés, es falsa.</a:t>
             </a:r>
           </a:p>
         </p:txBody>
@@ -1415,12 +1425,12 @@
           <a:lstStyle/>
           <a:p>
             <a:r>
-              <a:t>N1: De todo el listado del manual técnico, ¿qué datos no pueden faltar?</a:t>
-            </a:r>
-          </a:p>
-          <a:p>
-            <a:r>
-              <a:t>N2: Las estrellas son tipo de gas, presión de suministro, consumo nominal, aire de combustión, evacuación de humos y datos eléctricos con el esquema de bornes. Son los datos que necesitas sí o sí para montar y regular. El resto, como el caudal másico en gramos por segundo para el cálculo de chimeneas o las combinaciones de quemadores de aire forzado, son detalles que la norma añade para casos concretos. Ejemplo: sin la presión de suministro no sabes a qué regular la caldera.</a:t>
+              <a:t>N1: El manual técnico trae una lista larguísima. ¿Qué datos no pueden faltar?</a:t>
+            </a:r>
+          </a:p>
+          <a:p>
+            <a:r>
+              <a:t>N2: Es verdad que la lista es larga, pero no todo pesa igual. Quédate con las estrellas: tipo de gas, presión de suministro, consumo nominal, aire de combustión, evacuación de los gases y datos eléctricos con el esquema de bornes. ¿Por qué esos? Porque son los datos que necesitas sí o sí para montar y regular el aparato. El resto, como el caudal másico en gramos por segundo para el cálculo de chimeneas, o las combinaciones de quemadores de aire forzado, son detalles que la norma añade para casos concretos. Ejemplo: sin la presión de suministro no sabes a qué presión regular la caldera, y sin el aire de combustión no sabes qué ventilación exige el local.</a:t>
             </a:r>
           </a:p>
         </p:txBody>
@@ -1495,7 +1505,7 @@
           </a:p>
           <a:p>
             <a:r>
-              <a:t>N2: Está escrito a prueba de sustos: encender bien, usar los elementos regulables, no tocar lo que no toca (eso son las falsas maniobras) y llamar a un experto cualificado para el mantenimiento serio. Cuando entregas un aparato, este manual va con él: forma parte de dejar la instalación en regla. Si el cliente lo pierde, es fácil que acabe haciendo maniobras raras que provocan una avería.</a:t>
+              <a:t>N2: Está escrito a prueba de sustos, pensando en una persona que no es técnica. Le explica las restricciones de uso, cómo encender y usar los elementos regulables, la limpieza y el mantenimiento básico, y le avisa de que un experto cualificado debe revisarlo periódicamente. Y hay una expresión de examen: la advertencia contra falsas maniobras, que es no tocar lo que no se debe tocar. Cuando entregas un aparato, este manual va con él: forma parte de dejar la instalación en regla. Si el cliente lo pierde, es fácil que acabe haciendo maniobras raras que provocan una avería.</a:t>
             </a:r>
           </a:p>
         </p:txBody>
@@ -6226,7 +6236,7 @@
             <a:avLst/>
           </a:prstGeom>
           <a:solidFill>
-            <a:srgbClr val="FFFFFF"/>
+            <a:srgbClr val="1E2761"/>
           </a:solidFill>
           <a:ln>
             <a:noFill/>
@@ -6263,8 +6273,8 @@
         </p:nvSpPr>
         <p:spPr>
           <a:xfrm>
-            <a:off x="10607040" y="320040"/>
-            <a:ext cx="1371600" cy="365760"/>
+            <a:off x="822960" y="640080"/>
+            <a:ext cx="10515600" cy="457200"/>
           </a:xfrm>
           <a:prstGeom prst="rect">
             <a:avLst/>
@@ -6277,15 +6287,14 @@
           </a:bodyPr>
           <a:lstStyle/>
           <a:p>
-            <a:pPr algn="r"/>
-            <a:r>
-              <a:rPr sz="1000" b="1" i="0">
-                <a:solidFill>
-                  <a:srgbClr val="64748B"/>
-                </a:solidFill>
-                <a:latin typeface="Montserrat"/>
-              </a:rPr>
-              <a:t>014 / 014</a:t>
+            <a:r>
+              <a:rPr sz="1400" b="1" i="0">
+                <a:solidFill>
+                  <a:srgbClr val="CADCFC"/>
+                </a:solidFill>
+                <a:latin typeface="Montserrat"/>
+              </a:rPr>
+              <a:t>LO QUE YA DOMINAS</a:t>
             </a:r>
           </a:p>
         </p:txBody>
@@ -6298,8 +6307,8 @@
         </p:nvSpPr>
         <p:spPr>
           <a:xfrm>
-            <a:off x="457200" y="6419088"/>
-            <a:ext cx="8229600" cy="365760"/>
+            <a:off x="822960" y="1143000"/>
+            <a:ext cx="10515600" cy="1097280"/>
           </a:xfrm>
           <a:prstGeom prst="rect">
             <a:avLst/>
@@ -6313,13 +6322,13 @@
           <a:lstStyle/>
           <a:p>
             <a:r>
-              <a:rPr sz="900" b="0" i="0">
-                <a:solidFill>
-                  <a:srgbClr val="64748B"/>
-                </a:solidFill>
-                <a:latin typeface="Montserrat"/>
-              </a:rPr>
-              <a:t>Curso Gas B · Tema 05 · Aparatos de gas</a:t>
+              <a:rPr sz="3400" b="1" i="0">
+                <a:solidFill>
+                  <a:srgbClr val="FFFFFF"/>
+                </a:solidFill>
+                <a:latin typeface="Montserrat"/>
+              </a:rPr>
+              <a:t>Ya controlas el aparato antes de tocarlo</a:t>
             </a:r>
           </a:p>
         </p:txBody>
@@ -6332,8 +6341,8 @@
         </p:nvSpPr>
         <p:spPr>
           <a:xfrm>
-            <a:off x="822960" y="640080"/>
-            <a:ext cx="10058400" cy="914400"/>
+            <a:off x="822960" y="2514600"/>
+            <a:ext cx="10515600" cy="2834640"/>
           </a:xfrm>
           <a:prstGeom prst="rect">
             <a:avLst/>
@@ -6346,28 +6355,161 @@
           </a:bodyPr>
           <a:lstStyle/>
           <a:p>
-            <a:r>
-              <a:rPr sz="3000" b="1" i="0">
-                <a:solidFill>
-                  <a:srgbClr val="1E2761"/>
-                </a:solidFill>
-                <a:latin typeface="Montserrat"/>
-              </a:rPr>
-              <a:t>Qué me llevo</a:t>
-            </a:r>
-          </a:p>
-        </p:txBody>
-      </p:sp>
-      <p:sp>
-        <p:nvSpPr>
-          <p:cNvPr id="6" name="TextBox 5"/>
+            <a:pPr>
+              <a:spcAft>
+                <a:spcPts val="1200"/>
+              </a:spcAft>
+            </a:pPr>
+            <a:r>
+              <a:rPr sz="2000" b="1" i="0">
+                <a:solidFill>
+                  <a:srgbClr val="CADCFC"/>
+                </a:solidFill>
+                <a:latin typeface="Montserrat"/>
+              </a:rPr>
+              <a:t>✓  </a:t>
+            </a:r>
+            <a:r>
+              <a:rPr sz="1900" b="0" i="0">
+                <a:solidFill>
+                  <a:srgbClr val="FFFFFF"/>
+                </a:solidFill>
+                <a:latin typeface="Montserrat"/>
+              </a:rPr>
+              <a:t>La ITC-ICG 08 es la norma del aparato, no del tubo</a:t>
+            </a:r>
+          </a:p>
+          <a:p>
+            <a:pPr>
+              <a:spcAft>
+                <a:spcPts val="1200"/>
+              </a:spcAft>
+            </a:pPr>
+            <a:r>
+              <a:rPr sz="2000" b="1" i="0">
+                <a:solidFill>
+                  <a:srgbClr val="CADCFC"/>
+                </a:solidFill>
+                <a:latin typeface="Montserrat"/>
+              </a:rPr>
+              <a:t>✓  </a:t>
+            </a:r>
+            <a:r>
+              <a:rPr sz="1900" b="0" i="0">
+                <a:solidFill>
+                  <a:srgbClr val="FFFFFF"/>
+                </a:solidFill>
+                <a:latin typeface="Montserrat"/>
+              </a:rPr>
+              <a:t>Exiges dos manuales y placa, en español</a:t>
+            </a:r>
+          </a:p>
+          <a:p>
+            <a:pPr>
+              <a:spcAft>
+                <a:spcPts val="1200"/>
+              </a:spcAft>
+            </a:pPr>
+            <a:r>
+              <a:rPr sz="2000" b="1" i="0">
+                <a:solidFill>
+                  <a:srgbClr val="CADCFC"/>
+                </a:solidFill>
+                <a:latin typeface="Montserrat"/>
+              </a:rPr>
+              <a:t>✓  </a:t>
+            </a:r>
+            <a:r>
+              <a:rPr sz="1900" b="0" i="0">
+                <a:solidFill>
+                  <a:srgbClr val="FFFFFF"/>
+                </a:solidFill>
+                <a:latin typeface="Montserrat"/>
+              </a:rPr>
+              <a:t>Reconoces las tres patas del funcionamiento</a:t>
+            </a:r>
+          </a:p>
+          <a:p>
+            <a:pPr>
+              <a:spcAft>
+                <a:spcPts val="1200"/>
+              </a:spcAft>
+            </a:pPr>
+            <a:r>
+              <a:rPr sz="2000" b="1" i="0">
+                <a:solidFill>
+                  <a:srgbClr val="CADCFC"/>
+                </a:solidFill>
+                <a:latin typeface="Montserrat"/>
+              </a:rPr>
+              <a:t>✓  </a:t>
+            </a:r>
+            <a:r>
+              <a:rPr sz="1900" b="0" i="0">
+                <a:solidFill>
+                  <a:srgbClr val="FFFFFF"/>
+                </a:solidFill>
+                <a:latin typeface="Montserrat"/>
+              </a:rPr>
+              <a:t>Certificas con la fórmula: a + b, o bien c</a:t>
+            </a:r>
+          </a:p>
+        </p:txBody>
+      </p:sp>
+      <p:sp>
+        <p:nvSpPr>
+          <p:cNvPr id="6" name="Rounded Rectangle 5"/>
+          <p:cNvSpPr/>
+          <p:nvPr/>
+        </p:nvSpPr>
+        <p:spPr>
+          <a:xfrm>
+            <a:off x="822960" y="5532120"/>
+            <a:ext cx="10515600" cy="777240"/>
+          </a:xfrm>
+          <a:prstGeom prst="roundRect">
+            <a:avLst/>
+          </a:prstGeom>
+          <a:solidFill>
+            <a:srgbClr val="2E3A80"/>
+          </a:solidFill>
+          <a:ln>
+            <a:noFill/>
+          </a:ln>
+          <a:effectLst/>
+        </p:spPr>
+        <p:style>
+          <a:lnRef idx="1">
+            <a:schemeClr val="accent1"/>
+          </a:lnRef>
+          <a:fillRef idx="3">
+            <a:schemeClr val="accent1"/>
+          </a:fillRef>
+          <a:effectRef idx="2">
+            <a:schemeClr val="accent1"/>
+          </a:effectRef>
+          <a:fontRef idx="minor">
+            <a:schemeClr val="lt1"/>
+          </a:fontRef>
+        </p:style>
+        <p:txBody>
+          <a:bodyPr rtlCol="0" anchor="ctr"/>
+          <a:lstStyle/>
+          <a:p>
+            <a:pPr algn="ctr"/>
+          </a:p>
+        </p:txBody>
+      </p:sp>
+      <p:sp>
+        <p:nvSpPr>
+          <p:cNvPr id="7" name="TextBox 6"/>
           <p:cNvSpPr txBox="1"/>
           <p:nvPr/>
         </p:nvSpPr>
         <p:spPr>
           <a:xfrm>
-            <a:off x="822960" y="2011680"/>
-            <a:ext cx="10058400" cy="3657600"/>
+            <a:off x="1051560" y="5605272"/>
+            <a:ext cx="10058400" cy="640080"/>
           </a:xfrm>
           <a:prstGeom prst="rect">
             <a:avLst/>
@@ -6380,78 +6522,14 @@
           </a:bodyPr>
           <a:lstStyle/>
           <a:p>
-            <a:pPr>
-              <a:spcAft>
-                <a:spcPts val="1400"/>
-              </a:spcAft>
-            </a:pPr>
-            <a:r>
-              <a:rPr sz="2000" b="1" i="0">
-                <a:solidFill>
-                  <a:srgbClr val="2E3A80"/>
-                </a:solidFill>
-                <a:latin typeface="Montserrat"/>
-              </a:rPr>
-              <a:t>✓  </a:t>
-            </a:r>
-            <a:r>
-              <a:rPr sz="2000" b="0" i="0">
-                <a:solidFill>
-                  <a:srgbClr val="1B2330"/>
-                </a:solidFill>
-                <a:latin typeface="Montserrat"/>
-              </a:rPr>
-              <a:t>ITC-ICG 08 = norma del aparato</a:t>
-            </a:r>
-          </a:p>
-          <a:p>
-            <a:pPr>
-              <a:spcAft>
-                <a:spcPts val="1400"/>
-              </a:spcAft>
-            </a:pPr>
-            <a:r>
-              <a:rPr sz="2000" b="1" i="0">
-                <a:solidFill>
-                  <a:srgbClr val="2E3A80"/>
-                </a:solidFill>
-                <a:latin typeface="Montserrat"/>
-              </a:rPr>
-              <a:t>✓  </a:t>
-            </a:r>
-            <a:r>
-              <a:rPr sz="2000" b="0" i="0">
-                <a:solidFill>
-                  <a:srgbClr val="1B2330"/>
-                </a:solidFill>
-                <a:latin typeface="Montserrat"/>
-              </a:rPr>
-              <a:t>Dos manuales y placa, en español</a:t>
-            </a:r>
-          </a:p>
-          <a:p>
-            <a:pPr>
-              <a:spcAft>
-                <a:spcPts val="1400"/>
-              </a:spcAft>
-            </a:pPr>
-            <a:r>
-              <a:rPr sz="2000" b="1" i="0">
-                <a:solidFill>
-                  <a:srgbClr val="2E3A80"/>
-                </a:solidFill>
-                <a:latin typeface="Montserrat"/>
-              </a:rPr>
-              <a:t>✓  </a:t>
-            </a:r>
-            <a:r>
-              <a:rPr sz="2000" b="0" i="0">
-                <a:solidFill>
-                  <a:srgbClr val="1B2330"/>
-                </a:solidFill>
-                <a:latin typeface="Montserrat"/>
-              </a:rPr>
-              <a:t>Conformidad: a + b, o bien c</a:t>
+            <a:r>
+              <a:rPr sz="1500" b="1" i="1">
+                <a:solidFill>
+                  <a:srgbClr val="CADCFC"/>
+                </a:solidFill>
+                <a:latin typeface="Montserrat"/>
+              </a:rPr>
+              <a:t>Hoy ya eres más gasista que ayer. En el siguiente vídeo bajamos al piso: a conectar y arrancar el aparato.</a:t>
             </a:r>
           </a:p>
         </p:txBody>
@@ -7626,7 +7704,7 @@
                 </a:solidFill>
                 <a:latin typeface="Montserrat"/>
               </a:rPr>
-              <a:t>Seguridad y certificación: solo sin directiva propia</a:t>
+              <a:t>Seguridad: solo sin directiva propia</a:t>
             </a:r>
           </a:p>
           <a:p>
@@ -7651,7 +7729,7 @@
                 </a:solidFill>
                 <a:latin typeface="Montserrat"/>
               </a:rPr>
-              <a:t>Documentación y puesta en marcha: a TODOS</a:t>
+              <a:t>Documentación y arranque: a TODOS</a:t>
             </a:r>
           </a:p>
           <a:p>

--- a/Curso Gas B/05 - ITC-ICG 08 - Aparatos de gas/05 - ITC-ICG 08 - Aparatos de gas - Vídeo 1.pptx
+++ b/Curso Gas B/05 - ITC-ICG 08 - Aparatos de gas/05 - ITC-ICG 08 - Aparatos de gas - Vídeo 1.pptx
@@ -19,6 +19,7 @@
     <p:sldId id="267" r:id="rId19"/>
     <p:sldId id="268" r:id="rId20"/>
     <p:sldId id="269" r:id="rId21"/>
+    <p:sldId id="270" r:id="rId22"/>
   </p:sldIdLst>
   <p:sldSz cx="12191695" cy="6858000" type="screen4x3"/>
   <p:notesSz cx="6858000" cy="9144000"/>
@@ -590,12 +591,12 @@
           <a:lstStyle/>
           <a:p>
             <a:r>
-              <a:t>N1: Hay advertencias en el aparato y en la caja. ¿Dónde va cada cosa?</a:t>
-            </a:r>
-          </a:p>
-          <a:p>
-            <a:r>
-              <a:t>N2: Ojo a no mezclarlas, porque el examen juega con eso. Las advertencias que van en el aparato siguen las reglas del anexo dos, que es la placa de características; lo veremos entero en el cuarto vídeo. Las advertencias que van en el embalaje, en la caja, llevan como mínimo tres cosas: tipo de gas, presión de suministro y las restricciones de uso, en particular la de no instalar el aparato en locales sin ventilación suficiente o al aire libre, según proceda. Truco para recordarlo: en la caja te fijas en qué gas, a qué presión y dónde no lo puedo poner.</a:t>
+              <a:t>N1: ¿Y el manual que se queda el usuario, qué le cuenta?</a:t>
+            </a:r>
+          </a:p>
+          <a:p>
+            <a:r>
+              <a:t>N2: Está escrito a prueba de sustos, pensando en una persona que no es técnica. Le explica las restricciones de uso, cómo encender y usar los elementos regulables, la limpieza y el mantenimiento básico, y le avisa de que un experto cualificado debe revisarlo periódicamente. Y hay una expresión de examen: la advertencia contra falsas maniobras, que es no tocar lo que no se debe tocar. Cuando entregas un aparato, este manual va con él: forma parte de dejar la instalación en regla. Si el cliente lo pierde, es fácil que acabe haciendo maniobras raras que provocan una avería.</a:t>
             </a:r>
           </a:p>
         </p:txBody>
@@ -665,12 +666,12 @@
           <a:lstStyle/>
           <a:p>
             <a:r>
-              <a:t>N1: La norma habla de aparatos y también de equipos. ¿Qué diferencia hay?</a:t>
-            </a:r>
-          </a:p>
-          <a:p>
-            <a:r>
-              <a:t>N2: Es una distinción sencilla pero que conviene tener clara. El aparato es el conjunto terminado, la caldera completa. El equipo es una pieza que se integra dentro de él: un quemador, una válvula, un programador. Pues bien, la norma exige que cada equipo, por separado, también venga con sus instrucciones de instalación, regulación, empleo y mantenimiento, y que funcione bien montado según manda su fabricante. ¿Por qué? Porque la seguridad del aparato final no se puede romper por una pieza mal documentada o mal montada. La cadena es tan fuerte como su eslabón más débil.</a:t>
+              <a:t>N1: Hay advertencias en el aparato y en la caja. ¿Dónde va cada cosa?</a:t>
+            </a:r>
+          </a:p>
+          <a:p>
+            <a:r>
+              <a:t>N2: Ojo a no mezclarlas, porque el examen juega con eso. Las advertencias que van en el aparato siguen las reglas del anexo dos, que es la placa de características; lo veremos entero en el cuarto vídeo. Las advertencias que van en el embalaje, en la caja, llevan como mínimo tres cosas: tipo de gas, presión de suministro y las restricciones de uso, en particular la de no instalar el aparato en locales sin ventilación suficiente o al aire libre, según proceda. Truco para recordarlo: en la caja te fijas en qué gas, a qué presión y dónde no lo puedo poner.</a:t>
             </a:r>
           </a:p>
         </p:txBody>
@@ -740,12 +741,12 @@
           <a:lstStyle/>
           <a:p>
             <a:r>
-              <a:t>N1: ¿Cómo demuestra un aparato que es de fiar?</a:t>
-            </a:r>
-          </a:p>
-          <a:p>
-            <a:r>
-              <a:t>N2: Vamos por partes. Primero, qué tiene que cumplir: el orden manda. Se busca la norma española UNE, la UNE-EN o la europea EN que le aplique; y solo si no existe ninguna, se recurre a las prescripciones de seguridad del anexo tres. Es la misma lógica de todo el Reglamento: la norma técnica primero, y las reglas propias de la ITC como red de seguridad. Segundo, cómo se certifica: hay dos caminos, no tres sueltos. El camino de la serie, que es examen de tipo, la a, más verificación de la producción, la b. O el camino de la pieza única, la verificación por unidad, la c. La fórmula que tienes que memorizar es a más b, o bien c. Los detalles de cada procedimiento están en el anexo uno, y los desmenuzamos en el vídeo tres.</a:t>
+              <a:t>N1: La norma habla de aparatos y también de equipos. ¿Qué diferencia hay?</a:t>
+            </a:r>
+          </a:p>
+          <a:p>
+            <a:r>
+              <a:t>N2: Es una distinción sencilla pero que conviene tener clara. El aparato es el conjunto terminado, la caldera completa. El equipo es una pieza que se integra dentro de él: un quemador, una válvula, un programador. Pues bien, la norma exige que cada equipo, por separado, también venga con sus instrucciones de instalación, regulación, empleo y mantenimiento, y que funcione bien montado según manda su fabricante. ¿Por qué? Porque la seguridad del aparato final no se puede romper por una pieza mal documentada o mal montada. La cadena es tan fuerte como su eslabón más débil.</a:t>
             </a:r>
           </a:p>
         </p:txBody>
@@ -815,12 +816,12 @@
           <a:lstStyle/>
           <a:p>
             <a:r>
-              <a:t>N1: Y para cerrar el vídeo, ¿qué obliga la ITC en cuanto a marcado?</a:t>
-            </a:r>
-          </a:p>
-          <a:p>
-            <a:r>
-              <a:t>N2: Solo dos obligaciones, cortas pero importantes. Una: una placa de características en lugar visible, cuyo contenido detallado está en el anexo dos. Dos: instrucciones, cuyo contenido está en las normas que apliquen o, si no hay, como mínimo en el anexo tres. Fíjate en que es una sección puente: te dice que hay que marcar e instruir, y te manda a los anexos para el qué y el cómo. Asocia siempre placa con anexo dos, e instrucciones con normas o anexo tres. Y recuerda para qué sirve la placa: es el DNI del aparato; de ella sacas el gas, la presión de reglaje y la potencia que necesitarás para rellenar el certificado de puesta en marcha.</a:t>
+              <a:t>N1: ¿Cómo demuestra un aparato que es de fiar?</a:t>
+            </a:r>
+          </a:p>
+          <a:p>
+            <a:r>
+              <a:t>N2: Vamos por partes. Primero, qué tiene que cumplir: el orden manda. Se busca la norma española UNE, la UNE-EN o la europea EN que le aplique; y solo si no existe ninguna, se recurre a las prescripciones de seguridad del anexo tres. Es la misma lógica de todo el Reglamento: la norma técnica primero, y las reglas propias de la ITC como red de seguridad. Segundo, cómo se certifica: hay dos caminos, no tres sueltos. El camino de la serie, que es examen de tipo, la a, más verificación de la producción, la b. O el camino de la pieza única, la verificación por unidad, la c. La fórmula que tienes que memorizar es a más b, o bien c. Los detalles de cada procedimiento están en el anexo uno, y los desmenuzamos en el vídeo tres.</a:t>
             </a:r>
           </a:p>
         </p:txBody>
@@ -890,6 +891,81 @@
           <a:lstStyle/>
           <a:p>
             <a:r>
+              <a:t>N1: Y para cerrar el vídeo, ¿qué obliga la ITC en cuanto a marcado?</a:t>
+            </a:r>
+          </a:p>
+          <a:p>
+            <a:r>
+              <a:t>N2: Solo dos obligaciones, cortas pero importantes. Una: una placa de características en lugar visible, cuyo contenido detallado está en el anexo dos. Dos: instrucciones, cuyo contenido está en las normas que apliquen o, si no hay, como mínimo en el anexo tres. Fíjate en que es una sección puente: te dice que hay que marcar e instruir, y te manda a los anexos para el qué y el cómo. Asocia siempre placa con anexo dos, e instrucciones con normas o anexo tres. Y recuerda para qué sirve la placa: es el DNI del aparato; de ella sacas el gas, la presión de reglaje y la potencia que necesitarás para rellenar el certificado de puesta en marcha.</a:t>
+            </a:r>
+          </a:p>
+        </p:txBody>
+      </p:sp>
+      <p:sp>
+        <p:nvSpPr>
+          <p:cNvPr id="4" name="Slide Number Placeholder 3"/>
+          <p:cNvSpPr>
+            <a:spLocks noGrp="1"/>
+          </p:cNvSpPr>
+          <p:nvPr>
+            <p:ph type="sldNum" idx="5" sz="quarter"/>
+          </p:nvPr>
+        </p:nvSpPr>
+        <p:spPr/>
+      </p:sp>
+    </p:spTree>
+  </p:cSld>
+  <p:clrMapOvr>
+    <a:masterClrMapping/>
+  </p:clrMapOvr>
+</p:notes>
+</file>
+
+<file path=ppt/notesSlides/notesSlide15.xml><?xml version="1.0" encoding="utf-8"?>
+<p:notes xmlns:a="http://schemas.openxmlformats.org/drawingml/2006/main" xmlns:p="http://schemas.openxmlformats.org/presentationml/2006/main" xmlns:r="http://schemas.openxmlformats.org/officeDocument/2006/relationships">
+  <p:cSld>
+    <p:spTree>
+      <p:nvGrpSpPr>
+        <p:cNvPr id="1" name=""/>
+        <p:cNvGrpSpPr/>
+        <p:nvPr/>
+      </p:nvGrpSpPr>
+      <p:grpSpPr>
+        <a:xfrm>
+          <a:off x="0" y="0"/>
+          <a:ext cx="0" cy="0"/>
+          <a:chOff x="0" y="0"/>
+          <a:chExt cx="0" cy="0"/>
+        </a:xfrm>
+      </p:grpSpPr>
+      <p:sp>
+        <p:nvSpPr>
+          <p:cNvPr id="2" name="Slide Image Placeholder 1"/>
+          <p:cNvSpPr>
+            <a:spLocks noGrp="1"/>
+          </p:cNvSpPr>
+          <p:nvPr>
+            <p:ph type="sldImg" idx="2"/>
+          </p:nvPr>
+        </p:nvSpPr>
+        <p:spPr/>
+      </p:sp>
+      <p:sp>
+        <p:nvSpPr>
+          <p:cNvPr id="3" name="Notes Placeholder 2"/>
+          <p:cNvSpPr>
+            <a:spLocks noGrp="1"/>
+          </p:cNvSpPr>
+          <p:nvPr>
+            <p:ph type="body" idx="3" sz="quarter"/>
+          </p:nvPr>
+        </p:nvSpPr>
+        <p:spPr/>
+        <p:txBody>
+          <a:bodyPr/>
+          <a:lstStyle/>
+          <a:p>
+            <a:r>
               <a:t>N1: Cerramos fuerte. Si me quedo con lo esencial de este primer vídeo, ¿qué es?</a:t>
             </a:r>
           </a:p>
@@ -1048,16 +1124,7 @@
         <p:txBody>
           <a:bodyPr/>
           <a:lstStyle/>
-          <a:p>
-            <a:r>
-              <a:t>N1: ¿De qué va exactamente esta instrucción?</a:t>
-            </a:r>
-          </a:p>
-          <a:p>
-            <a:r>
-              <a:t>N2: Empecemos por lo más básico: hasta ahora, cada ITC regulaba una parte de la instalación, la tubería, la acometida, el contador. Esta va del aparato en sí, la caldera, el calentador, el quemador. Fija tres cosas: los criterios técnicos y documentales, los requisitos esenciales de seguridad y los medios de certificación. Y aquí está la clave: deja fuera de la parte de seguridad los aparatos que ya tienen su propia directiva europea, los que llevan marcado CE por esa directiva, porque esos ya van certificados por otro camino. Ejemplo: una caldera doméstica con CE por su directiva ya está cubierta; un aparato sin directiva específica cae aquí.</a:t>
-            </a:r>
-          </a:p>
+          <a:p/>
         </p:txBody>
       </p:sp>
       <p:sp>
@@ -1125,12 +1192,12 @@
           <a:lstStyle/>
           <a:p>
             <a:r>
-              <a:t>N1: ¿A qué aparatos se les aplica cada parte de la norma?</a:t>
-            </a:r>
-          </a:p>
-          <a:p>
-            <a:r>
-              <a:t>N2: Aquí hay que fijarse, porque tiene truco. La ITC tiene dos puertas. La parte de seguridad y certificación solo se aplica a los aparatos que no están cubiertos por una directiva europea propia. Pero la parte de documentación y puesta en marcha se aplica a todos los aparatos a gas, tengan CE o no. Regla mental: seguridad de fábrica, solo a los que no tienen directiva propia; arrancar el aparato en casa del cliente, a todos. Y una palabra importante: la puesta en marcha es verificar que el aparato funciona según los parámetros del fabricante en su ubicación e instalación definitivas. Es decir, no en el taller ni en la tienda, sino ya montado y conectado en su sitio, porque el tiro, la ventilación y la presión reales mandan. Un calentador que va fino en el mostrador puede darte llama amarilla, hollín y monóxido de carbono en un baño mal ventilado.</a:t>
+              <a:t>N1: ¿De qué va exactamente esta instrucción?</a:t>
+            </a:r>
+          </a:p>
+          <a:p>
+            <a:r>
+              <a:t>N2: Empecemos por lo más básico: hasta ahora, cada ITC regulaba una parte de la instalación, la tubería, la acometida, el contador. Esta va del aparato en sí, la caldera, el calentador, el quemador. Fija tres cosas: los criterios técnicos y documentales, los requisitos esenciales de seguridad y los medios de certificación. Y aquí está la clave: deja fuera de la parte de seguridad los aparatos que ya tienen su propia directiva europea, los que llevan marcado CE por esa directiva, porque esos ya van certificados por otro camino. Ejemplo: una caldera doméstica con CE por su directiva ya está cubierta; un aparato sin directiva específica cae aquí.</a:t>
             </a:r>
           </a:p>
         </p:txBody>
@@ -1200,12 +1267,12 @@
           <a:lstStyle/>
           <a:p>
             <a:r>
-              <a:t>N1: ¿Cuándo se permite vender y arrancar un aparato?</a:t>
-            </a:r>
-          </a:p>
-          <a:p>
-            <a:r>
-              <a:t>N2: La idea es de sentido común y luego la norma la afina. Solo se permite comercializar y poner en marcha aparatos que, en condiciones normales de funcionamiento, no pongan en peligro la seguridad de personas, animales ni bienes. La otra cara: si un aparato cumple esta ITC, nadie puede prohibir, limitar ni obstaculizar su venta; sería competencia desleal. Pero si se comprueba que un aparato entraña riesgos, la Administración competente, que es la comunidad autónoma, adopta medidas para retirarlo del mercado o restringir su comercialización. Ejemplo: un modelo con un defecto de fábrica que provoca fugas puede ser retirado de las tiendas por la comunidad autónoma.</a:t>
+              <a:t>N1: ¿A qué aparatos se les aplica cada parte de la norma?</a:t>
+            </a:r>
+          </a:p>
+          <a:p>
+            <a:r>
+              <a:t>N2: Aquí hay que fijarse, porque tiene truco. La ITC tiene dos puertas. La parte de seguridad y certificación solo se aplica a los aparatos que no están cubiertos por una directiva europea propia. Pero la parte de documentación y puesta en marcha se aplica a todos los aparatos a gas, tengan CE o no. Regla mental: seguridad de fábrica, solo a los que no tienen directiva propia; arrancar el aparato en casa del cliente, a todos. Y una palabra importante: la puesta en marcha es verificar que el aparato funciona según los parámetros del fabricante en su ubicación e instalación definitivas. Es decir, no en el taller ni en la tienda, sino ya montado y conectado en su sitio, porque el tiro, la ventilación y la presión reales mandan. Un calentador que va fino en el mostrador puede darte llama amarilla, hollín y monóxido de carbono en un baño mal ventilado.</a:t>
             </a:r>
           </a:p>
         </p:txBody>
@@ -1275,12 +1342,12 @@
           <a:lstStyle/>
           <a:p>
             <a:r>
-              <a:t>N1: Esa fórmula, condiciones normales de funcionamiento, se repite por toda la ITC. ¿Qué significa?</a:t>
-            </a:r>
-          </a:p>
-          <a:p>
-            <a:r>
-              <a:t>N2: Grábate que son tres patas, y tienen que darse las tres a la vez. Una: que esté bien instalado y con mantenimiento periódico, según las instrucciones del fabricante. Dos: que se use con el gas correcto, dentro del Índice de Wobbe y la presión de suministro previstos. Y tres: que se use para lo que es, sus fines previstos. El Índice de Wobbe, para que nos entendamos, es un número que mide la energía que entrega un gas por el quemador; no necesitas calcularlo, solo saber que define qué gases valen para ese aparato. Si el gas de la red se sale de ese rango, el aparato deja de estar en condiciones normales. Ejemplo: enganchar un aparato preparado para butano a una red de gas natural sin adecuarlo te da llamas amarillas e inquemados.</a:t>
+              <a:t>N1: ¿Cuándo se permite vender y arrancar un aparato?</a:t>
+            </a:r>
+          </a:p>
+          <a:p>
+            <a:r>
+              <a:t>N2: La idea es de sentido común y luego la norma la afina. Solo se permite comercializar y poner en marcha aparatos que, en condiciones normales de funcionamiento, no pongan en peligro la seguridad de personas, animales ni bienes. La otra cara: si un aparato cumple esta ITC, nadie puede prohibir, limitar ni obstaculizar su venta; sería competencia desleal. Pero si se comprueba que un aparato entraña riesgos, la Administración competente, que es la comunidad autónoma, adopta medidas para retirarlo del mercado o restringir su comercialización. Ejemplo: un modelo con un defecto de fábrica que provoca fugas puede ser retirado de las tiendas por la comunidad autónoma.</a:t>
             </a:r>
           </a:p>
         </p:txBody>
@@ -1350,12 +1417,12 @@
           <a:lstStyle/>
           <a:p>
             <a:r>
-              <a:t>N1: ¿Qué papeles tienen que acompañar al aparato cuando se vende?</a:t>
-            </a:r>
-          </a:p>
-          <a:p>
-            <a:r>
-              <a:t>N2: Piénsalo así: un aparato no se vende solo, se vende con su documentación. Y son dos manuales distintos que conviene no confundir. El manual de información técnica, que es para ti, el instalador: cómo instalar, regular y mantener. Y el manual de instrucciones de uso y mantenimiento, que es para el cliente: cómo encenderlo y usarlo sin peligro. Más las advertencias, que van en el propio aparato y en su embalaje. Y todo, como mínimo, en español. Truco de examen: si te ofrecen la opción de que basta con que venga en inglés, es falsa.</a:t>
+              <a:t>N1: Esa fórmula, condiciones normales de funcionamiento, se repite por toda la ITC. ¿Qué significa?</a:t>
+            </a:r>
+          </a:p>
+          <a:p>
+            <a:r>
+              <a:t>N2: Grábate que son tres patas, y tienen que darse las tres a la vez. Una: que esté bien instalado y con mantenimiento periódico, según las instrucciones del fabricante. Dos: que se use con el gas correcto, dentro del Índice de Wobbe y la presión de suministro previstos. Y tres: que se use para lo que es, sus fines previstos. El Índice de Wobbe, para que nos entendamos, es un número que mide la energía que entrega un gas por el quemador; no necesitas calcularlo, solo saber que define qué gases valen para ese aparato. Si el gas de la red se sale de ese rango, el aparato deja de estar en condiciones normales. Ejemplo: enganchar un aparato preparado para butano a una red de gas natural sin adecuarlo te da llamas amarillas e inquemados.</a:t>
             </a:r>
           </a:p>
         </p:txBody>
@@ -1425,12 +1492,12 @@
           <a:lstStyle/>
           <a:p>
             <a:r>
-              <a:t>N1: El manual técnico trae una lista larguísima. ¿Qué datos no pueden faltar?</a:t>
-            </a:r>
-          </a:p>
-          <a:p>
-            <a:r>
-              <a:t>N2: Es verdad que la lista es larga, pero no todo pesa igual. Quédate con las estrellas: tipo de gas, presión de suministro, consumo nominal, aire de combustión, evacuación de los gases y datos eléctricos con el esquema de bornes. ¿Por qué esos? Porque son los datos que necesitas sí o sí para montar y regular el aparato. El resto, como el caudal másico en gramos por segundo para el cálculo de chimeneas, o las combinaciones de quemadores de aire forzado, son detalles que la norma añade para casos concretos. Ejemplo: sin la presión de suministro no sabes a qué presión regular la caldera, y sin el aire de combustión no sabes qué ventilación exige el local.</a:t>
+              <a:t>N1: ¿Qué papeles tienen que acompañar al aparato cuando se vende?</a:t>
+            </a:r>
+          </a:p>
+          <a:p>
+            <a:r>
+              <a:t>N2: Piénsalo así: un aparato no se vende solo, se vende con su documentación. Y son dos manuales distintos que conviene no confundir. El manual de información técnica, que es para ti, el instalador: cómo instalar, regular y mantener. Y el manual de instrucciones de uso y mantenimiento, que es para el cliente: cómo encenderlo y usarlo sin peligro. Más las advertencias, que van en el propio aparato y en su embalaje. Y todo, como mínimo, en español. Truco de examen: si te ofrecen la opción de que basta con que venga en inglés, es falsa.</a:t>
             </a:r>
           </a:p>
         </p:txBody>
@@ -1500,12 +1567,12 @@
           <a:lstStyle/>
           <a:p>
             <a:r>
-              <a:t>N1: ¿Y el manual que se queda el usuario, qué le cuenta?</a:t>
-            </a:r>
-          </a:p>
-          <a:p>
-            <a:r>
-              <a:t>N2: Está escrito a prueba de sustos, pensando en una persona que no es técnica. Le explica las restricciones de uso, cómo encender y usar los elementos regulables, la limpieza y el mantenimiento básico, y le avisa de que un experto cualificado debe revisarlo periódicamente. Y hay una expresión de examen: la advertencia contra falsas maniobras, que es no tocar lo que no se debe tocar. Cuando entregas un aparato, este manual va con él: forma parte de dejar la instalación en regla. Si el cliente lo pierde, es fácil que acabe haciendo maniobras raras que provocan una avería.</a:t>
+              <a:t>N1: El manual técnico trae una lista larguísima. ¿Qué datos no pueden faltar?</a:t>
+            </a:r>
+          </a:p>
+          <a:p>
+            <a:r>
+              <a:t>N2: Es verdad que la lista es larga, pero no todo pesa igual. Quédate con las estrellas: tipo de gas, presión de suministro, consumo nominal, aire de combustión, evacuación de los gases y datos eléctricos con el esquema de bornes. ¿Por qué esos? Porque son los datos que necesitas sí o sí para montar y regular el aparato. El resto, como el caudal másico en gramos por segundo para el cálculo de chimeneas, o las combinaciones de quemadores de aire forzado, son detalles que la norma añade para casos concretos. Ejemplo: sin la presión de suministro no sabes a qué presión regular la caldera, y sin el aire de combustión no sabes qué ventilación exige el local.</a:t>
             </a:r>
           </a:p>
         </p:txBody>
@@ -4580,7 +4647,7 @@
             <a:r>
               <a:rPr sz="1400" b="1" i="0">
                 <a:solidFill>
-                  <a:srgbClr val="CADCFC"/>
+                  <a:srgbClr val="F4A24C"/>
                 </a:solidFill>
                 <a:latin typeface="Montserrat"/>
               </a:rPr>
@@ -4591,13 +4658,57 @@
       </p:sp>
       <p:sp>
         <p:nvSpPr>
-          <p:cNvPr id="4" name="TextBox 3"/>
+          <p:cNvPr id="4" name="Rounded Rectangle 3"/>
+          <p:cNvSpPr/>
+          <p:nvPr/>
+        </p:nvSpPr>
+        <p:spPr>
+          <a:xfrm>
+            <a:off x="868680" y="2057400"/>
+            <a:ext cx="1463040" cy="82296"/>
+          </a:xfrm>
+          <a:prstGeom prst="roundRect">
+            <a:avLst/>
+          </a:prstGeom>
+          <a:solidFill>
+            <a:srgbClr val="E8801A"/>
+          </a:solidFill>
+          <a:ln>
+            <a:noFill/>
+          </a:ln>
+          <a:effectLst/>
+        </p:spPr>
+        <p:style>
+          <a:lnRef idx="1">
+            <a:schemeClr val="accent1"/>
+          </a:lnRef>
+          <a:fillRef idx="3">
+            <a:schemeClr val="accent1"/>
+          </a:fillRef>
+          <a:effectRef idx="2">
+            <a:schemeClr val="accent1"/>
+          </a:effectRef>
+          <a:fontRef idx="minor">
+            <a:schemeClr val="lt1"/>
+          </a:fontRef>
+        </p:style>
+        <p:txBody>
+          <a:bodyPr rtlCol="0" anchor="ctr"/>
+          <a:lstStyle/>
+          <a:p>
+            <a:pPr algn="ctr"/>
+          </a:p>
+        </p:txBody>
+      </p:sp>
+      <p:sp>
+        <p:nvSpPr>
+          <p:cNvPr id="5" name="TextBox 4"/>
           <p:cNvSpPr txBox="1"/>
           <p:nvPr/>
         </p:nvSpPr>
         <p:spPr>
           <a:xfrm>
-            <a:off x="822960" y="2194560"/>
+            <a:off x="822960" y="2286000"/>
             <a:ext cx="10515600" cy="2011680"/>
           </a:xfrm>
           <a:prstGeom prst="rect">
@@ -4636,7 +4747,7 @@
       </p:sp>
       <p:sp>
         <p:nvSpPr>
-          <p:cNvPr id="5" name="TextBox 4"/>
+          <p:cNvPr id="6" name="TextBox 5"/>
           <p:cNvSpPr txBox="1"/>
           <p:nvPr/>
         </p:nvSpPr>
@@ -4760,7 +4871,7 @@
                 </a:solidFill>
                 <a:latin typeface="Montserrat"/>
               </a:rPr>
-              <a:t>010 / 014</a:t>
+              <a:t>010 / 015</a:t>
             </a:r>
           </a:p>
         </p:txBody>
@@ -4808,7 +4919,7 @@
         <p:spPr>
           <a:xfrm>
             <a:off x="822960" y="457200"/>
-            <a:ext cx="8229600" cy="365760"/>
+            <a:ext cx="10058400" cy="365760"/>
           </a:xfrm>
           <a:prstGeom prst="rect">
             <a:avLst/>
@@ -4822,13 +4933,13 @@
           <a:lstStyle/>
           <a:p>
             <a:r>
-              <a:rPr sz="1200" b="1" i="0">
-                <a:solidFill>
-                  <a:srgbClr val="64748B"/>
-                </a:solidFill>
-                <a:latin typeface="Montserrat"/>
-              </a:rPr>
-              <a:t>APARTADOS 2.2.3-2.2.4 · ADVERTENCIAS</a:t>
+              <a:rPr sz="1300" b="1" i="0">
+                <a:solidFill>
+                  <a:srgbClr val="E8801A"/>
+                </a:solidFill>
+                <a:latin typeface="Montserrat"/>
+              </a:rPr>
+              <a:t>APARTADO 2.2.2 · MANUAL DE USO</a:t>
             </a:r>
           </a:p>
         </p:txBody>
@@ -4856,26 +4967,70 @@
           <a:lstStyle/>
           <a:p>
             <a:r>
-              <a:rPr sz="2700" b="1" i="0">
+              <a:rPr sz="2800" b="1" i="0">
                 <a:solidFill>
                   <a:srgbClr val="1E2761"/>
                 </a:solidFill>
                 <a:latin typeface="Montserrat"/>
               </a:rPr>
-              <a:t>Aparato y embalaje</a:t>
-            </a:r>
-          </a:p>
-        </p:txBody>
-      </p:sp>
-      <p:sp>
-        <p:nvSpPr>
-          <p:cNvPr id="7" name="TextBox 6"/>
+              <a:t>El manual del cliente</a:t>
+            </a:r>
+          </a:p>
+        </p:txBody>
+      </p:sp>
+      <p:sp>
+        <p:nvSpPr>
+          <p:cNvPr id="7" name="Rounded Rectangle 6"/>
+          <p:cNvSpPr/>
+          <p:nvPr/>
+        </p:nvSpPr>
+        <p:spPr>
+          <a:xfrm>
+            <a:off x="868680" y="1627632"/>
+            <a:ext cx="2011680" cy="73152"/>
+          </a:xfrm>
+          <a:prstGeom prst="roundRect">
+            <a:avLst/>
+          </a:prstGeom>
+          <a:solidFill>
+            <a:srgbClr val="E8801A"/>
+          </a:solidFill>
+          <a:ln>
+            <a:noFill/>
+          </a:ln>
+          <a:effectLst/>
+        </p:spPr>
+        <p:style>
+          <a:lnRef idx="1">
+            <a:schemeClr val="accent1"/>
+          </a:lnRef>
+          <a:fillRef idx="3">
+            <a:schemeClr val="accent1"/>
+          </a:fillRef>
+          <a:effectRef idx="2">
+            <a:schemeClr val="accent1"/>
+          </a:effectRef>
+          <a:fontRef idx="minor">
+            <a:schemeClr val="lt1"/>
+          </a:fontRef>
+        </p:style>
+        <p:txBody>
+          <a:bodyPr rtlCol="0" anchor="ctr"/>
+          <a:lstStyle/>
+          <a:p>
+            <a:pPr algn="ctr"/>
+          </a:p>
+        </p:txBody>
+      </p:sp>
+      <p:sp>
+        <p:nvSpPr>
+          <p:cNvPr id="8" name="TextBox 7"/>
           <p:cNvSpPr txBox="1"/>
           <p:nvPr/>
         </p:nvSpPr>
         <p:spPr>
           <a:xfrm>
-            <a:off x="822960" y="1920240"/>
+            <a:off x="822960" y="1965960"/>
             <a:ext cx="4983480" cy="4206240"/>
           </a:xfrm>
           <a:prstGeom prst="rect">
@@ -4891,17 +5046,17 @@
           <a:p>
             <a:pPr>
               <a:spcAft>
-                <a:spcPts val="1000"/>
+                <a:spcPts val="1100"/>
               </a:spcAft>
             </a:pPr>
             <a:r>
               <a:rPr sz="1600" b="1" i="0">
                 <a:solidFill>
-                  <a:srgbClr val="2E3A80"/>
-                </a:solidFill>
-                <a:latin typeface="Montserrat"/>
-              </a:rPr>
-              <a:t>•  </a:t>
+                  <a:srgbClr val="E8801A"/>
+                </a:solidFill>
+                <a:latin typeface="Montserrat"/>
+              </a:rPr>
+              <a:t>▸  </a:t>
             </a:r>
             <a:r>
               <a:rPr sz="1600" b="0" i="0">
@@ -4910,23 +5065,23 @@
                 </a:solidFill>
                 <a:latin typeface="Montserrat"/>
               </a:rPr>
-              <a:t>En el aparato: placa (anexo 2)</a:t>
+              <a:t>Restricciones de uso</a:t>
             </a:r>
           </a:p>
           <a:p>
             <a:pPr>
               <a:spcAft>
-                <a:spcPts val="1000"/>
+                <a:spcPts val="1100"/>
               </a:spcAft>
             </a:pPr>
             <a:r>
               <a:rPr sz="1600" b="1" i="0">
                 <a:solidFill>
-                  <a:srgbClr val="2E3A80"/>
-                </a:solidFill>
-                <a:latin typeface="Montserrat"/>
-              </a:rPr>
-              <a:t>•  </a:t>
+                  <a:srgbClr val="E8801A"/>
+                </a:solidFill>
+                <a:latin typeface="Montserrat"/>
+              </a:rPr>
+              <a:t>▸  </a:t>
             </a:r>
             <a:r>
               <a:rPr sz="1600" b="0" i="0">
@@ -4935,23 +5090,23 @@
                 </a:solidFill>
                 <a:latin typeface="Montserrat"/>
               </a:rPr>
-              <a:t>En la caja: tipo de gas y presión</a:t>
+              <a:t>Encendido y elementos regulables</a:t>
             </a:r>
           </a:p>
           <a:p>
             <a:pPr>
               <a:spcAft>
-                <a:spcPts val="1000"/>
+                <a:spcPts val="1100"/>
               </a:spcAft>
             </a:pPr>
             <a:r>
               <a:rPr sz="1600" b="1" i="0">
                 <a:solidFill>
-                  <a:srgbClr val="2E3A80"/>
-                </a:solidFill>
-                <a:latin typeface="Montserrat"/>
-              </a:rPr>
-              <a:t>•  </a:t>
+                  <a:srgbClr val="E8801A"/>
+                </a:solidFill>
+                <a:latin typeface="Montserrat"/>
+              </a:rPr>
+              <a:t>▸  </a:t>
             </a:r>
             <a:r>
               <a:rPr sz="1600" b="0" i="0">
@@ -4960,14 +5115,39 @@
                 </a:solidFill>
                 <a:latin typeface="Montserrat"/>
               </a:rPr>
-              <a:t>En la caja: restricciones de uso</a:t>
-            </a:r>
-          </a:p>
-        </p:txBody>
-      </p:sp>
-      <p:sp>
-        <p:nvSpPr>
-          <p:cNvPr id="8" name="imgph" descr="IMGQ:gas appliance rating label"/>
+              <a:t>Limpieza y mantenimiento básico</a:t>
+            </a:r>
+          </a:p>
+          <a:p>
+            <a:pPr>
+              <a:spcAft>
+                <a:spcPts val="1100"/>
+              </a:spcAft>
+            </a:pPr>
+            <a:r>
+              <a:rPr sz="1600" b="1" i="0">
+                <a:solidFill>
+                  <a:srgbClr val="E8801A"/>
+                </a:solidFill>
+                <a:latin typeface="Montserrat"/>
+              </a:rPr>
+              <a:t>▸  </a:t>
+            </a:r>
+            <a:r>
+              <a:rPr sz="1600" b="0" i="0">
+                <a:solidFill>
+                  <a:srgbClr val="1B2330"/>
+                </a:solidFill>
+                <a:latin typeface="Montserrat"/>
+              </a:rPr>
+              <a:t>Aviso contra falsas maniobras</a:t>
+            </a:r>
+          </a:p>
+        </p:txBody>
+      </p:sp>
+      <p:sp>
+        <p:nvSpPr>
+          <p:cNvPr id="9" name="imgph" descr="IMGQ:person lighting gas stove"/>
           <p:cNvSpPr/>
           <p:nvPr/>
         </p:nvSpPr>
@@ -5013,7 +5193,7 @@
       </p:sp>
       <p:sp>
         <p:nvSpPr>
-          <p:cNvPr id="9" name="TextBox 8"/>
+          <p:cNvPr id="10" name="TextBox 9"/>
           <p:cNvSpPr txBox="1"/>
           <p:nvPr/>
         </p:nvSpPr>
@@ -5053,7 +5233,7 @@
                 </a:solidFill>
                 <a:latin typeface="Montserrat"/>
               </a:rPr>
-              <a:t>gas appliance rating label</a:t>
+              <a:t>person lighting gas stove</a:t>
             </a:r>
           </a:p>
         </p:txBody>
@@ -5150,7 +5330,7 @@
                 </a:solidFill>
                 <a:latin typeface="Montserrat"/>
               </a:rPr>
-              <a:t>011 / 014</a:t>
+              <a:t>011 / 015</a:t>
             </a:r>
           </a:p>
         </p:txBody>
@@ -5198,7 +5378,7 @@
         <p:spPr>
           <a:xfrm>
             <a:off x="822960" y="457200"/>
-            <a:ext cx="8229600" cy="365760"/>
+            <a:ext cx="10058400" cy="365760"/>
           </a:xfrm>
           <a:prstGeom prst="rect">
             <a:avLst/>
@@ -5212,13 +5392,13 @@
           <a:lstStyle/>
           <a:p>
             <a:r>
-              <a:rPr sz="1200" b="1" i="0">
-                <a:solidFill>
-                  <a:srgbClr val="64748B"/>
-                </a:solidFill>
-                <a:latin typeface="Montserrat"/>
-              </a:rPr>
-              <a:t>APARTADO 2.3 · EQUIPOS</a:t>
+              <a:rPr sz="1300" b="1" i="0">
+                <a:solidFill>
+                  <a:srgbClr val="E8801A"/>
+                </a:solidFill>
+                <a:latin typeface="Montserrat"/>
+              </a:rPr>
+              <a:t>APARTADOS 2.2.3-2.2.4 · ADVERTENCIAS</a:t>
             </a:r>
           </a:p>
         </p:txBody>
@@ -5246,26 +5426,70 @@
           <a:lstStyle/>
           <a:p>
             <a:r>
-              <a:rPr sz="2700" b="1" i="0">
+              <a:rPr sz="2800" b="1" i="0">
                 <a:solidFill>
                   <a:srgbClr val="1E2761"/>
                 </a:solidFill>
                 <a:latin typeface="Montserrat"/>
               </a:rPr>
-              <a:t>Aparato frente a equipo</a:t>
-            </a:r>
-          </a:p>
-        </p:txBody>
-      </p:sp>
-      <p:sp>
-        <p:nvSpPr>
-          <p:cNvPr id="7" name="TextBox 6"/>
+              <a:t>Aparato y embalaje</a:t>
+            </a:r>
+          </a:p>
+        </p:txBody>
+      </p:sp>
+      <p:sp>
+        <p:nvSpPr>
+          <p:cNvPr id="7" name="Rounded Rectangle 6"/>
+          <p:cNvSpPr/>
+          <p:nvPr/>
+        </p:nvSpPr>
+        <p:spPr>
+          <a:xfrm>
+            <a:off x="868680" y="1627632"/>
+            <a:ext cx="2011680" cy="73152"/>
+          </a:xfrm>
+          <a:prstGeom prst="roundRect">
+            <a:avLst/>
+          </a:prstGeom>
+          <a:solidFill>
+            <a:srgbClr val="E8801A"/>
+          </a:solidFill>
+          <a:ln>
+            <a:noFill/>
+          </a:ln>
+          <a:effectLst/>
+        </p:spPr>
+        <p:style>
+          <a:lnRef idx="1">
+            <a:schemeClr val="accent1"/>
+          </a:lnRef>
+          <a:fillRef idx="3">
+            <a:schemeClr val="accent1"/>
+          </a:fillRef>
+          <a:effectRef idx="2">
+            <a:schemeClr val="accent1"/>
+          </a:effectRef>
+          <a:fontRef idx="minor">
+            <a:schemeClr val="lt1"/>
+          </a:fontRef>
+        </p:style>
+        <p:txBody>
+          <a:bodyPr rtlCol="0" anchor="ctr"/>
+          <a:lstStyle/>
+          <a:p>
+            <a:pPr algn="ctr"/>
+          </a:p>
+        </p:txBody>
+      </p:sp>
+      <p:sp>
+        <p:nvSpPr>
+          <p:cNvPr id="8" name="TextBox 7"/>
           <p:cNvSpPr txBox="1"/>
           <p:nvPr/>
         </p:nvSpPr>
         <p:spPr>
           <a:xfrm>
-            <a:off x="822960" y="1920240"/>
+            <a:off x="822960" y="1965960"/>
             <a:ext cx="4983480" cy="4206240"/>
           </a:xfrm>
           <a:prstGeom prst="rect">
@@ -5281,17 +5505,17 @@
           <a:p>
             <a:pPr>
               <a:spcAft>
-                <a:spcPts val="1000"/>
+                <a:spcPts val="1100"/>
               </a:spcAft>
             </a:pPr>
             <a:r>
               <a:rPr sz="1600" b="1" i="0">
                 <a:solidFill>
-                  <a:srgbClr val="2E3A80"/>
-                </a:solidFill>
-                <a:latin typeface="Montserrat"/>
-              </a:rPr>
-              <a:t>•  </a:t>
+                  <a:srgbClr val="E8801A"/>
+                </a:solidFill>
+                <a:latin typeface="Montserrat"/>
+              </a:rPr>
+              <a:t>▸  </a:t>
             </a:r>
             <a:r>
               <a:rPr sz="1600" b="0" i="0">
@@ -5300,23 +5524,23 @@
                 </a:solidFill>
                 <a:latin typeface="Montserrat"/>
               </a:rPr>
-              <a:t>Aparato = conjunto terminado (caldera)</a:t>
+              <a:t>En el aparato: placa (anexo 2)</a:t>
             </a:r>
           </a:p>
           <a:p>
             <a:pPr>
               <a:spcAft>
-                <a:spcPts val="1000"/>
+                <a:spcPts val="1100"/>
               </a:spcAft>
             </a:pPr>
             <a:r>
               <a:rPr sz="1600" b="1" i="0">
                 <a:solidFill>
-                  <a:srgbClr val="2E3A80"/>
-                </a:solidFill>
-                <a:latin typeface="Montserrat"/>
-              </a:rPr>
-              <a:t>•  </a:t>
+                  <a:srgbClr val="E8801A"/>
+                </a:solidFill>
+                <a:latin typeface="Montserrat"/>
+              </a:rPr>
+              <a:t>▸  </a:t>
             </a:r>
             <a:r>
               <a:rPr sz="1600" b="0" i="0">
@@ -5325,23 +5549,23 @@
                 </a:solidFill>
                 <a:latin typeface="Montserrat"/>
               </a:rPr>
-              <a:t>Equipo = pieza integrada (quemador, válvula)</a:t>
+              <a:t>En la caja: tipo de gas y presión</a:t>
             </a:r>
           </a:p>
           <a:p>
             <a:pPr>
               <a:spcAft>
-                <a:spcPts val="1000"/>
+                <a:spcPts val="1100"/>
               </a:spcAft>
             </a:pPr>
             <a:r>
               <a:rPr sz="1600" b="1" i="0">
                 <a:solidFill>
-                  <a:srgbClr val="2E3A80"/>
-                </a:solidFill>
-                <a:latin typeface="Montserrat"/>
-              </a:rPr>
-              <a:t>•  </a:t>
+                  <a:srgbClr val="E8801A"/>
+                </a:solidFill>
+                <a:latin typeface="Montserrat"/>
+              </a:rPr>
+              <a:t>▸  </a:t>
             </a:r>
             <a:r>
               <a:rPr sz="1600" b="0" i="0">
@@ -5350,14 +5574,14 @@
                 </a:solidFill>
                 <a:latin typeface="Montserrat"/>
               </a:rPr>
-              <a:t>Cada equipo, con sus instrucciones</a:t>
-            </a:r>
-          </a:p>
-        </p:txBody>
-      </p:sp>
-      <p:sp>
-        <p:nvSpPr>
-          <p:cNvPr id="8" name="imgph" descr="IMGQ:gas valve component"/>
+              <a:t>En la caja: restricciones de uso</a:t>
+            </a:r>
+          </a:p>
+        </p:txBody>
+      </p:sp>
+      <p:sp>
+        <p:nvSpPr>
+          <p:cNvPr id="9" name="imgph" descr="IMGQ:gas appliance rating label"/>
           <p:cNvSpPr/>
           <p:nvPr/>
         </p:nvSpPr>
@@ -5403,7 +5627,7 @@
       </p:sp>
       <p:sp>
         <p:nvSpPr>
-          <p:cNvPr id="9" name="TextBox 8"/>
+          <p:cNvPr id="10" name="TextBox 9"/>
           <p:cNvSpPr txBox="1"/>
           <p:nvPr/>
         </p:nvSpPr>
@@ -5443,7 +5667,7 @@
                 </a:solidFill>
                 <a:latin typeface="Montserrat"/>
               </a:rPr>
-              <a:t>gas valve component</a:t>
+              <a:t>gas appliance rating label</a:t>
             </a:r>
           </a:p>
         </p:txBody>
@@ -5540,7 +5764,7 @@
                 </a:solidFill>
                 <a:latin typeface="Montserrat"/>
               </a:rPr>
-              <a:t>012 / 014</a:t>
+              <a:t>012 / 015</a:t>
             </a:r>
           </a:p>
         </p:txBody>
@@ -5588,7 +5812,7 @@
         <p:spPr>
           <a:xfrm>
             <a:off x="822960" y="457200"/>
-            <a:ext cx="8229600" cy="365760"/>
+            <a:ext cx="10058400" cy="365760"/>
           </a:xfrm>
           <a:prstGeom prst="rect">
             <a:avLst/>
@@ -5602,13 +5826,13 @@
           <a:lstStyle/>
           <a:p>
             <a:r>
-              <a:rPr sz="1200" b="1" i="0">
-                <a:solidFill>
-                  <a:srgbClr val="64748B"/>
-                </a:solidFill>
-                <a:latin typeface="Montserrat"/>
-              </a:rPr>
-              <a:t>APARTADO 3 · CONFORMIDAD</a:t>
+              <a:rPr sz="1300" b="1" i="0">
+                <a:solidFill>
+                  <a:srgbClr val="E8801A"/>
+                </a:solidFill>
+                <a:latin typeface="Montserrat"/>
+              </a:rPr>
+              <a:t>APARTADO 2.3 · EQUIPOS</a:t>
             </a:r>
           </a:p>
         </p:txBody>
@@ -5636,26 +5860,70 @@
           <a:lstStyle/>
           <a:p>
             <a:r>
-              <a:rPr sz="2700" b="1" i="0">
+              <a:rPr sz="2800" b="1" i="0">
                 <a:solidFill>
                   <a:srgbClr val="1E2761"/>
                 </a:solidFill>
                 <a:latin typeface="Montserrat"/>
               </a:rPr>
-              <a:t>Cómo se certifica el aparato</a:t>
-            </a:r>
-          </a:p>
-        </p:txBody>
-      </p:sp>
-      <p:sp>
-        <p:nvSpPr>
-          <p:cNvPr id="7" name="TextBox 6"/>
+              <a:t>Aparato frente a equipo</a:t>
+            </a:r>
+          </a:p>
+        </p:txBody>
+      </p:sp>
+      <p:sp>
+        <p:nvSpPr>
+          <p:cNvPr id="7" name="Rounded Rectangle 6"/>
+          <p:cNvSpPr/>
+          <p:nvPr/>
+        </p:nvSpPr>
+        <p:spPr>
+          <a:xfrm>
+            <a:off x="868680" y="1627632"/>
+            <a:ext cx="2011680" cy="73152"/>
+          </a:xfrm>
+          <a:prstGeom prst="roundRect">
+            <a:avLst/>
+          </a:prstGeom>
+          <a:solidFill>
+            <a:srgbClr val="E8801A"/>
+          </a:solidFill>
+          <a:ln>
+            <a:noFill/>
+          </a:ln>
+          <a:effectLst/>
+        </p:spPr>
+        <p:style>
+          <a:lnRef idx="1">
+            <a:schemeClr val="accent1"/>
+          </a:lnRef>
+          <a:fillRef idx="3">
+            <a:schemeClr val="accent1"/>
+          </a:fillRef>
+          <a:effectRef idx="2">
+            <a:schemeClr val="accent1"/>
+          </a:effectRef>
+          <a:fontRef idx="minor">
+            <a:schemeClr val="lt1"/>
+          </a:fontRef>
+        </p:style>
+        <p:txBody>
+          <a:bodyPr rtlCol="0" anchor="ctr"/>
+          <a:lstStyle/>
+          <a:p>
+            <a:pPr algn="ctr"/>
+          </a:p>
+        </p:txBody>
+      </p:sp>
+      <p:sp>
+        <p:nvSpPr>
+          <p:cNvPr id="8" name="TextBox 7"/>
           <p:cNvSpPr txBox="1"/>
           <p:nvPr/>
         </p:nvSpPr>
         <p:spPr>
           <a:xfrm>
-            <a:off x="822960" y="1920240"/>
+            <a:off x="822960" y="1965960"/>
             <a:ext cx="4983480" cy="4206240"/>
           </a:xfrm>
           <a:prstGeom prst="rect">
@@ -5671,17 +5939,17 @@
           <a:p>
             <a:pPr>
               <a:spcAft>
-                <a:spcPts val="1000"/>
+                <a:spcPts val="1100"/>
               </a:spcAft>
             </a:pPr>
             <a:r>
               <a:rPr sz="1600" b="1" i="0">
                 <a:solidFill>
-                  <a:srgbClr val="2E3A80"/>
-                </a:solidFill>
-                <a:latin typeface="Montserrat"/>
-              </a:rPr>
-              <a:t>•  </a:t>
+                  <a:srgbClr val="E8801A"/>
+                </a:solidFill>
+                <a:latin typeface="Montserrat"/>
+              </a:rPr>
+              <a:t>▸  </a:t>
             </a:r>
             <a:r>
               <a:rPr sz="1600" b="0" i="0">
@@ -5690,23 +5958,23 @@
                 </a:solidFill>
                 <a:latin typeface="Montserrat"/>
               </a:rPr>
-              <a:t>Cumple normas UNE / UNE-EN / EN</a:t>
+              <a:t>Aparato = conjunto terminado (caldera)</a:t>
             </a:r>
           </a:p>
           <a:p>
             <a:pPr>
               <a:spcAft>
-                <a:spcPts val="1000"/>
+                <a:spcPts val="1100"/>
               </a:spcAft>
             </a:pPr>
             <a:r>
               <a:rPr sz="1600" b="1" i="0">
                 <a:solidFill>
-                  <a:srgbClr val="2E3A80"/>
-                </a:solidFill>
-                <a:latin typeface="Montserrat"/>
-              </a:rPr>
-              <a:t>•  </a:t>
+                  <a:srgbClr val="E8801A"/>
+                </a:solidFill>
+                <a:latin typeface="Montserrat"/>
+              </a:rPr>
+              <a:t>▸  </a:t>
             </a:r>
             <a:r>
               <a:rPr sz="1600" b="0" i="0">
@@ -5715,23 +5983,23 @@
                 </a:solidFill>
                 <a:latin typeface="Montserrat"/>
               </a:rPr>
-              <a:t>Sin norma: anexo 3</a:t>
+              <a:t>Equipo = pieza integrada (quemador, válvula)</a:t>
             </a:r>
           </a:p>
           <a:p>
             <a:pPr>
               <a:spcAft>
-                <a:spcPts val="1000"/>
+                <a:spcPts val="1100"/>
               </a:spcAft>
             </a:pPr>
             <a:r>
               <a:rPr sz="1600" b="1" i="0">
                 <a:solidFill>
-                  <a:srgbClr val="2E3A80"/>
-                </a:solidFill>
-                <a:latin typeface="Montserrat"/>
-              </a:rPr>
-              <a:t>•  </a:t>
+                  <a:srgbClr val="E8801A"/>
+                </a:solidFill>
+                <a:latin typeface="Montserrat"/>
+              </a:rPr>
+              <a:t>▸  </a:t>
             </a:r>
             <a:r>
               <a:rPr sz="1600" b="0" i="0">
@@ -5740,14 +6008,14 @@
                 </a:solidFill>
                 <a:latin typeface="Montserrat"/>
               </a:rPr>
-              <a:t>Camino: a + b, o bien c</a:t>
-            </a:r>
-          </a:p>
-        </p:txBody>
-      </p:sp>
-      <p:sp>
-        <p:nvSpPr>
-          <p:cNvPr id="8" name="imgph" descr="IMGQ:quality control inspection factory"/>
+              <a:t>Cada equipo, con sus instrucciones</a:t>
+            </a:r>
+          </a:p>
+        </p:txBody>
+      </p:sp>
+      <p:sp>
+        <p:nvSpPr>
+          <p:cNvPr id="9" name="imgph" descr="IMGQ:gas valve component"/>
           <p:cNvSpPr/>
           <p:nvPr/>
         </p:nvSpPr>
@@ -5793,7 +6061,7 @@
       </p:sp>
       <p:sp>
         <p:nvSpPr>
-          <p:cNvPr id="9" name="TextBox 8"/>
+          <p:cNvPr id="10" name="TextBox 9"/>
           <p:cNvSpPr txBox="1"/>
           <p:nvPr/>
         </p:nvSpPr>
@@ -5833,7 +6101,7 @@
                 </a:solidFill>
                 <a:latin typeface="Montserrat"/>
               </a:rPr>
-              <a:t>quality control inspection factory</a:t>
+              <a:t>gas valve component</a:t>
             </a:r>
           </a:p>
         </p:txBody>
@@ -5930,7 +6198,7 @@
                 </a:solidFill>
                 <a:latin typeface="Montserrat"/>
               </a:rPr>
-              <a:t>013 / 014</a:t>
+              <a:t>013 / 015</a:t>
             </a:r>
           </a:p>
         </p:txBody>
@@ -5978,7 +6246,7 @@
         <p:spPr>
           <a:xfrm>
             <a:off x="822960" y="457200"/>
-            <a:ext cx="8229600" cy="365760"/>
+            <a:ext cx="10058400" cy="365760"/>
           </a:xfrm>
           <a:prstGeom prst="rect">
             <a:avLst/>
@@ -5992,13 +6260,13 @@
           <a:lstStyle/>
           <a:p>
             <a:r>
-              <a:rPr sz="1200" b="1" i="0">
-                <a:solidFill>
-                  <a:srgbClr val="64748B"/>
-                </a:solidFill>
-                <a:latin typeface="Montserrat"/>
-              </a:rPr>
-              <a:t>APARTADO 4 · MARCADO</a:t>
+              <a:rPr sz="1300" b="1" i="0">
+                <a:solidFill>
+                  <a:srgbClr val="E8801A"/>
+                </a:solidFill>
+                <a:latin typeface="Montserrat"/>
+              </a:rPr>
+              <a:t>APARTADO 3 · CONFORMIDAD</a:t>
             </a:r>
           </a:p>
         </p:txBody>
@@ -6026,26 +6294,70 @@
           <a:lstStyle/>
           <a:p>
             <a:r>
-              <a:rPr sz="2700" b="1" i="0">
+              <a:rPr sz="2800" b="1" i="0">
                 <a:solidFill>
                   <a:srgbClr val="1E2761"/>
                 </a:solidFill>
                 <a:latin typeface="Montserrat"/>
               </a:rPr>
-              <a:t>Placa e instrucciones</a:t>
-            </a:r>
-          </a:p>
-        </p:txBody>
-      </p:sp>
-      <p:sp>
-        <p:nvSpPr>
-          <p:cNvPr id="7" name="TextBox 6"/>
+              <a:t>Cómo se certifica el aparato</a:t>
+            </a:r>
+          </a:p>
+        </p:txBody>
+      </p:sp>
+      <p:sp>
+        <p:nvSpPr>
+          <p:cNvPr id="7" name="Rounded Rectangle 6"/>
+          <p:cNvSpPr/>
+          <p:nvPr/>
+        </p:nvSpPr>
+        <p:spPr>
+          <a:xfrm>
+            <a:off x="868680" y="1627632"/>
+            <a:ext cx="2011680" cy="73152"/>
+          </a:xfrm>
+          <a:prstGeom prst="roundRect">
+            <a:avLst/>
+          </a:prstGeom>
+          <a:solidFill>
+            <a:srgbClr val="E8801A"/>
+          </a:solidFill>
+          <a:ln>
+            <a:noFill/>
+          </a:ln>
+          <a:effectLst/>
+        </p:spPr>
+        <p:style>
+          <a:lnRef idx="1">
+            <a:schemeClr val="accent1"/>
+          </a:lnRef>
+          <a:fillRef idx="3">
+            <a:schemeClr val="accent1"/>
+          </a:fillRef>
+          <a:effectRef idx="2">
+            <a:schemeClr val="accent1"/>
+          </a:effectRef>
+          <a:fontRef idx="minor">
+            <a:schemeClr val="lt1"/>
+          </a:fontRef>
+        </p:style>
+        <p:txBody>
+          <a:bodyPr rtlCol="0" anchor="ctr"/>
+          <a:lstStyle/>
+          <a:p>
+            <a:pPr algn="ctr"/>
+          </a:p>
+        </p:txBody>
+      </p:sp>
+      <p:sp>
+        <p:nvSpPr>
+          <p:cNvPr id="8" name="TextBox 7"/>
           <p:cNvSpPr txBox="1"/>
           <p:nvPr/>
         </p:nvSpPr>
         <p:spPr>
           <a:xfrm>
-            <a:off x="822960" y="1920240"/>
+            <a:off x="822960" y="1965960"/>
             <a:ext cx="4983480" cy="4206240"/>
           </a:xfrm>
           <a:prstGeom prst="rect">
@@ -6061,17 +6373,17 @@
           <a:p>
             <a:pPr>
               <a:spcAft>
-                <a:spcPts val="1000"/>
+                <a:spcPts val="1100"/>
               </a:spcAft>
             </a:pPr>
             <a:r>
               <a:rPr sz="1600" b="1" i="0">
                 <a:solidFill>
-                  <a:srgbClr val="2E3A80"/>
-                </a:solidFill>
-                <a:latin typeface="Montserrat"/>
-              </a:rPr>
-              <a:t>•  </a:t>
+                  <a:srgbClr val="E8801A"/>
+                </a:solidFill>
+                <a:latin typeface="Montserrat"/>
+              </a:rPr>
+              <a:t>▸  </a:t>
             </a:r>
             <a:r>
               <a:rPr sz="1600" b="0" i="0">
@@ -6080,23 +6392,23 @@
                 </a:solidFill>
                 <a:latin typeface="Montserrat"/>
               </a:rPr>
-              <a:t>Placa visible → anexo 2</a:t>
+              <a:t>Cumple normas UNE / UNE-EN / EN</a:t>
             </a:r>
           </a:p>
           <a:p>
             <a:pPr>
               <a:spcAft>
-                <a:spcPts val="1000"/>
+                <a:spcPts val="1100"/>
               </a:spcAft>
             </a:pPr>
             <a:r>
               <a:rPr sz="1600" b="1" i="0">
                 <a:solidFill>
-                  <a:srgbClr val="2E3A80"/>
-                </a:solidFill>
-                <a:latin typeface="Montserrat"/>
-              </a:rPr>
-              <a:t>•  </a:t>
+                  <a:srgbClr val="E8801A"/>
+                </a:solidFill>
+                <a:latin typeface="Montserrat"/>
+              </a:rPr>
+              <a:t>▸  </a:t>
             </a:r>
             <a:r>
               <a:rPr sz="1600" b="0" i="0">
@@ -6105,14 +6417,39 @@
                 </a:solidFill>
                 <a:latin typeface="Montserrat"/>
               </a:rPr>
-              <a:t>Instrucciones → normas o anexo 3</a:t>
-            </a:r>
-          </a:p>
-        </p:txBody>
-      </p:sp>
-      <p:sp>
-        <p:nvSpPr>
-          <p:cNvPr id="8" name="imgph" descr="IMGQ:gas meter cabinet nameplate"/>
+              <a:t>Sin norma: anexo 3</a:t>
+            </a:r>
+          </a:p>
+          <a:p>
+            <a:pPr>
+              <a:spcAft>
+                <a:spcPts val="1100"/>
+              </a:spcAft>
+            </a:pPr>
+            <a:r>
+              <a:rPr sz="1600" b="1" i="0">
+                <a:solidFill>
+                  <a:srgbClr val="E8801A"/>
+                </a:solidFill>
+                <a:latin typeface="Montserrat"/>
+              </a:rPr>
+              <a:t>▸  </a:t>
+            </a:r>
+            <a:r>
+              <a:rPr sz="1600" b="0" i="0">
+                <a:solidFill>
+                  <a:srgbClr val="1B2330"/>
+                </a:solidFill>
+                <a:latin typeface="Montserrat"/>
+              </a:rPr>
+              <a:t>Camino: a + b, o bien c</a:t>
+            </a:r>
+          </a:p>
+        </p:txBody>
+      </p:sp>
+      <p:sp>
+        <p:nvSpPr>
+          <p:cNvPr id="9" name="imgph" descr="IMGQ:quality control inspection factory"/>
           <p:cNvSpPr/>
           <p:nvPr/>
         </p:nvSpPr>
@@ -6158,7 +6495,7 @@
       </p:sp>
       <p:sp>
         <p:nvSpPr>
-          <p:cNvPr id="9" name="TextBox 8"/>
+          <p:cNvPr id="10" name="TextBox 9"/>
           <p:cNvSpPr txBox="1"/>
           <p:nvPr/>
         </p:nvSpPr>
@@ -6198,7 +6535,7 @@
                 </a:solidFill>
                 <a:latin typeface="Montserrat"/>
               </a:rPr>
-              <a:t>gas meter cabinet nameplate</a:t>
+              <a:t>quality control inspection factory</a:t>
             </a:r>
           </a:p>
         </p:txBody>
@@ -6236,6 +6573,415 @@
             <a:avLst/>
           </a:prstGeom>
           <a:solidFill>
+            <a:srgbClr val="FFFFFF"/>
+          </a:solidFill>
+          <a:ln>
+            <a:noFill/>
+          </a:ln>
+          <a:effectLst/>
+        </p:spPr>
+        <p:style>
+          <a:lnRef idx="1">
+            <a:schemeClr val="accent1"/>
+          </a:lnRef>
+          <a:fillRef idx="3">
+            <a:schemeClr val="accent1"/>
+          </a:fillRef>
+          <a:effectRef idx="2">
+            <a:schemeClr val="accent1"/>
+          </a:effectRef>
+          <a:fontRef idx="minor">
+            <a:schemeClr val="lt1"/>
+          </a:fontRef>
+        </p:style>
+        <p:txBody>
+          <a:bodyPr rtlCol="0" anchor="ctr"/>
+          <a:lstStyle/>
+          <a:p>
+            <a:pPr algn="ctr"/>
+          </a:p>
+        </p:txBody>
+      </p:sp>
+      <p:sp>
+        <p:nvSpPr>
+          <p:cNvPr id="3" name="TextBox 2"/>
+          <p:cNvSpPr txBox="1"/>
+          <p:nvPr/>
+        </p:nvSpPr>
+        <p:spPr>
+          <a:xfrm>
+            <a:off x="10607040" y="320040"/>
+            <a:ext cx="1371600" cy="365760"/>
+          </a:xfrm>
+          <a:prstGeom prst="rect">
+            <a:avLst/>
+          </a:prstGeom>
+          <a:noFill/>
+        </p:spPr>
+        <p:txBody>
+          <a:bodyPr wrap="square">
+            <a:spAutoFit/>
+          </a:bodyPr>
+          <a:lstStyle/>
+          <a:p>
+            <a:pPr algn="r"/>
+            <a:r>
+              <a:rPr sz="1000" b="1" i="0">
+                <a:solidFill>
+                  <a:srgbClr val="64748B"/>
+                </a:solidFill>
+                <a:latin typeface="Montserrat"/>
+              </a:rPr>
+              <a:t>014 / 015</a:t>
+            </a:r>
+          </a:p>
+        </p:txBody>
+      </p:sp>
+      <p:sp>
+        <p:nvSpPr>
+          <p:cNvPr id="4" name="TextBox 3"/>
+          <p:cNvSpPr txBox="1"/>
+          <p:nvPr/>
+        </p:nvSpPr>
+        <p:spPr>
+          <a:xfrm>
+            <a:off x="457200" y="6419088"/>
+            <a:ext cx="8229600" cy="365760"/>
+          </a:xfrm>
+          <a:prstGeom prst="rect">
+            <a:avLst/>
+          </a:prstGeom>
+          <a:noFill/>
+        </p:spPr>
+        <p:txBody>
+          <a:bodyPr wrap="square">
+            <a:spAutoFit/>
+          </a:bodyPr>
+          <a:lstStyle/>
+          <a:p>
+            <a:r>
+              <a:rPr sz="900" b="0" i="0">
+                <a:solidFill>
+                  <a:srgbClr val="64748B"/>
+                </a:solidFill>
+                <a:latin typeface="Montserrat"/>
+              </a:rPr>
+              <a:t>Curso Gas B · Tema 05 · Aparatos de gas</a:t>
+            </a:r>
+          </a:p>
+        </p:txBody>
+      </p:sp>
+      <p:sp>
+        <p:nvSpPr>
+          <p:cNvPr id="5" name="TextBox 4"/>
+          <p:cNvSpPr txBox="1"/>
+          <p:nvPr/>
+        </p:nvSpPr>
+        <p:spPr>
+          <a:xfrm>
+            <a:off x="822960" y="457200"/>
+            <a:ext cx="10058400" cy="365760"/>
+          </a:xfrm>
+          <a:prstGeom prst="rect">
+            <a:avLst/>
+          </a:prstGeom>
+          <a:noFill/>
+        </p:spPr>
+        <p:txBody>
+          <a:bodyPr wrap="square">
+            <a:spAutoFit/>
+          </a:bodyPr>
+          <a:lstStyle/>
+          <a:p>
+            <a:r>
+              <a:rPr sz="1300" b="1" i="0">
+                <a:solidFill>
+                  <a:srgbClr val="E8801A"/>
+                </a:solidFill>
+                <a:latin typeface="Montserrat"/>
+              </a:rPr>
+              <a:t>APARTADO 4 · MARCADO</a:t>
+            </a:r>
+          </a:p>
+        </p:txBody>
+      </p:sp>
+      <p:sp>
+        <p:nvSpPr>
+          <p:cNvPr id="6" name="TextBox 5"/>
+          <p:cNvSpPr txBox="1"/>
+          <p:nvPr/>
+        </p:nvSpPr>
+        <p:spPr>
+          <a:xfrm>
+            <a:off x="822960" y="868680"/>
+            <a:ext cx="10515600" cy="914400"/>
+          </a:xfrm>
+          <a:prstGeom prst="rect">
+            <a:avLst/>
+          </a:prstGeom>
+          <a:noFill/>
+        </p:spPr>
+        <p:txBody>
+          <a:bodyPr wrap="square">
+            <a:spAutoFit/>
+          </a:bodyPr>
+          <a:lstStyle/>
+          <a:p>
+            <a:r>
+              <a:rPr sz="2800" b="1" i="0">
+                <a:solidFill>
+                  <a:srgbClr val="1E2761"/>
+                </a:solidFill>
+                <a:latin typeface="Montserrat"/>
+              </a:rPr>
+              <a:t>Placa e instrucciones</a:t>
+            </a:r>
+          </a:p>
+        </p:txBody>
+      </p:sp>
+      <p:sp>
+        <p:nvSpPr>
+          <p:cNvPr id="7" name="Rounded Rectangle 6"/>
+          <p:cNvSpPr/>
+          <p:nvPr/>
+        </p:nvSpPr>
+        <p:spPr>
+          <a:xfrm>
+            <a:off x="868680" y="1627632"/>
+            <a:ext cx="2011680" cy="73152"/>
+          </a:xfrm>
+          <a:prstGeom prst="roundRect">
+            <a:avLst/>
+          </a:prstGeom>
+          <a:solidFill>
+            <a:srgbClr val="E8801A"/>
+          </a:solidFill>
+          <a:ln>
+            <a:noFill/>
+          </a:ln>
+          <a:effectLst/>
+        </p:spPr>
+        <p:style>
+          <a:lnRef idx="1">
+            <a:schemeClr val="accent1"/>
+          </a:lnRef>
+          <a:fillRef idx="3">
+            <a:schemeClr val="accent1"/>
+          </a:fillRef>
+          <a:effectRef idx="2">
+            <a:schemeClr val="accent1"/>
+          </a:effectRef>
+          <a:fontRef idx="minor">
+            <a:schemeClr val="lt1"/>
+          </a:fontRef>
+        </p:style>
+        <p:txBody>
+          <a:bodyPr rtlCol="0" anchor="ctr"/>
+          <a:lstStyle/>
+          <a:p>
+            <a:pPr algn="ctr"/>
+          </a:p>
+        </p:txBody>
+      </p:sp>
+      <p:sp>
+        <p:nvSpPr>
+          <p:cNvPr id="8" name="TextBox 7"/>
+          <p:cNvSpPr txBox="1"/>
+          <p:nvPr/>
+        </p:nvSpPr>
+        <p:spPr>
+          <a:xfrm>
+            <a:off x="822960" y="1965960"/>
+            <a:ext cx="4983480" cy="4206240"/>
+          </a:xfrm>
+          <a:prstGeom prst="rect">
+            <a:avLst/>
+          </a:prstGeom>
+          <a:noFill/>
+        </p:spPr>
+        <p:txBody>
+          <a:bodyPr wrap="square">
+            <a:spAutoFit/>
+          </a:bodyPr>
+          <a:lstStyle/>
+          <a:p>
+            <a:pPr>
+              <a:spcAft>
+                <a:spcPts val="1100"/>
+              </a:spcAft>
+            </a:pPr>
+            <a:r>
+              <a:rPr sz="1600" b="1" i="0">
+                <a:solidFill>
+                  <a:srgbClr val="E8801A"/>
+                </a:solidFill>
+                <a:latin typeface="Montserrat"/>
+              </a:rPr>
+              <a:t>▸  </a:t>
+            </a:r>
+            <a:r>
+              <a:rPr sz="1600" b="0" i="0">
+                <a:solidFill>
+                  <a:srgbClr val="1B2330"/>
+                </a:solidFill>
+                <a:latin typeface="Montserrat"/>
+              </a:rPr>
+              <a:t>Placa visible → anexo 2</a:t>
+            </a:r>
+          </a:p>
+          <a:p>
+            <a:pPr>
+              <a:spcAft>
+                <a:spcPts val="1100"/>
+              </a:spcAft>
+            </a:pPr>
+            <a:r>
+              <a:rPr sz="1600" b="1" i="0">
+                <a:solidFill>
+                  <a:srgbClr val="E8801A"/>
+                </a:solidFill>
+                <a:latin typeface="Montserrat"/>
+              </a:rPr>
+              <a:t>▸  </a:t>
+            </a:r>
+            <a:r>
+              <a:rPr sz="1600" b="0" i="0">
+                <a:solidFill>
+                  <a:srgbClr val="1B2330"/>
+                </a:solidFill>
+                <a:latin typeface="Montserrat"/>
+              </a:rPr>
+              <a:t>Instrucciones → normas o anexo 3</a:t>
+            </a:r>
+          </a:p>
+        </p:txBody>
+      </p:sp>
+      <p:sp>
+        <p:nvSpPr>
+          <p:cNvPr id="9" name="imgph" descr="IMGQ:gas meter cabinet nameplate"/>
+          <p:cNvSpPr/>
+          <p:nvPr/>
+        </p:nvSpPr>
+        <p:spPr>
+          <a:xfrm>
+            <a:off x="5806440" y="1051560"/>
+            <a:ext cx="5298947" cy="4629150"/>
+          </a:xfrm>
+          <a:prstGeom prst="roundRect">
+            <a:avLst/>
+          </a:prstGeom>
+          <a:solidFill>
+            <a:srgbClr val="F3F6FB"/>
+          </a:solidFill>
+          <a:ln w="12700">
+            <a:solidFill>
+              <a:srgbClr val="C7D2E6"/>
+            </a:solidFill>
+          </a:ln>
+          <a:effectLst/>
+        </p:spPr>
+        <p:style>
+          <a:lnRef idx="1">
+            <a:schemeClr val="accent1"/>
+          </a:lnRef>
+          <a:fillRef idx="3">
+            <a:schemeClr val="accent1"/>
+          </a:fillRef>
+          <a:effectRef idx="2">
+            <a:schemeClr val="accent1"/>
+          </a:effectRef>
+          <a:fontRef idx="minor">
+            <a:schemeClr val="lt1"/>
+          </a:fontRef>
+        </p:style>
+        <p:txBody>
+          <a:bodyPr rtlCol="0" anchor="ctr"/>
+          <a:lstStyle/>
+          <a:p>
+            <a:pPr algn="ctr"/>
+          </a:p>
+        </p:txBody>
+      </p:sp>
+      <p:sp>
+        <p:nvSpPr>
+          <p:cNvPr id="10" name="TextBox 9"/>
+          <p:cNvSpPr txBox="1"/>
+          <p:nvPr/>
+        </p:nvSpPr>
+        <p:spPr>
+          <a:xfrm>
+            <a:off x="6080760" y="2726055"/>
+            <a:ext cx="4750307" cy="1280160"/>
+          </a:xfrm>
+          <a:prstGeom prst="rect">
+            <a:avLst/>
+          </a:prstGeom>
+          <a:noFill/>
+        </p:spPr>
+        <p:txBody>
+          <a:bodyPr wrap="square">
+            <a:spAutoFit/>
+          </a:bodyPr>
+          <a:lstStyle/>
+          <a:p>
+            <a:pPr algn="ctr"/>
+            <a:r>
+              <a:rPr sz="1400" b="1" i="0">
+                <a:solidFill>
+                  <a:srgbClr val="64748B"/>
+                </a:solidFill>
+                <a:latin typeface="Montserrat"/>
+              </a:rPr>
+              <a:t>IMAGEN REALISTA</a:t>
+            </a:r>
+          </a:p>
+          <a:p>
+            <a:pPr algn="ctr"/>
+            <a:r>
+              <a:rPr sz="1100" b="0" i="1">
+                <a:solidFill>
+                  <a:srgbClr val="64748B"/>
+                </a:solidFill>
+                <a:latin typeface="Montserrat"/>
+              </a:rPr>
+              <a:t>gas meter cabinet nameplate</a:t>
+            </a:r>
+          </a:p>
+        </p:txBody>
+      </p:sp>
+    </p:spTree>
+  </p:cSld>
+  <p:clrMapOvr>
+    <a:masterClrMapping/>
+  </p:clrMapOvr>
+</p:sld>
+</file>
+
+<file path=ppt/slides/slide15.xml><?xml version="1.0" encoding="utf-8"?>
+<p:sld xmlns:a="http://schemas.openxmlformats.org/drawingml/2006/main" xmlns:p="http://schemas.openxmlformats.org/presentationml/2006/main" xmlns:r="http://schemas.openxmlformats.org/officeDocument/2006/relationships">
+  <p:cSld>
+    <p:spTree>
+      <p:nvGrpSpPr>
+        <p:cNvPr id="1" name=""/>
+        <p:cNvGrpSpPr/>
+        <p:nvPr/>
+      </p:nvGrpSpPr>
+      <p:grpSpPr/>
+      <p:sp>
+        <p:nvSpPr>
+          <p:cNvPr id="2" name="Rectangle 1"/>
+          <p:cNvSpPr/>
+          <p:nvPr/>
+        </p:nvSpPr>
+        <p:spPr>
+          <a:xfrm>
+            <a:off x="0" y="0"/>
+            <a:ext cx="12191695" cy="6858000"/>
+          </a:xfrm>
+          <a:prstGeom prst="rect">
+            <a:avLst/>
+          </a:prstGeom>
+          <a:solidFill>
             <a:srgbClr val="1E2761"/>
           </a:solidFill>
           <a:ln>
@@ -6290,7 +7036,7 @@
             <a:r>
               <a:rPr sz="1400" b="1" i="0">
                 <a:solidFill>
-                  <a:srgbClr val="CADCFC"/>
+                  <a:srgbClr val="F4A24C"/>
                 </a:solidFill>
                 <a:latin typeface="Montserrat"/>
               </a:rPr>
@@ -6301,13 +7047,57 @@
       </p:sp>
       <p:sp>
         <p:nvSpPr>
-          <p:cNvPr id="4" name="TextBox 3"/>
+          <p:cNvPr id="4" name="Rounded Rectangle 3"/>
+          <p:cNvSpPr/>
+          <p:nvPr/>
+        </p:nvSpPr>
+        <p:spPr>
+          <a:xfrm>
+            <a:off x="868680" y="1051560"/>
+            <a:ext cx="1463040" cy="82296"/>
+          </a:xfrm>
+          <a:prstGeom prst="roundRect">
+            <a:avLst/>
+          </a:prstGeom>
+          <a:solidFill>
+            <a:srgbClr val="E8801A"/>
+          </a:solidFill>
+          <a:ln>
+            <a:noFill/>
+          </a:ln>
+          <a:effectLst/>
+        </p:spPr>
+        <p:style>
+          <a:lnRef idx="1">
+            <a:schemeClr val="accent1"/>
+          </a:lnRef>
+          <a:fillRef idx="3">
+            <a:schemeClr val="accent1"/>
+          </a:fillRef>
+          <a:effectRef idx="2">
+            <a:schemeClr val="accent1"/>
+          </a:effectRef>
+          <a:fontRef idx="minor">
+            <a:schemeClr val="lt1"/>
+          </a:fontRef>
+        </p:style>
+        <p:txBody>
+          <a:bodyPr rtlCol="0" anchor="ctr"/>
+          <a:lstStyle/>
+          <a:p>
+            <a:pPr algn="ctr"/>
+          </a:p>
+        </p:txBody>
+      </p:sp>
+      <p:sp>
+        <p:nvSpPr>
+          <p:cNvPr id="5" name="TextBox 4"/>
           <p:cNvSpPr txBox="1"/>
           <p:nvPr/>
         </p:nvSpPr>
         <p:spPr>
           <a:xfrm>
-            <a:off x="822960" y="1143000"/>
+            <a:off x="822960" y="1234440"/>
             <a:ext cx="10515600" cy="1097280"/>
           </a:xfrm>
           <a:prstGeom prst="rect">
@@ -6335,14 +7125,14 @@
       </p:sp>
       <p:sp>
         <p:nvSpPr>
-          <p:cNvPr id="5" name="TextBox 4"/>
+          <p:cNvPr id="6" name="TextBox 5"/>
           <p:cNvSpPr txBox="1"/>
           <p:nvPr/>
         </p:nvSpPr>
         <p:spPr>
           <a:xfrm>
-            <a:off x="822960" y="2514600"/>
-            <a:ext cx="10515600" cy="2834640"/>
+            <a:off x="822960" y="2606040"/>
+            <a:ext cx="10515600" cy="2743200"/>
           </a:xfrm>
           <a:prstGeom prst="rect">
             <a:avLst/>
@@ -6363,7 +7153,7 @@
             <a:r>
               <a:rPr sz="2000" b="1" i="0">
                 <a:solidFill>
-                  <a:srgbClr val="CADCFC"/>
+                  <a:srgbClr val="F4A24C"/>
                 </a:solidFill>
                 <a:latin typeface="Montserrat"/>
               </a:rPr>
@@ -6388,7 +7178,7 @@
             <a:r>
               <a:rPr sz="2000" b="1" i="0">
                 <a:solidFill>
-                  <a:srgbClr val="CADCFC"/>
+                  <a:srgbClr val="F4A24C"/>
                 </a:solidFill>
                 <a:latin typeface="Montserrat"/>
               </a:rPr>
@@ -6413,7 +7203,7 @@
             <a:r>
               <a:rPr sz="2000" b="1" i="0">
                 <a:solidFill>
-                  <a:srgbClr val="CADCFC"/>
+                  <a:srgbClr val="F4A24C"/>
                 </a:solidFill>
                 <a:latin typeface="Montserrat"/>
               </a:rPr>
@@ -6438,7 +7228,7 @@
             <a:r>
               <a:rPr sz="2000" b="1" i="0">
                 <a:solidFill>
-                  <a:srgbClr val="CADCFC"/>
+                  <a:srgbClr val="F4A24C"/>
                 </a:solidFill>
                 <a:latin typeface="Montserrat"/>
               </a:rPr>
@@ -6458,20 +7248,20 @@
       </p:sp>
       <p:sp>
         <p:nvSpPr>
-          <p:cNvPr id="6" name="Rounded Rectangle 5"/>
+          <p:cNvPr id="7" name="Rounded Rectangle 6"/>
           <p:cNvSpPr/>
           <p:nvPr/>
         </p:nvSpPr>
         <p:spPr>
           <a:xfrm>
             <a:off x="822960" y="5532120"/>
-            <a:ext cx="10515600" cy="777240"/>
+            <a:ext cx="10515600" cy="822960"/>
           </a:xfrm>
           <a:prstGeom prst="roundRect">
             <a:avLst/>
           </a:prstGeom>
           <a:solidFill>
-            <a:srgbClr val="2E3A80"/>
+            <a:srgbClr val="E8801A"/>
           </a:solidFill>
           <a:ln>
             <a:noFill/>
@@ -6502,13 +7292,13 @@
       </p:sp>
       <p:sp>
         <p:nvSpPr>
-          <p:cNvPr id="7" name="TextBox 6"/>
+          <p:cNvPr id="8" name="TextBox 7"/>
           <p:cNvSpPr txBox="1"/>
           <p:nvPr/>
         </p:nvSpPr>
         <p:spPr>
           <a:xfrm>
-            <a:off x="1051560" y="5605272"/>
+            <a:off x="1051560" y="5623560"/>
             <a:ext cx="10058400" cy="640080"/>
           </a:xfrm>
           <a:prstGeom prst="rect">
@@ -6525,7 +7315,7 @@
             <a:r>
               <a:rPr sz="1500" b="1" i="1">
                 <a:solidFill>
-                  <a:srgbClr val="CADCFC"/>
+                  <a:srgbClr val="1E2761"/>
                 </a:solidFill>
                 <a:latin typeface="Montserrat"/>
               </a:rPr>
@@ -6626,7 +7416,7 @@
                 </a:solidFill>
                 <a:latin typeface="Montserrat"/>
               </a:rPr>
-              <a:t>002 / 014</a:t>
+              <a:t>002 / 015</a:t>
             </a:r>
           </a:p>
         </p:txBody>
@@ -6690,7 +7480,7 @@
             <a:r>
               <a:rPr sz="2700" b="1" i="0">
                 <a:solidFill>
-                  <a:srgbClr val="1E2761"/>
+                  <a:srgbClr val="E8801A"/>
                 </a:solidFill>
                 <a:latin typeface="Montserrat"/>
               </a:rPr>
@@ -6702,6 +7492,50 @@
       <p:sp>
         <p:nvSpPr>
           <p:cNvPr id="6" name="Rounded Rectangle 5"/>
+          <p:cNvSpPr/>
+          <p:nvPr/>
+        </p:nvSpPr>
+        <p:spPr>
+          <a:xfrm>
+            <a:off x="868680" y="1234440"/>
+            <a:ext cx="1463040" cy="73152"/>
+          </a:xfrm>
+          <a:prstGeom prst="roundRect">
+            <a:avLst/>
+          </a:prstGeom>
+          <a:solidFill>
+            <a:srgbClr val="1E2761"/>
+          </a:solidFill>
+          <a:ln>
+            <a:noFill/>
+          </a:ln>
+          <a:effectLst/>
+        </p:spPr>
+        <p:style>
+          <a:lnRef idx="1">
+            <a:schemeClr val="accent1"/>
+          </a:lnRef>
+          <a:fillRef idx="3">
+            <a:schemeClr val="accent1"/>
+          </a:fillRef>
+          <a:effectRef idx="2">
+            <a:schemeClr val="accent1"/>
+          </a:effectRef>
+          <a:fontRef idx="minor">
+            <a:schemeClr val="lt1"/>
+          </a:fontRef>
+        </p:style>
+        <p:txBody>
+          <a:bodyPr rtlCol="0" anchor="ctr"/>
+          <a:lstStyle/>
+          <a:p>
+            <a:pPr algn="ctr"/>
+          </a:p>
+        </p:txBody>
+      </p:sp>
+      <p:sp>
+        <p:nvSpPr>
+          <p:cNvPr id="7" name="Rounded Rectangle 6"/>
           <p:cNvSpPr/>
           <p:nvPr/>
         </p:nvSpPr>
@@ -6747,7 +7581,7 @@
       </p:sp>
       <p:sp>
         <p:nvSpPr>
-          <p:cNvPr id="7" name="TextBox 6"/>
+          <p:cNvPr id="8" name="TextBox 7"/>
           <p:cNvSpPr txBox="1"/>
           <p:nvPr/>
         </p:nvSpPr>
@@ -6782,7 +7616,7 @@
       </p:sp>
       <p:sp>
         <p:nvSpPr>
-          <p:cNvPr id="8" name="TextBox 7"/>
+          <p:cNvPr id="9" name="TextBox 8"/>
           <p:cNvSpPr txBox="1"/>
           <p:nvPr/>
         </p:nvSpPr>
@@ -6817,7 +7651,7 @@
       </p:sp>
       <p:sp>
         <p:nvSpPr>
-          <p:cNvPr id="9" name="Rounded Rectangle 8"/>
+          <p:cNvPr id="10" name="Rounded Rectangle 9"/>
           <p:cNvSpPr/>
           <p:nvPr/>
         </p:nvSpPr>
@@ -6863,7 +7697,7 @@
       </p:sp>
       <p:sp>
         <p:nvSpPr>
-          <p:cNvPr id="10" name="TextBox 9"/>
+          <p:cNvPr id="11" name="TextBox 10"/>
           <p:cNvSpPr txBox="1"/>
           <p:nvPr/>
         </p:nvSpPr>
@@ -6898,7 +7732,7 @@
       </p:sp>
       <p:sp>
         <p:nvSpPr>
-          <p:cNvPr id="11" name="TextBox 10"/>
+          <p:cNvPr id="12" name="TextBox 11"/>
           <p:cNvSpPr txBox="1"/>
           <p:nvPr/>
         </p:nvSpPr>
@@ -6933,7 +7767,7 @@
       </p:sp>
       <p:sp>
         <p:nvSpPr>
-          <p:cNvPr id="12" name="Rounded Rectangle 11"/>
+          <p:cNvPr id="13" name="Rounded Rectangle 12"/>
           <p:cNvSpPr/>
           <p:nvPr/>
         </p:nvSpPr>
@@ -6979,7 +7813,7 @@
       </p:sp>
       <p:sp>
         <p:nvSpPr>
-          <p:cNvPr id="13" name="TextBox 12"/>
+          <p:cNvPr id="14" name="TextBox 13"/>
           <p:cNvSpPr txBox="1"/>
           <p:nvPr/>
         </p:nvSpPr>
@@ -7014,7 +7848,7 @@
       </p:sp>
       <p:sp>
         <p:nvSpPr>
-          <p:cNvPr id="14" name="TextBox 13"/>
+          <p:cNvPr id="15" name="TextBox 14"/>
           <p:cNvSpPr txBox="1"/>
           <p:nvPr/>
         </p:nvSpPr>
@@ -7139,7 +7973,7 @@
                 </a:solidFill>
                 <a:latin typeface="Montserrat"/>
               </a:rPr>
-              <a:t>003 / 014</a:t>
+              <a:t>003 / 015</a:t>
             </a:r>
           </a:p>
         </p:txBody>
@@ -7186,7 +8020,7 @@
         </p:nvSpPr>
         <p:spPr>
           <a:xfrm>
-            <a:off x="822960" y="457200"/>
+            <a:off x="822960" y="502920"/>
             <a:ext cx="8229600" cy="365760"/>
           </a:xfrm>
           <a:prstGeom prst="rect">
@@ -7201,13 +8035,13 @@
           <a:lstStyle/>
           <a:p>
             <a:r>
-              <a:rPr sz="1200" b="1" i="0">
-                <a:solidFill>
-                  <a:srgbClr val="64748B"/>
-                </a:solidFill>
-                <a:latin typeface="Montserrat"/>
-              </a:rPr>
-              <a:t>APARTADO 1 · OBJETO</a:t>
+              <a:rPr sz="1300" b="1" i="0">
+                <a:solidFill>
+                  <a:srgbClr val="E8801A"/>
+                </a:solidFill>
+                <a:latin typeface="Montserrat"/>
+              </a:rPr>
+              <a:t>PARTES DE ESTE VÍDEO</a:t>
             </a:r>
           </a:p>
         </p:txBody>
@@ -7220,7 +8054,7 @@
         </p:nvSpPr>
         <p:spPr>
           <a:xfrm>
-            <a:off x="822960" y="868680"/>
+            <a:off x="822960" y="914400"/>
             <a:ext cx="10515600" cy="914400"/>
           </a:xfrm>
           <a:prstGeom prst="rect">
@@ -7241,155 +8075,30 @@
                 </a:solidFill>
                 <a:latin typeface="Montserrat"/>
               </a:rPr>
-              <a:t>Qué regula la ITC-ICG 08</a:t>
-            </a:r>
-          </a:p>
-        </p:txBody>
-      </p:sp>
-      <p:sp>
-        <p:nvSpPr>
-          <p:cNvPr id="7" name="TextBox 6"/>
-          <p:cNvSpPr txBox="1"/>
-          <p:nvPr/>
-        </p:nvSpPr>
-        <p:spPr>
-          <a:xfrm>
-            <a:off x="822960" y="1920240"/>
-            <a:ext cx="4983480" cy="4206240"/>
-          </a:xfrm>
-          <a:prstGeom prst="rect">
-            <a:avLst/>
-          </a:prstGeom>
-          <a:noFill/>
-        </p:spPr>
-        <p:txBody>
-          <a:bodyPr wrap="square">
-            <a:spAutoFit/>
-          </a:bodyPr>
-          <a:lstStyle/>
-          <a:p>
-            <a:pPr>
-              <a:spcAft>
-                <a:spcPts val="1000"/>
-              </a:spcAft>
-            </a:pPr>
-            <a:r>
-              <a:rPr sz="1600" b="1" i="0">
-                <a:solidFill>
-                  <a:srgbClr val="2E3A80"/>
-                </a:solidFill>
-                <a:latin typeface="Montserrat"/>
-              </a:rPr>
-              <a:t>•  </a:t>
-            </a:r>
-            <a:r>
-              <a:rPr sz="1600" b="0" i="0">
-                <a:solidFill>
-                  <a:srgbClr val="1B2330"/>
-                </a:solidFill>
-                <a:latin typeface="Montserrat"/>
-              </a:rPr>
-              <a:t>La norma del aparato, no del tubo</a:t>
-            </a:r>
-          </a:p>
-          <a:p>
-            <a:pPr>
-              <a:spcAft>
-                <a:spcPts val="1000"/>
-              </a:spcAft>
-            </a:pPr>
-            <a:r>
-              <a:rPr sz="1600" b="1" i="0">
-                <a:solidFill>
-                  <a:srgbClr val="2E3A80"/>
-                </a:solidFill>
-                <a:latin typeface="Montserrat"/>
-              </a:rPr>
-              <a:t>•  </a:t>
-            </a:r>
-            <a:r>
-              <a:rPr sz="1600" b="0" i="0">
-                <a:solidFill>
-                  <a:srgbClr val="1B2330"/>
-                </a:solidFill>
-                <a:latin typeface="Montserrat"/>
-              </a:rPr>
-              <a:t>Criterios técnicos y de seguridad</a:t>
-            </a:r>
-          </a:p>
-          <a:p>
-            <a:pPr>
-              <a:spcAft>
-                <a:spcPts val="1000"/>
-              </a:spcAft>
-            </a:pPr>
-            <a:r>
-              <a:rPr sz="1600" b="1" i="0">
-                <a:solidFill>
-                  <a:srgbClr val="2E3A80"/>
-                </a:solidFill>
-                <a:latin typeface="Montserrat"/>
-              </a:rPr>
-              <a:t>•  </a:t>
-            </a:r>
-            <a:r>
-              <a:rPr sz="1600" b="0" i="0">
-                <a:solidFill>
-                  <a:srgbClr val="1B2330"/>
-                </a:solidFill>
-                <a:latin typeface="Montserrat"/>
-              </a:rPr>
-              <a:t>Medios de certificación</a:t>
-            </a:r>
-          </a:p>
-          <a:p>
-            <a:pPr>
-              <a:spcAft>
-                <a:spcPts val="1000"/>
-              </a:spcAft>
-            </a:pPr>
-            <a:r>
-              <a:rPr sz="1600" b="1" i="0">
-                <a:solidFill>
-                  <a:srgbClr val="2E3A80"/>
-                </a:solidFill>
-                <a:latin typeface="Montserrat"/>
-              </a:rPr>
-              <a:t>•  </a:t>
-            </a:r>
-            <a:r>
-              <a:rPr sz="1600" b="0" i="0">
-                <a:solidFill>
-                  <a:srgbClr val="1B2330"/>
-                </a:solidFill>
-                <a:latin typeface="Montserrat"/>
-              </a:rPr>
-              <a:t>Excluye aparatos con directiva CE propia</a:t>
-            </a:r>
-          </a:p>
-        </p:txBody>
-      </p:sp>
-      <p:sp>
-        <p:nvSpPr>
-          <p:cNvPr id="8" name="imgph" descr="IMGQ:gas boiler installation wall"/>
+              <a:t>En este vídeo</a:t>
+            </a:r>
+          </a:p>
+        </p:txBody>
+      </p:sp>
+      <p:sp>
+        <p:nvSpPr>
+          <p:cNvPr id="7" name="Rounded Rectangle 6"/>
           <p:cNvSpPr/>
           <p:nvPr/>
         </p:nvSpPr>
         <p:spPr>
           <a:xfrm>
-            <a:off x="5806440" y="1051560"/>
-            <a:ext cx="5298947" cy="4629150"/>
+            <a:off x="868680" y="1673352"/>
+            <a:ext cx="2011680" cy="73152"/>
           </a:xfrm>
           <a:prstGeom prst="roundRect">
             <a:avLst/>
           </a:prstGeom>
           <a:solidFill>
-            <a:srgbClr val="F3F6FB"/>
+            <a:srgbClr val="E8801A"/>
           </a:solidFill>
-          <a:ln w="12700">
-            <a:solidFill>
-              <a:srgbClr val="C7D2E6"/>
-            </a:solidFill>
+          <a:ln>
+            <a:noFill/>
           </a:ln>
           <a:effectLst/>
         </p:spPr>
@@ -7417,14 +8126,14 @@
       </p:sp>
       <p:sp>
         <p:nvSpPr>
-          <p:cNvPr id="9" name="TextBox 8"/>
+          <p:cNvPr id="8" name="TextBox 7"/>
           <p:cNvSpPr txBox="1"/>
           <p:nvPr/>
         </p:nvSpPr>
         <p:spPr>
           <a:xfrm>
-            <a:off x="6080760" y="2726055"/>
-            <a:ext cx="4750307" cy="1280160"/>
+            <a:off x="822960" y="2103120"/>
+            <a:ext cx="10515600" cy="4023360"/>
           </a:xfrm>
           <a:prstGeom prst="rect">
             <a:avLst/>
@@ -7437,27 +8146,228 @@
           </a:bodyPr>
           <a:lstStyle/>
           <a:p>
-            <a:pPr algn="ctr"/>
-            <a:r>
-              <a:rPr sz="1400" b="1" i="0">
-                <a:solidFill>
-                  <a:srgbClr val="64748B"/>
-                </a:solidFill>
-                <a:latin typeface="Montserrat"/>
-              </a:rPr>
-              <a:t>IMAGEN REALISTA</a:t>
-            </a:r>
-          </a:p>
-          <a:p>
-            <a:pPr algn="ctr"/>
-            <a:r>
-              <a:rPr sz="1100" b="0" i="1">
-                <a:solidFill>
-                  <a:srgbClr val="64748B"/>
-                </a:solidFill>
-                <a:latin typeface="Montserrat"/>
-              </a:rPr>
-              <a:t>gas boiler installation wall</a:t>
+            <a:pPr>
+              <a:spcAft>
+                <a:spcPts val="900"/>
+              </a:spcAft>
+            </a:pPr>
+            <a:r>
+              <a:rPr sz="1800" b="1" i="0">
+                <a:solidFill>
+                  <a:srgbClr val="E8801A"/>
+                </a:solidFill>
+                <a:latin typeface="Montserrat"/>
+              </a:rPr>
+              <a:t>01   </a:t>
+            </a:r>
+            <a:r>
+              <a:rPr sz="1700" b="0" i="0">
+                <a:solidFill>
+                  <a:srgbClr val="1B2330"/>
+                </a:solidFill>
+                <a:latin typeface="Montserrat"/>
+              </a:rPr>
+              <a:t>Apartado 1</a:t>
+            </a:r>
+          </a:p>
+          <a:p>
+            <a:pPr>
+              <a:spcAft>
+                <a:spcPts val="900"/>
+              </a:spcAft>
+            </a:pPr>
+            <a:r>
+              <a:rPr sz="1800" b="1" i="0">
+                <a:solidFill>
+                  <a:srgbClr val="E8801A"/>
+                </a:solidFill>
+                <a:latin typeface="Montserrat"/>
+              </a:rPr>
+              <a:t>02   </a:t>
+            </a:r>
+            <a:r>
+              <a:rPr sz="1700" b="0" i="0">
+                <a:solidFill>
+                  <a:srgbClr val="1B2330"/>
+                </a:solidFill>
+                <a:latin typeface="Montserrat"/>
+              </a:rPr>
+              <a:t>Apartado 2</a:t>
+            </a:r>
+          </a:p>
+          <a:p>
+            <a:pPr>
+              <a:spcAft>
+                <a:spcPts val="900"/>
+              </a:spcAft>
+            </a:pPr>
+            <a:r>
+              <a:rPr sz="1800" b="1" i="0">
+                <a:solidFill>
+                  <a:srgbClr val="E8801A"/>
+                </a:solidFill>
+                <a:latin typeface="Montserrat"/>
+              </a:rPr>
+              <a:t>03   </a:t>
+            </a:r>
+            <a:r>
+              <a:rPr sz="1700" b="0" i="0">
+                <a:solidFill>
+                  <a:srgbClr val="1B2330"/>
+                </a:solidFill>
+                <a:latin typeface="Montserrat"/>
+              </a:rPr>
+              <a:t>Apartado 2.2</a:t>
+            </a:r>
+          </a:p>
+          <a:p>
+            <a:pPr>
+              <a:spcAft>
+                <a:spcPts val="900"/>
+              </a:spcAft>
+            </a:pPr>
+            <a:r>
+              <a:rPr sz="1800" b="1" i="0">
+                <a:solidFill>
+                  <a:srgbClr val="E8801A"/>
+                </a:solidFill>
+                <a:latin typeface="Montserrat"/>
+              </a:rPr>
+              <a:t>04   </a:t>
+            </a:r>
+            <a:r>
+              <a:rPr sz="1700" b="0" i="0">
+                <a:solidFill>
+                  <a:srgbClr val="1B2330"/>
+                </a:solidFill>
+                <a:latin typeface="Montserrat"/>
+              </a:rPr>
+              <a:t>Apartado 2.2.1</a:t>
+            </a:r>
+          </a:p>
+          <a:p>
+            <a:pPr>
+              <a:spcAft>
+                <a:spcPts val="900"/>
+              </a:spcAft>
+            </a:pPr>
+            <a:r>
+              <a:rPr sz="1800" b="1" i="0">
+                <a:solidFill>
+                  <a:srgbClr val="E8801A"/>
+                </a:solidFill>
+                <a:latin typeface="Montserrat"/>
+              </a:rPr>
+              <a:t>05   </a:t>
+            </a:r>
+            <a:r>
+              <a:rPr sz="1700" b="0" i="0">
+                <a:solidFill>
+                  <a:srgbClr val="1B2330"/>
+                </a:solidFill>
+                <a:latin typeface="Montserrat"/>
+              </a:rPr>
+              <a:t>Apartado 2.2.2</a:t>
+            </a:r>
+          </a:p>
+          <a:p>
+            <a:pPr>
+              <a:spcAft>
+                <a:spcPts val="900"/>
+              </a:spcAft>
+            </a:pPr>
+            <a:r>
+              <a:rPr sz="1800" b="1" i="0">
+                <a:solidFill>
+                  <a:srgbClr val="E8801A"/>
+                </a:solidFill>
+                <a:latin typeface="Montserrat"/>
+              </a:rPr>
+              <a:t>06   </a:t>
+            </a:r>
+            <a:r>
+              <a:rPr sz="1700" b="0" i="0">
+                <a:solidFill>
+                  <a:srgbClr val="1B2330"/>
+                </a:solidFill>
+                <a:latin typeface="Montserrat"/>
+              </a:rPr>
+              <a:t>Apartados 2.2.3-2.2.4</a:t>
+            </a:r>
+          </a:p>
+          <a:p>
+            <a:pPr>
+              <a:spcAft>
+                <a:spcPts val="900"/>
+              </a:spcAft>
+            </a:pPr>
+            <a:r>
+              <a:rPr sz="1800" b="1" i="0">
+                <a:solidFill>
+                  <a:srgbClr val="E8801A"/>
+                </a:solidFill>
+                <a:latin typeface="Montserrat"/>
+              </a:rPr>
+              <a:t>07   </a:t>
+            </a:r>
+            <a:r>
+              <a:rPr sz="1700" b="0" i="0">
+                <a:solidFill>
+                  <a:srgbClr val="1B2330"/>
+                </a:solidFill>
+                <a:latin typeface="Montserrat"/>
+              </a:rPr>
+              <a:t>Apartado 2.3</a:t>
+            </a:r>
+          </a:p>
+          <a:p>
+            <a:pPr>
+              <a:spcAft>
+                <a:spcPts val="900"/>
+              </a:spcAft>
+            </a:pPr>
+            <a:r>
+              <a:rPr sz="1800" b="1" i="0">
+                <a:solidFill>
+                  <a:srgbClr val="E8801A"/>
+                </a:solidFill>
+                <a:latin typeface="Montserrat"/>
+              </a:rPr>
+              <a:t>08   </a:t>
+            </a:r>
+            <a:r>
+              <a:rPr sz="1700" b="0" i="0">
+                <a:solidFill>
+                  <a:srgbClr val="1B2330"/>
+                </a:solidFill>
+                <a:latin typeface="Montserrat"/>
+              </a:rPr>
+              <a:t>Apartado 3</a:t>
+            </a:r>
+          </a:p>
+          <a:p>
+            <a:pPr>
+              <a:spcAft>
+                <a:spcPts val="900"/>
+              </a:spcAft>
+            </a:pPr>
+            <a:r>
+              <a:rPr sz="1800" b="1" i="0">
+                <a:solidFill>
+                  <a:srgbClr val="E8801A"/>
+                </a:solidFill>
+                <a:latin typeface="Montserrat"/>
+              </a:rPr>
+              <a:t>09   </a:t>
+            </a:r>
+            <a:r>
+              <a:rPr sz="1700" b="0" i="0">
+                <a:solidFill>
+                  <a:srgbClr val="1B2330"/>
+                </a:solidFill>
+                <a:latin typeface="Montserrat"/>
+              </a:rPr>
+              <a:t>Apartado 4</a:t>
             </a:r>
           </a:p>
         </p:txBody>
@@ -7554,7 +8464,7 @@
                 </a:solidFill>
                 <a:latin typeface="Montserrat"/>
               </a:rPr>
-              <a:t>004 / 014</a:t>
+              <a:t>004 / 015</a:t>
             </a:r>
           </a:p>
         </p:txBody>
@@ -7602,7 +8512,7 @@
         <p:spPr>
           <a:xfrm>
             <a:off x="822960" y="457200"/>
-            <a:ext cx="8229600" cy="365760"/>
+            <a:ext cx="10058400" cy="365760"/>
           </a:xfrm>
           <a:prstGeom prst="rect">
             <a:avLst/>
@@ -7616,13 +8526,13 @@
           <a:lstStyle/>
           <a:p>
             <a:r>
-              <a:rPr sz="1200" b="1" i="0">
-                <a:solidFill>
-                  <a:srgbClr val="64748B"/>
-                </a:solidFill>
-                <a:latin typeface="Montserrat"/>
-              </a:rPr>
-              <a:t>APARTADO 1 · ALCANCE</a:t>
+              <a:rPr sz="1300" b="1" i="0">
+                <a:solidFill>
+                  <a:srgbClr val="E8801A"/>
+                </a:solidFill>
+                <a:latin typeface="Montserrat"/>
+              </a:rPr>
+              <a:t>APARTADO 1 · OBJETO</a:t>
             </a:r>
           </a:p>
         </p:txBody>
@@ -7650,26 +8560,70 @@
           <a:lstStyle/>
           <a:p>
             <a:r>
-              <a:rPr sz="2700" b="1" i="0">
+              <a:rPr sz="2800" b="1" i="0">
                 <a:solidFill>
                   <a:srgbClr val="1E2761"/>
                 </a:solidFill>
                 <a:latin typeface="Montserrat"/>
               </a:rPr>
-              <a:t>Dos puertas y la puesta en marcha</a:t>
-            </a:r>
-          </a:p>
-        </p:txBody>
-      </p:sp>
-      <p:sp>
-        <p:nvSpPr>
-          <p:cNvPr id="7" name="TextBox 6"/>
+              <a:t>Qué regula la ITC-ICG 08</a:t>
+            </a:r>
+          </a:p>
+        </p:txBody>
+      </p:sp>
+      <p:sp>
+        <p:nvSpPr>
+          <p:cNvPr id="7" name="Rounded Rectangle 6"/>
+          <p:cNvSpPr/>
+          <p:nvPr/>
+        </p:nvSpPr>
+        <p:spPr>
+          <a:xfrm>
+            <a:off x="868680" y="1627632"/>
+            <a:ext cx="2011680" cy="73152"/>
+          </a:xfrm>
+          <a:prstGeom prst="roundRect">
+            <a:avLst/>
+          </a:prstGeom>
+          <a:solidFill>
+            <a:srgbClr val="E8801A"/>
+          </a:solidFill>
+          <a:ln>
+            <a:noFill/>
+          </a:ln>
+          <a:effectLst/>
+        </p:spPr>
+        <p:style>
+          <a:lnRef idx="1">
+            <a:schemeClr val="accent1"/>
+          </a:lnRef>
+          <a:fillRef idx="3">
+            <a:schemeClr val="accent1"/>
+          </a:fillRef>
+          <a:effectRef idx="2">
+            <a:schemeClr val="accent1"/>
+          </a:effectRef>
+          <a:fontRef idx="minor">
+            <a:schemeClr val="lt1"/>
+          </a:fontRef>
+        </p:style>
+        <p:txBody>
+          <a:bodyPr rtlCol="0" anchor="ctr"/>
+          <a:lstStyle/>
+          <a:p>
+            <a:pPr algn="ctr"/>
+          </a:p>
+        </p:txBody>
+      </p:sp>
+      <p:sp>
+        <p:nvSpPr>
+          <p:cNvPr id="8" name="TextBox 7"/>
           <p:cNvSpPr txBox="1"/>
           <p:nvPr/>
         </p:nvSpPr>
         <p:spPr>
           <a:xfrm>
-            <a:off x="822960" y="1920240"/>
+            <a:off x="822960" y="1965960"/>
             <a:ext cx="4983480" cy="4206240"/>
           </a:xfrm>
           <a:prstGeom prst="rect">
@@ -7685,17 +8639,17 @@
           <a:p>
             <a:pPr>
               <a:spcAft>
-                <a:spcPts val="1000"/>
+                <a:spcPts val="1100"/>
               </a:spcAft>
             </a:pPr>
             <a:r>
               <a:rPr sz="1600" b="1" i="0">
                 <a:solidFill>
-                  <a:srgbClr val="2E3A80"/>
-                </a:solidFill>
-                <a:latin typeface="Montserrat"/>
-              </a:rPr>
-              <a:t>•  </a:t>
+                  <a:srgbClr val="E8801A"/>
+                </a:solidFill>
+                <a:latin typeface="Montserrat"/>
+              </a:rPr>
+              <a:t>▸  </a:t>
             </a:r>
             <a:r>
               <a:rPr sz="1600" b="0" i="0">
@@ -7704,23 +8658,23 @@
                 </a:solidFill>
                 <a:latin typeface="Montserrat"/>
               </a:rPr>
-              <a:t>Seguridad: solo sin directiva propia</a:t>
+              <a:t>La norma del aparato, no del tubo</a:t>
             </a:r>
           </a:p>
           <a:p>
             <a:pPr>
               <a:spcAft>
-                <a:spcPts val="1000"/>
+                <a:spcPts val="1100"/>
               </a:spcAft>
             </a:pPr>
             <a:r>
               <a:rPr sz="1600" b="1" i="0">
                 <a:solidFill>
-                  <a:srgbClr val="2E3A80"/>
-                </a:solidFill>
-                <a:latin typeface="Montserrat"/>
-              </a:rPr>
-              <a:t>•  </a:t>
+                  <a:srgbClr val="E8801A"/>
+                </a:solidFill>
+                <a:latin typeface="Montserrat"/>
+              </a:rPr>
+              <a:t>▸  </a:t>
             </a:r>
             <a:r>
               <a:rPr sz="1600" b="0" i="0">
@@ -7729,23 +8683,23 @@
                 </a:solidFill>
                 <a:latin typeface="Montserrat"/>
               </a:rPr>
-              <a:t>Documentación y arranque: a TODOS</a:t>
+              <a:t>Criterios técnicos y de seguridad</a:t>
             </a:r>
           </a:p>
           <a:p>
             <a:pPr>
               <a:spcAft>
-                <a:spcPts val="1000"/>
+                <a:spcPts val="1100"/>
               </a:spcAft>
             </a:pPr>
             <a:r>
               <a:rPr sz="1600" b="1" i="0">
                 <a:solidFill>
-                  <a:srgbClr val="2E3A80"/>
-                </a:solidFill>
-                <a:latin typeface="Montserrat"/>
-              </a:rPr>
-              <a:t>•  </a:t>
+                  <a:srgbClr val="E8801A"/>
+                </a:solidFill>
+                <a:latin typeface="Montserrat"/>
+              </a:rPr>
+              <a:t>▸  </a:t>
             </a:r>
             <a:r>
               <a:rPr sz="1600" b="0" i="0">
@@ -7754,14 +8708,39 @@
                 </a:solidFill>
                 <a:latin typeface="Montserrat"/>
               </a:rPr>
-              <a:t>Se arranca en su ubicación definitiva</a:t>
-            </a:r>
-          </a:p>
-        </p:txBody>
-      </p:sp>
-      <p:sp>
-        <p:nvSpPr>
-          <p:cNvPr id="8" name="imgph" descr="IMGQ:technician commissioning gas boiler"/>
+              <a:t>Medios de certificación</a:t>
+            </a:r>
+          </a:p>
+          <a:p>
+            <a:pPr>
+              <a:spcAft>
+                <a:spcPts val="1100"/>
+              </a:spcAft>
+            </a:pPr>
+            <a:r>
+              <a:rPr sz="1600" b="1" i="0">
+                <a:solidFill>
+                  <a:srgbClr val="E8801A"/>
+                </a:solidFill>
+                <a:latin typeface="Montserrat"/>
+              </a:rPr>
+              <a:t>▸  </a:t>
+            </a:r>
+            <a:r>
+              <a:rPr sz="1600" b="0" i="0">
+                <a:solidFill>
+                  <a:srgbClr val="1B2330"/>
+                </a:solidFill>
+                <a:latin typeface="Montserrat"/>
+              </a:rPr>
+              <a:t>Excluye aparatos con directiva CE propia</a:t>
+            </a:r>
+          </a:p>
+        </p:txBody>
+      </p:sp>
+      <p:sp>
+        <p:nvSpPr>
+          <p:cNvPr id="9" name="imgph" descr="IMGQ:gas boiler installation wall"/>
           <p:cNvSpPr/>
           <p:nvPr/>
         </p:nvSpPr>
@@ -7807,7 +8786,7 @@
       </p:sp>
       <p:sp>
         <p:nvSpPr>
-          <p:cNvPr id="9" name="TextBox 8"/>
+          <p:cNvPr id="10" name="TextBox 9"/>
           <p:cNvSpPr txBox="1"/>
           <p:nvPr/>
         </p:nvSpPr>
@@ -7847,7 +8826,7 @@
                 </a:solidFill>
                 <a:latin typeface="Montserrat"/>
               </a:rPr>
-              <a:t>technician commissioning gas boiler</a:t>
+              <a:t>gas boiler installation wall</a:t>
             </a:r>
           </a:p>
         </p:txBody>
@@ -7944,7 +8923,7 @@
                 </a:solidFill>
                 <a:latin typeface="Montserrat"/>
               </a:rPr>
-              <a:t>005 / 014</a:t>
+              <a:t>005 / 015</a:t>
             </a:r>
           </a:p>
         </p:txBody>
@@ -7992,7 +8971,7 @@
         <p:spPr>
           <a:xfrm>
             <a:off x="822960" y="457200"/>
-            <a:ext cx="8229600" cy="365760"/>
+            <a:ext cx="10058400" cy="365760"/>
           </a:xfrm>
           <a:prstGeom prst="rect">
             <a:avLst/>
@@ -8006,13 +8985,13 @@
           <a:lstStyle/>
           <a:p>
             <a:r>
-              <a:rPr sz="1200" b="1" i="0">
-                <a:solidFill>
-                  <a:srgbClr val="64748B"/>
-                </a:solidFill>
-                <a:latin typeface="Montserrat"/>
-              </a:rPr>
-              <a:t>APARTADO 2 · COMERCIALIZACIÓN</a:t>
+              <a:rPr sz="1300" b="1" i="0">
+                <a:solidFill>
+                  <a:srgbClr val="E8801A"/>
+                </a:solidFill>
+                <a:latin typeface="Montserrat"/>
+              </a:rPr>
+              <a:t>APARTADO 1 · ALCANCE</a:t>
             </a:r>
           </a:p>
         </p:txBody>
@@ -8040,26 +9019,70 @@
           <a:lstStyle/>
           <a:p>
             <a:r>
-              <a:rPr sz="2700" b="1" i="0">
+              <a:rPr sz="2800" b="1" i="0">
                 <a:solidFill>
                   <a:srgbClr val="1E2761"/>
                 </a:solidFill>
                 <a:latin typeface="Montserrat"/>
               </a:rPr>
-              <a:t>Qué aparatos pueden venderse</a:t>
-            </a:r>
-          </a:p>
-        </p:txBody>
-      </p:sp>
-      <p:sp>
-        <p:nvSpPr>
-          <p:cNvPr id="7" name="TextBox 6"/>
+              <a:t>Dos puertas y la puesta en marcha</a:t>
+            </a:r>
+          </a:p>
+        </p:txBody>
+      </p:sp>
+      <p:sp>
+        <p:nvSpPr>
+          <p:cNvPr id="7" name="Rounded Rectangle 6"/>
+          <p:cNvSpPr/>
+          <p:nvPr/>
+        </p:nvSpPr>
+        <p:spPr>
+          <a:xfrm>
+            <a:off x="868680" y="1627632"/>
+            <a:ext cx="2011680" cy="73152"/>
+          </a:xfrm>
+          <a:prstGeom prst="roundRect">
+            <a:avLst/>
+          </a:prstGeom>
+          <a:solidFill>
+            <a:srgbClr val="E8801A"/>
+          </a:solidFill>
+          <a:ln>
+            <a:noFill/>
+          </a:ln>
+          <a:effectLst/>
+        </p:spPr>
+        <p:style>
+          <a:lnRef idx="1">
+            <a:schemeClr val="accent1"/>
+          </a:lnRef>
+          <a:fillRef idx="3">
+            <a:schemeClr val="accent1"/>
+          </a:fillRef>
+          <a:effectRef idx="2">
+            <a:schemeClr val="accent1"/>
+          </a:effectRef>
+          <a:fontRef idx="minor">
+            <a:schemeClr val="lt1"/>
+          </a:fontRef>
+        </p:style>
+        <p:txBody>
+          <a:bodyPr rtlCol="0" anchor="ctr"/>
+          <a:lstStyle/>
+          <a:p>
+            <a:pPr algn="ctr"/>
+          </a:p>
+        </p:txBody>
+      </p:sp>
+      <p:sp>
+        <p:nvSpPr>
+          <p:cNvPr id="8" name="TextBox 7"/>
           <p:cNvSpPr txBox="1"/>
           <p:nvPr/>
         </p:nvSpPr>
         <p:spPr>
           <a:xfrm>
-            <a:off x="822960" y="1920240"/>
+            <a:off x="822960" y="1965960"/>
             <a:ext cx="4983480" cy="4206240"/>
           </a:xfrm>
           <a:prstGeom prst="rect">
@@ -8075,17 +9098,17 @@
           <a:p>
             <a:pPr>
               <a:spcAft>
-                <a:spcPts val="1000"/>
+                <a:spcPts val="1100"/>
               </a:spcAft>
             </a:pPr>
             <a:r>
               <a:rPr sz="1600" b="1" i="0">
                 <a:solidFill>
-                  <a:srgbClr val="2E3A80"/>
-                </a:solidFill>
-                <a:latin typeface="Montserrat"/>
-              </a:rPr>
-              <a:t>•  </a:t>
+                  <a:srgbClr val="E8801A"/>
+                </a:solidFill>
+                <a:latin typeface="Montserrat"/>
+              </a:rPr>
+              <a:t>▸  </a:t>
             </a:r>
             <a:r>
               <a:rPr sz="1600" b="0" i="0">
@@ -8094,23 +9117,23 @@
                 </a:solidFill>
                 <a:latin typeface="Montserrat"/>
               </a:rPr>
-              <a:t>Sin peligro para personas, animales y bienes</a:t>
+              <a:t>Seguridad: solo sin directiva propia</a:t>
             </a:r>
           </a:p>
           <a:p>
             <a:pPr>
               <a:spcAft>
-                <a:spcPts val="1000"/>
+                <a:spcPts val="1100"/>
               </a:spcAft>
             </a:pPr>
             <a:r>
               <a:rPr sz="1600" b="1" i="0">
                 <a:solidFill>
-                  <a:srgbClr val="2E3A80"/>
-                </a:solidFill>
-                <a:latin typeface="Montserrat"/>
-              </a:rPr>
-              <a:t>•  </a:t>
+                  <a:srgbClr val="E8801A"/>
+                </a:solidFill>
+                <a:latin typeface="Montserrat"/>
+              </a:rPr>
+              <a:t>▸  </a:t>
             </a:r>
             <a:r>
               <a:rPr sz="1600" b="0" i="0">
@@ -8119,23 +9142,23 @@
                 </a:solidFill>
                 <a:latin typeface="Montserrat"/>
               </a:rPr>
-              <a:t>Si cumple la ITC, no se puede vetar</a:t>
+              <a:t>Documentación y arranque: a TODOS</a:t>
             </a:r>
           </a:p>
           <a:p>
             <a:pPr>
               <a:spcAft>
-                <a:spcPts val="1000"/>
+                <a:spcPts val="1100"/>
               </a:spcAft>
             </a:pPr>
             <a:r>
               <a:rPr sz="1600" b="1" i="0">
                 <a:solidFill>
-                  <a:srgbClr val="2E3A80"/>
-                </a:solidFill>
-                <a:latin typeface="Montserrat"/>
-              </a:rPr>
-              <a:t>•  </a:t>
+                  <a:srgbClr val="E8801A"/>
+                </a:solidFill>
+                <a:latin typeface="Montserrat"/>
+              </a:rPr>
+              <a:t>▸  </a:t>
             </a:r>
             <a:r>
               <a:rPr sz="1600" b="0" i="0">
@@ -8144,14 +9167,14 @@
                 </a:solidFill>
                 <a:latin typeface="Montserrat"/>
               </a:rPr>
-              <a:t>Con riesgo: la Administración lo retira</a:t>
-            </a:r>
-          </a:p>
-        </p:txBody>
-      </p:sp>
-      <p:sp>
-        <p:nvSpPr>
-          <p:cNvPr id="8" name="imgph" descr="IMGQ:gas appliances store shelf"/>
+              <a:t>Se arranca en su ubicación definitiva</a:t>
+            </a:r>
+          </a:p>
+        </p:txBody>
+      </p:sp>
+      <p:sp>
+        <p:nvSpPr>
+          <p:cNvPr id="9" name="imgph" descr="IMGQ:technician commissioning gas boiler"/>
           <p:cNvSpPr/>
           <p:nvPr/>
         </p:nvSpPr>
@@ -8197,7 +9220,7 @@
       </p:sp>
       <p:sp>
         <p:nvSpPr>
-          <p:cNvPr id="9" name="TextBox 8"/>
+          <p:cNvPr id="10" name="TextBox 9"/>
           <p:cNvSpPr txBox="1"/>
           <p:nvPr/>
         </p:nvSpPr>
@@ -8237,7 +9260,7 @@
                 </a:solidFill>
                 <a:latin typeface="Montserrat"/>
               </a:rPr>
-              <a:t>gas appliances store shelf</a:t>
+              <a:t>technician commissioning gas boiler</a:t>
             </a:r>
           </a:p>
         </p:txBody>
@@ -8334,7 +9357,7 @@
                 </a:solidFill>
                 <a:latin typeface="Montserrat"/>
               </a:rPr>
-              <a:t>006 / 014</a:t>
+              <a:t>006 / 015</a:t>
             </a:r>
           </a:p>
         </p:txBody>
@@ -8382,7 +9405,7 @@
         <p:spPr>
           <a:xfrm>
             <a:off x="822960" y="457200"/>
-            <a:ext cx="8229600" cy="365760"/>
+            <a:ext cx="10058400" cy="365760"/>
           </a:xfrm>
           <a:prstGeom prst="rect">
             <a:avLst/>
@@ -8396,13 +9419,13 @@
           <a:lstStyle/>
           <a:p>
             <a:r>
-              <a:rPr sz="1200" b="1" i="0">
-                <a:solidFill>
-                  <a:srgbClr val="64748B"/>
-                </a:solidFill>
-                <a:latin typeface="Montserrat"/>
-              </a:rPr>
-              <a:t>APARTADO 2 · CONDICIONES NORMALES</a:t>
+              <a:rPr sz="1300" b="1" i="0">
+                <a:solidFill>
+                  <a:srgbClr val="E8801A"/>
+                </a:solidFill>
+                <a:latin typeface="Montserrat"/>
+              </a:rPr>
+              <a:t>APARTADO 2 · COMERCIALIZACIÓN</a:t>
             </a:r>
           </a:p>
         </p:txBody>
@@ -8430,26 +9453,70 @@
           <a:lstStyle/>
           <a:p>
             <a:r>
-              <a:rPr sz="2700" b="1" i="0">
+              <a:rPr sz="2800" b="1" i="0">
                 <a:solidFill>
                   <a:srgbClr val="1E2761"/>
                 </a:solidFill>
                 <a:latin typeface="Montserrat"/>
               </a:rPr>
-              <a:t>Las tres patas del funcionamiento</a:t>
-            </a:r>
-          </a:p>
-        </p:txBody>
-      </p:sp>
-      <p:sp>
-        <p:nvSpPr>
-          <p:cNvPr id="7" name="TextBox 6"/>
+              <a:t>Qué aparatos pueden venderse</a:t>
+            </a:r>
+          </a:p>
+        </p:txBody>
+      </p:sp>
+      <p:sp>
+        <p:nvSpPr>
+          <p:cNvPr id="7" name="Rounded Rectangle 6"/>
+          <p:cNvSpPr/>
+          <p:nvPr/>
+        </p:nvSpPr>
+        <p:spPr>
+          <a:xfrm>
+            <a:off x="868680" y="1627632"/>
+            <a:ext cx="2011680" cy="73152"/>
+          </a:xfrm>
+          <a:prstGeom prst="roundRect">
+            <a:avLst/>
+          </a:prstGeom>
+          <a:solidFill>
+            <a:srgbClr val="E8801A"/>
+          </a:solidFill>
+          <a:ln>
+            <a:noFill/>
+          </a:ln>
+          <a:effectLst/>
+        </p:spPr>
+        <p:style>
+          <a:lnRef idx="1">
+            <a:schemeClr val="accent1"/>
+          </a:lnRef>
+          <a:fillRef idx="3">
+            <a:schemeClr val="accent1"/>
+          </a:fillRef>
+          <a:effectRef idx="2">
+            <a:schemeClr val="accent1"/>
+          </a:effectRef>
+          <a:fontRef idx="minor">
+            <a:schemeClr val="lt1"/>
+          </a:fontRef>
+        </p:style>
+        <p:txBody>
+          <a:bodyPr rtlCol="0" anchor="ctr"/>
+          <a:lstStyle/>
+          <a:p>
+            <a:pPr algn="ctr"/>
+          </a:p>
+        </p:txBody>
+      </p:sp>
+      <p:sp>
+        <p:nvSpPr>
+          <p:cNvPr id="8" name="TextBox 7"/>
           <p:cNvSpPr txBox="1"/>
           <p:nvPr/>
         </p:nvSpPr>
         <p:spPr>
           <a:xfrm>
-            <a:off x="822960" y="1920240"/>
+            <a:off x="822960" y="1965960"/>
             <a:ext cx="4983480" cy="4206240"/>
           </a:xfrm>
           <a:prstGeom prst="rect">
@@ -8465,17 +9532,17 @@
           <a:p>
             <a:pPr>
               <a:spcAft>
-                <a:spcPts val="1000"/>
+                <a:spcPts val="1100"/>
               </a:spcAft>
             </a:pPr>
             <a:r>
               <a:rPr sz="1600" b="1" i="0">
                 <a:solidFill>
-                  <a:srgbClr val="2E3A80"/>
-                </a:solidFill>
-                <a:latin typeface="Montserrat"/>
-              </a:rPr>
-              <a:t>•  </a:t>
+                  <a:srgbClr val="E8801A"/>
+                </a:solidFill>
+                <a:latin typeface="Montserrat"/>
+              </a:rPr>
+              <a:t>▸  </a:t>
             </a:r>
             <a:r>
               <a:rPr sz="1600" b="0" i="0">
@@ -8484,23 +9551,23 @@
                 </a:solidFill>
                 <a:latin typeface="Montserrat"/>
               </a:rPr>
-              <a:t>Bien instalado y mantenido</a:t>
+              <a:t>Sin peligro para personas, animales y bienes</a:t>
             </a:r>
           </a:p>
           <a:p>
             <a:pPr>
               <a:spcAft>
-                <a:spcPts val="1000"/>
+                <a:spcPts val="1100"/>
               </a:spcAft>
             </a:pPr>
             <a:r>
               <a:rPr sz="1600" b="1" i="0">
                 <a:solidFill>
-                  <a:srgbClr val="2E3A80"/>
-                </a:solidFill>
-                <a:latin typeface="Montserrat"/>
-              </a:rPr>
-              <a:t>•  </a:t>
+                  <a:srgbClr val="E8801A"/>
+                </a:solidFill>
+                <a:latin typeface="Montserrat"/>
+              </a:rPr>
+              <a:t>▸  </a:t>
             </a:r>
             <a:r>
               <a:rPr sz="1600" b="0" i="0">
@@ -8509,23 +9576,23 @@
                 </a:solidFill>
                 <a:latin typeface="Montserrat"/>
               </a:rPr>
-              <a:t>Gas correcto: Wobbe y presión</a:t>
+              <a:t>Si cumple la ITC, no se puede vetar</a:t>
             </a:r>
           </a:p>
           <a:p>
             <a:pPr>
               <a:spcAft>
-                <a:spcPts val="1000"/>
+                <a:spcPts val="1100"/>
               </a:spcAft>
             </a:pPr>
             <a:r>
               <a:rPr sz="1600" b="1" i="0">
                 <a:solidFill>
-                  <a:srgbClr val="2E3A80"/>
-                </a:solidFill>
-                <a:latin typeface="Montserrat"/>
-              </a:rPr>
-              <a:t>•  </a:t>
+                  <a:srgbClr val="E8801A"/>
+                </a:solidFill>
+                <a:latin typeface="Montserrat"/>
+              </a:rPr>
+              <a:t>▸  </a:t>
             </a:r>
             <a:r>
               <a:rPr sz="1600" b="0" i="0">
@@ -8534,14 +9601,14 @@
                 </a:solidFill>
                 <a:latin typeface="Montserrat"/>
               </a:rPr>
-              <a:t>Usado para su fin</a:t>
-            </a:r>
-          </a:p>
-        </p:txBody>
-      </p:sp>
-      <p:sp>
-        <p:nvSpPr>
-          <p:cNvPr id="8" name="imgph" descr="IMGQ:blue gas flame burner"/>
+              <a:t>Con riesgo: la Administración lo retira</a:t>
+            </a:r>
+          </a:p>
+        </p:txBody>
+      </p:sp>
+      <p:sp>
+        <p:nvSpPr>
+          <p:cNvPr id="9" name="imgph" descr="IMGQ:gas appliances store shelf"/>
           <p:cNvSpPr/>
           <p:nvPr/>
         </p:nvSpPr>
@@ -8587,7 +9654,7 @@
       </p:sp>
       <p:sp>
         <p:nvSpPr>
-          <p:cNvPr id="9" name="TextBox 8"/>
+          <p:cNvPr id="10" name="TextBox 9"/>
           <p:cNvSpPr txBox="1"/>
           <p:nvPr/>
         </p:nvSpPr>
@@ -8627,7 +9694,7 @@
                 </a:solidFill>
                 <a:latin typeface="Montserrat"/>
               </a:rPr>
-              <a:t>blue gas flame burner</a:t>
+              <a:t>gas appliances store shelf</a:t>
             </a:r>
           </a:p>
         </p:txBody>
@@ -8724,7 +9791,7 @@
                 </a:solidFill>
                 <a:latin typeface="Montserrat"/>
               </a:rPr>
-              <a:t>007 / 014</a:t>
+              <a:t>007 / 015</a:t>
             </a:r>
           </a:p>
         </p:txBody>
@@ -8772,7 +9839,7 @@
         <p:spPr>
           <a:xfrm>
             <a:off x="822960" y="457200"/>
-            <a:ext cx="8229600" cy="365760"/>
+            <a:ext cx="10058400" cy="365760"/>
           </a:xfrm>
           <a:prstGeom prst="rect">
             <a:avLst/>
@@ -8786,13 +9853,13 @@
           <a:lstStyle/>
           <a:p>
             <a:r>
-              <a:rPr sz="1200" b="1" i="0">
-                <a:solidFill>
-                  <a:srgbClr val="64748B"/>
-                </a:solidFill>
-                <a:latin typeface="Montserrat"/>
-              </a:rPr>
-              <a:t>APARTADO 2.2 · PUESTA EN EL MERCADO</a:t>
+              <a:rPr sz="1300" b="1" i="0">
+                <a:solidFill>
+                  <a:srgbClr val="E8801A"/>
+                </a:solidFill>
+                <a:latin typeface="Montserrat"/>
+              </a:rPr>
+              <a:t>APARTADO 2 · CONDICIONES NORMALES</a:t>
             </a:r>
           </a:p>
         </p:txBody>
@@ -8820,26 +9887,70 @@
           <a:lstStyle/>
           <a:p>
             <a:r>
-              <a:rPr sz="2700" b="1" i="0">
+              <a:rPr sz="2800" b="1" i="0">
                 <a:solidFill>
                   <a:srgbClr val="1E2761"/>
                 </a:solidFill>
                 <a:latin typeface="Montserrat"/>
               </a:rPr>
-              <a:t>Dos manuales y advertencias</a:t>
-            </a:r>
-          </a:p>
-        </p:txBody>
-      </p:sp>
-      <p:sp>
-        <p:nvSpPr>
-          <p:cNvPr id="7" name="TextBox 6"/>
+              <a:t>Las tres patas del funcionamiento</a:t>
+            </a:r>
+          </a:p>
+        </p:txBody>
+      </p:sp>
+      <p:sp>
+        <p:nvSpPr>
+          <p:cNvPr id="7" name="Rounded Rectangle 6"/>
+          <p:cNvSpPr/>
+          <p:nvPr/>
+        </p:nvSpPr>
+        <p:spPr>
+          <a:xfrm>
+            <a:off x="868680" y="1627632"/>
+            <a:ext cx="2011680" cy="73152"/>
+          </a:xfrm>
+          <a:prstGeom prst="roundRect">
+            <a:avLst/>
+          </a:prstGeom>
+          <a:solidFill>
+            <a:srgbClr val="E8801A"/>
+          </a:solidFill>
+          <a:ln>
+            <a:noFill/>
+          </a:ln>
+          <a:effectLst/>
+        </p:spPr>
+        <p:style>
+          <a:lnRef idx="1">
+            <a:schemeClr val="accent1"/>
+          </a:lnRef>
+          <a:fillRef idx="3">
+            <a:schemeClr val="accent1"/>
+          </a:fillRef>
+          <a:effectRef idx="2">
+            <a:schemeClr val="accent1"/>
+          </a:effectRef>
+          <a:fontRef idx="minor">
+            <a:schemeClr val="lt1"/>
+          </a:fontRef>
+        </p:style>
+        <p:txBody>
+          <a:bodyPr rtlCol="0" anchor="ctr"/>
+          <a:lstStyle/>
+          <a:p>
+            <a:pPr algn="ctr"/>
+          </a:p>
+        </p:txBody>
+      </p:sp>
+      <p:sp>
+        <p:nvSpPr>
+          <p:cNvPr id="8" name="TextBox 7"/>
           <p:cNvSpPr txBox="1"/>
           <p:nvPr/>
         </p:nvSpPr>
         <p:spPr>
           <a:xfrm>
-            <a:off x="822960" y="1920240"/>
+            <a:off x="822960" y="1965960"/>
             <a:ext cx="4983480" cy="4206240"/>
           </a:xfrm>
           <a:prstGeom prst="rect">
@@ -8855,17 +9966,17 @@
           <a:p>
             <a:pPr>
               <a:spcAft>
-                <a:spcPts val="1000"/>
+                <a:spcPts val="1100"/>
               </a:spcAft>
             </a:pPr>
             <a:r>
               <a:rPr sz="1600" b="1" i="0">
                 <a:solidFill>
-                  <a:srgbClr val="2E3A80"/>
-                </a:solidFill>
-                <a:latin typeface="Montserrat"/>
-              </a:rPr>
-              <a:t>•  </a:t>
+                  <a:srgbClr val="E8801A"/>
+                </a:solidFill>
+                <a:latin typeface="Montserrat"/>
+              </a:rPr>
+              <a:t>▸  </a:t>
             </a:r>
             <a:r>
               <a:rPr sz="1600" b="0" i="0">
@@ -8874,23 +9985,23 @@
                 </a:solidFill>
                 <a:latin typeface="Montserrat"/>
               </a:rPr>
-              <a:t>Manual técnico (instalador)</a:t>
+              <a:t>Bien instalado y mantenido</a:t>
             </a:r>
           </a:p>
           <a:p>
             <a:pPr>
               <a:spcAft>
-                <a:spcPts val="1000"/>
+                <a:spcPts val="1100"/>
               </a:spcAft>
             </a:pPr>
             <a:r>
               <a:rPr sz="1600" b="1" i="0">
                 <a:solidFill>
-                  <a:srgbClr val="2E3A80"/>
-                </a:solidFill>
-                <a:latin typeface="Montserrat"/>
-              </a:rPr>
-              <a:t>•  </a:t>
+                  <a:srgbClr val="E8801A"/>
+                </a:solidFill>
+                <a:latin typeface="Montserrat"/>
+              </a:rPr>
+              <a:t>▸  </a:t>
             </a:r>
             <a:r>
               <a:rPr sz="1600" b="0" i="0">
@@ -8899,23 +10010,23 @@
                 </a:solidFill>
                 <a:latin typeface="Montserrat"/>
               </a:rPr>
-              <a:t>Manual de uso (usuario)</a:t>
+              <a:t>Gas correcto: Wobbe y presión</a:t>
             </a:r>
           </a:p>
           <a:p>
             <a:pPr>
               <a:spcAft>
-                <a:spcPts val="1000"/>
+                <a:spcPts val="1100"/>
               </a:spcAft>
             </a:pPr>
             <a:r>
               <a:rPr sz="1600" b="1" i="0">
                 <a:solidFill>
-                  <a:srgbClr val="2E3A80"/>
-                </a:solidFill>
-                <a:latin typeface="Montserrat"/>
-              </a:rPr>
-              <a:t>•  </a:t>
+                  <a:srgbClr val="E8801A"/>
+                </a:solidFill>
+                <a:latin typeface="Montserrat"/>
+              </a:rPr>
+              <a:t>▸  </a:t>
             </a:r>
             <a:r>
               <a:rPr sz="1600" b="0" i="0">
@@ -8924,39 +10035,14 @@
                 </a:solidFill>
                 <a:latin typeface="Montserrat"/>
               </a:rPr>
-              <a:t>Advertencias en aparato y embalaje</a:t>
-            </a:r>
-          </a:p>
-          <a:p>
-            <a:pPr>
-              <a:spcAft>
-                <a:spcPts val="1000"/>
-              </a:spcAft>
-            </a:pPr>
-            <a:r>
-              <a:rPr sz="1600" b="1" i="0">
-                <a:solidFill>
-                  <a:srgbClr val="2E3A80"/>
-                </a:solidFill>
-                <a:latin typeface="Montserrat"/>
-              </a:rPr>
-              <a:t>•  </a:t>
-            </a:r>
-            <a:r>
-              <a:rPr sz="1600" b="0" i="0">
-                <a:solidFill>
-                  <a:srgbClr val="1B2330"/>
-                </a:solidFill>
-                <a:latin typeface="Montserrat"/>
-              </a:rPr>
-              <a:t>Todo, como mínimo, en español</a:t>
-            </a:r>
-          </a:p>
-        </p:txBody>
-      </p:sp>
-      <p:sp>
-        <p:nvSpPr>
-          <p:cNvPr id="8" name="imgph" descr="IMGQ:boiler instruction manual booklet"/>
+              <a:t>Usado para su fin</a:t>
+            </a:r>
+          </a:p>
+        </p:txBody>
+      </p:sp>
+      <p:sp>
+        <p:nvSpPr>
+          <p:cNvPr id="9" name="imgph" descr="IMGQ:blue gas flame burner"/>
           <p:cNvSpPr/>
           <p:nvPr/>
         </p:nvSpPr>
@@ -9002,7 +10088,7 @@
       </p:sp>
       <p:sp>
         <p:nvSpPr>
-          <p:cNvPr id="9" name="TextBox 8"/>
+          <p:cNvPr id="10" name="TextBox 9"/>
           <p:cNvSpPr txBox="1"/>
           <p:nvPr/>
         </p:nvSpPr>
@@ -9042,7 +10128,7 @@
                 </a:solidFill>
                 <a:latin typeface="Montserrat"/>
               </a:rPr>
-              <a:t>boiler instruction manual booklet</a:t>
+              <a:t>blue gas flame burner</a:t>
             </a:r>
           </a:p>
         </p:txBody>
@@ -9139,7 +10225,7 @@
                 </a:solidFill>
                 <a:latin typeface="Montserrat"/>
               </a:rPr>
-              <a:t>008 / 014</a:t>
+              <a:t>008 / 015</a:t>
             </a:r>
           </a:p>
         </p:txBody>
@@ -9187,7 +10273,7 @@
         <p:spPr>
           <a:xfrm>
             <a:off x="822960" y="457200"/>
-            <a:ext cx="8229600" cy="365760"/>
+            <a:ext cx="10058400" cy="365760"/>
           </a:xfrm>
           <a:prstGeom prst="rect">
             <a:avLst/>
@@ -9201,13 +10287,13 @@
           <a:lstStyle/>
           <a:p>
             <a:r>
-              <a:rPr sz="1200" b="1" i="0">
-                <a:solidFill>
-                  <a:srgbClr val="64748B"/>
-                </a:solidFill>
-                <a:latin typeface="Montserrat"/>
-              </a:rPr>
-              <a:t>APARTADO 2.2.1 · MANUAL TÉCNICO</a:t>
+              <a:rPr sz="1300" b="1" i="0">
+                <a:solidFill>
+                  <a:srgbClr val="E8801A"/>
+                </a:solidFill>
+                <a:latin typeface="Montserrat"/>
+              </a:rPr>
+              <a:t>APARTADO 2.2 · PUESTA EN EL MERCADO</a:t>
             </a:r>
           </a:p>
         </p:txBody>
@@ -9235,26 +10321,70 @@
           <a:lstStyle/>
           <a:p>
             <a:r>
-              <a:rPr sz="2700" b="1" i="0">
+              <a:rPr sz="2800" b="1" i="0">
                 <a:solidFill>
                   <a:srgbClr val="1E2761"/>
                 </a:solidFill>
                 <a:latin typeface="Montserrat"/>
               </a:rPr>
-              <a:t>El libro del profesional</a:t>
-            </a:r>
-          </a:p>
-        </p:txBody>
-      </p:sp>
-      <p:sp>
-        <p:nvSpPr>
-          <p:cNvPr id="7" name="TextBox 6"/>
+              <a:t>Dos manuales y advertencias</a:t>
+            </a:r>
+          </a:p>
+        </p:txBody>
+      </p:sp>
+      <p:sp>
+        <p:nvSpPr>
+          <p:cNvPr id="7" name="Rounded Rectangle 6"/>
+          <p:cNvSpPr/>
+          <p:nvPr/>
+        </p:nvSpPr>
+        <p:spPr>
+          <a:xfrm>
+            <a:off x="868680" y="1627632"/>
+            <a:ext cx="2011680" cy="73152"/>
+          </a:xfrm>
+          <a:prstGeom prst="roundRect">
+            <a:avLst/>
+          </a:prstGeom>
+          <a:solidFill>
+            <a:srgbClr val="E8801A"/>
+          </a:solidFill>
+          <a:ln>
+            <a:noFill/>
+          </a:ln>
+          <a:effectLst/>
+        </p:spPr>
+        <p:style>
+          <a:lnRef idx="1">
+            <a:schemeClr val="accent1"/>
+          </a:lnRef>
+          <a:fillRef idx="3">
+            <a:schemeClr val="accent1"/>
+          </a:fillRef>
+          <a:effectRef idx="2">
+            <a:schemeClr val="accent1"/>
+          </a:effectRef>
+          <a:fontRef idx="minor">
+            <a:schemeClr val="lt1"/>
+          </a:fontRef>
+        </p:style>
+        <p:txBody>
+          <a:bodyPr rtlCol="0" anchor="ctr"/>
+          <a:lstStyle/>
+          <a:p>
+            <a:pPr algn="ctr"/>
+          </a:p>
+        </p:txBody>
+      </p:sp>
+      <p:sp>
+        <p:nvSpPr>
+          <p:cNvPr id="8" name="TextBox 7"/>
           <p:cNvSpPr txBox="1"/>
           <p:nvPr/>
         </p:nvSpPr>
         <p:spPr>
           <a:xfrm>
-            <a:off x="822960" y="1920240"/>
+            <a:off x="822960" y="1965960"/>
             <a:ext cx="4983480" cy="4206240"/>
           </a:xfrm>
           <a:prstGeom prst="rect">
@@ -9270,17 +10400,17 @@
           <a:p>
             <a:pPr>
               <a:spcAft>
-                <a:spcPts val="1000"/>
+                <a:spcPts val="1100"/>
               </a:spcAft>
             </a:pPr>
             <a:r>
               <a:rPr sz="1600" b="1" i="0">
                 <a:solidFill>
-                  <a:srgbClr val="2E3A80"/>
-                </a:solidFill>
-                <a:latin typeface="Montserrat"/>
-              </a:rPr>
-              <a:t>•  </a:t>
+                  <a:srgbClr val="E8801A"/>
+                </a:solidFill>
+                <a:latin typeface="Montserrat"/>
+              </a:rPr>
+              <a:t>▸  </a:t>
             </a:r>
             <a:r>
               <a:rPr sz="1600" b="0" i="0">
@@ -9289,23 +10419,23 @@
                 </a:solidFill>
                 <a:latin typeface="Montserrat"/>
               </a:rPr>
-              <a:t>Tipo de gas y presión de suministro</a:t>
+              <a:t>Manual técnico (instalador)</a:t>
             </a:r>
           </a:p>
           <a:p>
             <a:pPr>
               <a:spcAft>
-                <a:spcPts val="1000"/>
+                <a:spcPts val="1100"/>
               </a:spcAft>
             </a:pPr>
             <a:r>
               <a:rPr sz="1600" b="1" i="0">
                 <a:solidFill>
-                  <a:srgbClr val="2E3A80"/>
-                </a:solidFill>
-                <a:latin typeface="Montserrat"/>
-              </a:rPr>
-              <a:t>•  </a:t>
+                  <a:srgbClr val="E8801A"/>
+                </a:solidFill>
+                <a:latin typeface="Montserrat"/>
+              </a:rPr>
+              <a:t>▸  </a:t>
             </a:r>
             <a:r>
               <a:rPr sz="1600" b="0" i="0">
@@ -9314,23 +10444,23 @@
                 </a:solidFill>
                 <a:latin typeface="Montserrat"/>
               </a:rPr>
-              <a:t>Consumo nominal</a:t>
+              <a:t>Manual de uso (usuario)</a:t>
             </a:r>
           </a:p>
           <a:p>
             <a:pPr>
               <a:spcAft>
-                <a:spcPts val="1000"/>
+                <a:spcPts val="1100"/>
               </a:spcAft>
             </a:pPr>
             <a:r>
               <a:rPr sz="1600" b="1" i="0">
                 <a:solidFill>
-                  <a:srgbClr val="2E3A80"/>
-                </a:solidFill>
-                <a:latin typeface="Montserrat"/>
-              </a:rPr>
-              <a:t>•  </a:t>
+                  <a:srgbClr val="E8801A"/>
+                </a:solidFill>
+                <a:latin typeface="Montserrat"/>
+              </a:rPr>
+              <a:t>▸  </a:t>
             </a:r>
             <a:r>
               <a:rPr sz="1600" b="0" i="0">
@@ -9339,23 +10469,23 @@
                 </a:solidFill>
                 <a:latin typeface="Montserrat"/>
               </a:rPr>
-              <a:t>Aire de combustión</a:t>
+              <a:t>Advertencias en aparato y embalaje</a:t>
             </a:r>
           </a:p>
           <a:p>
             <a:pPr>
               <a:spcAft>
-                <a:spcPts val="1000"/>
+                <a:spcPts val="1100"/>
               </a:spcAft>
             </a:pPr>
             <a:r>
               <a:rPr sz="1600" b="1" i="0">
                 <a:solidFill>
-                  <a:srgbClr val="2E3A80"/>
-                </a:solidFill>
-                <a:latin typeface="Montserrat"/>
-              </a:rPr>
-              <a:t>•  </a:t>
+                  <a:srgbClr val="E8801A"/>
+                </a:solidFill>
+                <a:latin typeface="Montserrat"/>
+              </a:rPr>
+              <a:t>▸  </a:t>
             </a:r>
             <a:r>
               <a:rPr sz="1600" b="0" i="0">
@@ -9364,39 +10494,14 @@
                 </a:solidFill>
                 <a:latin typeface="Montserrat"/>
               </a:rPr>
-              <a:t>Evacuación de humos</a:t>
-            </a:r>
-          </a:p>
-          <a:p>
-            <a:pPr>
-              <a:spcAft>
-                <a:spcPts val="1000"/>
-              </a:spcAft>
-            </a:pPr>
-            <a:r>
-              <a:rPr sz="1600" b="1" i="0">
-                <a:solidFill>
-                  <a:srgbClr val="2E3A80"/>
-                </a:solidFill>
-                <a:latin typeface="Montserrat"/>
-              </a:rPr>
-              <a:t>•  </a:t>
-            </a:r>
-            <a:r>
-              <a:rPr sz="1600" b="0" i="0">
-                <a:solidFill>
-                  <a:srgbClr val="1B2330"/>
-                </a:solidFill>
-                <a:latin typeface="Montserrat"/>
-              </a:rPr>
-              <a:t>Datos eléctricos y bornes</a:t>
-            </a:r>
-          </a:p>
-        </p:txBody>
-      </p:sp>
-      <p:sp>
-        <p:nvSpPr>
-          <p:cNvPr id="8" name="imgph" descr="IMGQ:gas boiler wiring diagram"/>
+              <a:t>Todo, como mínimo, en español</a:t>
+            </a:r>
+          </a:p>
+        </p:txBody>
+      </p:sp>
+      <p:sp>
+        <p:nvSpPr>
+          <p:cNvPr id="9" name="imgph" descr="IMGQ:boiler instruction manual booklet"/>
           <p:cNvSpPr/>
           <p:nvPr/>
         </p:nvSpPr>
@@ -9442,7 +10547,7 @@
       </p:sp>
       <p:sp>
         <p:nvSpPr>
-          <p:cNvPr id="9" name="TextBox 8"/>
+          <p:cNvPr id="10" name="TextBox 9"/>
           <p:cNvSpPr txBox="1"/>
           <p:nvPr/>
         </p:nvSpPr>
@@ -9482,7 +10587,7 @@
                 </a:solidFill>
                 <a:latin typeface="Montserrat"/>
               </a:rPr>
-              <a:t>gas boiler wiring diagram</a:t>
+              <a:t>boiler instruction manual booklet</a:t>
             </a:r>
           </a:p>
         </p:txBody>
@@ -9579,7 +10684,7 @@
                 </a:solidFill>
                 <a:latin typeface="Montserrat"/>
               </a:rPr>
-              <a:t>009 / 014</a:t>
+              <a:t>009 / 015</a:t>
             </a:r>
           </a:p>
         </p:txBody>
@@ -9627,7 +10732,7 @@
         <p:spPr>
           <a:xfrm>
             <a:off x="822960" y="457200"/>
-            <a:ext cx="8229600" cy="365760"/>
+            <a:ext cx="10058400" cy="365760"/>
           </a:xfrm>
           <a:prstGeom prst="rect">
             <a:avLst/>
@@ -9641,13 +10746,13 @@
           <a:lstStyle/>
           <a:p>
             <a:r>
-              <a:rPr sz="1200" b="1" i="0">
-                <a:solidFill>
-                  <a:srgbClr val="64748B"/>
-                </a:solidFill>
-                <a:latin typeface="Montserrat"/>
-              </a:rPr>
-              <a:t>APARTADO 2.2.2 · MANUAL DE USO</a:t>
+              <a:rPr sz="1300" b="1" i="0">
+                <a:solidFill>
+                  <a:srgbClr val="E8801A"/>
+                </a:solidFill>
+                <a:latin typeface="Montserrat"/>
+              </a:rPr>
+              <a:t>APARTADO 2.2.1 · MANUAL TÉCNICO</a:t>
             </a:r>
           </a:p>
         </p:txBody>
@@ -9675,26 +10780,70 @@
           <a:lstStyle/>
           <a:p>
             <a:r>
-              <a:rPr sz="2700" b="1" i="0">
+              <a:rPr sz="2800" b="1" i="0">
                 <a:solidFill>
                   <a:srgbClr val="1E2761"/>
                 </a:solidFill>
                 <a:latin typeface="Montserrat"/>
               </a:rPr>
-              <a:t>El manual del cliente</a:t>
-            </a:r>
-          </a:p>
-        </p:txBody>
-      </p:sp>
-      <p:sp>
-        <p:nvSpPr>
-          <p:cNvPr id="7" name="TextBox 6"/>
+              <a:t>El libro del profesional</a:t>
+            </a:r>
+          </a:p>
+        </p:txBody>
+      </p:sp>
+      <p:sp>
+        <p:nvSpPr>
+          <p:cNvPr id="7" name="Rounded Rectangle 6"/>
+          <p:cNvSpPr/>
+          <p:nvPr/>
+        </p:nvSpPr>
+        <p:spPr>
+          <a:xfrm>
+            <a:off x="868680" y="1627632"/>
+            <a:ext cx="2011680" cy="73152"/>
+          </a:xfrm>
+          <a:prstGeom prst="roundRect">
+            <a:avLst/>
+          </a:prstGeom>
+          <a:solidFill>
+            <a:srgbClr val="E8801A"/>
+          </a:solidFill>
+          <a:ln>
+            <a:noFill/>
+          </a:ln>
+          <a:effectLst/>
+        </p:spPr>
+        <p:style>
+          <a:lnRef idx="1">
+            <a:schemeClr val="accent1"/>
+          </a:lnRef>
+          <a:fillRef idx="3">
+            <a:schemeClr val="accent1"/>
+          </a:fillRef>
+          <a:effectRef idx="2">
+            <a:schemeClr val="accent1"/>
+          </a:effectRef>
+          <a:fontRef idx="minor">
+            <a:schemeClr val="lt1"/>
+          </a:fontRef>
+        </p:style>
+        <p:txBody>
+          <a:bodyPr rtlCol="0" anchor="ctr"/>
+          <a:lstStyle/>
+          <a:p>
+            <a:pPr algn="ctr"/>
+          </a:p>
+        </p:txBody>
+      </p:sp>
+      <p:sp>
+        <p:nvSpPr>
+          <p:cNvPr id="8" name="TextBox 7"/>
           <p:cNvSpPr txBox="1"/>
           <p:nvPr/>
         </p:nvSpPr>
         <p:spPr>
           <a:xfrm>
-            <a:off x="822960" y="1920240"/>
+            <a:off x="822960" y="1965960"/>
             <a:ext cx="4983480" cy="4206240"/>
           </a:xfrm>
           <a:prstGeom prst="rect">
@@ -9710,17 +10859,17 @@
           <a:p>
             <a:pPr>
               <a:spcAft>
-                <a:spcPts val="1000"/>
+                <a:spcPts val="1100"/>
               </a:spcAft>
             </a:pPr>
             <a:r>
               <a:rPr sz="1600" b="1" i="0">
                 <a:solidFill>
-                  <a:srgbClr val="2E3A80"/>
-                </a:solidFill>
-                <a:latin typeface="Montserrat"/>
-              </a:rPr>
-              <a:t>•  </a:t>
+                  <a:srgbClr val="E8801A"/>
+                </a:solidFill>
+                <a:latin typeface="Montserrat"/>
+              </a:rPr>
+              <a:t>▸  </a:t>
             </a:r>
             <a:r>
               <a:rPr sz="1600" b="0" i="0">
@@ -9729,23 +10878,23 @@
                 </a:solidFill>
                 <a:latin typeface="Montserrat"/>
               </a:rPr>
-              <a:t>Restricciones de uso</a:t>
+              <a:t>Tipo de gas y presión de suministro</a:t>
             </a:r>
           </a:p>
           <a:p>
             <a:pPr>
               <a:spcAft>
-                <a:spcPts val="1000"/>
+                <a:spcPts val="1100"/>
               </a:spcAft>
             </a:pPr>
             <a:r>
               <a:rPr sz="1600" b="1" i="0">
                 <a:solidFill>
-                  <a:srgbClr val="2E3A80"/>
-                </a:solidFill>
-                <a:latin typeface="Montserrat"/>
-              </a:rPr>
-              <a:t>•  </a:t>
+                  <a:srgbClr val="E8801A"/>
+                </a:solidFill>
+                <a:latin typeface="Montserrat"/>
+              </a:rPr>
+              <a:t>▸  </a:t>
             </a:r>
             <a:r>
               <a:rPr sz="1600" b="0" i="0">
@@ -9754,23 +10903,23 @@
                 </a:solidFill>
                 <a:latin typeface="Montserrat"/>
               </a:rPr>
-              <a:t>Encendido y elementos regulables</a:t>
+              <a:t>Consumo nominal</a:t>
             </a:r>
           </a:p>
           <a:p>
             <a:pPr>
               <a:spcAft>
-                <a:spcPts val="1000"/>
+                <a:spcPts val="1100"/>
               </a:spcAft>
             </a:pPr>
             <a:r>
               <a:rPr sz="1600" b="1" i="0">
                 <a:solidFill>
-                  <a:srgbClr val="2E3A80"/>
-                </a:solidFill>
-                <a:latin typeface="Montserrat"/>
-              </a:rPr>
-              <a:t>•  </a:t>
+                  <a:srgbClr val="E8801A"/>
+                </a:solidFill>
+                <a:latin typeface="Montserrat"/>
+              </a:rPr>
+              <a:t>▸  </a:t>
             </a:r>
             <a:r>
               <a:rPr sz="1600" b="0" i="0">
@@ -9779,23 +10928,23 @@
                 </a:solidFill>
                 <a:latin typeface="Montserrat"/>
               </a:rPr>
-              <a:t>Limpieza y mantenimiento básico</a:t>
+              <a:t>Aire de combustión</a:t>
             </a:r>
           </a:p>
           <a:p>
             <a:pPr>
               <a:spcAft>
-                <a:spcPts val="1000"/>
+                <a:spcPts val="1100"/>
               </a:spcAft>
             </a:pPr>
             <a:r>
               <a:rPr sz="1600" b="1" i="0">
                 <a:solidFill>
-                  <a:srgbClr val="2E3A80"/>
-                </a:solidFill>
-                <a:latin typeface="Montserrat"/>
-              </a:rPr>
-              <a:t>•  </a:t>
+                  <a:srgbClr val="E8801A"/>
+                </a:solidFill>
+                <a:latin typeface="Montserrat"/>
+              </a:rPr>
+              <a:t>▸  </a:t>
             </a:r>
             <a:r>
               <a:rPr sz="1600" b="0" i="0">
@@ -9804,14 +10953,39 @@
                 </a:solidFill>
                 <a:latin typeface="Montserrat"/>
               </a:rPr>
-              <a:t>Aviso contra falsas maniobras</a:t>
-            </a:r>
-          </a:p>
-        </p:txBody>
-      </p:sp>
-      <p:sp>
-        <p:nvSpPr>
-          <p:cNvPr id="8" name="imgph" descr="IMGQ:person lighting gas stove"/>
+              <a:t>Evacuación de humos</a:t>
+            </a:r>
+          </a:p>
+          <a:p>
+            <a:pPr>
+              <a:spcAft>
+                <a:spcPts val="1100"/>
+              </a:spcAft>
+            </a:pPr>
+            <a:r>
+              <a:rPr sz="1600" b="1" i="0">
+                <a:solidFill>
+                  <a:srgbClr val="E8801A"/>
+                </a:solidFill>
+                <a:latin typeface="Montserrat"/>
+              </a:rPr>
+              <a:t>▸  </a:t>
+            </a:r>
+            <a:r>
+              <a:rPr sz="1600" b="0" i="0">
+                <a:solidFill>
+                  <a:srgbClr val="1B2330"/>
+                </a:solidFill>
+                <a:latin typeface="Montserrat"/>
+              </a:rPr>
+              <a:t>Datos eléctricos y bornes</a:t>
+            </a:r>
+          </a:p>
+        </p:txBody>
+      </p:sp>
+      <p:sp>
+        <p:nvSpPr>
+          <p:cNvPr id="9" name="imgph" descr="IMGQ:gas boiler wiring diagram"/>
           <p:cNvSpPr/>
           <p:nvPr/>
         </p:nvSpPr>
@@ -9857,7 +11031,7 @@
       </p:sp>
       <p:sp>
         <p:nvSpPr>
-          <p:cNvPr id="9" name="TextBox 8"/>
+          <p:cNvPr id="10" name="TextBox 9"/>
           <p:cNvSpPr txBox="1"/>
           <p:nvPr/>
         </p:nvSpPr>
@@ -9897,7 +11071,7 @@
                 </a:solidFill>
                 <a:latin typeface="Montserrat"/>
               </a:rPr>
-              <a:t>person lighting gas stove</a:t>
+              <a:t>gas boiler wiring diagram</a:t>
             </a:r>
           </a:p>
         </p:txBody>

--- a/Curso Gas B/05 - ITC-ICG 08 - Aparatos de gas/05 - ITC-ICG 08 - Aparatos de gas - Vídeo 1.pptx
+++ b/Curso Gas B/05 - ITC-ICG 08 - Aparatos de gas/05 - ITC-ICG 08 - Aparatos de gas - Vídeo 1.pptx
@@ -20,6 +20,10 @@
     <p:sldId id="268" r:id="rId20"/>
     <p:sldId id="269" r:id="rId21"/>
     <p:sldId id="270" r:id="rId22"/>
+    <p:sldId id="271" r:id="rId23"/>
+    <p:sldId id="272" r:id="rId24"/>
+    <p:sldId id="273" r:id="rId25"/>
+    <p:sldId id="274" r:id="rId26"/>
   </p:sldIdLst>
   <p:sldSz cx="12191695" cy="6858000" type="screen4x3"/>
   <p:notesSz cx="6858000" cy="9144000"/>
@@ -591,12 +595,12 @@
           <a:lstStyle/>
           <a:p>
             <a:r>
-              <a:t>N1: ¿Y el manual que se queda el usuario, qué le cuenta?</a:t>
-            </a:r>
-          </a:p>
-          <a:p>
-            <a:r>
-              <a:t>N2: Está escrito a prueba de sustos, pensando en una persona que no es técnica. Le explica las restricciones de uso, cómo encender y usar los elementos regulables, la limpieza y el mantenimiento básico, y le avisa de que un experto cualificado debe revisarlo periódicamente. Y hay una expresión de examen: la advertencia contra falsas maniobras, que es no tocar lo que no se debe tocar. Cuando entregas un aparato, este manual va con él: forma parte de dejar la instalación en regla. Si el cliente lo pierde, es fácil que acabe haciendo maniobras raras que provocan una avería.</a:t>
+              <a:t>N1: ¿Qué papeles tienen que acompañar al aparato cuando se vende?</a:t>
+            </a:r>
+          </a:p>
+          <a:p>
+            <a:r>
+              <a:t>N2: Piénsalo así: un aparato no se vende solo, se vende con su documentación. Y son dos manuales distintos que conviene no confundir. El manual de información técnica, que es para ti, el instalador: cómo instalar, regular y mantener. Y el manual de instrucciones de uso y mantenimiento, que es para el cliente: cómo encenderlo y usarlo sin peligro. Más las advertencias, que van en el propio aparato y en su embalaje. Y todo, como mínimo, en español. Truco de examen: si te ofrecen la opción de que basta con que venga en inglés, es falsa.</a:t>
             </a:r>
           </a:p>
         </p:txBody>
@@ -666,12 +670,12 @@
           <a:lstStyle/>
           <a:p>
             <a:r>
-              <a:t>N1: Hay advertencias en el aparato y en la caja. ¿Dónde va cada cosa?</a:t>
-            </a:r>
-          </a:p>
-          <a:p>
-            <a:r>
-              <a:t>N2: Ojo a no mezclarlas, porque el examen juega con eso. Las advertencias que van en el aparato siguen las reglas del anexo dos, que es la placa de características; lo veremos entero en el cuarto vídeo. Las advertencias que van en el embalaje, en la caja, llevan como mínimo tres cosas: tipo de gas, presión de suministro y las restricciones de uso, en particular la de no instalar el aparato en locales sin ventilación suficiente o al aire libre, según proceda. Truco para recordarlo: en la caja te fijas en qué gas, a qué presión y dónde no lo puedo poner.</a:t>
+              <a:t>N1: El manual técnico trae una lista larguísima. ¿Qué datos no pueden faltar?</a:t>
+            </a:r>
+          </a:p>
+          <a:p>
+            <a:r>
+              <a:t>N2: Es verdad que la lista es larga, pero no todo pesa igual. Quédate con las estrellas: tipo de gas, presión de suministro, consumo nominal, aire de combustión, evacuación de los gases y datos eléctricos con el esquema de bornes. ¿Por qué esos? Porque son los datos que necesitas sí o sí para montar y regular el aparato. El resto, como el caudal másico en gramos por segundo para el cálculo de chimeneas, o las combinaciones de quemadores de aire forzado, son detalles que la norma añade para casos concretos. Ejemplo: sin la presión de suministro no sabes a qué presión regular la caldera, y sin el aire de combustión no sabes qué ventilación exige el local.</a:t>
             </a:r>
           </a:p>
         </p:txBody>
@@ -741,12 +745,12 @@
           <a:lstStyle/>
           <a:p>
             <a:r>
-              <a:t>N1: La norma habla de aparatos y también de equipos. ¿Qué diferencia hay?</a:t>
-            </a:r>
-          </a:p>
-          <a:p>
-            <a:r>
-              <a:t>N2: Es una distinción sencilla pero que conviene tener clara. El aparato es el conjunto terminado, la caldera completa. El equipo es una pieza que se integra dentro de él: un quemador, una válvula, un programador. Pues bien, la norma exige que cada equipo, por separado, también venga con sus instrucciones de instalación, regulación, empleo y mantenimiento, y que funcione bien montado según manda su fabricante. ¿Por qué? Porque la seguridad del aparato final no se puede romper por una pieza mal documentada o mal montada. La cadena es tan fuerte como su eslabón más débil.</a:t>
+              <a:t>N1: ¿Y el manual que se queda el usuario, qué le cuenta?</a:t>
+            </a:r>
+          </a:p>
+          <a:p>
+            <a:r>
+              <a:t>N2: Está escrito a prueba de sustos, pensando en una persona que no es técnica. Le explica las restricciones de uso, cómo encender y usar los elementos regulables, la limpieza y el mantenimiento básico, y le avisa de que un experto cualificado debe revisarlo periódicamente. Y hay una expresión de examen: la advertencia contra falsas maniobras, que es no tocar lo que no se debe tocar. Cuando entregas un aparato, este manual va con él: forma parte de dejar la instalación en regla. Si el cliente lo pierde, es fácil que acabe haciendo maniobras raras que provocan una avería.</a:t>
             </a:r>
           </a:p>
         </p:txBody>
@@ -816,12 +820,12 @@
           <a:lstStyle/>
           <a:p>
             <a:r>
-              <a:t>N1: ¿Cómo demuestra un aparato que es de fiar?</a:t>
-            </a:r>
-          </a:p>
-          <a:p>
-            <a:r>
-              <a:t>N2: Vamos por partes. Primero, qué tiene que cumplir: el orden manda. Se busca la norma española UNE, la UNE-EN o la europea EN que le aplique; y solo si no existe ninguna, se recurre a las prescripciones de seguridad del anexo tres. Es la misma lógica de todo el Reglamento: la norma técnica primero, y las reglas propias de la ITC como red de seguridad. Segundo, cómo se certifica: hay dos caminos, no tres sueltos. El camino de la serie, que es examen de tipo, la a, más verificación de la producción, la b. O el camino de la pieza única, la verificación por unidad, la c. La fórmula que tienes que memorizar es a más b, o bien c. Los detalles de cada procedimiento están en el anexo uno, y los desmenuzamos en el vídeo tres.</a:t>
+              <a:t>N1: Hay advertencias en el aparato y en la caja. ¿Dónde va cada cosa?</a:t>
+            </a:r>
+          </a:p>
+          <a:p>
+            <a:r>
+              <a:t>N2: Ojo a no mezclarlas, porque el examen juega con eso. Las advertencias que van en el aparato siguen las reglas del anexo dos, que es la placa de características; lo veremos entero en el cuarto vídeo. Las advertencias que van en el embalaje, en la caja, llevan como mínimo tres cosas: tipo de gas, presión de suministro y las restricciones de uso, en particular la de no instalar el aparato en locales sin ventilación suficiente o al aire libre, según proceda. Truco para recordarlo: en la caja te fijas en qué gas, a qué presión y dónde no lo puedo poner.</a:t>
             </a:r>
           </a:p>
         </p:txBody>
@@ -891,12 +895,12 @@
           <a:lstStyle/>
           <a:p>
             <a:r>
-              <a:t>N1: Y para cerrar el vídeo, ¿qué obliga la ITC en cuanto a marcado?</a:t>
-            </a:r>
-          </a:p>
-          <a:p>
-            <a:r>
-              <a:t>N2: Solo dos obligaciones, cortas pero importantes. Una: una placa de características en lugar visible, cuyo contenido detallado está en el anexo dos. Dos: instrucciones, cuyo contenido está en las normas que apliquen o, si no hay, como mínimo en el anexo tres. Fíjate en que es una sección puente: te dice que hay que marcar e instruir, y te manda a los anexos para el qué y el cómo. Asocia siempre placa con anexo dos, e instrucciones con normas o anexo tres. Y recuerda para qué sirve la placa: es el DNI del aparato; de ella sacas el gas, la presión de reglaje y la potencia que necesitarás para rellenar el certificado de puesta en marcha.</a:t>
+              <a:t>N1: La norma habla de aparatos y también de equipos. ¿Qué diferencia hay?</a:t>
+            </a:r>
+          </a:p>
+          <a:p>
+            <a:r>
+              <a:t>N2: Es una distinción sencilla pero que conviene tener clara. El aparato es el conjunto terminado, la caldera completa. El equipo es una pieza que se integra dentro de él: un quemador, una válvula, un programador. Pues bien, la norma exige que cada equipo, por separado, también venga con sus instrucciones de instalación, regulación, empleo y mantenimiento, y que funcione bien montado según manda su fabricante. ¿Por qué? Porque la seguridad del aparato final no se puede romper por una pieza mal documentada o mal montada. La cadena es tan fuerte como su eslabón más débil.</a:t>
             </a:r>
           </a:p>
         </p:txBody>
@@ -966,6 +970,306 @@
           <a:lstStyle/>
           <a:p>
             <a:r>
+              <a:t>N1: ¿Cómo demuestra un aparato que es de fiar?</a:t>
+            </a:r>
+          </a:p>
+          <a:p>
+            <a:r>
+              <a:t>N2: Vamos por partes. Primero, qué tiene que cumplir: el orden manda. Se busca la norma española UNE, la UNE-EN o la europea EN que le aplique; y solo si no existe ninguna, se recurre a las prescripciones de seguridad del anexo tres. Es la misma lógica de todo el Reglamento: la norma técnica primero, y las reglas propias de la ITC como red de seguridad. Segundo, cómo se certifica: hay dos caminos, no tres sueltos. El camino de la serie, que es examen de tipo, la a, más verificación de la producción, la b. O el camino de la pieza única, la verificación por unidad, la c. La fórmula que tienes que memorizar es a más b, o bien c. Los detalles de cada procedimiento están en el anexo uno, y los desmenuzamos en el vídeo tres.</a:t>
+            </a:r>
+          </a:p>
+        </p:txBody>
+      </p:sp>
+      <p:sp>
+        <p:nvSpPr>
+          <p:cNvPr id="4" name="Slide Number Placeholder 3"/>
+          <p:cNvSpPr>
+            <a:spLocks noGrp="1"/>
+          </p:cNvSpPr>
+          <p:nvPr>
+            <p:ph type="sldNum" idx="5" sz="quarter"/>
+          </p:nvPr>
+        </p:nvSpPr>
+        <p:spPr/>
+      </p:sp>
+    </p:spTree>
+  </p:cSld>
+  <p:clrMapOvr>
+    <a:masterClrMapping/>
+  </p:clrMapOvr>
+</p:notes>
+</file>
+
+<file path=ppt/notesSlides/notesSlide16.xml><?xml version="1.0" encoding="utf-8"?>
+<p:notes xmlns:a="http://schemas.openxmlformats.org/drawingml/2006/main" xmlns:p="http://schemas.openxmlformats.org/presentationml/2006/main" xmlns:r="http://schemas.openxmlformats.org/officeDocument/2006/relationships">
+  <p:cSld>
+    <p:spTree>
+      <p:nvGrpSpPr>
+        <p:cNvPr id="1" name=""/>
+        <p:cNvGrpSpPr/>
+        <p:nvPr/>
+      </p:nvGrpSpPr>
+      <p:grpSpPr>
+        <a:xfrm>
+          <a:off x="0" y="0"/>
+          <a:ext cx="0" cy="0"/>
+          <a:chOff x="0" y="0"/>
+          <a:chExt cx="0" cy="0"/>
+        </a:xfrm>
+      </p:grpSpPr>
+      <p:sp>
+        <p:nvSpPr>
+          <p:cNvPr id="2" name="Slide Image Placeholder 1"/>
+          <p:cNvSpPr>
+            <a:spLocks noGrp="1"/>
+          </p:cNvSpPr>
+          <p:nvPr>
+            <p:ph type="sldImg" idx="2"/>
+          </p:nvPr>
+        </p:nvSpPr>
+        <p:spPr/>
+      </p:sp>
+      <p:sp>
+        <p:nvSpPr>
+          <p:cNvPr id="3" name="Notes Placeholder 2"/>
+          <p:cNvSpPr>
+            <a:spLocks noGrp="1"/>
+          </p:cNvSpPr>
+          <p:nvPr>
+            <p:ph type="body" idx="3" sz="quarter"/>
+          </p:nvPr>
+        </p:nvSpPr>
+        <p:spPr/>
+        <p:txBody>
+          <a:bodyPr/>
+          <a:lstStyle/>
+          <a:p>
+            <a:r>
+              <a:t>N1: Una fórmula corta que hay que llevar grabada a fuego.</a:t>
+            </a:r>
+          </a:p>
+          <a:p>
+            <a:r>
+              <a:t>N2: Recuerda que hay dos caminos: el de la serie y el de la pieza única. ¿Cómo se escribía todo en una sola línea?</a:t>
+            </a:r>
+          </a:p>
+        </p:txBody>
+      </p:sp>
+      <p:sp>
+        <p:nvSpPr>
+          <p:cNvPr id="4" name="Slide Number Placeholder 3"/>
+          <p:cNvSpPr>
+            <a:spLocks noGrp="1"/>
+          </p:cNvSpPr>
+          <p:nvPr>
+            <p:ph type="sldNum" idx="5" sz="quarter"/>
+          </p:nvPr>
+        </p:nvSpPr>
+        <p:spPr/>
+      </p:sp>
+    </p:spTree>
+  </p:cSld>
+  <p:clrMapOvr>
+    <a:masterClrMapping/>
+  </p:clrMapOvr>
+</p:notes>
+</file>
+
+<file path=ppt/notesSlides/notesSlide17.xml><?xml version="1.0" encoding="utf-8"?>
+<p:notes xmlns:a="http://schemas.openxmlformats.org/drawingml/2006/main" xmlns:p="http://schemas.openxmlformats.org/presentationml/2006/main" xmlns:r="http://schemas.openxmlformats.org/officeDocument/2006/relationships">
+  <p:cSld>
+    <p:spTree>
+      <p:nvGrpSpPr>
+        <p:cNvPr id="1" name=""/>
+        <p:cNvGrpSpPr/>
+        <p:nvPr/>
+      </p:nvGrpSpPr>
+      <p:grpSpPr>
+        <a:xfrm>
+          <a:off x="0" y="0"/>
+          <a:ext cx="0" cy="0"/>
+          <a:chOff x="0" y="0"/>
+          <a:chExt cx="0" cy="0"/>
+        </a:xfrm>
+      </p:grpSpPr>
+      <p:sp>
+        <p:nvSpPr>
+          <p:cNvPr id="2" name="Slide Image Placeholder 1"/>
+          <p:cNvSpPr>
+            <a:spLocks noGrp="1"/>
+          </p:cNvSpPr>
+          <p:nvPr>
+            <p:ph type="sldImg" idx="2"/>
+          </p:nvPr>
+        </p:nvSpPr>
+        <p:spPr/>
+      </p:sp>
+      <p:sp>
+        <p:nvSpPr>
+          <p:cNvPr id="3" name="Notes Placeholder 2"/>
+          <p:cNvSpPr>
+            <a:spLocks noGrp="1"/>
+          </p:cNvSpPr>
+          <p:nvPr>
+            <p:ph type="body" idx="3" sz="quarter"/>
+          </p:nvPr>
+        </p:nvSpPr>
+        <p:spPr/>
+        <p:txBody>
+          <a:bodyPr/>
+          <a:lstStyle/>
+          <a:p>
+            <a:r>
+              <a:t>N1: ¿Por qué la be?</a:t>
+            </a:r>
+          </a:p>
+          <a:p>
+            <a:r>
+              <a:t>N2: Porque hay dos caminos, no tres sueltos: examen de tipo más verificación de la producción para la serie, o bien verificación por unidad para la pieza única. El truco: la a nunca va sola, siempre la acompaña la be; y la ce es la alternativa completa por sí misma.</a:t>
+            </a:r>
+          </a:p>
+        </p:txBody>
+      </p:sp>
+      <p:sp>
+        <p:nvSpPr>
+          <p:cNvPr id="4" name="Slide Number Placeholder 3"/>
+          <p:cNvSpPr>
+            <a:spLocks noGrp="1"/>
+          </p:cNvSpPr>
+          <p:nvPr>
+            <p:ph type="sldNum" idx="5" sz="quarter"/>
+          </p:nvPr>
+        </p:nvSpPr>
+        <p:spPr/>
+      </p:sp>
+    </p:spTree>
+  </p:cSld>
+  <p:clrMapOvr>
+    <a:masterClrMapping/>
+  </p:clrMapOvr>
+</p:notes>
+</file>
+
+<file path=ppt/notesSlides/notesSlide18.xml><?xml version="1.0" encoding="utf-8"?>
+<p:notes xmlns:a="http://schemas.openxmlformats.org/drawingml/2006/main" xmlns:p="http://schemas.openxmlformats.org/presentationml/2006/main" xmlns:r="http://schemas.openxmlformats.org/officeDocument/2006/relationships">
+  <p:cSld>
+    <p:spTree>
+      <p:nvGrpSpPr>
+        <p:cNvPr id="1" name=""/>
+        <p:cNvGrpSpPr/>
+        <p:nvPr/>
+      </p:nvGrpSpPr>
+      <p:grpSpPr>
+        <a:xfrm>
+          <a:off x="0" y="0"/>
+          <a:ext cx="0" cy="0"/>
+          <a:chOff x="0" y="0"/>
+          <a:chExt cx="0" cy="0"/>
+        </a:xfrm>
+      </p:grpSpPr>
+      <p:sp>
+        <p:nvSpPr>
+          <p:cNvPr id="2" name="Slide Image Placeholder 1"/>
+          <p:cNvSpPr>
+            <a:spLocks noGrp="1"/>
+          </p:cNvSpPr>
+          <p:nvPr>
+            <p:ph type="sldImg" idx="2"/>
+          </p:nvPr>
+        </p:nvSpPr>
+        <p:spPr/>
+      </p:sp>
+      <p:sp>
+        <p:nvSpPr>
+          <p:cNvPr id="3" name="Notes Placeholder 2"/>
+          <p:cNvSpPr>
+            <a:spLocks noGrp="1"/>
+          </p:cNvSpPr>
+          <p:nvPr>
+            <p:ph type="body" idx="3" sz="quarter"/>
+          </p:nvPr>
+        </p:nvSpPr>
+        <p:spPr/>
+        <p:txBody>
+          <a:bodyPr/>
+          <a:lstStyle/>
+          <a:p>
+            <a:r>
+              <a:t>N1: Y para cerrar el vídeo, ¿qué obliga la ITC en cuanto a marcado?</a:t>
+            </a:r>
+          </a:p>
+          <a:p>
+            <a:r>
+              <a:t>N2: Solo dos obligaciones, cortas pero importantes. Una: una placa de características en lugar visible, cuyo contenido detallado está en el anexo dos. Dos: instrucciones, cuyo contenido está en las normas que apliquen o, si no hay, como mínimo en el anexo tres. Fíjate en que es una sección puente: te dice que hay que marcar e instruir, y te manda a los anexos para el qué y el cómo. Asocia siempre placa con anexo dos, e instrucciones con normas o anexo tres. Y recuerda para qué sirve la placa: es el DNI del aparato; de ella sacas el gas, la presión de reglaje y la potencia que necesitarás para rellenar el certificado de puesta en marcha.</a:t>
+            </a:r>
+          </a:p>
+        </p:txBody>
+      </p:sp>
+      <p:sp>
+        <p:nvSpPr>
+          <p:cNvPr id="4" name="Slide Number Placeholder 3"/>
+          <p:cNvSpPr>
+            <a:spLocks noGrp="1"/>
+          </p:cNvSpPr>
+          <p:nvPr>
+            <p:ph type="sldNum" idx="5" sz="quarter"/>
+          </p:nvPr>
+        </p:nvSpPr>
+        <p:spPr/>
+      </p:sp>
+    </p:spTree>
+  </p:cSld>
+  <p:clrMapOvr>
+    <a:masterClrMapping/>
+  </p:clrMapOvr>
+</p:notes>
+</file>
+
+<file path=ppt/notesSlides/notesSlide19.xml><?xml version="1.0" encoding="utf-8"?>
+<p:notes xmlns:a="http://schemas.openxmlformats.org/drawingml/2006/main" xmlns:p="http://schemas.openxmlformats.org/presentationml/2006/main" xmlns:r="http://schemas.openxmlformats.org/officeDocument/2006/relationships">
+  <p:cSld>
+    <p:spTree>
+      <p:nvGrpSpPr>
+        <p:cNvPr id="1" name=""/>
+        <p:cNvGrpSpPr/>
+        <p:nvPr/>
+      </p:nvGrpSpPr>
+      <p:grpSpPr>
+        <a:xfrm>
+          <a:off x="0" y="0"/>
+          <a:ext cx="0" cy="0"/>
+          <a:chOff x="0" y="0"/>
+          <a:chExt cx="0" cy="0"/>
+        </a:xfrm>
+      </p:grpSpPr>
+      <p:sp>
+        <p:nvSpPr>
+          <p:cNvPr id="2" name="Slide Image Placeholder 1"/>
+          <p:cNvSpPr>
+            <a:spLocks noGrp="1"/>
+          </p:cNvSpPr>
+          <p:nvPr>
+            <p:ph type="sldImg" idx="2"/>
+          </p:nvPr>
+        </p:nvSpPr>
+        <p:spPr/>
+      </p:sp>
+      <p:sp>
+        <p:nvSpPr>
+          <p:cNvPr id="3" name="Notes Placeholder 2"/>
+          <p:cNvSpPr>
+            <a:spLocks noGrp="1"/>
+          </p:cNvSpPr>
+          <p:nvPr>
+            <p:ph type="body" idx="3" sz="quarter"/>
+          </p:nvPr>
+        </p:nvSpPr>
+        <p:spPr/>
+        <p:txBody>
+          <a:bodyPr/>
+          <a:lstStyle/>
+          <a:p>
+            <a:r>
               <a:t>N1: Cerramos fuerte. Si me quedo con lo esencial de este primer vídeo, ¿qué es?</a:t>
             </a:r>
           </a:p>
@@ -1342,12 +1646,12 @@
           <a:lstStyle/>
           <a:p>
             <a:r>
-              <a:t>N1: ¿Cuándo se permite vender y arrancar un aparato?</a:t>
-            </a:r>
-          </a:p>
-          <a:p>
-            <a:r>
-              <a:t>N2: La idea es de sentido común y luego la norma la afina. Solo se permite comercializar y poner en marcha aparatos que, en condiciones normales de funcionamiento, no pongan en peligro la seguridad de personas, animales ni bienes. La otra cara: si un aparato cumple esta ITC, nadie puede prohibir, limitar ni obstaculizar su venta; sería competencia desleal. Pero si se comprueba que un aparato entraña riesgos, la Administración competente, que es la comunidad autónoma, adopta medidas para retirarlo del mercado o restringir su comercialización. Ejemplo: un modelo con un defecto de fábrica que provoca fugas puede ser retirado de las tiendas por la comunidad autónoma.</a:t>
+              <a:t>N1: Vamos con una de las trampas favoritas del examen sobre las dos puertas de la ITC.</a:t>
+            </a:r>
+          </a:p>
+          <a:p>
+            <a:r>
+              <a:t>N2: Recuerda la regla mental: seguridad de fábrica solo a unos; arrancar el aparato en casa del cliente, a todos. ¿Cuál de las dos era la universal?</a:t>
             </a:r>
           </a:p>
         </p:txBody>
@@ -1417,12 +1721,12 @@
           <a:lstStyle/>
           <a:p>
             <a:r>
-              <a:t>N1: Esa fórmula, condiciones normales de funcionamiento, se repite por toda la ITC. ¿Qué significa?</a:t>
-            </a:r>
-          </a:p>
-          <a:p>
-            <a:r>
-              <a:t>N2: Grábate que son tres patas, y tienen que darse las tres a la vez. Una: que esté bien instalado y con mantenimiento periódico, según las instrucciones del fabricante. Dos: que se use con el gas correcto, dentro del Índice de Wobbe y la presión de suministro previstos. Y tres: que se use para lo que es, sus fines previstos. El Índice de Wobbe, para que nos entendamos, es un número que mide la energía que entrega un gas por el quemador; no necesitas calcularlo, solo saber que define qué gases valen para ese aparato. Si el gas de la red se sale de ese rango, el aparato deja de estar en condiciones normales. Ejemplo: enganchar un aparato preparado para butano a una red de gas natural sin adecuarlo te da llamas amarillas e inquemados.</a:t>
+              <a:t>N1: ¿Por qué la be?</a:t>
+            </a:r>
+          </a:p>
+          <a:p>
+            <a:r>
+              <a:t>N2: Porque la seguridad y la certificación solo se exigen a los aparatos que no van por una directiva europea propia; en cambio, la documentación y la puesta en marcha alcanzan a todos, lleven o no marcado ce. El truco para no fallar: si la opción dice a todos, casi siempre habla de documentación y puesta en marcha.</a:t>
             </a:r>
           </a:p>
         </p:txBody>
@@ -1492,12 +1796,12 @@
           <a:lstStyle/>
           <a:p>
             <a:r>
-              <a:t>N1: ¿Qué papeles tienen que acompañar al aparato cuando se vende?</a:t>
-            </a:r>
-          </a:p>
-          <a:p>
-            <a:r>
-              <a:t>N2: Piénsalo así: un aparato no se vende solo, se vende con su documentación. Y son dos manuales distintos que conviene no confundir. El manual de información técnica, que es para ti, el instalador: cómo instalar, regular y mantener. Y el manual de instrucciones de uso y mantenimiento, que es para el cliente: cómo encenderlo y usarlo sin peligro. Más las advertencias, que van en el propio aparato y en su embalaje. Y todo, como mínimo, en español. Truco de examen: si te ofrecen la opción de que basta con que venga en inglés, es falsa.</a:t>
+              <a:t>N1: ¿Cuándo se permite vender y arrancar un aparato?</a:t>
+            </a:r>
+          </a:p>
+          <a:p>
+            <a:r>
+              <a:t>N2: La idea es de sentido común y luego la norma la afina. Solo se permite comercializar y poner en marcha aparatos que, en condiciones normales de funcionamiento, no pongan en peligro la seguridad de personas, animales ni bienes. La otra cara: si un aparato cumple esta ITC, nadie puede prohibir, limitar ni obstaculizar su venta; sería competencia desleal. Pero si se comprueba que un aparato entraña riesgos, la Administración competente, que es la comunidad autónoma, adopta medidas para retirarlo del mercado o restringir su comercialización. Ejemplo: un modelo con un defecto de fábrica que provoca fugas puede ser retirado de las tiendas por la comunidad autónoma.</a:t>
             </a:r>
           </a:p>
         </p:txBody>
@@ -1567,12 +1871,12 @@
           <a:lstStyle/>
           <a:p>
             <a:r>
-              <a:t>N1: El manual técnico trae una lista larguísima. ¿Qué datos no pueden faltar?</a:t>
-            </a:r>
-          </a:p>
-          <a:p>
-            <a:r>
-              <a:t>N2: Es verdad que la lista es larga, pero no todo pesa igual. Quédate con las estrellas: tipo de gas, presión de suministro, consumo nominal, aire de combustión, evacuación de los gases y datos eléctricos con el esquema de bornes. ¿Por qué esos? Porque son los datos que necesitas sí o sí para montar y regular el aparato. El resto, como el caudal másico en gramos por segundo para el cálculo de chimeneas, o las combinaciones de quemadores de aire forzado, son detalles que la norma añade para casos concretos. Ejemplo: sin la presión de suministro no sabes a qué presión regular la caldera, y sin el aire de combustión no sabes qué ventilación exige el local.</a:t>
+              <a:t>N1: Esa fórmula, condiciones normales de funcionamiento, se repite por toda la ITC. ¿Qué significa?</a:t>
+            </a:r>
+          </a:p>
+          <a:p>
+            <a:r>
+              <a:t>N2: Grábate que son tres patas, y tienen que darse las tres a la vez. Una: que esté bien instalado y con mantenimiento periódico, según las instrucciones del fabricante. Dos: que se use con el gas correcto, dentro del Índice de Wobbe y la presión de suministro previstos. Y tres: que se use para lo que es, sus fines previstos. El Índice de Wobbe, para que nos entendamos, es un número que mide la energía que entrega un gas por el quemador; no necesitas calcularlo, solo saber que define qué gases valen para ese aparato. Si el gas de la red se sale de ese rango, el aparato deja de estar en condiciones normales. Ejemplo: enganchar un aparato preparado para butano a una red de gas natural sin adecuarlo te da llamas amarillas e inquemados.</a:t>
             </a:r>
           </a:p>
         </p:txBody>
@@ -4658,7 +4962,7 @@
       </p:sp>
       <p:sp>
         <p:nvSpPr>
-          <p:cNvPr id="4" name="Rounded Rectangle 3"/>
+          <p:cNvPr id="4" name="Rectangle 3"/>
           <p:cNvSpPr/>
           <p:nvPr/>
         </p:nvSpPr>
@@ -4667,7 +4971,7 @@
             <a:off x="868680" y="2057400"/>
             <a:ext cx="1463040" cy="82296"/>
           </a:xfrm>
-          <a:prstGeom prst="roundRect">
+          <a:prstGeom prst="rect">
             <a:avLst/>
           </a:prstGeom>
           <a:solidFill>
@@ -4784,6 +5088,18 @@
   <p:clrMapOvr>
     <a:masterClrMapping/>
   </p:clrMapOvr>
+  <mc:AlternateContent xmlns:mc="http://schemas.openxmlformats.org/markup-compatibility/2006">
+    <mc:Choice xmlns:p14="http://schemas.microsoft.com/office/powerpoint/2010/main" Requires="p14">
+      <p:transition spd="med" p14:dur="700">
+        <p14:cube dir="l"/>
+      </p:transition>
+    </mc:Choice>
+    <mc:Fallback>
+      <p:transition spd="med">
+        <p:push dir="l"/>
+      </p:transition>
+    </mc:Fallback>
+  </mc:AlternateContent>
 </p:sld>
 </file>
 
@@ -4871,7 +5187,7 @@
                 </a:solidFill>
                 <a:latin typeface="Montserrat"/>
               </a:rPr>
-              <a:t>010 / 015</a:t>
+              <a:t>010 / 019</a:t>
             </a:r>
           </a:p>
         </p:txBody>
@@ -4939,7 +5255,7 @@
                 </a:solidFill>
                 <a:latin typeface="Montserrat"/>
               </a:rPr>
-              <a:t>APARTADO 2.2.2 · MANUAL DE USO</a:t>
+              <a:t>APARTADO 2.2 · PUESTA EN EL MERCADO</a:t>
             </a:r>
           </a:p>
         </p:txBody>
@@ -4973,14 +5289,14 @@
                 </a:solidFill>
                 <a:latin typeface="Montserrat"/>
               </a:rPr>
-              <a:t>El manual del cliente</a:t>
-            </a:r>
-          </a:p>
-        </p:txBody>
-      </p:sp>
-      <p:sp>
-        <p:nvSpPr>
-          <p:cNvPr id="7" name="Rounded Rectangle 6"/>
+              <a:t>Dos manuales y advertencias</a:t>
+            </a:r>
+          </a:p>
+        </p:txBody>
+      </p:sp>
+      <p:sp>
+        <p:nvSpPr>
+          <p:cNvPr id="7" name="Rectangle 6"/>
           <p:cNvSpPr/>
           <p:nvPr/>
         </p:nvSpPr>
@@ -4989,7 +5305,7 @@
             <a:off x="868680" y="1627632"/>
             <a:ext cx="2011680" cy="73152"/>
           </a:xfrm>
-          <a:prstGeom prst="roundRect">
+          <a:prstGeom prst="rect">
             <a:avLst/>
           </a:prstGeom>
           <a:solidFill>
@@ -5031,7 +5347,7 @@
         <p:spPr>
           <a:xfrm>
             <a:off x="822960" y="1965960"/>
-            <a:ext cx="4983480" cy="4206240"/>
+            <a:ext cx="5029200" cy="4206240"/>
           </a:xfrm>
           <a:prstGeom prst="rect">
             <a:avLst/>
@@ -5065,7 +5381,7 @@
                 </a:solidFill>
                 <a:latin typeface="Montserrat"/>
               </a:rPr>
-              <a:t>Restricciones de uso</a:t>
+              <a:t>Manual técnico (instalador)</a:t>
             </a:r>
           </a:p>
           <a:p>
@@ -5090,7 +5406,7 @@
                 </a:solidFill>
                 <a:latin typeface="Montserrat"/>
               </a:rPr>
-              <a:t>Encendido y elementos regulables</a:t>
+              <a:t>Manual de uso (usuario)</a:t>
             </a:r>
           </a:p>
           <a:p>
@@ -5115,7 +5431,7 @@
                 </a:solidFill>
                 <a:latin typeface="Montserrat"/>
               </a:rPr>
-              <a:t>Limpieza y mantenimiento básico</a:t>
+              <a:t>Advertencias en aparato y embalaje</a:t>
             </a:r>
           </a:p>
           <a:p>
@@ -5140,21 +5456,21 @@
                 </a:solidFill>
                 <a:latin typeface="Montserrat"/>
               </a:rPr>
-              <a:t>Aviso contra falsas maniobras</a:t>
-            </a:r>
-          </a:p>
-        </p:txBody>
-      </p:sp>
-      <p:sp>
-        <p:nvSpPr>
-          <p:cNvPr id="9" name="imgph" descr="IMGQ:person lighting gas stove"/>
+              <a:t>Todo, como mínimo, en español</a:t>
+            </a:r>
+          </a:p>
+        </p:txBody>
+      </p:sp>
+      <p:sp>
+        <p:nvSpPr>
+          <p:cNvPr id="9" name="imgph" descr="IMGQ:boiler instruction manual booklet"/>
           <p:cNvSpPr/>
           <p:nvPr/>
         </p:nvSpPr>
         <p:spPr>
           <a:xfrm>
-            <a:off x="5806440" y="1051560"/>
-            <a:ext cx="5298947" cy="4629150"/>
+            <a:off x="6080760" y="1965960"/>
+            <a:ext cx="5303520" cy="4572000"/>
           </a:xfrm>
           <a:prstGeom prst="roundRect">
             <a:avLst/>
@@ -5199,8 +5515,8 @@
         </p:nvSpPr>
         <p:spPr>
           <a:xfrm>
-            <a:off x="6080760" y="2726055"/>
-            <a:ext cx="4750307" cy="1280160"/>
+            <a:off x="6355080" y="3611880"/>
+            <a:ext cx="4754880" cy="1280160"/>
           </a:xfrm>
           <a:prstGeom prst="rect">
             <a:avLst/>
@@ -5221,7 +5537,7 @@
                 </a:solidFill>
                 <a:latin typeface="Montserrat"/>
               </a:rPr>
-              <a:t>IMAGEN REALISTA</a:t>
+              <a:t>IMAGEN</a:t>
             </a:r>
           </a:p>
           <a:p>
@@ -5233,7 +5549,7 @@
                 </a:solidFill>
                 <a:latin typeface="Montserrat"/>
               </a:rPr>
-              <a:t>person lighting gas stove</a:t>
+              <a:t>boiler instruction manual booklet</a:t>
             </a:r>
           </a:p>
         </p:txBody>
@@ -5243,6 +5559,18 @@
   <p:clrMapOvr>
     <a:masterClrMapping/>
   </p:clrMapOvr>
+  <mc:AlternateContent xmlns:mc="http://schemas.openxmlformats.org/markup-compatibility/2006">
+    <mc:Choice xmlns:p14="http://schemas.microsoft.com/office/powerpoint/2010/main" Requires="p14">
+      <p:transition spd="med" p14:dur="700">
+        <p14:cube dir="r"/>
+      </p:transition>
+    </mc:Choice>
+    <mc:Fallback>
+      <p:transition spd="med">
+        <p:push dir="r"/>
+      </p:transition>
+    </mc:Fallback>
+  </mc:AlternateContent>
 </p:sld>
 </file>
 
@@ -5330,7 +5658,7 @@
                 </a:solidFill>
                 <a:latin typeface="Montserrat"/>
               </a:rPr>
-              <a:t>011 / 015</a:t>
+              <a:t>011 / 019</a:t>
             </a:r>
           </a:p>
         </p:txBody>
@@ -5398,7 +5726,7 @@
                 </a:solidFill>
                 <a:latin typeface="Montserrat"/>
               </a:rPr>
-              <a:t>APARTADOS 2.2.3-2.2.4 · ADVERTENCIAS</a:t>
+              <a:t>APARTADO 2.2.1 · MANUAL TÉCNICO</a:t>
             </a:r>
           </a:p>
         </p:txBody>
@@ -5432,14 +5760,14 @@
                 </a:solidFill>
                 <a:latin typeface="Montserrat"/>
               </a:rPr>
-              <a:t>Aparato y embalaje</a:t>
-            </a:r>
-          </a:p>
-        </p:txBody>
-      </p:sp>
-      <p:sp>
-        <p:nvSpPr>
-          <p:cNvPr id="7" name="Rounded Rectangle 6"/>
+              <a:t>El libro del profesional</a:t>
+            </a:r>
+          </a:p>
+        </p:txBody>
+      </p:sp>
+      <p:sp>
+        <p:nvSpPr>
+          <p:cNvPr id="7" name="Rectangle 6"/>
           <p:cNvSpPr/>
           <p:nvPr/>
         </p:nvSpPr>
@@ -5448,7 +5776,7 @@
             <a:off x="868680" y="1627632"/>
             <a:ext cx="2011680" cy="73152"/>
           </a:xfrm>
-          <a:prstGeom prst="roundRect">
+          <a:prstGeom prst="rect">
             <a:avLst/>
           </a:prstGeom>
           <a:solidFill>
@@ -5489,8 +5817,8 @@
         </p:nvSpPr>
         <p:spPr>
           <a:xfrm>
-            <a:off x="822960" y="1965960"/>
-            <a:ext cx="4983480" cy="4206240"/>
+            <a:off x="6355080" y="1965960"/>
+            <a:ext cx="5029200" cy="4206240"/>
           </a:xfrm>
           <a:prstGeom prst="rect">
             <a:avLst/>
@@ -5524,7 +5852,7 @@
                 </a:solidFill>
                 <a:latin typeface="Montserrat"/>
               </a:rPr>
-              <a:t>En el aparato: placa (anexo 2)</a:t>
+              <a:t>Tipo de gas y presión de suministro</a:t>
             </a:r>
           </a:p>
           <a:p>
@@ -5549,7 +5877,7 @@
                 </a:solidFill>
                 <a:latin typeface="Montserrat"/>
               </a:rPr>
-              <a:t>En la caja: tipo de gas y presión</a:t>
+              <a:t>Consumo nominal</a:t>
             </a:r>
           </a:p>
           <a:p>
@@ -5574,21 +5902,71 @@
                 </a:solidFill>
                 <a:latin typeface="Montserrat"/>
               </a:rPr>
-              <a:t>En la caja: restricciones de uso</a:t>
-            </a:r>
-          </a:p>
-        </p:txBody>
-      </p:sp>
-      <p:sp>
-        <p:nvSpPr>
-          <p:cNvPr id="9" name="imgph" descr="IMGQ:gas appliance rating label"/>
+              <a:t>Aire de combustión</a:t>
+            </a:r>
+          </a:p>
+          <a:p>
+            <a:pPr>
+              <a:spcAft>
+                <a:spcPts val="1100"/>
+              </a:spcAft>
+            </a:pPr>
+            <a:r>
+              <a:rPr sz="1600" b="1" i="0">
+                <a:solidFill>
+                  <a:srgbClr val="E8801A"/>
+                </a:solidFill>
+                <a:latin typeface="Montserrat"/>
+              </a:rPr>
+              <a:t>▸  </a:t>
+            </a:r>
+            <a:r>
+              <a:rPr sz="1600" b="0" i="0">
+                <a:solidFill>
+                  <a:srgbClr val="1B2330"/>
+                </a:solidFill>
+                <a:latin typeface="Montserrat"/>
+              </a:rPr>
+              <a:t>Evacuación de humos</a:t>
+            </a:r>
+          </a:p>
+          <a:p>
+            <a:pPr>
+              <a:spcAft>
+                <a:spcPts val="1100"/>
+              </a:spcAft>
+            </a:pPr>
+            <a:r>
+              <a:rPr sz="1600" b="1" i="0">
+                <a:solidFill>
+                  <a:srgbClr val="E8801A"/>
+                </a:solidFill>
+                <a:latin typeface="Montserrat"/>
+              </a:rPr>
+              <a:t>▸  </a:t>
+            </a:r>
+            <a:r>
+              <a:rPr sz="1600" b="0" i="0">
+                <a:solidFill>
+                  <a:srgbClr val="1B2330"/>
+                </a:solidFill>
+                <a:latin typeface="Montserrat"/>
+              </a:rPr>
+              <a:t>Datos eléctricos y bornes</a:t>
+            </a:r>
+          </a:p>
+        </p:txBody>
+      </p:sp>
+      <p:sp>
+        <p:nvSpPr>
+          <p:cNvPr id="9" name="imgph" descr="IMGQ:gas boiler wiring diagram"/>
           <p:cNvSpPr/>
           <p:nvPr/>
         </p:nvSpPr>
         <p:spPr>
           <a:xfrm>
-            <a:off x="5806440" y="1051560"/>
-            <a:ext cx="5298947" cy="4629150"/>
+            <a:off x="822960" y="1965960"/>
+            <a:ext cx="5303520" cy="4572000"/>
           </a:xfrm>
           <a:prstGeom prst="roundRect">
             <a:avLst/>
@@ -5633,8 +6011,8 @@
         </p:nvSpPr>
         <p:spPr>
           <a:xfrm>
-            <a:off x="6080760" y="2726055"/>
-            <a:ext cx="4750307" cy="1280160"/>
+            <a:off x="1097280" y="3611880"/>
+            <a:ext cx="4754880" cy="1280160"/>
           </a:xfrm>
           <a:prstGeom prst="rect">
             <a:avLst/>
@@ -5655,7 +6033,7 @@
                 </a:solidFill>
                 <a:latin typeface="Montserrat"/>
               </a:rPr>
-              <a:t>IMAGEN REALISTA</a:t>
+              <a:t>IMAGEN</a:t>
             </a:r>
           </a:p>
           <a:p>
@@ -5667,7 +6045,7 @@
                 </a:solidFill>
                 <a:latin typeface="Montserrat"/>
               </a:rPr>
-              <a:t>gas appliance rating label</a:t>
+              <a:t>gas boiler wiring diagram</a:t>
             </a:r>
           </a:p>
         </p:txBody>
@@ -5677,6 +6055,18 @@
   <p:clrMapOvr>
     <a:masterClrMapping/>
   </p:clrMapOvr>
+  <mc:AlternateContent xmlns:mc="http://schemas.openxmlformats.org/markup-compatibility/2006">
+    <mc:Choice xmlns:p14="http://schemas.microsoft.com/office/powerpoint/2010/main" Requires="p14">
+      <p:transition spd="med" p14:dur="700">
+        <p14:cube dir="l"/>
+      </p:transition>
+    </mc:Choice>
+    <mc:Fallback>
+      <p:transition spd="med">
+        <p:push dir="l"/>
+      </p:transition>
+    </mc:Fallback>
+  </mc:AlternateContent>
 </p:sld>
 </file>
 
@@ -5764,7 +6154,7 @@
                 </a:solidFill>
                 <a:latin typeface="Montserrat"/>
               </a:rPr>
-              <a:t>012 / 015</a:t>
+              <a:t>012 / 019</a:t>
             </a:r>
           </a:p>
         </p:txBody>
@@ -5832,7 +6222,7 @@
                 </a:solidFill>
                 <a:latin typeface="Montserrat"/>
               </a:rPr>
-              <a:t>APARTADO 2.3 · EQUIPOS</a:t>
+              <a:t>APARTADO 2.2.2 · MANUAL DE USO</a:t>
             </a:r>
           </a:p>
         </p:txBody>
@@ -5866,14 +6256,14 @@
                 </a:solidFill>
                 <a:latin typeface="Montserrat"/>
               </a:rPr>
-              <a:t>Aparato frente a equipo</a:t>
-            </a:r>
-          </a:p>
-        </p:txBody>
-      </p:sp>
-      <p:sp>
-        <p:nvSpPr>
-          <p:cNvPr id="7" name="Rounded Rectangle 6"/>
+              <a:t>El manual del cliente</a:t>
+            </a:r>
+          </a:p>
+        </p:txBody>
+      </p:sp>
+      <p:sp>
+        <p:nvSpPr>
+          <p:cNvPr id="7" name="Rectangle 6"/>
           <p:cNvSpPr/>
           <p:nvPr/>
         </p:nvSpPr>
@@ -5882,7 +6272,7 @@
             <a:off x="868680" y="1627632"/>
             <a:ext cx="2011680" cy="73152"/>
           </a:xfrm>
-          <a:prstGeom prst="roundRect">
+          <a:prstGeom prst="rect">
             <a:avLst/>
           </a:prstGeom>
           <a:solidFill>
@@ -5924,7 +6314,7 @@
         <p:spPr>
           <a:xfrm>
             <a:off x="822960" y="1965960"/>
-            <a:ext cx="4983480" cy="4206240"/>
+            <a:ext cx="5029200" cy="4206240"/>
           </a:xfrm>
           <a:prstGeom prst="rect">
             <a:avLst/>
@@ -5958,7 +6348,7 @@
                 </a:solidFill>
                 <a:latin typeface="Montserrat"/>
               </a:rPr>
-              <a:t>Aparato = conjunto terminado (caldera)</a:t>
+              <a:t>Restricciones de uso</a:t>
             </a:r>
           </a:p>
           <a:p>
@@ -5983,7 +6373,7 @@
                 </a:solidFill>
                 <a:latin typeface="Montserrat"/>
               </a:rPr>
-              <a:t>Equipo = pieza integrada (quemador, válvula)</a:t>
+              <a:t>Encendido y elementos regulables</a:t>
             </a:r>
           </a:p>
           <a:p>
@@ -6008,21 +6398,46 @@
                 </a:solidFill>
                 <a:latin typeface="Montserrat"/>
               </a:rPr>
-              <a:t>Cada equipo, con sus instrucciones</a:t>
-            </a:r>
-          </a:p>
-        </p:txBody>
-      </p:sp>
-      <p:sp>
-        <p:nvSpPr>
-          <p:cNvPr id="9" name="imgph" descr="IMGQ:gas valve component"/>
+              <a:t>Limpieza y mantenimiento básico</a:t>
+            </a:r>
+          </a:p>
+          <a:p>
+            <a:pPr>
+              <a:spcAft>
+                <a:spcPts val="1100"/>
+              </a:spcAft>
+            </a:pPr>
+            <a:r>
+              <a:rPr sz="1600" b="1" i="0">
+                <a:solidFill>
+                  <a:srgbClr val="E8801A"/>
+                </a:solidFill>
+                <a:latin typeface="Montserrat"/>
+              </a:rPr>
+              <a:t>▸  </a:t>
+            </a:r>
+            <a:r>
+              <a:rPr sz="1600" b="0" i="0">
+                <a:solidFill>
+                  <a:srgbClr val="1B2330"/>
+                </a:solidFill>
+                <a:latin typeface="Montserrat"/>
+              </a:rPr>
+              <a:t>Aviso contra falsas maniobras</a:t>
+            </a:r>
+          </a:p>
+        </p:txBody>
+      </p:sp>
+      <p:sp>
+        <p:nvSpPr>
+          <p:cNvPr id="9" name="imgph" descr="IMGQ:person lighting gas stove"/>
           <p:cNvSpPr/>
           <p:nvPr/>
         </p:nvSpPr>
         <p:spPr>
           <a:xfrm>
-            <a:off x="5806440" y="1051560"/>
-            <a:ext cx="5298947" cy="4629150"/>
+            <a:off x="6080760" y="1965960"/>
+            <a:ext cx="5303520" cy="4572000"/>
           </a:xfrm>
           <a:prstGeom prst="roundRect">
             <a:avLst/>
@@ -6067,8 +6482,8 @@
         </p:nvSpPr>
         <p:spPr>
           <a:xfrm>
-            <a:off x="6080760" y="2726055"/>
-            <a:ext cx="4750307" cy="1280160"/>
+            <a:off x="6355080" y="3611880"/>
+            <a:ext cx="4754880" cy="1280160"/>
           </a:xfrm>
           <a:prstGeom prst="rect">
             <a:avLst/>
@@ -6089,7 +6504,7 @@
                 </a:solidFill>
                 <a:latin typeface="Montserrat"/>
               </a:rPr>
-              <a:t>IMAGEN REALISTA</a:t>
+              <a:t>IMAGEN</a:t>
             </a:r>
           </a:p>
           <a:p>
@@ -6101,7 +6516,7 @@
                 </a:solidFill>
                 <a:latin typeface="Montserrat"/>
               </a:rPr>
-              <a:t>gas valve component</a:t>
+              <a:t>person lighting gas stove</a:t>
             </a:r>
           </a:p>
         </p:txBody>
@@ -6111,6 +6526,18 @@
   <p:clrMapOvr>
     <a:masterClrMapping/>
   </p:clrMapOvr>
+  <mc:AlternateContent xmlns:mc="http://schemas.openxmlformats.org/markup-compatibility/2006">
+    <mc:Choice xmlns:p14="http://schemas.microsoft.com/office/powerpoint/2010/main" Requires="p14">
+      <p:transition spd="med" p14:dur="700">
+        <p14:cube dir="r"/>
+      </p:transition>
+    </mc:Choice>
+    <mc:Fallback>
+      <p:transition spd="med">
+        <p:push dir="r"/>
+      </p:transition>
+    </mc:Fallback>
+  </mc:AlternateContent>
 </p:sld>
 </file>
 
@@ -6198,7 +6625,7 @@
                 </a:solidFill>
                 <a:latin typeface="Montserrat"/>
               </a:rPr>
-              <a:t>013 / 015</a:t>
+              <a:t>013 / 019</a:t>
             </a:r>
           </a:p>
         </p:txBody>
@@ -6266,7 +6693,7 @@
                 </a:solidFill>
                 <a:latin typeface="Montserrat"/>
               </a:rPr>
-              <a:t>APARTADO 3 · CONFORMIDAD</a:t>
+              <a:t>APARTADOS 2.2.3-2.2.4 · ADVERTENCIAS</a:t>
             </a:r>
           </a:p>
         </p:txBody>
@@ -6300,14 +6727,14 @@
                 </a:solidFill>
                 <a:latin typeface="Montserrat"/>
               </a:rPr>
-              <a:t>Cómo se certifica el aparato</a:t>
-            </a:r>
-          </a:p>
-        </p:txBody>
-      </p:sp>
-      <p:sp>
-        <p:nvSpPr>
-          <p:cNvPr id="7" name="Rounded Rectangle 6"/>
+              <a:t>Aparato y embalaje</a:t>
+            </a:r>
+          </a:p>
+        </p:txBody>
+      </p:sp>
+      <p:sp>
+        <p:nvSpPr>
+          <p:cNvPr id="7" name="Rectangle 6"/>
           <p:cNvSpPr/>
           <p:nvPr/>
         </p:nvSpPr>
@@ -6316,7 +6743,7 @@
             <a:off x="868680" y="1627632"/>
             <a:ext cx="2011680" cy="73152"/>
           </a:xfrm>
-          <a:prstGeom prst="roundRect">
+          <a:prstGeom prst="rect">
             <a:avLst/>
           </a:prstGeom>
           <a:solidFill>
@@ -6357,8 +6784,8 @@
         </p:nvSpPr>
         <p:spPr>
           <a:xfrm>
-            <a:off x="822960" y="1965960"/>
-            <a:ext cx="4983480" cy="4206240"/>
+            <a:off x="6355080" y="1965960"/>
+            <a:ext cx="5029200" cy="4206240"/>
           </a:xfrm>
           <a:prstGeom prst="rect">
             <a:avLst/>
@@ -6392,7 +6819,7 @@
                 </a:solidFill>
                 <a:latin typeface="Montserrat"/>
               </a:rPr>
-              <a:t>Cumple normas UNE / UNE-EN / EN</a:t>
+              <a:t>En el aparato: placa (anexo 2)</a:t>
             </a:r>
           </a:p>
           <a:p>
@@ -6417,7 +6844,7 @@
                 </a:solidFill>
                 <a:latin typeface="Montserrat"/>
               </a:rPr>
-              <a:t>Sin norma: anexo 3</a:t>
+              <a:t>En la caja: tipo de gas y presión</a:t>
             </a:r>
           </a:p>
           <a:p>
@@ -6442,21 +6869,21 @@
                 </a:solidFill>
                 <a:latin typeface="Montserrat"/>
               </a:rPr>
-              <a:t>Camino: a + b, o bien c</a:t>
-            </a:r>
-          </a:p>
-        </p:txBody>
-      </p:sp>
-      <p:sp>
-        <p:nvSpPr>
-          <p:cNvPr id="9" name="imgph" descr="IMGQ:quality control inspection factory"/>
+              <a:t>En la caja: restricciones de uso</a:t>
+            </a:r>
+          </a:p>
+        </p:txBody>
+      </p:sp>
+      <p:sp>
+        <p:nvSpPr>
+          <p:cNvPr id="9" name="imgph" descr="IMGQ:gas appliance rating label"/>
           <p:cNvSpPr/>
           <p:nvPr/>
         </p:nvSpPr>
         <p:spPr>
           <a:xfrm>
-            <a:off x="5806440" y="1051560"/>
-            <a:ext cx="5298947" cy="4629150"/>
+            <a:off x="822960" y="1965960"/>
+            <a:ext cx="5303520" cy="4572000"/>
           </a:xfrm>
           <a:prstGeom prst="roundRect">
             <a:avLst/>
@@ -6501,8 +6928,8 @@
         </p:nvSpPr>
         <p:spPr>
           <a:xfrm>
-            <a:off x="6080760" y="2726055"/>
-            <a:ext cx="4750307" cy="1280160"/>
+            <a:off x="1097280" y="3611880"/>
+            <a:ext cx="4754880" cy="1280160"/>
           </a:xfrm>
           <a:prstGeom prst="rect">
             <a:avLst/>
@@ -6523,7 +6950,7 @@
                 </a:solidFill>
                 <a:latin typeface="Montserrat"/>
               </a:rPr>
-              <a:t>IMAGEN REALISTA</a:t>
+              <a:t>IMAGEN</a:t>
             </a:r>
           </a:p>
           <a:p>
@@ -6535,7 +6962,7 @@
                 </a:solidFill>
                 <a:latin typeface="Montserrat"/>
               </a:rPr>
-              <a:t>quality control inspection factory</a:t>
+              <a:t>gas appliance rating label</a:t>
             </a:r>
           </a:p>
         </p:txBody>
@@ -6545,6 +6972,18 @@
   <p:clrMapOvr>
     <a:masterClrMapping/>
   </p:clrMapOvr>
+  <mc:AlternateContent xmlns:mc="http://schemas.openxmlformats.org/markup-compatibility/2006">
+    <mc:Choice xmlns:p14="http://schemas.microsoft.com/office/powerpoint/2010/main" Requires="p14">
+      <p:transition spd="med" p14:dur="700">
+        <p14:cube dir="l"/>
+      </p:transition>
+    </mc:Choice>
+    <mc:Fallback>
+      <p:transition spd="med">
+        <p:push dir="l"/>
+      </p:transition>
+    </mc:Fallback>
+  </mc:AlternateContent>
 </p:sld>
 </file>
 
@@ -6632,7 +7071,7 @@
                 </a:solidFill>
                 <a:latin typeface="Montserrat"/>
               </a:rPr>
-              <a:t>014 / 015</a:t>
+              <a:t>014 / 019</a:t>
             </a:r>
           </a:p>
         </p:txBody>
@@ -6700,7 +7139,7 @@
                 </a:solidFill>
                 <a:latin typeface="Montserrat"/>
               </a:rPr>
-              <a:t>APARTADO 4 · MARCADO</a:t>
+              <a:t>APARTADO 2.3 · EQUIPOS</a:t>
             </a:r>
           </a:p>
         </p:txBody>
@@ -6734,14 +7173,14 @@
                 </a:solidFill>
                 <a:latin typeface="Montserrat"/>
               </a:rPr>
-              <a:t>Placa e instrucciones</a:t>
-            </a:r>
-          </a:p>
-        </p:txBody>
-      </p:sp>
-      <p:sp>
-        <p:nvSpPr>
-          <p:cNvPr id="7" name="Rounded Rectangle 6"/>
+              <a:t>Aparato frente a equipo</a:t>
+            </a:r>
+          </a:p>
+        </p:txBody>
+      </p:sp>
+      <p:sp>
+        <p:nvSpPr>
+          <p:cNvPr id="7" name="Rectangle 6"/>
           <p:cNvSpPr/>
           <p:nvPr/>
         </p:nvSpPr>
@@ -6750,7 +7189,7 @@
             <a:off x="868680" y="1627632"/>
             <a:ext cx="2011680" cy="73152"/>
           </a:xfrm>
-          <a:prstGeom prst="roundRect">
+          <a:prstGeom prst="rect">
             <a:avLst/>
           </a:prstGeom>
           <a:solidFill>
@@ -6792,7 +7231,7 @@
         <p:spPr>
           <a:xfrm>
             <a:off x="822960" y="1965960"/>
-            <a:ext cx="4983480" cy="4206240"/>
+            <a:ext cx="5029200" cy="4206240"/>
           </a:xfrm>
           <a:prstGeom prst="rect">
             <a:avLst/>
@@ -6826,7 +7265,7 @@
                 </a:solidFill>
                 <a:latin typeface="Montserrat"/>
               </a:rPr>
-              <a:t>Placa visible → anexo 2</a:t>
+              <a:t>Aparato = conjunto terminado (caldera)</a:t>
             </a:r>
           </a:p>
           <a:p>
@@ -6851,21 +7290,46 @@
                 </a:solidFill>
                 <a:latin typeface="Montserrat"/>
               </a:rPr>
-              <a:t>Instrucciones → normas o anexo 3</a:t>
-            </a:r>
-          </a:p>
-        </p:txBody>
-      </p:sp>
-      <p:sp>
-        <p:nvSpPr>
-          <p:cNvPr id="9" name="imgph" descr="IMGQ:gas meter cabinet nameplate"/>
+              <a:t>Equipo = pieza integrada (quemador, válvula)</a:t>
+            </a:r>
+          </a:p>
+          <a:p>
+            <a:pPr>
+              <a:spcAft>
+                <a:spcPts val="1100"/>
+              </a:spcAft>
+            </a:pPr>
+            <a:r>
+              <a:rPr sz="1600" b="1" i="0">
+                <a:solidFill>
+                  <a:srgbClr val="E8801A"/>
+                </a:solidFill>
+                <a:latin typeface="Montserrat"/>
+              </a:rPr>
+              <a:t>▸  </a:t>
+            </a:r>
+            <a:r>
+              <a:rPr sz="1600" b="0" i="0">
+                <a:solidFill>
+                  <a:srgbClr val="1B2330"/>
+                </a:solidFill>
+                <a:latin typeface="Montserrat"/>
+              </a:rPr>
+              <a:t>Cada equipo, con sus instrucciones</a:t>
+            </a:r>
+          </a:p>
+        </p:txBody>
+      </p:sp>
+      <p:sp>
+        <p:nvSpPr>
+          <p:cNvPr id="9" name="imgph" descr="IMGQ:gas valve component"/>
           <p:cNvSpPr/>
           <p:nvPr/>
         </p:nvSpPr>
         <p:spPr>
           <a:xfrm>
-            <a:off x="5806440" y="1051560"/>
-            <a:ext cx="5298947" cy="4629150"/>
+            <a:off x="6080760" y="1965960"/>
+            <a:ext cx="5303520" cy="4572000"/>
           </a:xfrm>
           <a:prstGeom prst="roundRect">
             <a:avLst/>
@@ -6910,8 +7374,8 @@
         </p:nvSpPr>
         <p:spPr>
           <a:xfrm>
-            <a:off x="6080760" y="2726055"/>
-            <a:ext cx="4750307" cy="1280160"/>
+            <a:off x="6355080" y="3611880"/>
+            <a:ext cx="4754880" cy="1280160"/>
           </a:xfrm>
           <a:prstGeom prst="rect">
             <a:avLst/>
@@ -6932,7 +7396,7 @@
                 </a:solidFill>
                 <a:latin typeface="Montserrat"/>
               </a:rPr>
-              <a:t>IMAGEN REALISTA</a:t>
+              <a:t>IMAGEN</a:t>
             </a:r>
           </a:p>
           <a:p>
@@ -6944,7 +7408,7 @@
                 </a:solidFill>
                 <a:latin typeface="Montserrat"/>
               </a:rPr>
-              <a:t>gas meter cabinet nameplate</a:t>
+              <a:t>gas valve component</a:t>
             </a:r>
           </a:p>
         </p:txBody>
@@ -6954,6 +7418,18 @@
   <p:clrMapOvr>
     <a:masterClrMapping/>
   </p:clrMapOvr>
+  <mc:AlternateContent xmlns:mc="http://schemas.openxmlformats.org/markup-compatibility/2006">
+    <mc:Choice xmlns:p14="http://schemas.microsoft.com/office/powerpoint/2010/main" Requires="p14">
+      <p:transition spd="med" p14:dur="700">
+        <p14:cube dir="r"/>
+      </p:transition>
+    </mc:Choice>
+    <mc:Fallback>
+      <p:transition spd="med">
+        <p:push dir="r"/>
+      </p:transition>
+    </mc:Fallback>
+  </mc:AlternateContent>
 </p:sld>
 </file>
 
@@ -6982,7 +7458,7 @@
             <a:avLst/>
           </a:prstGeom>
           <a:solidFill>
-            <a:srgbClr val="1E2761"/>
+            <a:srgbClr val="FFFFFF"/>
           </a:solidFill>
           <a:ln>
             <a:noFill/>
@@ -7019,8 +7495,8 @@
         </p:nvSpPr>
         <p:spPr>
           <a:xfrm>
-            <a:off x="822960" y="640080"/>
-            <a:ext cx="10515600" cy="457200"/>
+            <a:off x="10607040" y="320040"/>
+            <a:ext cx="1371600" cy="365760"/>
           </a:xfrm>
           <a:prstGeom prst="rect">
             <a:avLst/>
@@ -7033,30 +7509,133 @@
           </a:bodyPr>
           <a:lstStyle/>
           <a:p>
-            <a:r>
-              <a:rPr sz="1400" b="1" i="0">
-                <a:solidFill>
-                  <a:srgbClr val="F4A24C"/>
-                </a:solidFill>
-                <a:latin typeface="Montserrat"/>
-              </a:rPr>
-              <a:t>LO QUE YA DOMINAS</a:t>
-            </a:r>
-          </a:p>
-        </p:txBody>
-      </p:sp>
-      <p:sp>
-        <p:nvSpPr>
-          <p:cNvPr id="4" name="Rounded Rectangle 3"/>
+            <a:pPr algn="r"/>
+            <a:r>
+              <a:rPr sz="1000" b="1" i="0">
+                <a:solidFill>
+                  <a:srgbClr val="64748B"/>
+                </a:solidFill>
+                <a:latin typeface="Montserrat"/>
+              </a:rPr>
+              <a:t>015 / 019</a:t>
+            </a:r>
+          </a:p>
+        </p:txBody>
+      </p:sp>
+      <p:sp>
+        <p:nvSpPr>
+          <p:cNvPr id="4" name="TextBox 3"/>
+          <p:cNvSpPr txBox="1"/>
+          <p:nvPr/>
+        </p:nvSpPr>
+        <p:spPr>
+          <a:xfrm>
+            <a:off x="457200" y="6419088"/>
+            <a:ext cx="8229600" cy="365760"/>
+          </a:xfrm>
+          <a:prstGeom prst="rect">
+            <a:avLst/>
+          </a:prstGeom>
+          <a:noFill/>
+        </p:spPr>
+        <p:txBody>
+          <a:bodyPr wrap="square">
+            <a:spAutoFit/>
+          </a:bodyPr>
+          <a:lstStyle/>
+          <a:p>
+            <a:r>
+              <a:rPr sz="900" b="0" i="0">
+                <a:solidFill>
+                  <a:srgbClr val="64748B"/>
+                </a:solidFill>
+                <a:latin typeface="Montserrat"/>
+              </a:rPr>
+              <a:t>Curso Gas B · Tema 05 · Aparatos de gas</a:t>
+            </a:r>
+          </a:p>
+        </p:txBody>
+      </p:sp>
+      <p:sp>
+        <p:nvSpPr>
+          <p:cNvPr id="5" name="TextBox 4"/>
+          <p:cNvSpPr txBox="1"/>
+          <p:nvPr/>
+        </p:nvSpPr>
+        <p:spPr>
+          <a:xfrm>
+            <a:off x="822960" y="457200"/>
+            <a:ext cx="10058400" cy="365760"/>
+          </a:xfrm>
+          <a:prstGeom prst="rect">
+            <a:avLst/>
+          </a:prstGeom>
+          <a:noFill/>
+        </p:spPr>
+        <p:txBody>
+          <a:bodyPr wrap="square">
+            <a:spAutoFit/>
+          </a:bodyPr>
+          <a:lstStyle/>
+          <a:p>
+            <a:r>
+              <a:rPr sz="1300" b="1" i="0">
+                <a:solidFill>
+                  <a:srgbClr val="E8801A"/>
+                </a:solidFill>
+                <a:latin typeface="Montserrat"/>
+              </a:rPr>
+              <a:t>APARTADO 3 · CONFORMIDAD</a:t>
+            </a:r>
+          </a:p>
+        </p:txBody>
+      </p:sp>
+      <p:sp>
+        <p:nvSpPr>
+          <p:cNvPr id="6" name="TextBox 5"/>
+          <p:cNvSpPr txBox="1"/>
+          <p:nvPr/>
+        </p:nvSpPr>
+        <p:spPr>
+          <a:xfrm>
+            <a:off x="822960" y="868680"/>
+            <a:ext cx="10515600" cy="914400"/>
+          </a:xfrm>
+          <a:prstGeom prst="rect">
+            <a:avLst/>
+          </a:prstGeom>
+          <a:noFill/>
+        </p:spPr>
+        <p:txBody>
+          <a:bodyPr wrap="square">
+            <a:spAutoFit/>
+          </a:bodyPr>
+          <a:lstStyle/>
+          <a:p>
+            <a:r>
+              <a:rPr sz="2800" b="1" i="0">
+                <a:solidFill>
+                  <a:srgbClr val="1E2761"/>
+                </a:solidFill>
+                <a:latin typeface="Montserrat"/>
+              </a:rPr>
+              <a:t>Cómo se certifica el aparato</a:t>
+            </a:r>
+          </a:p>
+        </p:txBody>
+      </p:sp>
+      <p:sp>
+        <p:nvSpPr>
+          <p:cNvPr id="7" name="Rectangle 6"/>
           <p:cNvSpPr/>
           <p:nvPr/>
         </p:nvSpPr>
         <p:spPr>
           <a:xfrm>
-            <a:off x="868680" y="1051560"/>
-            <a:ext cx="1463040" cy="82296"/>
-          </a:xfrm>
-          <a:prstGeom prst="roundRect">
+            <a:off x="868680" y="1627632"/>
+            <a:ext cx="2011680" cy="73152"/>
+          </a:xfrm>
+          <a:prstGeom prst="rect">
             <a:avLst/>
           </a:prstGeom>
           <a:solidFill>
@@ -7091,14 +7670,14 @@
       </p:sp>
       <p:sp>
         <p:nvSpPr>
-          <p:cNvPr id="5" name="TextBox 4"/>
+          <p:cNvPr id="8" name="TextBox 7"/>
           <p:cNvSpPr txBox="1"/>
           <p:nvPr/>
         </p:nvSpPr>
         <p:spPr>
           <a:xfrm>
-            <a:off x="822960" y="1234440"/>
-            <a:ext cx="10515600" cy="1097280"/>
+            <a:off x="6355080" y="1965960"/>
+            <a:ext cx="5029200" cy="4206240"/>
           </a:xfrm>
           <a:prstGeom prst="rect">
             <a:avLst/>
@@ -7111,28 +7690,138 @@
           </a:bodyPr>
           <a:lstStyle/>
           <a:p>
-            <a:r>
-              <a:rPr sz="3400" b="1" i="0">
-                <a:solidFill>
-                  <a:srgbClr val="FFFFFF"/>
-                </a:solidFill>
-                <a:latin typeface="Montserrat"/>
-              </a:rPr>
-              <a:t>Ya controlas el aparato antes de tocarlo</a:t>
-            </a:r>
-          </a:p>
-        </p:txBody>
-      </p:sp>
-      <p:sp>
-        <p:nvSpPr>
-          <p:cNvPr id="6" name="TextBox 5"/>
+            <a:pPr>
+              <a:spcAft>
+                <a:spcPts val="1100"/>
+              </a:spcAft>
+            </a:pPr>
+            <a:r>
+              <a:rPr sz="1600" b="1" i="0">
+                <a:solidFill>
+                  <a:srgbClr val="E8801A"/>
+                </a:solidFill>
+                <a:latin typeface="Montserrat"/>
+              </a:rPr>
+              <a:t>▸  </a:t>
+            </a:r>
+            <a:r>
+              <a:rPr sz="1600" b="0" i="0">
+                <a:solidFill>
+                  <a:srgbClr val="1B2330"/>
+                </a:solidFill>
+                <a:latin typeface="Montserrat"/>
+              </a:rPr>
+              <a:t>Cumple normas UNE / UNE-EN / EN</a:t>
+            </a:r>
+          </a:p>
+          <a:p>
+            <a:pPr>
+              <a:spcAft>
+                <a:spcPts val="1100"/>
+              </a:spcAft>
+            </a:pPr>
+            <a:r>
+              <a:rPr sz="1600" b="1" i="0">
+                <a:solidFill>
+                  <a:srgbClr val="E8801A"/>
+                </a:solidFill>
+                <a:latin typeface="Montserrat"/>
+              </a:rPr>
+              <a:t>▸  </a:t>
+            </a:r>
+            <a:r>
+              <a:rPr sz="1600" b="0" i="0">
+                <a:solidFill>
+                  <a:srgbClr val="1B2330"/>
+                </a:solidFill>
+                <a:latin typeface="Montserrat"/>
+              </a:rPr>
+              <a:t>Sin norma: anexo 3</a:t>
+            </a:r>
+          </a:p>
+          <a:p>
+            <a:pPr>
+              <a:spcAft>
+                <a:spcPts val="1100"/>
+              </a:spcAft>
+            </a:pPr>
+            <a:r>
+              <a:rPr sz="1600" b="1" i="0">
+                <a:solidFill>
+                  <a:srgbClr val="E8801A"/>
+                </a:solidFill>
+                <a:latin typeface="Montserrat"/>
+              </a:rPr>
+              <a:t>▸  </a:t>
+            </a:r>
+            <a:r>
+              <a:rPr sz="1600" b="0" i="0">
+                <a:solidFill>
+                  <a:srgbClr val="1B2330"/>
+                </a:solidFill>
+                <a:latin typeface="Montserrat"/>
+              </a:rPr>
+              <a:t>Camino: a + b, o bien c</a:t>
+            </a:r>
+          </a:p>
+        </p:txBody>
+      </p:sp>
+      <p:sp>
+        <p:nvSpPr>
+          <p:cNvPr id="9" name="imgph" descr="IMGQ:quality control inspection factory"/>
+          <p:cNvSpPr/>
+          <p:nvPr/>
+        </p:nvSpPr>
+        <p:spPr>
+          <a:xfrm>
+            <a:off x="822960" y="1965960"/>
+            <a:ext cx="5303520" cy="4572000"/>
+          </a:xfrm>
+          <a:prstGeom prst="roundRect">
+            <a:avLst/>
+          </a:prstGeom>
+          <a:solidFill>
+            <a:srgbClr val="F3F6FB"/>
+          </a:solidFill>
+          <a:ln w="12700">
+            <a:solidFill>
+              <a:srgbClr val="C7D2E6"/>
+            </a:solidFill>
+          </a:ln>
+          <a:effectLst/>
+        </p:spPr>
+        <p:style>
+          <a:lnRef idx="1">
+            <a:schemeClr val="accent1"/>
+          </a:lnRef>
+          <a:fillRef idx="3">
+            <a:schemeClr val="accent1"/>
+          </a:fillRef>
+          <a:effectRef idx="2">
+            <a:schemeClr val="accent1"/>
+          </a:effectRef>
+          <a:fontRef idx="minor">
+            <a:schemeClr val="lt1"/>
+          </a:fontRef>
+        </p:style>
+        <p:txBody>
+          <a:bodyPr rtlCol="0" anchor="ctr"/>
+          <a:lstStyle/>
+          <a:p>
+            <a:pPr algn="ctr"/>
+          </a:p>
+        </p:txBody>
+      </p:sp>
+      <p:sp>
+        <p:nvSpPr>
+          <p:cNvPr id="10" name="TextBox 9"/>
           <p:cNvSpPr txBox="1"/>
           <p:nvPr/>
         </p:nvSpPr>
         <p:spPr>
           <a:xfrm>
-            <a:off x="822960" y="2606040"/>
-            <a:ext cx="10515600" cy="2743200"/>
+            <a:off x="1097280" y="3611880"/>
+            <a:ext cx="4754880" cy="1280160"/>
           </a:xfrm>
           <a:prstGeom prst="rect">
             <a:avLst/>
@@ -7145,119 +7834,186 @@
           </a:bodyPr>
           <a:lstStyle/>
           <a:p>
-            <a:pPr>
-              <a:spcAft>
-                <a:spcPts val="1200"/>
-              </a:spcAft>
-            </a:pPr>
-            <a:r>
-              <a:rPr sz="2000" b="1" i="0">
-                <a:solidFill>
-                  <a:srgbClr val="F4A24C"/>
-                </a:solidFill>
-                <a:latin typeface="Montserrat"/>
-              </a:rPr>
-              <a:t>✓  </a:t>
-            </a:r>
-            <a:r>
-              <a:rPr sz="1900" b="0" i="0">
-                <a:solidFill>
-                  <a:srgbClr val="FFFFFF"/>
-                </a:solidFill>
-                <a:latin typeface="Montserrat"/>
-              </a:rPr>
-              <a:t>La ITC-ICG 08 es la norma del aparato, no del tubo</a:t>
-            </a:r>
-          </a:p>
-          <a:p>
-            <a:pPr>
-              <a:spcAft>
-                <a:spcPts val="1200"/>
-              </a:spcAft>
-            </a:pPr>
-            <a:r>
-              <a:rPr sz="2000" b="1" i="0">
-                <a:solidFill>
-                  <a:srgbClr val="F4A24C"/>
-                </a:solidFill>
-                <a:latin typeface="Montserrat"/>
-              </a:rPr>
-              <a:t>✓  </a:t>
-            </a:r>
-            <a:r>
-              <a:rPr sz="1900" b="0" i="0">
-                <a:solidFill>
-                  <a:srgbClr val="FFFFFF"/>
-                </a:solidFill>
-                <a:latin typeface="Montserrat"/>
-              </a:rPr>
-              <a:t>Exiges dos manuales y placa, en español</a:t>
-            </a:r>
-          </a:p>
-          <a:p>
-            <a:pPr>
-              <a:spcAft>
-                <a:spcPts val="1200"/>
-              </a:spcAft>
-            </a:pPr>
-            <a:r>
-              <a:rPr sz="2000" b="1" i="0">
-                <a:solidFill>
-                  <a:srgbClr val="F4A24C"/>
-                </a:solidFill>
-                <a:latin typeface="Montserrat"/>
-              </a:rPr>
-              <a:t>✓  </a:t>
-            </a:r>
-            <a:r>
-              <a:rPr sz="1900" b="0" i="0">
-                <a:solidFill>
-                  <a:srgbClr val="FFFFFF"/>
-                </a:solidFill>
-                <a:latin typeface="Montserrat"/>
-              </a:rPr>
-              <a:t>Reconoces las tres patas del funcionamiento</a:t>
-            </a:r>
-          </a:p>
-          <a:p>
-            <a:pPr>
-              <a:spcAft>
-                <a:spcPts val="1200"/>
-              </a:spcAft>
-            </a:pPr>
-            <a:r>
-              <a:rPr sz="2000" b="1" i="0">
-                <a:solidFill>
-                  <a:srgbClr val="F4A24C"/>
-                </a:solidFill>
-                <a:latin typeface="Montserrat"/>
-              </a:rPr>
-              <a:t>✓  </a:t>
-            </a:r>
-            <a:r>
-              <a:rPr sz="1900" b="0" i="0">
-                <a:solidFill>
-                  <a:srgbClr val="FFFFFF"/>
-                </a:solidFill>
-                <a:latin typeface="Montserrat"/>
-              </a:rPr>
-              <a:t>Certificas con la fórmula: a + b, o bien c</a:t>
-            </a:r>
-          </a:p>
-        </p:txBody>
-      </p:sp>
-      <p:sp>
-        <p:nvSpPr>
-          <p:cNvPr id="7" name="Rounded Rectangle 6"/>
+            <a:pPr algn="ctr"/>
+            <a:r>
+              <a:rPr sz="1400" b="1" i="0">
+                <a:solidFill>
+                  <a:srgbClr val="64748B"/>
+                </a:solidFill>
+                <a:latin typeface="Montserrat"/>
+              </a:rPr>
+              <a:t>IMAGEN</a:t>
+            </a:r>
+          </a:p>
+          <a:p>
+            <a:pPr algn="ctr"/>
+            <a:r>
+              <a:rPr sz="1100" b="0" i="1">
+                <a:solidFill>
+                  <a:srgbClr val="64748B"/>
+                </a:solidFill>
+                <a:latin typeface="Montserrat"/>
+              </a:rPr>
+              <a:t>quality control inspection factory</a:t>
+            </a:r>
+          </a:p>
+        </p:txBody>
+      </p:sp>
+    </p:spTree>
+  </p:cSld>
+  <p:clrMapOvr>
+    <a:masterClrMapping/>
+  </p:clrMapOvr>
+  <mc:AlternateContent xmlns:mc="http://schemas.openxmlformats.org/markup-compatibility/2006">
+    <mc:Choice xmlns:p14="http://schemas.microsoft.com/office/powerpoint/2010/main" Requires="p14">
+      <p:transition spd="med" p14:dur="700">
+        <p14:cube dir="l"/>
+      </p:transition>
+    </mc:Choice>
+    <mc:Fallback>
+      <p:transition spd="med">
+        <p:push dir="l"/>
+      </p:transition>
+    </mc:Fallback>
+  </mc:AlternateContent>
+</p:sld>
+</file>
+
+<file path=ppt/slides/slide16.xml><?xml version="1.0" encoding="utf-8"?>
+<p:sld xmlns:a="http://schemas.openxmlformats.org/drawingml/2006/main" xmlns:p="http://schemas.openxmlformats.org/presentationml/2006/main" xmlns:r="http://schemas.openxmlformats.org/officeDocument/2006/relationships">
+  <p:cSld>
+    <p:spTree>
+      <p:nvGrpSpPr>
+        <p:cNvPr id="1" name=""/>
+        <p:cNvGrpSpPr/>
+        <p:nvPr/>
+      </p:nvGrpSpPr>
+      <p:grpSpPr/>
+      <p:sp>
+        <p:nvSpPr>
+          <p:cNvPr id="2" name="Rectangle 1"/>
           <p:cNvSpPr/>
           <p:nvPr/>
         </p:nvSpPr>
         <p:spPr>
           <a:xfrm>
-            <a:off x="822960" y="5532120"/>
-            <a:ext cx="10515600" cy="822960"/>
-          </a:xfrm>
-          <a:prstGeom prst="roundRect">
+            <a:off x="0" y="0"/>
+            <a:ext cx="12191695" cy="6858000"/>
+          </a:xfrm>
+          <a:prstGeom prst="rect">
+            <a:avLst/>
+          </a:prstGeom>
+          <a:solidFill>
+            <a:srgbClr val="FFFFFF"/>
+          </a:solidFill>
+          <a:ln>
+            <a:noFill/>
+          </a:ln>
+          <a:effectLst/>
+        </p:spPr>
+        <p:style>
+          <a:lnRef idx="1">
+            <a:schemeClr val="accent1"/>
+          </a:lnRef>
+          <a:fillRef idx="3">
+            <a:schemeClr val="accent1"/>
+          </a:fillRef>
+          <a:effectRef idx="2">
+            <a:schemeClr val="accent1"/>
+          </a:effectRef>
+          <a:fontRef idx="minor">
+            <a:schemeClr val="lt1"/>
+          </a:fontRef>
+        </p:style>
+        <p:txBody>
+          <a:bodyPr rtlCol="0" anchor="ctr"/>
+          <a:lstStyle/>
+          <a:p>
+            <a:pPr algn="ctr"/>
+          </a:p>
+        </p:txBody>
+      </p:sp>
+      <p:sp>
+        <p:nvSpPr>
+          <p:cNvPr id="3" name="TextBox 2"/>
+          <p:cNvSpPr txBox="1"/>
+          <p:nvPr/>
+        </p:nvSpPr>
+        <p:spPr>
+          <a:xfrm>
+            <a:off x="10607040" y="320040"/>
+            <a:ext cx="1371600" cy="365760"/>
+          </a:xfrm>
+          <a:prstGeom prst="rect">
+            <a:avLst/>
+          </a:prstGeom>
+          <a:noFill/>
+        </p:spPr>
+        <p:txBody>
+          <a:bodyPr wrap="square">
+            <a:spAutoFit/>
+          </a:bodyPr>
+          <a:lstStyle/>
+          <a:p>
+            <a:pPr algn="r"/>
+            <a:r>
+              <a:rPr sz="1000" b="1" i="0">
+                <a:solidFill>
+                  <a:srgbClr val="64748B"/>
+                </a:solidFill>
+                <a:latin typeface="Montserrat"/>
+              </a:rPr>
+              <a:t>016 / 019</a:t>
+            </a:r>
+          </a:p>
+        </p:txBody>
+      </p:sp>
+      <p:sp>
+        <p:nvSpPr>
+          <p:cNvPr id="4" name="TextBox 3"/>
+          <p:cNvSpPr txBox="1"/>
+          <p:nvPr/>
+        </p:nvSpPr>
+        <p:spPr>
+          <a:xfrm>
+            <a:off x="457200" y="6419088"/>
+            <a:ext cx="8229600" cy="365760"/>
+          </a:xfrm>
+          <a:prstGeom prst="rect">
+            <a:avLst/>
+          </a:prstGeom>
+          <a:noFill/>
+        </p:spPr>
+        <p:txBody>
+          <a:bodyPr wrap="square">
+            <a:spAutoFit/>
+          </a:bodyPr>
+          <a:lstStyle/>
+          <a:p>
+            <a:r>
+              <a:rPr sz="900" b="0" i="0">
+                <a:solidFill>
+                  <a:srgbClr val="64748B"/>
+                </a:solidFill>
+                <a:latin typeface="Montserrat"/>
+              </a:rPr>
+              <a:t>Curso Gas B · Tema 05 · Aparatos de gas</a:t>
+            </a:r>
+          </a:p>
+        </p:txBody>
+      </p:sp>
+      <p:sp>
+        <p:nvSpPr>
+          <p:cNvPr id="5" name="Rectangle 4"/>
+          <p:cNvSpPr/>
+          <p:nvPr/>
+        </p:nvSpPr>
+        <p:spPr>
+          <a:xfrm>
+            <a:off x="0" y="0"/>
+            <a:ext cx="12191695" cy="1143000"/>
+          </a:xfrm>
+          <a:prstGeom prst="rect">
             <a:avLst/>
           </a:prstGeom>
           <a:solidFill>
@@ -7292,14 +8048,14 @@
       </p:sp>
       <p:sp>
         <p:nvSpPr>
-          <p:cNvPr id="8" name="TextBox 7"/>
+          <p:cNvPr id="6" name="TextBox 5"/>
           <p:cNvSpPr txBox="1"/>
           <p:nvPr/>
         </p:nvSpPr>
         <p:spPr>
           <a:xfrm>
-            <a:off x="1051560" y="5623560"/>
-            <a:ext cx="10058400" cy="640080"/>
+            <a:off x="822960" y="274320"/>
+            <a:ext cx="10515600" cy="640080"/>
           </a:xfrm>
           <a:prstGeom prst="rect">
             <a:avLst/>
@@ -7313,13 +8069,683 @@
           <a:lstStyle/>
           <a:p>
             <a:r>
-              <a:rPr sz="1500" b="1" i="1">
+              <a:rPr sz="2400" b="1" i="0">
+                <a:solidFill>
+                  <a:srgbClr val="FFFFFF"/>
+                </a:solidFill>
+                <a:latin typeface="Montserrat"/>
+              </a:rPr>
+              <a:t>⚡  PREGUNTA RÁPIDA</a:t>
+            </a:r>
+          </a:p>
+        </p:txBody>
+      </p:sp>
+      <p:sp>
+        <p:nvSpPr>
+          <p:cNvPr id="7" name="TextBox 6"/>
+          <p:cNvSpPr txBox="1"/>
+          <p:nvPr/>
+        </p:nvSpPr>
+        <p:spPr>
+          <a:xfrm>
+            <a:off x="822960" y="1508760"/>
+            <a:ext cx="10515600" cy="1371600"/>
+          </a:xfrm>
+          <a:prstGeom prst="rect">
+            <a:avLst/>
+          </a:prstGeom>
+          <a:noFill/>
+        </p:spPr>
+        <p:txBody>
+          <a:bodyPr wrap="square">
+            <a:spAutoFit/>
+          </a:bodyPr>
+          <a:lstStyle/>
+          <a:p>
+            <a:r>
+              <a:rPr sz="2400" b="1" i="0">
                 <a:solidFill>
                   <a:srgbClr val="1E2761"/>
                 </a:solidFill>
                 <a:latin typeface="Montserrat"/>
               </a:rPr>
-              <a:t>Hoy ya eres más gasista que ayer. En el siguiente vídeo bajamos al piso: a conectar y arrancar el aparato.</a:t>
+              <a:t>¿Qué fórmula resume los procedimientos válidos para certificar un aparato?</a:t>
+            </a:r>
+          </a:p>
+        </p:txBody>
+      </p:sp>
+      <p:sp>
+        <p:nvSpPr>
+          <p:cNvPr id="8" name="Rounded Rectangle 7"/>
+          <p:cNvSpPr/>
+          <p:nvPr/>
+        </p:nvSpPr>
+        <p:spPr>
+          <a:xfrm>
+            <a:off x="822960" y="3291840"/>
+            <a:ext cx="4983480" cy="1143000"/>
+          </a:xfrm>
+          <a:prstGeom prst="roundRect">
+            <a:avLst/>
+          </a:prstGeom>
+          <a:solidFill>
+            <a:srgbClr val="F3F6FB"/>
+          </a:solidFill>
+          <a:ln w="12700">
+            <a:solidFill>
+              <a:srgbClr val="C7D2E6"/>
+            </a:solidFill>
+          </a:ln>
+          <a:effectLst/>
+        </p:spPr>
+        <p:style>
+          <a:lnRef idx="1">
+            <a:schemeClr val="accent1"/>
+          </a:lnRef>
+          <a:fillRef idx="3">
+            <a:schemeClr val="accent1"/>
+          </a:fillRef>
+          <a:effectRef idx="2">
+            <a:schemeClr val="accent1"/>
+          </a:effectRef>
+          <a:fontRef idx="minor">
+            <a:schemeClr val="lt1"/>
+          </a:fontRef>
+        </p:style>
+        <p:txBody>
+          <a:bodyPr rtlCol="0" anchor="ctr"/>
+          <a:lstStyle/>
+          <a:p>
+            <a:pPr algn="ctr"/>
+          </a:p>
+        </p:txBody>
+      </p:sp>
+      <p:sp>
+        <p:nvSpPr>
+          <p:cNvPr id="9" name="Rectangle 8"/>
+          <p:cNvSpPr/>
+          <p:nvPr/>
+        </p:nvSpPr>
+        <p:spPr>
+          <a:xfrm>
+            <a:off x="822960" y="3291840"/>
+            <a:ext cx="640080" cy="1143000"/>
+          </a:xfrm>
+          <a:prstGeom prst="rect">
+            <a:avLst/>
+          </a:prstGeom>
+          <a:solidFill>
+            <a:srgbClr val="1E2761"/>
+          </a:solidFill>
+          <a:ln>
+            <a:noFill/>
+          </a:ln>
+          <a:effectLst/>
+        </p:spPr>
+        <p:style>
+          <a:lnRef idx="1">
+            <a:schemeClr val="accent1"/>
+          </a:lnRef>
+          <a:fillRef idx="3">
+            <a:schemeClr val="accent1"/>
+          </a:fillRef>
+          <a:effectRef idx="2">
+            <a:schemeClr val="accent1"/>
+          </a:effectRef>
+          <a:fontRef idx="minor">
+            <a:schemeClr val="lt1"/>
+          </a:fontRef>
+        </p:style>
+        <p:txBody>
+          <a:bodyPr rtlCol="0" anchor="ctr"/>
+          <a:lstStyle/>
+          <a:p>
+            <a:pPr algn="ctr"/>
+          </a:p>
+        </p:txBody>
+      </p:sp>
+      <p:sp>
+        <p:nvSpPr>
+          <p:cNvPr id="10" name="TextBox 9"/>
+          <p:cNvSpPr txBox="1"/>
+          <p:nvPr/>
+        </p:nvSpPr>
+        <p:spPr>
+          <a:xfrm>
+            <a:off x="822960" y="3611880"/>
+            <a:ext cx="640080" cy="548640"/>
+          </a:xfrm>
+          <a:prstGeom prst="rect">
+            <a:avLst/>
+          </a:prstGeom>
+          <a:noFill/>
+        </p:spPr>
+        <p:txBody>
+          <a:bodyPr wrap="square">
+            <a:spAutoFit/>
+          </a:bodyPr>
+          <a:lstStyle/>
+          <a:p>
+            <a:pPr algn="ctr"/>
+            <a:r>
+              <a:rPr sz="2200" b="1" i="0">
+                <a:solidFill>
+                  <a:srgbClr val="FFFFFF"/>
+                </a:solidFill>
+                <a:latin typeface="Montserrat"/>
+              </a:rPr>
+              <a:t>A</a:t>
+            </a:r>
+          </a:p>
+        </p:txBody>
+      </p:sp>
+      <p:sp>
+        <p:nvSpPr>
+          <p:cNvPr id="11" name="TextBox 10"/>
+          <p:cNvSpPr txBox="1"/>
+          <p:nvPr/>
+        </p:nvSpPr>
+        <p:spPr>
+          <a:xfrm>
+            <a:off x="1600200" y="3474720"/>
+            <a:ext cx="4114800" cy="868680"/>
+          </a:xfrm>
+          <a:prstGeom prst="rect">
+            <a:avLst/>
+          </a:prstGeom>
+          <a:noFill/>
+        </p:spPr>
+        <p:txBody>
+          <a:bodyPr wrap="square">
+            <a:spAutoFit/>
+          </a:bodyPr>
+          <a:lstStyle/>
+          <a:p>
+            <a:r>
+              <a:rPr sz="1400" b="0" i="0">
+                <a:solidFill>
+                  <a:srgbClr val="1B2330"/>
+                </a:solidFill>
+                <a:latin typeface="Montserrat"/>
+              </a:rPr>
+              <a:t>A y B a la vez, siempre las dos juntas</a:t>
+            </a:r>
+          </a:p>
+        </p:txBody>
+      </p:sp>
+      <p:sp>
+        <p:nvSpPr>
+          <p:cNvPr id="12" name="Rounded Rectangle 11"/>
+          <p:cNvSpPr/>
+          <p:nvPr/>
+        </p:nvSpPr>
+        <p:spPr>
+          <a:xfrm>
+            <a:off x="6355080" y="3291840"/>
+            <a:ext cx="4983480" cy="1143000"/>
+          </a:xfrm>
+          <a:prstGeom prst="roundRect">
+            <a:avLst/>
+          </a:prstGeom>
+          <a:solidFill>
+            <a:srgbClr val="F3F6FB"/>
+          </a:solidFill>
+          <a:ln w="12700">
+            <a:solidFill>
+              <a:srgbClr val="C7D2E6"/>
+            </a:solidFill>
+          </a:ln>
+          <a:effectLst/>
+        </p:spPr>
+        <p:style>
+          <a:lnRef idx="1">
+            <a:schemeClr val="accent1"/>
+          </a:lnRef>
+          <a:fillRef idx="3">
+            <a:schemeClr val="accent1"/>
+          </a:fillRef>
+          <a:effectRef idx="2">
+            <a:schemeClr val="accent1"/>
+          </a:effectRef>
+          <a:fontRef idx="minor">
+            <a:schemeClr val="lt1"/>
+          </a:fontRef>
+        </p:style>
+        <p:txBody>
+          <a:bodyPr rtlCol="0" anchor="ctr"/>
+          <a:lstStyle/>
+          <a:p>
+            <a:pPr algn="ctr"/>
+          </a:p>
+        </p:txBody>
+      </p:sp>
+      <p:sp>
+        <p:nvSpPr>
+          <p:cNvPr id="13" name="Rectangle 12"/>
+          <p:cNvSpPr/>
+          <p:nvPr/>
+        </p:nvSpPr>
+        <p:spPr>
+          <a:xfrm>
+            <a:off x="6355080" y="3291840"/>
+            <a:ext cx="640080" cy="1143000"/>
+          </a:xfrm>
+          <a:prstGeom prst="rect">
+            <a:avLst/>
+          </a:prstGeom>
+          <a:solidFill>
+            <a:srgbClr val="1E2761"/>
+          </a:solidFill>
+          <a:ln>
+            <a:noFill/>
+          </a:ln>
+          <a:effectLst/>
+        </p:spPr>
+        <p:style>
+          <a:lnRef idx="1">
+            <a:schemeClr val="accent1"/>
+          </a:lnRef>
+          <a:fillRef idx="3">
+            <a:schemeClr val="accent1"/>
+          </a:fillRef>
+          <a:effectRef idx="2">
+            <a:schemeClr val="accent1"/>
+          </a:effectRef>
+          <a:fontRef idx="minor">
+            <a:schemeClr val="lt1"/>
+          </a:fontRef>
+        </p:style>
+        <p:txBody>
+          <a:bodyPr rtlCol="0" anchor="ctr"/>
+          <a:lstStyle/>
+          <a:p>
+            <a:pPr algn="ctr"/>
+          </a:p>
+        </p:txBody>
+      </p:sp>
+      <p:sp>
+        <p:nvSpPr>
+          <p:cNvPr id="14" name="TextBox 13"/>
+          <p:cNvSpPr txBox="1"/>
+          <p:nvPr/>
+        </p:nvSpPr>
+        <p:spPr>
+          <a:xfrm>
+            <a:off x="6355080" y="3611880"/>
+            <a:ext cx="640080" cy="548640"/>
+          </a:xfrm>
+          <a:prstGeom prst="rect">
+            <a:avLst/>
+          </a:prstGeom>
+          <a:noFill/>
+        </p:spPr>
+        <p:txBody>
+          <a:bodyPr wrap="square">
+            <a:spAutoFit/>
+          </a:bodyPr>
+          <a:lstStyle/>
+          <a:p>
+            <a:pPr algn="ctr"/>
+            <a:r>
+              <a:rPr sz="2200" b="1" i="0">
+                <a:solidFill>
+                  <a:srgbClr val="FFFFFF"/>
+                </a:solidFill>
+                <a:latin typeface="Montserrat"/>
+              </a:rPr>
+              <a:t>B</a:t>
+            </a:r>
+          </a:p>
+        </p:txBody>
+      </p:sp>
+      <p:sp>
+        <p:nvSpPr>
+          <p:cNvPr id="15" name="TextBox 14"/>
+          <p:cNvSpPr txBox="1"/>
+          <p:nvPr/>
+        </p:nvSpPr>
+        <p:spPr>
+          <a:xfrm>
+            <a:off x="7132320" y="3474720"/>
+            <a:ext cx="4114800" cy="868680"/>
+          </a:xfrm>
+          <a:prstGeom prst="rect">
+            <a:avLst/>
+          </a:prstGeom>
+          <a:noFill/>
+        </p:spPr>
+        <p:txBody>
+          <a:bodyPr wrap="square">
+            <a:spAutoFit/>
+          </a:bodyPr>
+          <a:lstStyle/>
+          <a:p>
+            <a:r>
+              <a:rPr sz="1400" b="0" i="0">
+                <a:solidFill>
+                  <a:srgbClr val="1B2330"/>
+                </a:solidFill>
+                <a:latin typeface="Montserrat"/>
+              </a:rPr>
+              <a:t>A más B, o bien C como alternativa</a:t>
+            </a:r>
+          </a:p>
+        </p:txBody>
+      </p:sp>
+      <p:sp>
+        <p:nvSpPr>
+          <p:cNvPr id="16" name="Rounded Rectangle 15"/>
+          <p:cNvSpPr/>
+          <p:nvPr/>
+        </p:nvSpPr>
+        <p:spPr>
+          <a:xfrm>
+            <a:off x="822960" y="4617720"/>
+            <a:ext cx="4983480" cy="1143000"/>
+          </a:xfrm>
+          <a:prstGeom prst="roundRect">
+            <a:avLst/>
+          </a:prstGeom>
+          <a:solidFill>
+            <a:srgbClr val="F3F6FB"/>
+          </a:solidFill>
+          <a:ln w="12700">
+            <a:solidFill>
+              <a:srgbClr val="C7D2E6"/>
+            </a:solidFill>
+          </a:ln>
+          <a:effectLst/>
+        </p:spPr>
+        <p:style>
+          <a:lnRef idx="1">
+            <a:schemeClr val="accent1"/>
+          </a:lnRef>
+          <a:fillRef idx="3">
+            <a:schemeClr val="accent1"/>
+          </a:fillRef>
+          <a:effectRef idx="2">
+            <a:schemeClr val="accent1"/>
+          </a:effectRef>
+          <a:fontRef idx="minor">
+            <a:schemeClr val="lt1"/>
+          </a:fontRef>
+        </p:style>
+        <p:txBody>
+          <a:bodyPr rtlCol="0" anchor="ctr"/>
+          <a:lstStyle/>
+          <a:p>
+            <a:pPr algn="ctr"/>
+          </a:p>
+        </p:txBody>
+      </p:sp>
+      <p:sp>
+        <p:nvSpPr>
+          <p:cNvPr id="17" name="Rectangle 16"/>
+          <p:cNvSpPr/>
+          <p:nvPr/>
+        </p:nvSpPr>
+        <p:spPr>
+          <a:xfrm>
+            <a:off x="822960" y="4617720"/>
+            <a:ext cx="640080" cy="1143000"/>
+          </a:xfrm>
+          <a:prstGeom prst="rect">
+            <a:avLst/>
+          </a:prstGeom>
+          <a:solidFill>
+            <a:srgbClr val="1E2761"/>
+          </a:solidFill>
+          <a:ln>
+            <a:noFill/>
+          </a:ln>
+          <a:effectLst/>
+        </p:spPr>
+        <p:style>
+          <a:lnRef idx="1">
+            <a:schemeClr val="accent1"/>
+          </a:lnRef>
+          <a:fillRef idx="3">
+            <a:schemeClr val="accent1"/>
+          </a:fillRef>
+          <a:effectRef idx="2">
+            <a:schemeClr val="accent1"/>
+          </a:effectRef>
+          <a:fontRef idx="minor">
+            <a:schemeClr val="lt1"/>
+          </a:fontRef>
+        </p:style>
+        <p:txBody>
+          <a:bodyPr rtlCol="0" anchor="ctr"/>
+          <a:lstStyle/>
+          <a:p>
+            <a:pPr algn="ctr"/>
+          </a:p>
+        </p:txBody>
+      </p:sp>
+      <p:sp>
+        <p:nvSpPr>
+          <p:cNvPr id="18" name="TextBox 17"/>
+          <p:cNvSpPr txBox="1"/>
+          <p:nvPr/>
+        </p:nvSpPr>
+        <p:spPr>
+          <a:xfrm>
+            <a:off x="822960" y="4937760"/>
+            <a:ext cx="640080" cy="548640"/>
+          </a:xfrm>
+          <a:prstGeom prst="rect">
+            <a:avLst/>
+          </a:prstGeom>
+          <a:noFill/>
+        </p:spPr>
+        <p:txBody>
+          <a:bodyPr wrap="square">
+            <a:spAutoFit/>
+          </a:bodyPr>
+          <a:lstStyle/>
+          <a:p>
+            <a:pPr algn="ctr"/>
+            <a:r>
+              <a:rPr sz="2200" b="1" i="0">
+                <a:solidFill>
+                  <a:srgbClr val="FFFFFF"/>
+                </a:solidFill>
+                <a:latin typeface="Montserrat"/>
+              </a:rPr>
+              <a:t>C</a:t>
+            </a:r>
+          </a:p>
+        </p:txBody>
+      </p:sp>
+      <p:sp>
+        <p:nvSpPr>
+          <p:cNvPr id="19" name="TextBox 18"/>
+          <p:cNvSpPr txBox="1"/>
+          <p:nvPr/>
+        </p:nvSpPr>
+        <p:spPr>
+          <a:xfrm>
+            <a:off x="1600200" y="4800600"/>
+            <a:ext cx="4114800" cy="868680"/>
+          </a:xfrm>
+          <a:prstGeom prst="rect">
+            <a:avLst/>
+          </a:prstGeom>
+          <a:noFill/>
+        </p:spPr>
+        <p:txBody>
+          <a:bodyPr wrap="square">
+            <a:spAutoFit/>
+          </a:bodyPr>
+          <a:lstStyle/>
+          <a:p>
+            <a:r>
+              <a:rPr sz="1400" b="0" i="0">
+                <a:solidFill>
+                  <a:srgbClr val="1B2330"/>
+                </a:solidFill>
+                <a:latin typeface="Montserrat"/>
+              </a:rPr>
+              <a:t>Solo C, en todos los casos posibles</a:t>
+            </a:r>
+          </a:p>
+        </p:txBody>
+      </p:sp>
+      <p:sp>
+        <p:nvSpPr>
+          <p:cNvPr id="20" name="Rounded Rectangle 19"/>
+          <p:cNvSpPr/>
+          <p:nvPr/>
+        </p:nvSpPr>
+        <p:spPr>
+          <a:xfrm>
+            <a:off x="6355080" y="4617720"/>
+            <a:ext cx="4983480" cy="1143000"/>
+          </a:xfrm>
+          <a:prstGeom prst="roundRect">
+            <a:avLst/>
+          </a:prstGeom>
+          <a:solidFill>
+            <a:srgbClr val="F3F6FB"/>
+          </a:solidFill>
+          <a:ln w="12700">
+            <a:solidFill>
+              <a:srgbClr val="C7D2E6"/>
+            </a:solidFill>
+          </a:ln>
+          <a:effectLst/>
+        </p:spPr>
+        <p:style>
+          <a:lnRef idx="1">
+            <a:schemeClr val="accent1"/>
+          </a:lnRef>
+          <a:fillRef idx="3">
+            <a:schemeClr val="accent1"/>
+          </a:fillRef>
+          <a:effectRef idx="2">
+            <a:schemeClr val="accent1"/>
+          </a:effectRef>
+          <a:fontRef idx="minor">
+            <a:schemeClr val="lt1"/>
+          </a:fontRef>
+        </p:style>
+        <p:txBody>
+          <a:bodyPr rtlCol="0" anchor="ctr"/>
+          <a:lstStyle/>
+          <a:p>
+            <a:pPr algn="ctr"/>
+          </a:p>
+        </p:txBody>
+      </p:sp>
+      <p:sp>
+        <p:nvSpPr>
+          <p:cNvPr id="21" name="Rectangle 20"/>
+          <p:cNvSpPr/>
+          <p:nvPr/>
+        </p:nvSpPr>
+        <p:spPr>
+          <a:xfrm>
+            <a:off x="6355080" y="4617720"/>
+            <a:ext cx="640080" cy="1143000"/>
+          </a:xfrm>
+          <a:prstGeom prst="rect">
+            <a:avLst/>
+          </a:prstGeom>
+          <a:solidFill>
+            <a:srgbClr val="1E2761"/>
+          </a:solidFill>
+          <a:ln>
+            <a:noFill/>
+          </a:ln>
+          <a:effectLst/>
+        </p:spPr>
+        <p:style>
+          <a:lnRef idx="1">
+            <a:schemeClr val="accent1"/>
+          </a:lnRef>
+          <a:fillRef idx="3">
+            <a:schemeClr val="accent1"/>
+          </a:fillRef>
+          <a:effectRef idx="2">
+            <a:schemeClr val="accent1"/>
+          </a:effectRef>
+          <a:fontRef idx="minor">
+            <a:schemeClr val="lt1"/>
+          </a:fontRef>
+        </p:style>
+        <p:txBody>
+          <a:bodyPr rtlCol="0" anchor="ctr"/>
+          <a:lstStyle/>
+          <a:p>
+            <a:pPr algn="ctr"/>
+          </a:p>
+        </p:txBody>
+      </p:sp>
+      <p:sp>
+        <p:nvSpPr>
+          <p:cNvPr id="22" name="TextBox 21"/>
+          <p:cNvSpPr txBox="1"/>
+          <p:nvPr/>
+        </p:nvSpPr>
+        <p:spPr>
+          <a:xfrm>
+            <a:off x="6355080" y="4937760"/>
+            <a:ext cx="640080" cy="548640"/>
+          </a:xfrm>
+          <a:prstGeom prst="rect">
+            <a:avLst/>
+          </a:prstGeom>
+          <a:noFill/>
+        </p:spPr>
+        <p:txBody>
+          <a:bodyPr wrap="square">
+            <a:spAutoFit/>
+          </a:bodyPr>
+          <a:lstStyle/>
+          <a:p>
+            <a:pPr algn="ctr"/>
+            <a:r>
+              <a:rPr sz="2200" b="1" i="0">
+                <a:solidFill>
+                  <a:srgbClr val="FFFFFF"/>
+                </a:solidFill>
+                <a:latin typeface="Montserrat"/>
+              </a:rPr>
+              <a:t>D</a:t>
+            </a:r>
+          </a:p>
+        </p:txBody>
+      </p:sp>
+      <p:sp>
+        <p:nvSpPr>
+          <p:cNvPr id="23" name="TextBox 22"/>
+          <p:cNvSpPr txBox="1"/>
+          <p:nvPr/>
+        </p:nvSpPr>
+        <p:spPr>
+          <a:xfrm>
+            <a:off x="7132320" y="4800600"/>
+            <a:ext cx="4114800" cy="868680"/>
+          </a:xfrm>
+          <a:prstGeom prst="rect">
+            <a:avLst/>
+          </a:prstGeom>
+          <a:noFill/>
+        </p:spPr>
+        <p:txBody>
+          <a:bodyPr wrap="square">
+            <a:spAutoFit/>
+          </a:bodyPr>
+          <a:lstStyle/>
+          <a:p>
+            <a:r>
+              <a:rPr sz="1400" b="0" i="0">
+                <a:solidFill>
+                  <a:srgbClr val="1B2330"/>
+                </a:solidFill>
+                <a:latin typeface="Montserrat"/>
+              </a:rPr>
+              <a:t>B o C, pero nunca la A</a:t>
             </a:r>
           </a:p>
         </p:txBody>
@@ -7329,6 +8755,1213 @@
   <p:clrMapOvr>
     <a:masterClrMapping/>
   </p:clrMapOvr>
+  <mc:AlternateContent xmlns:mc="http://schemas.openxmlformats.org/markup-compatibility/2006">
+    <mc:Choice xmlns:p14="http://schemas.microsoft.com/office/powerpoint/2010/main" Requires="p14">
+      <p:transition spd="med" p14:dur="700">
+        <p14:cube dir="r"/>
+      </p:transition>
+    </mc:Choice>
+    <mc:Fallback>
+      <p:transition spd="med">
+        <p:push dir="r"/>
+      </p:transition>
+    </mc:Fallback>
+  </mc:AlternateContent>
+</p:sld>
+</file>
+
+<file path=ppt/slides/slide17.xml><?xml version="1.0" encoding="utf-8"?>
+<p:sld xmlns:a="http://schemas.openxmlformats.org/drawingml/2006/main" xmlns:p="http://schemas.openxmlformats.org/presentationml/2006/main" xmlns:r="http://schemas.openxmlformats.org/officeDocument/2006/relationships">
+  <p:cSld>
+    <p:spTree>
+      <p:nvGrpSpPr>
+        <p:cNvPr id="1" name=""/>
+        <p:cNvGrpSpPr/>
+        <p:nvPr/>
+      </p:nvGrpSpPr>
+      <p:grpSpPr/>
+      <p:sp>
+        <p:nvSpPr>
+          <p:cNvPr id="2" name="Rectangle 1"/>
+          <p:cNvSpPr/>
+          <p:nvPr/>
+        </p:nvSpPr>
+        <p:spPr>
+          <a:xfrm>
+            <a:off x="0" y="0"/>
+            <a:ext cx="12191695" cy="6858000"/>
+          </a:xfrm>
+          <a:prstGeom prst="rect">
+            <a:avLst/>
+          </a:prstGeom>
+          <a:solidFill>
+            <a:srgbClr val="FFFFFF"/>
+          </a:solidFill>
+          <a:ln>
+            <a:noFill/>
+          </a:ln>
+          <a:effectLst/>
+        </p:spPr>
+        <p:style>
+          <a:lnRef idx="1">
+            <a:schemeClr val="accent1"/>
+          </a:lnRef>
+          <a:fillRef idx="3">
+            <a:schemeClr val="accent1"/>
+          </a:fillRef>
+          <a:effectRef idx="2">
+            <a:schemeClr val="accent1"/>
+          </a:effectRef>
+          <a:fontRef idx="minor">
+            <a:schemeClr val="lt1"/>
+          </a:fontRef>
+        </p:style>
+        <p:txBody>
+          <a:bodyPr rtlCol="0" anchor="ctr"/>
+          <a:lstStyle/>
+          <a:p>
+            <a:pPr algn="ctr"/>
+          </a:p>
+        </p:txBody>
+      </p:sp>
+      <p:sp>
+        <p:nvSpPr>
+          <p:cNvPr id="3" name="TextBox 2"/>
+          <p:cNvSpPr txBox="1"/>
+          <p:nvPr/>
+        </p:nvSpPr>
+        <p:spPr>
+          <a:xfrm>
+            <a:off x="10607040" y="320040"/>
+            <a:ext cx="1371600" cy="365760"/>
+          </a:xfrm>
+          <a:prstGeom prst="rect">
+            <a:avLst/>
+          </a:prstGeom>
+          <a:noFill/>
+        </p:spPr>
+        <p:txBody>
+          <a:bodyPr wrap="square">
+            <a:spAutoFit/>
+          </a:bodyPr>
+          <a:lstStyle/>
+          <a:p>
+            <a:pPr algn="r"/>
+            <a:r>
+              <a:rPr sz="1000" b="1" i="0">
+                <a:solidFill>
+                  <a:srgbClr val="64748B"/>
+                </a:solidFill>
+                <a:latin typeface="Montserrat"/>
+              </a:rPr>
+              <a:t>017 / 019</a:t>
+            </a:r>
+          </a:p>
+        </p:txBody>
+      </p:sp>
+      <p:sp>
+        <p:nvSpPr>
+          <p:cNvPr id="4" name="TextBox 3"/>
+          <p:cNvSpPr txBox="1"/>
+          <p:nvPr/>
+        </p:nvSpPr>
+        <p:spPr>
+          <a:xfrm>
+            <a:off x="457200" y="6419088"/>
+            <a:ext cx="8229600" cy="365760"/>
+          </a:xfrm>
+          <a:prstGeom prst="rect">
+            <a:avLst/>
+          </a:prstGeom>
+          <a:noFill/>
+        </p:spPr>
+        <p:txBody>
+          <a:bodyPr wrap="square">
+            <a:spAutoFit/>
+          </a:bodyPr>
+          <a:lstStyle/>
+          <a:p>
+            <a:r>
+              <a:rPr sz="900" b="0" i="0">
+                <a:solidFill>
+                  <a:srgbClr val="64748B"/>
+                </a:solidFill>
+                <a:latin typeface="Montserrat"/>
+              </a:rPr>
+              <a:t>Curso Gas B · Tema 05 · Aparatos de gas</a:t>
+            </a:r>
+          </a:p>
+        </p:txBody>
+      </p:sp>
+      <p:sp>
+        <p:nvSpPr>
+          <p:cNvPr id="5" name="Rectangle 4"/>
+          <p:cNvSpPr/>
+          <p:nvPr/>
+        </p:nvSpPr>
+        <p:spPr>
+          <a:xfrm>
+            <a:off x="0" y="0"/>
+            <a:ext cx="12191695" cy="1143000"/>
+          </a:xfrm>
+          <a:prstGeom prst="rect">
+            <a:avLst/>
+          </a:prstGeom>
+          <a:solidFill>
+            <a:srgbClr val="1E8E4B"/>
+          </a:solidFill>
+          <a:ln>
+            <a:noFill/>
+          </a:ln>
+          <a:effectLst/>
+        </p:spPr>
+        <p:style>
+          <a:lnRef idx="1">
+            <a:schemeClr val="accent1"/>
+          </a:lnRef>
+          <a:fillRef idx="3">
+            <a:schemeClr val="accent1"/>
+          </a:fillRef>
+          <a:effectRef idx="2">
+            <a:schemeClr val="accent1"/>
+          </a:effectRef>
+          <a:fontRef idx="minor">
+            <a:schemeClr val="lt1"/>
+          </a:fontRef>
+        </p:style>
+        <p:txBody>
+          <a:bodyPr rtlCol="0" anchor="ctr"/>
+          <a:lstStyle/>
+          <a:p>
+            <a:pPr algn="ctr"/>
+          </a:p>
+        </p:txBody>
+      </p:sp>
+      <p:sp>
+        <p:nvSpPr>
+          <p:cNvPr id="6" name="TextBox 5"/>
+          <p:cNvSpPr txBox="1"/>
+          <p:nvPr/>
+        </p:nvSpPr>
+        <p:spPr>
+          <a:xfrm>
+            <a:off x="822960" y="274320"/>
+            <a:ext cx="10515600" cy="640080"/>
+          </a:xfrm>
+          <a:prstGeom prst="rect">
+            <a:avLst/>
+          </a:prstGeom>
+          <a:noFill/>
+        </p:spPr>
+        <p:txBody>
+          <a:bodyPr wrap="square">
+            <a:spAutoFit/>
+          </a:bodyPr>
+          <a:lstStyle/>
+          <a:p>
+            <a:r>
+              <a:rPr sz="2400" b="1" i="0">
+                <a:solidFill>
+                  <a:srgbClr val="FFFFFF"/>
+                </a:solidFill>
+                <a:latin typeface="Montserrat"/>
+              </a:rPr>
+              <a:t>✔  RESPUESTA:  B</a:t>
+            </a:r>
+          </a:p>
+        </p:txBody>
+      </p:sp>
+      <p:sp>
+        <p:nvSpPr>
+          <p:cNvPr id="7" name="TextBox 6"/>
+          <p:cNvSpPr txBox="1"/>
+          <p:nvPr/>
+        </p:nvSpPr>
+        <p:spPr>
+          <a:xfrm>
+            <a:off x="822960" y="1417320"/>
+            <a:ext cx="10515600" cy="914400"/>
+          </a:xfrm>
+          <a:prstGeom prst="rect">
+            <a:avLst/>
+          </a:prstGeom>
+          <a:noFill/>
+        </p:spPr>
+        <p:txBody>
+          <a:bodyPr wrap="square">
+            <a:spAutoFit/>
+          </a:bodyPr>
+          <a:lstStyle/>
+          <a:p>
+            <a:r>
+              <a:rPr sz="1800" b="1" i="0">
+                <a:solidFill>
+                  <a:srgbClr val="64748B"/>
+                </a:solidFill>
+                <a:latin typeface="Montserrat"/>
+              </a:rPr>
+              <a:t>¿Qué fórmula resume los procedimientos válidos para certificar un aparato?</a:t>
+            </a:r>
+          </a:p>
+        </p:txBody>
+      </p:sp>
+      <p:sp>
+        <p:nvSpPr>
+          <p:cNvPr id="8" name="Rounded Rectangle 7"/>
+          <p:cNvSpPr/>
+          <p:nvPr/>
+        </p:nvSpPr>
+        <p:spPr>
+          <a:xfrm>
+            <a:off x="822960" y="2514600"/>
+            <a:ext cx="10515600" cy="914400"/>
+          </a:xfrm>
+          <a:prstGeom prst="roundRect">
+            <a:avLst/>
+          </a:prstGeom>
+          <a:solidFill>
+            <a:srgbClr val="E9F6EE"/>
+          </a:solidFill>
+          <a:ln w="12700">
+            <a:solidFill>
+              <a:srgbClr val="1E8E4B"/>
+            </a:solidFill>
+          </a:ln>
+          <a:effectLst/>
+        </p:spPr>
+        <p:style>
+          <a:lnRef idx="1">
+            <a:schemeClr val="accent1"/>
+          </a:lnRef>
+          <a:fillRef idx="3">
+            <a:schemeClr val="accent1"/>
+          </a:fillRef>
+          <a:effectRef idx="2">
+            <a:schemeClr val="accent1"/>
+          </a:effectRef>
+          <a:fontRef idx="minor">
+            <a:schemeClr val="lt1"/>
+          </a:fontRef>
+        </p:style>
+        <p:txBody>
+          <a:bodyPr rtlCol="0" anchor="ctr"/>
+          <a:lstStyle/>
+          <a:p>
+            <a:pPr algn="ctr"/>
+          </a:p>
+        </p:txBody>
+      </p:sp>
+      <p:sp>
+        <p:nvSpPr>
+          <p:cNvPr id="9" name="TextBox 8"/>
+          <p:cNvSpPr txBox="1"/>
+          <p:nvPr/>
+        </p:nvSpPr>
+        <p:spPr>
+          <a:xfrm>
+            <a:off x="1097280" y="2697480"/>
+            <a:ext cx="10058400" cy="640080"/>
+          </a:xfrm>
+          <a:prstGeom prst="rect">
+            <a:avLst/>
+          </a:prstGeom>
+          <a:noFill/>
+        </p:spPr>
+        <p:txBody>
+          <a:bodyPr wrap="square">
+            <a:spAutoFit/>
+          </a:bodyPr>
+          <a:lstStyle/>
+          <a:p>
+            <a:r>
+              <a:rPr sz="1800" b="1" i="0">
+                <a:solidFill>
+                  <a:srgbClr val="1E8E4B"/>
+                </a:solidFill>
+                <a:latin typeface="Montserrat"/>
+              </a:rPr>
+              <a:t>B.  </a:t>
+            </a:r>
+            <a:r>
+              <a:rPr sz="1800" b="1" i="0">
+                <a:solidFill>
+                  <a:srgbClr val="1E2761"/>
+                </a:solidFill>
+                <a:latin typeface="Montserrat"/>
+              </a:rPr>
+              <a:t>A más B, o bien C como alternativa</a:t>
+            </a:r>
+          </a:p>
+        </p:txBody>
+      </p:sp>
+      <p:sp>
+        <p:nvSpPr>
+          <p:cNvPr id="10" name="TextBox 9"/>
+          <p:cNvSpPr txBox="1"/>
+          <p:nvPr/>
+        </p:nvSpPr>
+        <p:spPr>
+          <a:xfrm>
+            <a:off x="822960" y="3749039"/>
+            <a:ext cx="10515600" cy="2194560"/>
+          </a:xfrm>
+          <a:prstGeom prst="rect">
+            <a:avLst/>
+          </a:prstGeom>
+          <a:noFill/>
+        </p:spPr>
+        <p:txBody>
+          <a:bodyPr wrap="square">
+            <a:spAutoFit/>
+          </a:bodyPr>
+          <a:lstStyle/>
+          <a:p>
+            <a:r>
+              <a:rPr sz="1500" b="1" i="0">
+                <a:solidFill>
+                  <a:srgbClr val="E8801A"/>
+                </a:solidFill>
+                <a:latin typeface="Montserrat"/>
+              </a:rPr>
+              <a:t>Por qué:  </a:t>
+            </a:r>
+            <a:r>
+              <a:rPr sz="1500" b="0" i="0">
+                <a:solidFill>
+                  <a:srgbClr val="1B2330"/>
+                </a:solidFill>
+                <a:latin typeface="Montserrat"/>
+              </a:rPr>
+              <a:t>Se somete al examen de tipo (a) más una verificación de la producción (b); o, alternativamente, a la verificación por unidad (c).</a:t>
+            </a:r>
+          </a:p>
+        </p:txBody>
+      </p:sp>
+    </p:spTree>
+  </p:cSld>
+  <p:clrMapOvr>
+    <a:masterClrMapping/>
+  </p:clrMapOvr>
+  <mc:AlternateContent xmlns:mc="http://schemas.openxmlformats.org/markup-compatibility/2006">
+    <mc:Choice xmlns:p14="http://schemas.microsoft.com/office/powerpoint/2010/main" Requires="p14">
+      <p:transition spd="med" p14:dur="700">
+        <p14:cube dir="l"/>
+      </p:transition>
+    </mc:Choice>
+    <mc:Fallback>
+      <p:transition spd="med">
+        <p:push dir="l"/>
+      </p:transition>
+    </mc:Fallback>
+  </mc:AlternateContent>
+</p:sld>
+</file>
+
+<file path=ppt/slides/slide18.xml><?xml version="1.0" encoding="utf-8"?>
+<p:sld xmlns:a="http://schemas.openxmlformats.org/drawingml/2006/main" xmlns:p="http://schemas.openxmlformats.org/presentationml/2006/main" xmlns:r="http://schemas.openxmlformats.org/officeDocument/2006/relationships">
+  <p:cSld>
+    <p:spTree>
+      <p:nvGrpSpPr>
+        <p:cNvPr id="1" name=""/>
+        <p:cNvGrpSpPr/>
+        <p:nvPr/>
+      </p:nvGrpSpPr>
+      <p:grpSpPr/>
+      <p:sp>
+        <p:nvSpPr>
+          <p:cNvPr id="2" name="Rectangle 1"/>
+          <p:cNvSpPr/>
+          <p:nvPr/>
+        </p:nvSpPr>
+        <p:spPr>
+          <a:xfrm>
+            <a:off x="0" y="0"/>
+            <a:ext cx="12191695" cy="6858000"/>
+          </a:xfrm>
+          <a:prstGeom prst="rect">
+            <a:avLst/>
+          </a:prstGeom>
+          <a:solidFill>
+            <a:srgbClr val="FFFFFF"/>
+          </a:solidFill>
+          <a:ln>
+            <a:noFill/>
+          </a:ln>
+          <a:effectLst/>
+        </p:spPr>
+        <p:style>
+          <a:lnRef idx="1">
+            <a:schemeClr val="accent1"/>
+          </a:lnRef>
+          <a:fillRef idx="3">
+            <a:schemeClr val="accent1"/>
+          </a:fillRef>
+          <a:effectRef idx="2">
+            <a:schemeClr val="accent1"/>
+          </a:effectRef>
+          <a:fontRef idx="minor">
+            <a:schemeClr val="lt1"/>
+          </a:fontRef>
+        </p:style>
+        <p:txBody>
+          <a:bodyPr rtlCol="0" anchor="ctr"/>
+          <a:lstStyle/>
+          <a:p>
+            <a:pPr algn="ctr"/>
+          </a:p>
+        </p:txBody>
+      </p:sp>
+      <p:sp>
+        <p:nvSpPr>
+          <p:cNvPr id="3" name="TextBox 2"/>
+          <p:cNvSpPr txBox="1"/>
+          <p:nvPr/>
+        </p:nvSpPr>
+        <p:spPr>
+          <a:xfrm>
+            <a:off x="10607040" y="320040"/>
+            <a:ext cx="1371600" cy="365760"/>
+          </a:xfrm>
+          <a:prstGeom prst="rect">
+            <a:avLst/>
+          </a:prstGeom>
+          <a:noFill/>
+        </p:spPr>
+        <p:txBody>
+          <a:bodyPr wrap="square">
+            <a:spAutoFit/>
+          </a:bodyPr>
+          <a:lstStyle/>
+          <a:p>
+            <a:pPr algn="r"/>
+            <a:r>
+              <a:rPr sz="1000" b="1" i="0">
+                <a:solidFill>
+                  <a:srgbClr val="64748B"/>
+                </a:solidFill>
+                <a:latin typeface="Montserrat"/>
+              </a:rPr>
+              <a:t>018 / 019</a:t>
+            </a:r>
+          </a:p>
+        </p:txBody>
+      </p:sp>
+      <p:sp>
+        <p:nvSpPr>
+          <p:cNvPr id="4" name="TextBox 3"/>
+          <p:cNvSpPr txBox="1"/>
+          <p:nvPr/>
+        </p:nvSpPr>
+        <p:spPr>
+          <a:xfrm>
+            <a:off x="457200" y="6419088"/>
+            <a:ext cx="8229600" cy="365760"/>
+          </a:xfrm>
+          <a:prstGeom prst="rect">
+            <a:avLst/>
+          </a:prstGeom>
+          <a:noFill/>
+        </p:spPr>
+        <p:txBody>
+          <a:bodyPr wrap="square">
+            <a:spAutoFit/>
+          </a:bodyPr>
+          <a:lstStyle/>
+          <a:p>
+            <a:r>
+              <a:rPr sz="900" b="0" i="0">
+                <a:solidFill>
+                  <a:srgbClr val="64748B"/>
+                </a:solidFill>
+                <a:latin typeface="Montserrat"/>
+              </a:rPr>
+              <a:t>Curso Gas B · Tema 05 · Aparatos de gas</a:t>
+            </a:r>
+          </a:p>
+        </p:txBody>
+      </p:sp>
+      <p:sp>
+        <p:nvSpPr>
+          <p:cNvPr id="5" name="TextBox 4"/>
+          <p:cNvSpPr txBox="1"/>
+          <p:nvPr/>
+        </p:nvSpPr>
+        <p:spPr>
+          <a:xfrm>
+            <a:off x="822960" y="457200"/>
+            <a:ext cx="10058400" cy="365760"/>
+          </a:xfrm>
+          <a:prstGeom prst="rect">
+            <a:avLst/>
+          </a:prstGeom>
+          <a:noFill/>
+        </p:spPr>
+        <p:txBody>
+          <a:bodyPr wrap="square">
+            <a:spAutoFit/>
+          </a:bodyPr>
+          <a:lstStyle/>
+          <a:p>
+            <a:r>
+              <a:rPr sz="1300" b="1" i="0">
+                <a:solidFill>
+                  <a:srgbClr val="E8801A"/>
+                </a:solidFill>
+                <a:latin typeface="Montserrat"/>
+              </a:rPr>
+              <a:t>APARTADO 4 · MARCADO</a:t>
+            </a:r>
+          </a:p>
+        </p:txBody>
+      </p:sp>
+      <p:sp>
+        <p:nvSpPr>
+          <p:cNvPr id="6" name="TextBox 5"/>
+          <p:cNvSpPr txBox="1"/>
+          <p:nvPr/>
+        </p:nvSpPr>
+        <p:spPr>
+          <a:xfrm>
+            <a:off x="822960" y="868680"/>
+            <a:ext cx="10515600" cy="914400"/>
+          </a:xfrm>
+          <a:prstGeom prst="rect">
+            <a:avLst/>
+          </a:prstGeom>
+          <a:noFill/>
+        </p:spPr>
+        <p:txBody>
+          <a:bodyPr wrap="square">
+            <a:spAutoFit/>
+          </a:bodyPr>
+          <a:lstStyle/>
+          <a:p>
+            <a:r>
+              <a:rPr sz="2800" b="1" i="0">
+                <a:solidFill>
+                  <a:srgbClr val="1E2761"/>
+                </a:solidFill>
+                <a:latin typeface="Montserrat"/>
+              </a:rPr>
+              <a:t>Placa e instrucciones</a:t>
+            </a:r>
+          </a:p>
+        </p:txBody>
+      </p:sp>
+      <p:sp>
+        <p:nvSpPr>
+          <p:cNvPr id="7" name="Rectangle 6"/>
+          <p:cNvSpPr/>
+          <p:nvPr/>
+        </p:nvSpPr>
+        <p:spPr>
+          <a:xfrm>
+            <a:off x="868680" y="1627632"/>
+            <a:ext cx="2011680" cy="73152"/>
+          </a:xfrm>
+          <a:prstGeom prst="rect">
+            <a:avLst/>
+          </a:prstGeom>
+          <a:solidFill>
+            <a:srgbClr val="E8801A"/>
+          </a:solidFill>
+          <a:ln>
+            <a:noFill/>
+          </a:ln>
+          <a:effectLst/>
+        </p:spPr>
+        <p:style>
+          <a:lnRef idx="1">
+            <a:schemeClr val="accent1"/>
+          </a:lnRef>
+          <a:fillRef idx="3">
+            <a:schemeClr val="accent1"/>
+          </a:fillRef>
+          <a:effectRef idx="2">
+            <a:schemeClr val="accent1"/>
+          </a:effectRef>
+          <a:fontRef idx="minor">
+            <a:schemeClr val="lt1"/>
+          </a:fontRef>
+        </p:style>
+        <p:txBody>
+          <a:bodyPr rtlCol="0" anchor="ctr"/>
+          <a:lstStyle/>
+          <a:p>
+            <a:pPr algn="ctr"/>
+          </a:p>
+        </p:txBody>
+      </p:sp>
+      <p:sp>
+        <p:nvSpPr>
+          <p:cNvPr id="8" name="TextBox 7"/>
+          <p:cNvSpPr txBox="1"/>
+          <p:nvPr/>
+        </p:nvSpPr>
+        <p:spPr>
+          <a:xfrm>
+            <a:off x="822960" y="1965960"/>
+            <a:ext cx="5029200" cy="4206240"/>
+          </a:xfrm>
+          <a:prstGeom prst="rect">
+            <a:avLst/>
+          </a:prstGeom>
+          <a:noFill/>
+        </p:spPr>
+        <p:txBody>
+          <a:bodyPr wrap="square">
+            <a:spAutoFit/>
+          </a:bodyPr>
+          <a:lstStyle/>
+          <a:p>
+            <a:pPr>
+              <a:spcAft>
+                <a:spcPts val="1100"/>
+              </a:spcAft>
+            </a:pPr>
+            <a:r>
+              <a:rPr sz="1600" b="1" i="0">
+                <a:solidFill>
+                  <a:srgbClr val="E8801A"/>
+                </a:solidFill>
+                <a:latin typeface="Montserrat"/>
+              </a:rPr>
+              <a:t>▸  </a:t>
+            </a:r>
+            <a:r>
+              <a:rPr sz="1600" b="0" i="0">
+                <a:solidFill>
+                  <a:srgbClr val="1B2330"/>
+                </a:solidFill>
+                <a:latin typeface="Montserrat"/>
+              </a:rPr>
+              <a:t>Placa visible → anexo 2</a:t>
+            </a:r>
+          </a:p>
+          <a:p>
+            <a:pPr>
+              <a:spcAft>
+                <a:spcPts val="1100"/>
+              </a:spcAft>
+            </a:pPr>
+            <a:r>
+              <a:rPr sz="1600" b="1" i="0">
+                <a:solidFill>
+                  <a:srgbClr val="E8801A"/>
+                </a:solidFill>
+                <a:latin typeface="Montserrat"/>
+              </a:rPr>
+              <a:t>▸  </a:t>
+            </a:r>
+            <a:r>
+              <a:rPr sz="1600" b="0" i="0">
+                <a:solidFill>
+                  <a:srgbClr val="1B2330"/>
+                </a:solidFill>
+                <a:latin typeface="Montserrat"/>
+              </a:rPr>
+              <a:t>Instrucciones → normas o anexo 3</a:t>
+            </a:r>
+          </a:p>
+        </p:txBody>
+      </p:sp>
+      <p:sp>
+        <p:nvSpPr>
+          <p:cNvPr id="9" name="imgph" descr="IMGQ:gas meter cabinet nameplate"/>
+          <p:cNvSpPr/>
+          <p:nvPr/>
+        </p:nvSpPr>
+        <p:spPr>
+          <a:xfrm>
+            <a:off x="6080760" y="1965960"/>
+            <a:ext cx="5303520" cy="4572000"/>
+          </a:xfrm>
+          <a:prstGeom prst="roundRect">
+            <a:avLst/>
+          </a:prstGeom>
+          <a:solidFill>
+            <a:srgbClr val="F3F6FB"/>
+          </a:solidFill>
+          <a:ln w="12700">
+            <a:solidFill>
+              <a:srgbClr val="C7D2E6"/>
+            </a:solidFill>
+          </a:ln>
+          <a:effectLst/>
+        </p:spPr>
+        <p:style>
+          <a:lnRef idx="1">
+            <a:schemeClr val="accent1"/>
+          </a:lnRef>
+          <a:fillRef idx="3">
+            <a:schemeClr val="accent1"/>
+          </a:fillRef>
+          <a:effectRef idx="2">
+            <a:schemeClr val="accent1"/>
+          </a:effectRef>
+          <a:fontRef idx="minor">
+            <a:schemeClr val="lt1"/>
+          </a:fontRef>
+        </p:style>
+        <p:txBody>
+          <a:bodyPr rtlCol="0" anchor="ctr"/>
+          <a:lstStyle/>
+          <a:p>
+            <a:pPr algn="ctr"/>
+          </a:p>
+        </p:txBody>
+      </p:sp>
+      <p:sp>
+        <p:nvSpPr>
+          <p:cNvPr id="10" name="TextBox 9"/>
+          <p:cNvSpPr txBox="1"/>
+          <p:nvPr/>
+        </p:nvSpPr>
+        <p:spPr>
+          <a:xfrm>
+            <a:off x="6355080" y="3611880"/>
+            <a:ext cx="4754880" cy="1280160"/>
+          </a:xfrm>
+          <a:prstGeom prst="rect">
+            <a:avLst/>
+          </a:prstGeom>
+          <a:noFill/>
+        </p:spPr>
+        <p:txBody>
+          <a:bodyPr wrap="square">
+            <a:spAutoFit/>
+          </a:bodyPr>
+          <a:lstStyle/>
+          <a:p>
+            <a:pPr algn="ctr"/>
+            <a:r>
+              <a:rPr sz="1400" b="1" i="0">
+                <a:solidFill>
+                  <a:srgbClr val="64748B"/>
+                </a:solidFill>
+                <a:latin typeface="Montserrat"/>
+              </a:rPr>
+              <a:t>IMAGEN</a:t>
+            </a:r>
+          </a:p>
+          <a:p>
+            <a:pPr algn="ctr"/>
+            <a:r>
+              <a:rPr sz="1100" b="0" i="1">
+                <a:solidFill>
+                  <a:srgbClr val="64748B"/>
+                </a:solidFill>
+                <a:latin typeface="Montserrat"/>
+              </a:rPr>
+              <a:t>gas meter cabinet nameplate</a:t>
+            </a:r>
+          </a:p>
+        </p:txBody>
+      </p:sp>
+    </p:spTree>
+  </p:cSld>
+  <p:clrMapOvr>
+    <a:masterClrMapping/>
+  </p:clrMapOvr>
+  <mc:AlternateContent xmlns:mc="http://schemas.openxmlformats.org/markup-compatibility/2006">
+    <mc:Choice xmlns:p14="http://schemas.microsoft.com/office/powerpoint/2010/main" Requires="p14">
+      <p:transition spd="med" p14:dur="700">
+        <p14:cube dir="r"/>
+      </p:transition>
+    </mc:Choice>
+    <mc:Fallback>
+      <p:transition spd="med">
+        <p:push dir="r"/>
+      </p:transition>
+    </mc:Fallback>
+  </mc:AlternateContent>
+</p:sld>
+</file>
+
+<file path=ppt/slides/slide19.xml><?xml version="1.0" encoding="utf-8"?>
+<p:sld xmlns:a="http://schemas.openxmlformats.org/drawingml/2006/main" xmlns:p="http://schemas.openxmlformats.org/presentationml/2006/main" xmlns:r="http://schemas.openxmlformats.org/officeDocument/2006/relationships">
+  <p:cSld>
+    <p:spTree>
+      <p:nvGrpSpPr>
+        <p:cNvPr id="1" name=""/>
+        <p:cNvGrpSpPr/>
+        <p:nvPr/>
+      </p:nvGrpSpPr>
+      <p:grpSpPr/>
+      <p:sp>
+        <p:nvSpPr>
+          <p:cNvPr id="2" name="Rectangle 1"/>
+          <p:cNvSpPr/>
+          <p:nvPr/>
+        </p:nvSpPr>
+        <p:spPr>
+          <a:xfrm>
+            <a:off x="0" y="0"/>
+            <a:ext cx="12191695" cy="6858000"/>
+          </a:xfrm>
+          <a:prstGeom prst="rect">
+            <a:avLst/>
+          </a:prstGeom>
+          <a:solidFill>
+            <a:srgbClr val="1E2761"/>
+          </a:solidFill>
+          <a:ln>
+            <a:noFill/>
+          </a:ln>
+          <a:effectLst/>
+        </p:spPr>
+        <p:style>
+          <a:lnRef idx="1">
+            <a:schemeClr val="accent1"/>
+          </a:lnRef>
+          <a:fillRef idx="3">
+            <a:schemeClr val="accent1"/>
+          </a:fillRef>
+          <a:effectRef idx="2">
+            <a:schemeClr val="accent1"/>
+          </a:effectRef>
+          <a:fontRef idx="minor">
+            <a:schemeClr val="lt1"/>
+          </a:fontRef>
+        </p:style>
+        <p:txBody>
+          <a:bodyPr rtlCol="0" anchor="ctr"/>
+          <a:lstStyle/>
+          <a:p>
+            <a:pPr algn="ctr"/>
+          </a:p>
+        </p:txBody>
+      </p:sp>
+      <p:sp>
+        <p:nvSpPr>
+          <p:cNvPr id="3" name="TextBox 2"/>
+          <p:cNvSpPr txBox="1"/>
+          <p:nvPr/>
+        </p:nvSpPr>
+        <p:spPr>
+          <a:xfrm>
+            <a:off x="822960" y="640080"/>
+            <a:ext cx="10515600" cy="457200"/>
+          </a:xfrm>
+          <a:prstGeom prst="rect">
+            <a:avLst/>
+          </a:prstGeom>
+          <a:noFill/>
+        </p:spPr>
+        <p:txBody>
+          <a:bodyPr wrap="square">
+            <a:spAutoFit/>
+          </a:bodyPr>
+          <a:lstStyle/>
+          <a:p>
+            <a:r>
+              <a:rPr sz="1400" b="1" i="0">
+                <a:solidFill>
+                  <a:srgbClr val="F4A24C"/>
+                </a:solidFill>
+                <a:latin typeface="Montserrat"/>
+              </a:rPr>
+              <a:t>LO QUE YA DOMINAS</a:t>
+            </a:r>
+          </a:p>
+        </p:txBody>
+      </p:sp>
+      <p:sp>
+        <p:nvSpPr>
+          <p:cNvPr id="4" name="Rectangle 3"/>
+          <p:cNvSpPr/>
+          <p:nvPr/>
+        </p:nvSpPr>
+        <p:spPr>
+          <a:xfrm>
+            <a:off x="868680" y="1051560"/>
+            <a:ext cx="1463040" cy="82296"/>
+          </a:xfrm>
+          <a:prstGeom prst="rect">
+            <a:avLst/>
+          </a:prstGeom>
+          <a:solidFill>
+            <a:srgbClr val="E8801A"/>
+          </a:solidFill>
+          <a:ln>
+            <a:noFill/>
+          </a:ln>
+          <a:effectLst/>
+        </p:spPr>
+        <p:style>
+          <a:lnRef idx="1">
+            <a:schemeClr val="accent1"/>
+          </a:lnRef>
+          <a:fillRef idx="3">
+            <a:schemeClr val="accent1"/>
+          </a:fillRef>
+          <a:effectRef idx="2">
+            <a:schemeClr val="accent1"/>
+          </a:effectRef>
+          <a:fontRef idx="minor">
+            <a:schemeClr val="lt1"/>
+          </a:fontRef>
+        </p:style>
+        <p:txBody>
+          <a:bodyPr rtlCol="0" anchor="ctr"/>
+          <a:lstStyle/>
+          <a:p>
+            <a:pPr algn="ctr"/>
+          </a:p>
+        </p:txBody>
+      </p:sp>
+      <p:sp>
+        <p:nvSpPr>
+          <p:cNvPr id="5" name="TextBox 4"/>
+          <p:cNvSpPr txBox="1"/>
+          <p:nvPr/>
+        </p:nvSpPr>
+        <p:spPr>
+          <a:xfrm>
+            <a:off x="822960" y="1234440"/>
+            <a:ext cx="10515600" cy="1097280"/>
+          </a:xfrm>
+          <a:prstGeom prst="rect">
+            <a:avLst/>
+          </a:prstGeom>
+          <a:noFill/>
+        </p:spPr>
+        <p:txBody>
+          <a:bodyPr wrap="square">
+            <a:spAutoFit/>
+          </a:bodyPr>
+          <a:lstStyle/>
+          <a:p>
+            <a:r>
+              <a:rPr sz="3400" b="1" i="0">
+                <a:solidFill>
+                  <a:srgbClr val="FFFFFF"/>
+                </a:solidFill>
+                <a:latin typeface="Montserrat"/>
+              </a:rPr>
+              <a:t>Ya controlas el aparato antes de tocarlo</a:t>
+            </a:r>
+          </a:p>
+        </p:txBody>
+      </p:sp>
+      <p:sp>
+        <p:nvSpPr>
+          <p:cNvPr id="6" name="TextBox 5"/>
+          <p:cNvSpPr txBox="1"/>
+          <p:nvPr/>
+        </p:nvSpPr>
+        <p:spPr>
+          <a:xfrm>
+            <a:off x="822960" y="2606040"/>
+            <a:ext cx="10515600" cy="2743200"/>
+          </a:xfrm>
+          <a:prstGeom prst="rect">
+            <a:avLst/>
+          </a:prstGeom>
+          <a:noFill/>
+        </p:spPr>
+        <p:txBody>
+          <a:bodyPr wrap="square">
+            <a:spAutoFit/>
+          </a:bodyPr>
+          <a:lstStyle/>
+          <a:p>
+            <a:pPr>
+              <a:spcAft>
+                <a:spcPts val="1200"/>
+              </a:spcAft>
+            </a:pPr>
+            <a:r>
+              <a:rPr sz="2000" b="1" i="0">
+                <a:solidFill>
+                  <a:srgbClr val="F4A24C"/>
+                </a:solidFill>
+                <a:latin typeface="Montserrat"/>
+              </a:rPr>
+              <a:t>✓  </a:t>
+            </a:r>
+            <a:r>
+              <a:rPr sz="1900" b="0" i="0">
+                <a:solidFill>
+                  <a:srgbClr val="FFFFFF"/>
+                </a:solidFill>
+                <a:latin typeface="Montserrat"/>
+              </a:rPr>
+              <a:t>La ITC-ICG 08 es la norma del aparato, no del tubo</a:t>
+            </a:r>
+          </a:p>
+          <a:p>
+            <a:pPr>
+              <a:spcAft>
+                <a:spcPts val="1200"/>
+              </a:spcAft>
+            </a:pPr>
+            <a:r>
+              <a:rPr sz="2000" b="1" i="0">
+                <a:solidFill>
+                  <a:srgbClr val="F4A24C"/>
+                </a:solidFill>
+                <a:latin typeface="Montserrat"/>
+              </a:rPr>
+              <a:t>✓  </a:t>
+            </a:r>
+            <a:r>
+              <a:rPr sz="1900" b="0" i="0">
+                <a:solidFill>
+                  <a:srgbClr val="FFFFFF"/>
+                </a:solidFill>
+                <a:latin typeface="Montserrat"/>
+              </a:rPr>
+              <a:t>Exiges dos manuales y placa, en español</a:t>
+            </a:r>
+          </a:p>
+          <a:p>
+            <a:pPr>
+              <a:spcAft>
+                <a:spcPts val="1200"/>
+              </a:spcAft>
+            </a:pPr>
+            <a:r>
+              <a:rPr sz="2000" b="1" i="0">
+                <a:solidFill>
+                  <a:srgbClr val="F4A24C"/>
+                </a:solidFill>
+                <a:latin typeface="Montserrat"/>
+              </a:rPr>
+              <a:t>✓  </a:t>
+            </a:r>
+            <a:r>
+              <a:rPr sz="1900" b="0" i="0">
+                <a:solidFill>
+                  <a:srgbClr val="FFFFFF"/>
+                </a:solidFill>
+                <a:latin typeface="Montserrat"/>
+              </a:rPr>
+              <a:t>Reconoces las tres patas del funcionamiento</a:t>
+            </a:r>
+          </a:p>
+          <a:p>
+            <a:pPr>
+              <a:spcAft>
+                <a:spcPts val="1200"/>
+              </a:spcAft>
+            </a:pPr>
+            <a:r>
+              <a:rPr sz="2000" b="1" i="0">
+                <a:solidFill>
+                  <a:srgbClr val="F4A24C"/>
+                </a:solidFill>
+                <a:latin typeface="Montserrat"/>
+              </a:rPr>
+              <a:t>✓  </a:t>
+            </a:r>
+            <a:r>
+              <a:rPr sz="1900" b="0" i="0">
+                <a:solidFill>
+                  <a:srgbClr val="FFFFFF"/>
+                </a:solidFill>
+                <a:latin typeface="Montserrat"/>
+              </a:rPr>
+              <a:t>Certificas con la fórmula: a + b, o bien c</a:t>
+            </a:r>
+          </a:p>
+        </p:txBody>
+      </p:sp>
+      <p:sp>
+        <p:nvSpPr>
+          <p:cNvPr id="7" name="Rounded Rectangle 6"/>
+          <p:cNvSpPr/>
+          <p:nvPr/>
+        </p:nvSpPr>
+        <p:spPr>
+          <a:xfrm>
+            <a:off x="822960" y="5532120"/>
+            <a:ext cx="10515600" cy="822960"/>
+          </a:xfrm>
+          <a:prstGeom prst="roundRect">
+            <a:avLst/>
+          </a:prstGeom>
+          <a:solidFill>
+            <a:srgbClr val="E8801A"/>
+          </a:solidFill>
+          <a:ln>
+            <a:noFill/>
+          </a:ln>
+          <a:effectLst/>
+        </p:spPr>
+        <p:style>
+          <a:lnRef idx="1">
+            <a:schemeClr val="accent1"/>
+          </a:lnRef>
+          <a:fillRef idx="3">
+            <a:schemeClr val="accent1"/>
+          </a:fillRef>
+          <a:effectRef idx="2">
+            <a:schemeClr val="accent1"/>
+          </a:effectRef>
+          <a:fontRef idx="minor">
+            <a:schemeClr val="lt1"/>
+          </a:fontRef>
+        </p:style>
+        <p:txBody>
+          <a:bodyPr rtlCol="0" anchor="ctr"/>
+          <a:lstStyle/>
+          <a:p>
+            <a:pPr algn="ctr"/>
+          </a:p>
+        </p:txBody>
+      </p:sp>
+      <p:sp>
+        <p:nvSpPr>
+          <p:cNvPr id="8" name="TextBox 7"/>
+          <p:cNvSpPr txBox="1"/>
+          <p:nvPr/>
+        </p:nvSpPr>
+        <p:spPr>
+          <a:xfrm>
+            <a:off x="1051560" y="5623560"/>
+            <a:ext cx="10058400" cy="640080"/>
+          </a:xfrm>
+          <a:prstGeom prst="rect">
+            <a:avLst/>
+          </a:prstGeom>
+          <a:noFill/>
+        </p:spPr>
+        <p:txBody>
+          <a:bodyPr wrap="square">
+            <a:spAutoFit/>
+          </a:bodyPr>
+          <a:lstStyle/>
+          <a:p>
+            <a:r>
+              <a:rPr sz="1500" b="1" i="1">
+                <a:solidFill>
+                  <a:srgbClr val="1E2761"/>
+                </a:solidFill>
+                <a:latin typeface="Montserrat"/>
+              </a:rPr>
+              <a:t>Hoy ya eres más gasista que ayer. En el siguiente vídeo bajamos al piso: a conectar y arrancar el aparato.</a:t>
+            </a:r>
+          </a:p>
+        </p:txBody>
+      </p:sp>
+    </p:spTree>
+  </p:cSld>
+  <p:clrMapOvr>
+    <a:masterClrMapping/>
+  </p:clrMapOvr>
+  <mc:AlternateContent xmlns:mc="http://schemas.openxmlformats.org/markup-compatibility/2006">
+    <mc:Choice xmlns:p14="http://schemas.microsoft.com/office/powerpoint/2010/main" Requires="p14">
+      <p:transition spd="med" p14:dur="700">
+        <p14:cube dir="l"/>
+      </p:transition>
+    </mc:Choice>
+    <mc:Fallback>
+      <p:transition spd="med">
+        <p:push dir="l"/>
+      </p:transition>
+    </mc:Fallback>
+  </mc:AlternateContent>
 </p:sld>
 </file>
 
@@ -7416,7 +10049,7 @@
                 </a:solidFill>
                 <a:latin typeface="Montserrat"/>
               </a:rPr>
-              <a:t>002 / 015</a:t>
+              <a:t>002 / 019</a:t>
             </a:r>
           </a:p>
         </p:txBody>
@@ -7491,7 +10124,7 @@
       </p:sp>
       <p:sp>
         <p:nvSpPr>
-          <p:cNvPr id="6" name="Rounded Rectangle 5"/>
+          <p:cNvPr id="6" name="Rectangle 5"/>
           <p:cNvSpPr/>
           <p:nvPr/>
         </p:nvSpPr>
@@ -7500,7 +10133,7 @@
             <a:off x="868680" y="1234440"/>
             <a:ext cx="1463040" cy="73152"/>
           </a:xfrm>
-          <a:prstGeom prst="roundRect">
+          <a:prstGeom prst="rect">
             <a:avLst/>
           </a:prstGeom>
           <a:solidFill>
@@ -7581,14 +10214,58 @@
       </p:sp>
       <p:sp>
         <p:nvSpPr>
-          <p:cNvPr id="8" name="TextBox 7"/>
+          <p:cNvPr id="8" name="Rectangle 7"/>
+          <p:cNvSpPr/>
+          <p:nvPr/>
+        </p:nvSpPr>
+        <p:spPr>
+          <a:xfrm>
+            <a:off x="822960" y="2011680"/>
+            <a:ext cx="3017520" cy="128016"/>
+          </a:xfrm>
+          <a:prstGeom prst="rect">
+            <a:avLst/>
+          </a:prstGeom>
+          <a:solidFill>
+            <a:srgbClr val="E8801A"/>
+          </a:solidFill>
+          <a:ln>
+            <a:noFill/>
+          </a:ln>
+          <a:effectLst/>
+        </p:spPr>
+        <p:style>
+          <a:lnRef idx="1">
+            <a:schemeClr val="accent1"/>
+          </a:lnRef>
+          <a:fillRef idx="3">
+            <a:schemeClr val="accent1"/>
+          </a:fillRef>
+          <a:effectRef idx="2">
+            <a:schemeClr val="accent1"/>
+          </a:effectRef>
+          <a:fontRef idx="minor">
+            <a:schemeClr val="lt1"/>
+          </a:fontRef>
+        </p:style>
+        <p:txBody>
+          <a:bodyPr rtlCol="0" anchor="ctr"/>
+          <a:lstStyle/>
+          <a:p>
+            <a:pPr algn="ctr"/>
+          </a:p>
+        </p:txBody>
+      </p:sp>
+      <p:sp>
+        <p:nvSpPr>
+          <p:cNvPr id="9" name="TextBox 8"/>
           <p:cNvSpPr txBox="1"/>
           <p:nvPr/>
         </p:nvSpPr>
         <p:spPr>
           <a:xfrm>
-            <a:off x="822960" y="2331720"/>
-            <a:ext cx="3017520" cy="1463040"/>
+            <a:off x="822960" y="2377440"/>
+            <a:ext cx="3017520" cy="1371600"/>
           </a:xfrm>
           <a:prstGeom prst="rect">
             <a:avLst/>
@@ -7603,7 +10280,7 @@
           <a:p>
             <a:pPr algn="ctr"/>
             <a:r>
-              <a:rPr sz="6000" b="1" i="0">
+              <a:rPr sz="5800" b="1" i="0">
                 <a:solidFill>
                   <a:srgbClr val="1E2761"/>
                 </a:solidFill>
@@ -7616,13 +10293,13 @@
       </p:sp>
       <p:sp>
         <p:nvSpPr>
-          <p:cNvPr id="9" name="TextBox 8"/>
+          <p:cNvPr id="10" name="TextBox 9"/>
           <p:cNvSpPr txBox="1"/>
           <p:nvPr/>
         </p:nvSpPr>
         <p:spPr>
           <a:xfrm>
-            <a:off x="1051560" y="3611880"/>
+            <a:off x="1051560" y="3657600"/>
             <a:ext cx="2560320" cy="1005840"/>
           </a:xfrm>
           <a:prstGeom prst="rect">
@@ -7651,7 +10328,7 @@
       </p:sp>
       <p:sp>
         <p:nvSpPr>
-          <p:cNvPr id="10" name="Rounded Rectangle 9"/>
+          <p:cNvPr id="11" name="Rounded Rectangle 10"/>
           <p:cNvSpPr/>
           <p:nvPr/>
         </p:nvSpPr>
@@ -7697,14 +10374,58 @@
       </p:sp>
       <p:sp>
         <p:nvSpPr>
-          <p:cNvPr id="11" name="TextBox 10"/>
+          <p:cNvPr id="12" name="Rectangle 11"/>
+          <p:cNvSpPr/>
+          <p:nvPr/>
+        </p:nvSpPr>
+        <p:spPr>
+          <a:xfrm>
+            <a:off x="4617720" y="2011680"/>
+            <a:ext cx="3017520" cy="128016"/>
+          </a:xfrm>
+          <a:prstGeom prst="rect">
+            <a:avLst/>
+          </a:prstGeom>
+          <a:solidFill>
+            <a:srgbClr val="E8801A"/>
+          </a:solidFill>
+          <a:ln>
+            <a:noFill/>
+          </a:ln>
+          <a:effectLst/>
+        </p:spPr>
+        <p:style>
+          <a:lnRef idx="1">
+            <a:schemeClr val="accent1"/>
+          </a:lnRef>
+          <a:fillRef idx="3">
+            <a:schemeClr val="accent1"/>
+          </a:fillRef>
+          <a:effectRef idx="2">
+            <a:schemeClr val="accent1"/>
+          </a:effectRef>
+          <a:fontRef idx="minor">
+            <a:schemeClr val="lt1"/>
+          </a:fontRef>
+        </p:style>
+        <p:txBody>
+          <a:bodyPr rtlCol="0" anchor="ctr"/>
+          <a:lstStyle/>
+          <a:p>
+            <a:pPr algn="ctr"/>
+          </a:p>
+        </p:txBody>
+      </p:sp>
+      <p:sp>
+        <p:nvSpPr>
+          <p:cNvPr id="13" name="TextBox 12"/>
           <p:cNvSpPr txBox="1"/>
           <p:nvPr/>
         </p:nvSpPr>
         <p:spPr>
           <a:xfrm>
-            <a:off x="4617720" y="2331720"/>
-            <a:ext cx="3017520" cy="1463040"/>
+            <a:off x="4617720" y="2377440"/>
+            <a:ext cx="3017520" cy="1371600"/>
           </a:xfrm>
           <a:prstGeom prst="rect">
             <a:avLst/>
@@ -7719,7 +10440,7 @@
           <a:p>
             <a:pPr algn="ctr"/>
             <a:r>
-              <a:rPr sz="6000" b="1" i="0">
+              <a:rPr sz="5800" b="1" i="0">
                 <a:solidFill>
                   <a:srgbClr val="1E2761"/>
                 </a:solidFill>
@@ -7732,13 +10453,13 @@
       </p:sp>
       <p:sp>
         <p:nvSpPr>
-          <p:cNvPr id="12" name="TextBox 11"/>
+          <p:cNvPr id="14" name="TextBox 13"/>
           <p:cNvSpPr txBox="1"/>
           <p:nvPr/>
         </p:nvSpPr>
         <p:spPr>
           <a:xfrm>
-            <a:off x="4846320" y="3611880"/>
+            <a:off x="4846320" y="3657600"/>
             <a:ext cx="2560320" cy="1005840"/>
           </a:xfrm>
           <a:prstGeom prst="rect">
@@ -7767,7 +10488,7 @@
       </p:sp>
       <p:sp>
         <p:nvSpPr>
-          <p:cNvPr id="13" name="Rounded Rectangle 12"/>
+          <p:cNvPr id="15" name="Rounded Rectangle 14"/>
           <p:cNvSpPr/>
           <p:nvPr/>
         </p:nvSpPr>
@@ -7813,14 +10534,58 @@
       </p:sp>
       <p:sp>
         <p:nvSpPr>
-          <p:cNvPr id="14" name="TextBox 13"/>
+          <p:cNvPr id="16" name="Rectangle 15"/>
+          <p:cNvSpPr/>
+          <p:nvPr/>
+        </p:nvSpPr>
+        <p:spPr>
+          <a:xfrm>
+            <a:off x="8412480" y="2011680"/>
+            <a:ext cx="3017520" cy="128016"/>
+          </a:xfrm>
+          <a:prstGeom prst="rect">
+            <a:avLst/>
+          </a:prstGeom>
+          <a:solidFill>
+            <a:srgbClr val="E8801A"/>
+          </a:solidFill>
+          <a:ln>
+            <a:noFill/>
+          </a:ln>
+          <a:effectLst/>
+        </p:spPr>
+        <p:style>
+          <a:lnRef idx="1">
+            <a:schemeClr val="accent1"/>
+          </a:lnRef>
+          <a:fillRef idx="3">
+            <a:schemeClr val="accent1"/>
+          </a:fillRef>
+          <a:effectRef idx="2">
+            <a:schemeClr val="accent1"/>
+          </a:effectRef>
+          <a:fontRef idx="minor">
+            <a:schemeClr val="lt1"/>
+          </a:fontRef>
+        </p:style>
+        <p:txBody>
+          <a:bodyPr rtlCol="0" anchor="ctr"/>
+          <a:lstStyle/>
+          <a:p>
+            <a:pPr algn="ctr"/>
+          </a:p>
+        </p:txBody>
+      </p:sp>
+      <p:sp>
+        <p:nvSpPr>
+          <p:cNvPr id="17" name="TextBox 16"/>
           <p:cNvSpPr txBox="1"/>
           <p:nvPr/>
         </p:nvSpPr>
         <p:spPr>
           <a:xfrm>
-            <a:off x="8412480" y="2331720"/>
-            <a:ext cx="3017520" cy="1463040"/>
+            <a:off x="8412480" y="2377440"/>
+            <a:ext cx="3017520" cy="1371600"/>
           </a:xfrm>
           <a:prstGeom prst="rect">
             <a:avLst/>
@@ -7835,7 +10600,7 @@
           <a:p>
             <a:pPr algn="ctr"/>
             <a:r>
-              <a:rPr sz="6000" b="1" i="0">
+              <a:rPr sz="5800" b="1" i="0">
                 <a:solidFill>
                   <a:srgbClr val="1E2761"/>
                 </a:solidFill>
@@ -7848,13 +10613,13 @@
       </p:sp>
       <p:sp>
         <p:nvSpPr>
-          <p:cNvPr id="15" name="TextBox 14"/>
+          <p:cNvPr id="18" name="TextBox 17"/>
           <p:cNvSpPr txBox="1"/>
           <p:nvPr/>
         </p:nvSpPr>
         <p:spPr>
           <a:xfrm>
-            <a:off x="8641080" y="3611880"/>
+            <a:off x="8641080" y="3657600"/>
             <a:ext cx="2560320" cy="1005840"/>
           </a:xfrm>
           <a:prstGeom prst="rect">
@@ -7886,6 +10651,18 @@
   <p:clrMapOvr>
     <a:masterClrMapping/>
   </p:clrMapOvr>
+  <mc:AlternateContent xmlns:mc="http://schemas.openxmlformats.org/markup-compatibility/2006">
+    <mc:Choice xmlns:p14="http://schemas.microsoft.com/office/powerpoint/2010/main" Requires="p14">
+      <p:transition spd="med" p14:dur="700">
+        <p14:cube dir="r"/>
+      </p:transition>
+    </mc:Choice>
+    <mc:Fallback>
+      <p:transition spd="med">
+        <p:push dir="r"/>
+      </p:transition>
+    </mc:Fallback>
+  </mc:AlternateContent>
 </p:sld>
 </file>
 
@@ -7973,7 +10750,7 @@
                 </a:solidFill>
                 <a:latin typeface="Montserrat"/>
               </a:rPr>
-              <a:t>003 / 015</a:t>
+              <a:t>003 / 019</a:t>
             </a:r>
           </a:p>
         </p:txBody>
@@ -8082,7 +10859,7 @@
       </p:sp>
       <p:sp>
         <p:nvSpPr>
-          <p:cNvPr id="7" name="Rounded Rectangle 6"/>
+          <p:cNvPr id="7" name="Rectangle 6"/>
           <p:cNvSpPr/>
           <p:nvPr/>
         </p:nvSpPr>
@@ -8091,7 +10868,7 @@
             <a:off x="868680" y="1673352"/>
             <a:ext cx="2011680" cy="73152"/>
           </a:xfrm>
-          <a:prstGeom prst="roundRect">
+          <a:prstGeom prst="rect">
             <a:avLst/>
           </a:prstGeom>
           <a:solidFill>
@@ -8377,6 +11154,18 @@
   <p:clrMapOvr>
     <a:masterClrMapping/>
   </p:clrMapOvr>
+  <mc:AlternateContent xmlns:mc="http://schemas.openxmlformats.org/markup-compatibility/2006">
+    <mc:Choice xmlns:p14="http://schemas.microsoft.com/office/powerpoint/2010/main" Requires="p14">
+      <p:transition spd="med" p14:dur="700">
+        <p14:cube dir="l"/>
+      </p:transition>
+    </mc:Choice>
+    <mc:Fallback>
+      <p:transition spd="med">
+        <p:push dir="l"/>
+      </p:transition>
+    </mc:Fallback>
+  </mc:AlternateContent>
 </p:sld>
 </file>
 
@@ -8464,7 +11253,7 @@
                 </a:solidFill>
                 <a:latin typeface="Montserrat"/>
               </a:rPr>
-              <a:t>004 / 015</a:t>
+              <a:t>004 / 019</a:t>
             </a:r>
           </a:p>
         </p:txBody>
@@ -8573,7 +11362,7 @@
       </p:sp>
       <p:sp>
         <p:nvSpPr>
-          <p:cNvPr id="7" name="Rounded Rectangle 6"/>
+          <p:cNvPr id="7" name="Rectangle 6"/>
           <p:cNvSpPr/>
           <p:nvPr/>
         </p:nvSpPr>
@@ -8582,7 +11371,7 @@
             <a:off x="868680" y="1627632"/>
             <a:ext cx="2011680" cy="73152"/>
           </a:xfrm>
-          <a:prstGeom prst="roundRect">
+          <a:prstGeom prst="rect">
             <a:avLst/>
           </a:prstGeom>
           <a:solidFill>
@@ -8624,7 +11413,7 @@
         <p:spPr>
           <a:xfrm>
             <a:off x="822960" y="1965960"/>
-            <a:ext cx="4983480" cy="4206240"/>
+            <a:ext cx="5029200" cy="4206240"/>
           </a:xfrm>
           <a:prstGeom prst="rect">
             <a:avLst/>
@@ -8746,8 +11535,8 @@
         </p:nvSpPr>
         <p:spPr>
           <a:xfrm>
-            <a:off x="5806440" y="1051560"/>
-            <a:ext cx="5298947" cy="4629150"/>
+            <a:off x="6080760" y="1965960"/>
+            <a:ext cx="5303520" cy="4572000"/>
           </a:xfrm>
           <a:prstGeom prst="roundRect">
             <a:avLst/>
@@ -8792,8 +11581,8 @@
         </p:nvSpPr>
         <p:spPr>
           <a:xfrm>
-            <a:off x="6080760" y="2726055"/>
-            <a:ext cx="4750307" cy="1280160"/>
+            <a:off x="6355080" y="3611880"/>
+            <a:ext cx="4754880" cy="1280160"/>
           </a:xfrm>
           <a:prstGeom prst="rect">
             <a:avLst/>
@@ -8814,7 +11603,7 @@
                 </a:solidFill>
                 <a:latin typeface="Montserrat"/>
               </a:rPr>
-              <a:t>IMAGEN REALISTA</a:t>
+              <a:t>IMAGEN</a:t>
             </a:r>
           </a:p>
           <a:p>
@@ -8836,6 +11625,18 @@
   <p:clrMapOvr>
     <a:masterClrMapping/>
   </p:clrMapOvr>
+  <mc:AlternateContent xmlns:mc="http://schemas.openxmlformats.org/markup-compatibility/2006">
+    <mc:Choice xmlns:p14="http://schemas.microsoft.com/office/powerpoint/2010/main" Requires="p14">
+      <p:transition spd="med" p14:dur="700">
+        <p14:cube dir="r"/>
+      </p:transition>
+    </mc:Choice>
+    <mc:Fallback>
+      <p:transition spd="med">
+        <p:push dir="r"/>
+      </p:transition>
+    </mc:Fallback>
+  </mc:AlternateContent>
 </p:sld>
 </file>
 
@@ -8923,7 +11724,7 @@
                 </a:solidFill>
                 <a:latin typeface="Montserrat"/>
               </a:rPr>
-              <a:t>005 / 015</a:t>
+              <a:t>005 / 019</a:t>
             </a:r>
           </a:p>
         </p:txBody>
@@ -9032,7 +11833,7 @@
       </p:sp>
       <p:sp>
         <p:nvSpPr>
-          <p:cNvPr id="7" name="Rounded Rectangle 6"/>
+          <p:cNvPr id="7" name="Rectangle 6"/>
           <p:cNvSpPr/>
           <p:nvPr/>
         </p:nvSpPr>
@@ -9041,7 +11842,7 @@
             <a:off x="868680" y="1627632"/>
             <a:ext cx="2011680" cy="73152"/>
           </a:xfrm>
-          <a:prstGeom prst="roundRect">
+          <a:prstGeom prst="rect">
             <a:avLst/>
           </a:prstGeom>
           <a:solidFill>
@@ -9082,8 +11883,8 @@
         </p:nvSpPr>
         <p:spPr>
           <a:xfrm>
-            <a:off x="822960" y="1965960"/>
-            <a:ext cx="4983480" cy="4206240"/>
+            <a:off x="6355080" y="1965960"/>
+            <a:ext cx="5029200" cy="4206240"/>
           </a:xfrm>
           <a:prstGeom prst="rect">
             <a:avLst/>
@@ -9180,8 +11981,8 @@
         </p:nvSpPr>
         <p:spPr>
           <a:xfrm>
-            <a:off x="5806440" y="1051560"/>
-            <a:ext cx="5298947" cy="4629150"/>
+            <a:off x="822960" y="1965960"/>
+            <a:ext cx="5303520" cy="4572000"/>
           </a:xfrm>
           <a:prstGeom prst="roundRect">
             <a:avLst/>
@@ -9226,8 +12027,8 @@
         </p:nvSpPr>
         <p:spPr>
           <a:xfrm>
-            <a:off x="6080760" y="2726055"/>
-            <a:ext cx="4750307" cy="1280160"/>
+            <a:off x="1097280" y="3611880"/>
+            <a:ext cx="4754880" cy="1280160"/>
           </a:xfrm>
           <a:prstGeom prst="rect">
             <a:avLst/>
@@ -9248,7 +12049,7 @@
                 </a:solidFill>
                 <a:latin typeface="Montserrat"/>
               </a:rPr>
-              <a:t>IMAGEN REALISTA</a:t>
+              <a:t>IMAGEN</a:t>
             </a:r>
           </a:p>
           <a:p>
@@ -9270,6 +12071,18 @@
   <p:clrMapOvr>
     <a:masterClrMapping/>
   </p:clrMapOvr>
+  <mc:AlternateContent xmlns:mc="http://schemas.openxmlformats.org/markup-compatibility/2006">
+    <mc:Choice xmlns:p14="http://schemas.microsoft.com/office/powerpoint/2010/main" Requires="p14">
+      <p:transition spd="med" p14:dur="700">
+        <p14:cube dir="l"/>
+      </p:transition>
+    </mc:Choice>
+    <mc:Fallback>
+      <p:transition spd="med">
+        <p:push dir="l"/>
+      </p:transition>
+    </mc:Fallback>
+  </mc:AlternateContent>
 </p:sld>
 </file>
 
@@ -9357,7 +12170,7 @@
                 </a:solidFill>
                 <a:latin typeface="Montserrat"/>
               </a:rPr>
-              <a:t>006 / 015</a:t>
+              <a:t>006 / 019</a:t>
             </a:r>
           </a:p>
         </p:txBody>
@@ -9398,84 +12211,16 @@
       </p:sp>
       <p:sp>
         <p:nvSpPr>
-          <p:cNvPr id="5" name="TextBox 4"/>
-          <p:cNvSpPr txBox="1"/>
-          <p:nvPr/>
-        </p:nvSpPr>
-        <p:spPr>
-          <a:xfrm>
-            <a:off x="822960" y="457200"/>
-            <a:ext cx="10058400" cy="365760"/>
-          </a:xfrm>
-          <a:prstGeom prst="rect">
-            <a:avLst/>
-          </a:prstGeom>
-          <a:noFill/>
-        </p:spPr>
-        <p:txBody>
-          <a:bodyPr wrap="square">
-            <a:spAutoFit/>
-          </a:bodyPr>
-          <a:lstStyle/>
-          <a:p>
-            <a:r>
-              <a:rPr sz="1300" b="1" i="0">
-                <a:solidFill>
-                  <a:srgbClr val="E8801A"/>
-                </a:solidFill>
-                <a:latin typeface="Montserrat"/>
-              </a:rPr>
-              <a:t>APARTADO 2 · COMERCIALIZACIÓN</a:t>
-            </a:r>
-          </a:p>
-        </p:txBody>
-      </p:sp>
-      <p:sp>
-        <p:nvSpPr>
-          <p:cNvPr id="6" name="TextBox 5"/>
-          <p:cNvSpPr txBox="1"/>
-          <p:nvPr/>
-        </p:nvSpPr>
-        <p:spPr>
-          <a:xfrm>
-            <a:off x="822960" y="868680"/>
-            <a:ext cx="10515600" cy="914400"/>
-          </a:xfrm>
-          <a:prstGeom prst="rect">
-            <a:avLst/>
-          </a:prstGeom>
-          <a:noFill/>
-        </p:spPr>
-        <p:txBody>
-          <a:bodyPr wrap="square">
-            <a:spAutoFit/>
-          </a:bodyPr>
-          <a:lstStyle/>
-          <a:p>
-            <a:r>
-              <a:rPr sz="2800" b="1" i="0">
-                <a:solidFill>
-                  <a:srgbClr val="1E2761"/>
-                </a:solidFill>
-                <a:latin typeface="Montserrat"/>
-              </a:rPr>
-              <a:t>Qué aparatos pueden venderse</a:t>
-            </a:r>
-          </a:p>
-        </p:txBody>
-      </p:sp>
-      <p:sp>
-        <p:nvSpPr>
-          <p:cNvPr id="7" name="Rounded Rectangle 6"/>
+          <p:cNvPr id="5" name="Rectangle 4"/>
           <p:cNvSpPr/>
           <p:nvPr/>
         </p:nvSpPr>
         <p:spPr>
           <a:xfrm>
-            <a:off x="868680" y="1627632"/>
-            <a:ext cx="2011680" cy="73152"/>
-          </a:xfrm>
-          <a:prstGeom prst="roundRect">
+            <a:off x="0" y="0"/>
+            <a:ext cx="12191695" cy="1143000"/>
+          </a:xfrm>
+          <a:prstGeom prst="rect">
             <a:avLst/>
           </a:prstGeom>
           <a:solidFill>
@@ -9510,14 +12255,14 @@
       </p:sp>
       <p:sp>
         <p:nvSpPr>
-          <p:cNvPr id="8" name="TextBox 7"/>
+          <p:cNvPr id="6" name="TextBox 5"/>
           <p:cNvSpPr txBox="1"/>
           <p:nvPr/>
         </p:nvSpPr>
         <p:spPr>
           <a:xfrm>
-            <a:off x="822960" y="1965960"/>
-            <a:ext cx="4983480" cy="4206240"/>
+            <a:off x="822960" y="274320"/>
+            <a:ext cx="10515600" cy="640080"/>
           </a:xfrm>
           <a:prstGeom prst="rect">
             <a:avLst/>
@@ -9530,92 +12275,62 @@
           </a:bodyPr>
           <a:lstStyle/>
           <a:p>
-            <a:pPr>
-              <a:spcAft>
-                <a:spcPts val="1100"/>
-              </a:spcAft>
-            </a:pPr>
-            <a:r>
-              <a:rPr sz="1600" b="1" i="0">
-                <a:solidFill>
-                  <a:srgbClr val="E8801A"/>
-                </a:solidFill>
-                <a:latin typeface="Montserrat"/>
-              </a:rPr>
-              <a:t>▸  </a:t>
-            </a:r>
-            <a:r>
-              <a:rPr sz="1600" b="0" i="0">
-                <a:solidFill>
-                  <a:srgbClr val="1B2330"/>
-                </a:solidFill>
-                <a:latin typeface="Montserrat"/>
-              </a:rPr>
-              <a:t>Sin peligro para personas, animales y bienes</a:t>
-            </a:r>
-          </a:p>
-          <a:p>
-            <a:pPr>
-              <a:spcAft>
-                <a:spcPts val="1100"/>
-              </a:spcAft>
-            </a:pPr>
-            <a:r>
-              <a:rPr sz="1600" b="1" i="0">
-                <a:solidFill>
-                  <a:srgbClr val="E8801A"/>
-                </a:solidFill>
-                <a:latin typeface="Montserrat"/>
-              </a:rPr>
-              <a:t>▸  </a:t>
-            </a:r>
-            <a:r>
-              <a:rPr sz="1600" b="0" i="0">
-                <a:solidFill>
-                  <a:srgbClr val="1B2330"/>
-                </a:solidFill>
-                <a:latin typeface="Montserrat"/>
-              </a:rPr>
-              <a:t>Si cumple la ITC, no se puede vetar</a:t>
-            </a:r>
-          </a:p>
-          <a:p>
-            <a:pPr>
-              <a:spcAft>
-                <a:spcPts val="1100"/>
-              </a:spcAft>
-            </a:pPr>
-            <a:r>
-              <a:rPr sz="1600" b="1" i="0">
-                <a:solidFill>
-                  <a:srgbClr val="E8801A"/>
-                </a:solidFill>
-                <a:latin typeface="Montserrat"/>
-              </a:rPr>
-              <a:t>▸  </a:t>
-            </a:r>
-            <a:r>
-              <a:rPr sz="1600" b="0" i="0">
-                <a:solidFill>
-                  <a:srgbClr val="1B2330"/>
-                </a:solidFill>
-                <a:latin typeface="Montserrat"/>
-              </a:rPr>
-              <a:t>Con riesgo: la Administración lo retira</a:t>
-            </a:r>
-          </a:p>
-        </p:txBody>
-      </p:sp>
-      <p:sp>
-        <p:nvSpPr>
-          <p:cNvPr id="9" name="imgph" descr="IMGQ:gas appliances store shelf"/>
+            <a:r>
+              <a:rPr sz="2400" b="1" i="0">
+                <a:solidFill>
+                  <a:srgbClr val="FFFFFF"/>
+                </a:solidFill>
+                <a:latin typeface="Montserrat"/>
+              </a:rPr>
+              <a:t>⚡  PREGUNTA RÁPIDA</a:t>
+            </a:r>
+          </a:p>
+        </p:txBody>
+      </p:sp>
+      <p:sp>
+        <p:nvSpPr>
+          <p:cNvPr id="7" name="TextBox 6"/>
+          <p:cNvSpPr txBox="1"/>
+          <p:nvPr/>
+        </p:nvSpPr>
+        <p:spPr>
+          <a:xfrm>
+            <a:off x="822960" y="1508760"/>
+            <a:ext cx="10515600" cy="1371600"/>
+          </a:xfrm>
+          <a:prstGeom prst="rect">
+            <a:avLst/>
+          </a:prstGeom>
+          <a:noFill/>
+        </p:spPr>
+        <p:txBody>
+          <a:bodyPr wrap="square">
+            <a:spAutoFit/>
+          </a:bodyPr>
+          <a:lstStyle/>
+          <a:p>
+            <a:r>
+              <a:rPr sz="2400" b="1" i="0">
+                <a:solidFill>
+                  <a:srgbClr val="1E2761"/>
+                </a:solidFill>
+                <a:latin typeface="Montserrat"/>
+              </a:rPr>
+              <a:t>La parte de documentación y puesta en marcha de la ITC-ICG 08, ¿a qué aparatos se aplica?</a:t>
+            </a:r>
+          </a:p>
+        </p:txBody>
+      </p:sp>
+      <p:sp>
+        <p:nvSpPr>
+          <p:cNvPr id="8" name="Rounded Rectangle 7"/>
           <p:cNvSpPr/>
           <p:nvPr/>
         </p:nvSpPr>
         <p:spPr>
           <a:xfrm>
-            <a:off x="5806440" y="1051560"/>
-            <a:ext cx="5298947" cy="4629150"/>
+            <a:off x="822960" y="3291840"/>
+            <a:ext cx="4983480" cy="1143000"/>
           </a:xfrm>
           <a:prstGeom prst="roundRect">
             <a:avLst/>
@@ -9654,14 +12369,58 @@
       </p:sp>
       <p:sp>
         <p:nvSpPr>
+          <p:cNvPr id="9" name="Rectangle 8"/>
+          <p:cNvSpPr/>
+          <p:nvPr/>
+        </p:nvSpPr>
+        <p:spPr>
+          <a:xfrm>
+            <a:off x="822960" y="3291840"/>
+            <a:ext cx="640080" cy="1143000"/>
+          </a:xfrm>
+          <a:prstGeom prst="rect">
+            <a:avLst/>
+          </a:prstGeom>
+          <a:solidFill>
+            <a:srgbClr val="1E2761"/>
+          </a:solidFill>
+          <a:ln>
+            <a:noFill/>
+          </a:ln>
+          <a:effectLst/>
+        </p:spPr>
+        <p:style>
+          <a:lnRef idx="1">
+            <a:schemeClr val="accent1"/>
+          </a:lnRef>
+          <a:fillRef idx="3">
+            <a:schemeClr val="accent1"/>
+          </a:fillRef>
+          <a:effectRef idx="2">
+            <a:schemeClr val="accent1"/>
+          </a:effectRef>
+          <a:fontRef idx="minor">
+            <a:schemeClr val="lt1"/>
+          </a:fontRef>
+        </p:style>
+        <p:txBody>
+          <a:bodyPr rtlCol="0" anchor="ctr"/>
+          <a:lstStyle/>
+          <a:p>
+            <a:pPr algn="ctr"/>
+          </a:p>
+        </p:txBody>
+      </p:sp>
+      <p:sp>
+        <p:nvSpPr>
           <p:cNvPr id="10" name="TextBox 9"/>
           <p:cNvSpPr txBox="1"/>
           <p:nvPr/>
         </p:nvSpPr>
         <p:spPr>
           <a:xfrm>
-            <a:off x="6080760" y="2726055"/>
-            <a:ext cx="4750307" cy="1280160"/>
+            <a:off x="822960" y="3611880"/>
+            <a:ext cx="640080" cy="548640"/>
           </a:xfrm>
           <a:prstGeom prst="rect">
             <a:avLst/>
@@ -9676,25 +12435,524 @@
           <a:p>
             <a:pPr algn="ctr"/>
             <a:r>
-              <a:rPr sz="1400" b="1" i="0">
-                <a:solidFill>
-                  <a:srgbClr val="64748B"/>
-                </a:solidFill>
-                <a:latin typeface="Montserrat"/>
-              </a:rPr>
-              <a:t>IMAGEN REALISTA</a:t>
-            </a:r>
-          </a:p>
+              <a:rPr sz="2200" b="1" i="0">
+                <a:solidFill>
+                  <a:srgbClr val="FFFFFF"/>
+                </a:solidFill>
+                <a:latin typeface="Montserrat"/>
+              </a:rPr>
+              <a:t>A</a:t>
+            </a:r>
+          </a:p>
+        </p:txBody>
+      </p:sp>
+      <p:sp>
+        <p:nvSpPr>
+          <p:cNvPr id="11" name="TextBox 10"/>
+          <p:cNvSpPr txBox="1"/>
+          <p:nvPr/>
+        </p:nvSpPr>
+        <p:spPr>
+          <a:xfrm>
+            <a:off x="1600200" y="3474720"/>
+            <a:ext cx="4114800" cy="868680"/>
+          </a:xfrm>
+          <a:prstGeom prst="rect">
+            <a:avLst/>
+          </a:prstGeom>
+          <a:noFill/>
+        </p:spPr>
+        <p:txBody>
+          <a:bodyPr wrap="square">
+            <a:spAutoFit/>
+          </a:bodyPr>
+          <a:lstStyle/>
+          <a:p>
+            <a:r>
+              <a:rPr sz="1400" b="0" i="0">
+                <a:solidFill>
+                  <a:srgbClr val="1B2330"/>
+                </a:solidFill>
+                <a:latin typeface="Montserrat"/>
+              </a:rPr>
+              <a:t>Solo a los que no tienen directiva europea propia</a:t>
+            </a:r>
+          </a:p>
+        </p:txBody>
+      </p:sp>
+      <p:sp>
+        <p:nvSpPr>
+          <p:cNvPr id="12" name="Rounded Rectangle 11"/>
+          <p:cNvSpPr/>
+          <p:nvPr/>
+        </p:nvSpPr>
+        <p:spPr>
+          <a:xfrm>
+            <a:off x="6355080" y="3291840"/>
+            <a:ext cx="4983480" cy="1143000"/>
+          </a:xfrm>
+          <a:prstGeom prst="roundRect">
+            <a:avLst/>
+          </a:prstGeom>
+          <a:solidFill>
+            <a:srgbClr val="F3F6FB"/>
+          </a:solidFill>
+          <a:ln w="12700">
+            <a:solidFill>
+              <a:srgbClr val="C7D2E6"/>
+            </a:solidFill>
+          </a:ln>
+          <a:effectLst/>
+        </p:spPr>
+        <p:style>
+          <a:lnRef idx="1">
+            <a:schemeClr val="accent1"/>
+          </a:lnRef>
+          <a:fillRef idx="3">
+            <a:schemeClr val="accent1"/>
+          </a:fillRef>
+          <a:effectRef idx="2">
+            <a:schemeClr val="accent1"/>
+          </a:effectRef>
+          <a:fontRef idx="minor">
+            <a:schemeClr val="lt1"/>
+          </a:fontRef>
+        </p:style>
+        <p:txBody>
+          <a:bodyPr rtlCol="0" anchor="ctr"/>
+          <a:lstStyle/>
           <a:p>
             <a:pPr algn="ctr"/>
-            <a:r>
-              <a:rPr sz="1100" b="0" i="1">
-                <a:solidFill>
-                  <a:srgbClr val="64748B"/>
-                </a:solidFill>
-                <a:latin typeface="Montserrat"/>
-              </a:rPr>
-              <a:t>gas appliances store shelf</a:t>
+          </a:p>
+        </p:txBody>
+      </p:sp>
+      <p:sp>
+        <p:nvSpPr>
+          <p:cNvPr id="13" name="Rectangle 12"/>
+          <p:cNvSpPr/>
+          <p:nvPr/>
+        </p:nvSpPr>
+        <p:spPr>
+          <a:xfrm>
+            <a:off x="6355080" y="3291840"/>
+            <a:ext cx="640080" cy="1143000"/>
+          </a:xfrm>
+          <a:prstGeom prst="rect">
+            <a:avLst/>
+          </a:prstGeom>
+          <a:solidFill>
+            <a:srgbClr val="1E2761"/>
+          </a:solidFill>
+          <a:ln>
+            <a:noFill/>
+          </a:ln>
+          <a:effectLst/>
+        </p:spPr>
+        <p:style>
+          <a:lnRef idx="1">
+            <a:schemeClr val="accent1"/>
+          </a:lnRef>
+          <a:fillRef idx="3">
+            <a:schemeClr val="accent1"/>
+          </a:fillRef>
+          <a:effectRef idx="2">
+            <a:schemeClr val="accent1"/>
+          </a:effectRef>
+          <a:fontRef idx="minor">
+            <a:schemeClr val="lt1"/>
+          </a:fontRef>
+        </p:style>
+        <p:txBody>
+          <a:bodyPr rtlCol="0" anchor="ctr"/>
+          <a:lstStyle/>
+          <a:p>
+            <a:pPr algn="ctr"/>
+          </a:p>
+        </p:txBody>
+      </p:sp>
+      <p:sp>
+        <p:nvSpPr>
+          <p:cNvPr id="14" name="TextBox 13"/>
+          <p:cNvSpPr txBox="1"/>
+          <p:nvPr/>
+        </p:nvSpPr>
+        <p:spPr>
+          <a:xfrm>
+            <a:off x="6355080" y="3611880"/>
+            <a:ext cx="640080" cy="548640"/>
+          </a:xfrm>
+          <a:prstGeom prst="rect">
+            <a:avLst/>
+          </a:prstGeom>
+          <a:noFill/>
+        </p:spPr>
+        <p:txBody>
+          <a:bodyPr wrap="square">
+            <a:spAutoFit/>
+          </a:bodyPr>
+          <a:lstStyle/>
+          <a:p>
+            <a:pPr algn="ctr"/>
+            <a:r>
+              <a:rPr sz="2200" b="1" i="0">
+                <a:solidFill>
+                  <a:srgbClr val="FFFFFF"/>
+                </a:solidFill>
+                <a:latin typeface="Montserrat"/>
+              </a:rPr>
+              <a:t>B</a:t>
+            </a:r>
+          </a:p>
+        </p:txBody>
+      </p:sp>
+      <p:sp>
+        <p:nvSpPr>
+          <p:cNvPr id="15" name="TextBox 14"/>
+          <p:cNvSpPr txBox="1"/>
+          <p:nvPr/>
+        </p:nvSpPr>
+        <p:spPr>
+          <a:xfrm>
+            <a:off x="7132320" y="3474720"/>
+            <a:ext cx="4114800" cy="868680"/>
+          </a:xfrm>
+          <a:prstGeom prst="rect">
+            <a:avLst/>
+          </a:prstGeom>
+          <a:noFill/>
+        </p:spPr>
+        <p:txBody>
+          <a:bodyPr wrap="square">
+            <a:spAutoFit/>
+          </a:bodyPr>
+          <a:lstStyle/>
+          <a:p>
+            <a:r>
+              <a:rPr sz="1400" b="0" i="0">
+                <a:solidFill>
+                  <a:srgbClr val="1B2330"/>
+                </a:solidFill>
+                <a:latin typeface="Montserrat"/>
+              </a:rPr>
+              <a:t>A todos los aparatos a gas, tengan marcado CE o no</a:t>
+            </a:r>
+          </a:p>
+        </p:txBody>
+      </p:sp>
+      <p:sp>
+        <p:nvSpPr>
+          <p:cNvPr id="16" name="Rounded Rectangle 15"/>
+          <p:cNvSpPr/>
+          <p:nvPr/>
+        </p:nvSpPr>
+        <p:spPr>
+          <a:xfrm>
+            <a:off x="822960" y="4617720"/>
+            <a:ext cx="4983480" cy="1143000"/>
+          </a:xfrm>
+          <a:prstGeom prst="roundRect">
+            <a:avLst/>
+          </a:prstGeom>
+          <a:solidFill>
+            <a:srgbClr val="F3F6FB"/>
+          </a:solidFill>
+          <a:ln w="12700">
+            <a:solidFill>
+              <a:srgbClr val="C7D2E6"/>
+            </a:solidFill>
+          </a:ln>
+          <a:effectLst/>
+        </p:spPr>
+        <p:style>
+          <a:lnRef idx="1">
+            <a:schemeClr val="accent1"/>
+          </a:lnRef>
+          <a:fillRef idx="3">
+            <a:schemeClr val="accent1"/>
+          </a:fillRef>
+          <a:effectRef idx="2">
+            <a:schemeClr val="accent1"/>
+          </a:effectRef>
+          <a:fontRef idx="minor">
+            <a:schemeClr val="lt1"/>
+          </a:fontRef>
+        </p:style>
+        <p:txBody>
+          <a:bodyPr rtlCol="0" anchor="ctr"/>
+          <a:lstStyle/>
+          <a:p>
+            <a:pPr algn="ctr"/>
+          </a:p>
+        </p:txBody>
+      </p:sp>
+      <p:sp>
+        <p:nvSpPr>
+          <p:cNvPr id="17" name="Rectangle 16"/>
+          <p:cNvSpPr/>
+          <p:nvPr/>
+        </p:nvSpPr>
+        <p:spPr>
+          <a:xfrm>
+            <a:off x="822960" y="4617720"/>
+            <a:ext cx="640080" cy="1143000"/>
+          </a:xfrm>
+          <a:prstGeom prst="rect">
+            <a:avLst/>
+          </a:prstGeom>
+          <a:solidFill>
+            <a:srgbClr val="1E2761"/>
+          </a:solidFill>
+          <a:ln>
+            <a:noFill/>
+          </a:ln>
+          <a:effectLst/>
+        </p:spPr>
+        <p:style>
+          <a:lnRef idx="1">
+            <a:schemeClr val="accent1"/>
+          </a:lnRef>
+          <a:fillRef idx="3">
+            <a:schemeClr val="accent1"/>
+          </a:fillRef>
+          <a:effectRef idx="2">
+            <a:schemeClr val="accent1"/>
+          </a:effectRef>
+          <a:fontRef idx="minor">
+            <a:schemeClr val="lt1"/>
+          </a:fontRef>
+        </p:style>
+        <p:txBody>
+          <a:bodyPr rtlCol="0" anchor="ctr"/>
+          <a:lstStyle/>
+          <a:p>
+            <a:pPr algn="ctr"/>
+          </a:p>
+        </p:txBody>
+      </p:sp>
+      <p:sp>
+        <p:nvSpPr>
+          <p:cNvPr id="18" name="TextBox 17"/>
+          <p:cNvSpPr txBox="1"/>
+          <p:nvPr/>
+        </p:nvSpPr>
+        <p:spPr>
+          <a:xfrm>
+            <a:off x="822960" y="4937760"/>
+            <a:ext cx="640080" cy="548640"/>
+          </a:xfrm>
+          <a:prstGeom prst="rect">
+            <a:avLst/>
+          </a:prstGeom>
+          <a:noFill/>
+        </p:spPr>
+        <p:txBody>
+          <a:bodyPr wrap="square">
+            <a:spAutoFit/>
+          </a:bodyPr>
+          <a:lstStyle/>
+          <a:p>
+            <a:pPr algn="ctr"/>
+            <a:r>
+              <a:rPr sz="2200" b="1" i="0">
+                <a:solidFill>
+                  <a:srgbClr val="FFFFFF"/>
+                </a:solidFill>
+                <a:latin typeface="Montserrat"/>
+              </a:rPr>
+              <a:t>C</a:t>
+            </a:r>
+          </a:p>
+        </p:txBody>
+      </p:sp>
+      <p:sp>
+        <p:nvSpPr>
+          <p:cNvPr id="19" name="TextBox 18"/>
+          <p:cNvSpPr txBox="1"/>
+          <p:nvPr/>
+        </p:nvSpPr>
+        <p:spPr>
+          <a:xfrm>
+            <a:off x="1600200" y="4800600"/>
+            <a:ext cx="4114800" cy="868680"/>
+          </a:xfrm>
+          <a:prstGeom prst="rect">
+            <a:avLst/>
+          </a:prstGeom>
+          <a:noFill/>
+        </p:spPr>
+        <p:txBody>
+          <a:bodyPr wrap="square">
+            <a:spAutoFit/>
+          </a:bodyPr>
+          <a:lstStyle/>
+          <a:p>
+            <a:r>
+              <a:rPr sz="1400" b="0" i="0">
+                <a:solidFill>
+                  <a:srgbClr val="1B2330"/>
+                </a:solidFill>
+                <a:latin typeface="Montserrat"/>
+              </a:rPr>
+              <a:t>Solo a los aparatos que ya llevan marcado CE</a:t>
+            </a:r>
+          </a:p>
+        </p:txBody>
+      </p:sp>
+      <p:sp>
+        <p:nvSpPr>
+          <p:cNvPr id="20" name="Rounded Rectangle 19"/>
+          <p:cNvSpPr/>
+          <p:nvPr/>
+        </p:nvSpPr>
+        <p:spPr>
+          <a:xfrm>
+            <a:off x="6355080" y="4617720"/>
+            <a:ext cx="4983480" cy="1143000"/>
+          </a:xfrm>
+          <a:prstGeom prst="roundRect">
+            <a:avLst/>
+          </a:prstGeom>
+          <a:solidFill>
+            <a:srgbClr val="F3F6FB"/>
+          </a:solidFill>
+          <a:ln w="12700">
+            <a:solidFill>
+              <a:srgbClr val="C7D2E6"/>
+            </a:solidFill>
+          </a:ln>
+          <a:effectLst/>
+        </p:spPr>
+        <p:style>
+          <a:lnRef idx="1">
+            <a:schemeClr val="accent1"/>
+          </a:lnRef>
+          <a:fillRef idx="3">
+            <a:schemeClr val="accent1"/>
+          </a:fillRef>
+          <a:effectRef idx="2">
+            <a:schemeClr val="accent1"/>
+          </a:effectRef>
+          <a:fontRef idx="minor">
+            <a:schemeClr val="lt1"/>
+          </a:fontRef>
+        </p:style>
+        <p:txBody>
+          <a:bodyPr rtlCol="0" anchor="ctr"/>
+          <a:lstStyle/>
+          <a:p>
+            <a:pPr algn="ctr"/>
+          </a:p>
+        </p:txBody>
+      </p:sp>
+      <p:sp>
+        <p:nvSpPr>
+          <p:cNvPr id="21" name="Rectangle 20"/>
+          <p:cNvSpPr/>
+          <p:nvPr/>
+        </p:nvSpPr>
+        <p:spPr>
+          <a:xfrm>
+            <a:off x="6355080" y="4617720"/>
+            <a:ext cx="640080" cy="1143000"/>
+          </a:xfrm>
+          <a:prstGeom prst="rect">
+            <a:avLst/>
+          </a:prstGeom>
+          <a:solidFill>
+            <a:srgbClr val="1E2761"/>
+          </a:solidFill>
+          <a:ln>
+            <a:noFill/>
+          </a:ln>
+          <a:effectLst/>
+        </p:spPr>
+        <p:style>
+          <a:lnRef idx="1">
+            <a:schemeClr val="accent1"/>
+          </a:lnRef>
+          <a:fillRef idx="3">
+            <a:schemeClr val="accent1"/>
+          </a:fillRef>
+          <a:effectRef idx="2">
+            <a:schemeClr val="accent1"/>
+          </a:effectRef>
+          <a:fontRef idx="minor">
+            <a:schemeClr val="lt1"/>
+          </a:fontRef>
+        </p:style>
+        <p:txBody>
+          <a:bodyPr rtlCol="0" anchor="ctr"/>
+          <a:lstStyle/>
+          <a:p>
+            <a:pPr algn="ctr"/>
+          </a:p>
+        </p:txBody>
+      </p:sp>
+      <p:sp>
+        <p:nvSpPr>
+          <p:cNvPr id="22" name="TextBox 21"/>
+          <p:cNvSpPr txBox="1"/>
+          <p:nvPr/>
+        </p:nvSpPr>
+        <p:spPr>
+          <a:xfrm>
+            <a:off x="6355080" y="4937760"/>
+            <a:ext cx="640080" cy="548640"/>
+          </a:xfrm>
+          <a:prstGeom prst="rect">
+            <a:avLst/>
+          </a:prstGeom>
+          <a:noFill/>
+        </p:spPr>
+        <p:txBody>
+          <a:bodyPr wrap="square">
+            <a:spAutoFit/>
+          </a:bodyPr>
+          <a:lstStyle/>
+          <a:p>
+            <a:pPr algn="ctr"/>
+            <a:r>
+              <a:rPr sz="2200" b="1" i="0">
+                <a:solidFill>
+                  <a:srgbClr val="FFFFFF"/>
+                </a:solidFill>
+                <a:latin typeface="Montserrat"/>
+              </a:rPr>
+              <a:t>D</a:t>
+            </a:r>
+          </a:p>
+        </p:txBody>
+      </p:sp>
+      <p:sp>
+        <p:nvSpPr>
+          <p:cNvPr id="23" name="TextBox 22"/>
+          <p:cNvSpPr txBox="1"/>
+          <p:nvPr/>
+        </p:nvSpPr>
+        <p:spPr>
+          <a:xfrm>
+            <a:off x="7132320" y="4800600"/>
+            <a:ext cx="4114800" cy="868680"/>
+          </a:xfrm>
+          <a:prstGeom prst="rect">
+            <a:avLst/>
+          </a:prstGeom>
+          <a:noFill/>
+        </p:spPr>
+        <p:txBody>
+          <a:bodyPr wrap="square">
+            <a:spAutoFit/>
+          </a:bodyPr>
+          <a:lstStyle/>
+          <a:p>
+            <a:r>
+              <a:rPr sz="1400" b="0" i="0">
+                <a:solidFill>
+                  <a:srgbClr val="1B2330"/>
+                </a:solidFill>
+                <a:latin typeface="Montserrat"/>
+              </a:rPr>
+              <a:t>Solo a los aparatos de uso industrial</a:t>
             </a:r>
           </a:p>
         </p:txBody>
@@ -9704,6 +12962,18 @@
   <p:clrMapOvr>
     <a:masterClrMapping/>
   </p:clrMapOvr>
+  <mc:AlternateContent xmlns:mc="http://schemas.openxmlformats.org/markup-compatibility/2006">
+    <mc:Choice xmlns:p14="http://schemas.microsoft.com/office/powerpoint/2010/main" Requires="p14">
+      <p:transition spd="med" p14:dur="700">
+        <p14:cube dir="r"/>
+      </p:transition>
+    </mc:Choice>
+    <mc:Fallback>
+      <p:transition spd="med">
+        <p:push dir="r"/>
+      </p:transition>
+    </mc:Fallback>
+  </mc:AlternateContent>
 </p:sld>
 </file>
 
@@ -9791,7 +13061,7 @@
                 </a:solidFill>
                 <a:latin typeface="Montserrat"/>
               </a:rPr>
-              <a:t>007 / 015</a:t>
+              <a:t>007 / 019</a:t>
             </a:r>
           </a:p>
         </p:txBody>
@@ -9832,88 +13102,20 @@
       </p:sp>
       <p:sp>
         <p:nvSpPr>
-          <p:cNvPr id="5" name="TextBox 4"/>
-          <p:cNvSpPr txBox="1"/>
-          <p:nvPr/>
-        </p:nvSpPr>
-        <p:spPr>
-          <a:xfrm>
-            <a:off x="822960" y="457200"/>
-            <a:ext cx="10058400" cy="365760"/>
-          </a:xfrm>
-          <a:prstGeom prst="rect">
-            <a:avLst/>
-          </a:prstGeom>
-          <a:noFill/>
-        </p:spPr>
-        <p:txBody>
-          <a:bodyPr wrap="square">
-            <a:spAutoFit/>
-          </a:bodyPr>
-          <a:lstStyle/>
-          <a:p>
-            <a:r>
-              <a:rPr sz="1300" b="1" i="0">
-                <a:solidFill>
-                  <a:srgbClr val="E8801A"/>
-                </a:solidFill>
-                <a:latin typeface="Montserrat"/>
-              </a:rPr>
-              <a:t>APARTADO 2 · CONDICIONES NORMALES</a:t>
-            </a:r>
-          </a:p>
-        </p:txBody>
-      </p:sp>
-      <p:sp>
-        <p:nvSpPr>
-          <p:cNvPr id="6" name="TextBox 5"/>
-          <p:cNvSpPr txBox="1"/>
-          <p:nvPr/>
-        </p:nvSpPr>
-        <p:spPr>
-          <a:xfrm>
-            <a:off x="822960" y="868680"/>
-            <a:ext cx="10515600" cy="914400"/>
-          </a:xfrm>
-          <a:prstGeom prst="rect">
-            <a:avLst/>
-          </a:prstGeom>
-          <a:noFill/>
-        </p:spPr>
-        <p:txBody>
-          <a:bodyPr wrap="square">
-            <a:spAutoFit/>
-          </a:bodyPr>
-          <a:lstStyle/>
-          <a:p>
-            <a:r>
-              <a:rPr sz="2800" b="1" i="0">
-                <a:solidFill>
-                  <a:srgbClr val="1E2761"/>
-                </a:solidFill>
-                <a:latin typeface="Montserrat"/>
-              </a:rPr>
-              <a:t>Las tres patas del funcionamiento</a:t>
-            </a:r>
-          </a:p>
-        </p:txBody>
-      </p:sp>
-      <p:sp>
-        <p:nvSpPr>
-          <p:cNvPr id="7" name="Rounded Rectangle 6"/>
+          <p:cNvPr id="5" name="Rectangle 4"/>
           <p:cNvSpPr/>
           <p:nvPr/>
         </p:nvSpPr>
         <p:spPr>
           <a:xfrm>
-            <a:off x="868680" y="1627632"/>
-            <a:ext cx="2011680" cy="73152"/>
-          </a:xfrm>
-          <a:prstGeom prst="roundRect">
+            <a:off x="0" y="0"/>
+            <a:ext cx="12191695" cy="1143000"/>
+          </a:xfrm>
+          <a:prstGeom prst="rect">
             <a:avLst/>
           </a:prstGeom>
           <a:solidFill>
-            <a:srgbClr val="E8801A"/>
+            <a:srgbClr val="1E8E4B"/>
           </a:solidFill>
           <a:ln>
             <a:noFill/>
@@ -9944,14 +13146,14 @@
       </p:sp>
       <p:sp>
         <p:nvSpPr>
-          <p:cNvPr id="8" name="TextBox 7"/>
+          <p:cNvPr id="6" name="TextBox 5"/>
           <p:cNvSpPr txBox="1"/>
           <p:nvPr/>
         </p:nvSpPr>
         <p:spPr>
           <a:xfrm>
-            <a:off x="822960" y="1965960"/>
-            <a:ext cx="4983480" cy="4206240"/>
+            <a:off x="822960" y="274320"/>
+            <a:ext cx="10515600" cy="640080"/>
           </a:xfrm>
           <a:prstGeom prst="rect">
             <a:avLst/>
@@ -9964,102 +13166,72 @@
           </a:bodyPr>
           <a:lstStyle/>
           <a:p>
-            <a:pPr>
-              <a:spcAft>
-                <a:spcPts val="1100"/>
-              </a:spcAft>
-            </a:pPr>
-            <a:r>
-              <a:rPr sz="1600" b="1" i="0">
-                <a:solidFill>
-                  <a:srgbClr val="E8801A"/>
-                </a:solidFill>
-                <a:latin typeface="Montserrat"/>
-              </a:rPr>
-              <a:t>▸  </a:t>
-            </a:r>
-            <a:r>
-              <a:rPr sz="1600" b="0" i="0">
-                <a:solidFill>
-                  <a:srgbClr val="1B2330"/>
-                </a:solidFill>
-                <a:latin typeface="Montserrat"/>
-              </a:rPr>
-              <a:t>Bien instalado y mantenido</a:t>
-            </a:r>
-          </a:p>
-          <a:p>
-            <a:pPr>
-              <a:spcAft>
-                <a:spcPts val="1100"/>
-              </a:spcAft>
-            </a:pPr>
-            <a:r>
-              <a:rPr sz="1600" b="1" i="0">
-                <a:solidFill>
-                  <a:srgbClr val="E8801A"/>
-                </a:solidFill>
-                <a:latin typeface="Montserrat"/>
-              </a:rPr>
-              <a:t>▸  </a:t>
-            </a:r>
-            <a:r>
-              <a:rPr sz="1600" b="0" i="0">
-                <a:solidFill>
-                  <a:srgbClr val="1B2330"/>
-                </a:solidFill>
-                <a:latin typeface="Montserrat"/>
-              </a:rPr>
-              <a:t>Gas correcto: Wobbe y presión</a:t>
-            </a:r>
-          </a:p>
-          <a:p>
-            <a:pPr>
-              <a:spcAft>
-                <a:spcPts val="1100"/>
-              </a:spcAft>
-            </a:pPr>
-            <a:r>
-              <a:rPr sz="1600" b="1" i="0">
-                <a:solidFill>
-                  <a:srgbClr val="E8801A"/>
-                </a:solidFill>
-                <a:latin typeface="Montserrat"/>
-              </a:rPr>
-              <a:t>▸  </a:t>
-            </a:r>
-            <a:r>
-              <a:rPr sz="1600" b="0" i="0">
-                <a:solidFill>
-                  <a:srgbClr val="1B2330"/>
-                </a:solidFill>
-                <a:latin typeface="Montserrat"/>
-              </a:rPr>
-              <a:t>Usado para su fin</a:t>
-            </a:r>
-          </a:p>
-        </p:txBody>
-      </p:sp>
-      <p:sp>
-        <p:nvSpPr>
-          <p:cNvPr id="9" name="imgph" descr="IMGQ:blue gas flame burner"/>
+            <a:r>
+              <a:rPr sz="2400" b="1" i="0">
+                <a:solidFill>
+                  <a:srgbClr val="FFFFFF"/>
+                </a:solidFill>
+                <a:latin typeface="Montserrat"/>
+              </a:rPr>
+              <a:t>✔  RESPUESTA:  B</a:t>
+            </a:r>
+          </a:p>
+        </p:txBody>
+      </p:sp>
+      <p:sp>
+        <p:nvSpPr>
+          <p:cNvPr id="7" name="TextBox 6"/>
+          <p:cNvSpPr txBox="1"/>
+          <p:nvPr/>
+        </p:nvSpPr>
+        <p:spPr>
+          <a:xfrm>
+            <a:off x="822960" y="1417320"/>
+            <a:ext cx="10515600" cy="914400"/>
+          </a:xfrm>
+          <a:prstGeom prst="rect">
+            <a:avLst/>
+          </a:prstGeom>
+          <a:noFill/>
+        </p:spPr>
+        <p:txBody>
+          <a:bodyPr wrap="square">
+            <a:spAutoFit/>
+          </a:bodyPr>
+          <a:lstStyle/>
+          <a:p>
+            <a:r>
+              <a:rPr sz="1800" b="1" i="0">
+                <a:solidFill>
+                  <a:srgbClr val="64748B"/>
+                </a:solidFill>
+                <a:latin typeface="Montserrat"/>
+              </a:rPr>
+              <a:t>La parte de documentación y puesta en marcha de la ITC-ICG 08, ¿a qué aparatos se aplica?</a:t>
+            </a:r>
+          </a:p>
+        </p:txBody>
+      </p:sp>
+      <p:sp>
+        <p:nvSpPr>
+          <p:cNvPr id="8" name="Rounded Rectangle 7"/>
           <p:cNvSpPr/>
           <p:nvPr/>
         </p:nvSpPr>
         <p:spPr>
           <a:xfrm>
-            <a:off x="5806440" y="1051560"/>
-            <a:ext cx="5298947" cy="4629150"/>
+            <a:off x="822960" y="2514600"/>
+            <a:ext cx="10515600" cy="914400"/>
           </a:xfrm>
           <a:prstGeom prst="roundRect">
             <a:avLst/>
           </a:prstGeom>
           <a:solidFill>
-            <a:srgbClr val="F3F6FB"/>
+            <a:srgbClr val="E9F6EE"/>
           </a:solidFill>
           <a:ln w="12700">
             <a:solidFill>
-              <a:srgbClr val="C7D2E6"/>
+              <a:srgbClr val="1E8E4B"/>
             </a:solidFill>
           </a:ln>
           <a:effectLst/>
@@ -10088,14 +13260,14 @@
       </p:sp>
       <p:sp>
         <p:nvSpPr>
-          <p:cNvPr id="10" name="TextBox 9"/>
+          <p:cNvPr id="9" name="TextBox 8"/>
           <p:cNvSpPr txBox="1"/>
           <p:nvPr/>
         </p:nvSpPr>
         <p:spPr>
           <a:xfrm>
-            <a:off x="6080760" y="2726055"/>
-            <a:ext cx="4750307" cy="1280160"/>
+            <a:off x="1097280" y="2697480"/>
+            <a:ext cx="10058400" cy="640080"/>
           </a:xfrm>
           <a:prstGeom prst="rect">
             <a:avLst/>
@@ -10108,27 +13280,66 @@
           </a:bodyPr>
           <a:lstStyle/>
           <a:p>
-            <a:pPr algn="ctr"/>
-            <a:r>
-              <a:rPr sz="1400" b="1" i="0">
-                <a:solidFill>
-                  <a:srgbClr val="64748B"/>
-                </a:solidFill>
-                <a:latin typeface="Montserrat"/>
-              </a:rPr>
-              <a:t>IMAGEN REALISTA</a:t>
-            </a:r>
-          </a:p>
-          <a:p>
-            <a:pPr algn="ctr"/>
-            <a:r>
-              <a:rPr sz="1100" b="0" i="1">
-                <a:solidFill>
-                  <a:srgbClr val="64748B"/>
-                </a:solidFill>
-                <a:latin typeface="Montserrat"/>
-              </a:rPr>
-              <a:t>blue gas flame burner</a:t>
+            <a:r>
+              <a:rPr sz="1800" b="1" i="0">
+                <a:solidFill>
+                  <a:srgbClr val="1E8E4B"/>
+                </a:solidFill>
+                <a:latin typeface="Montserrat"/>
+              </a:rPr>
+              <a:t>B.  </a:t>
+            </a:r>
+            <a:r>
+              <a:rPr sz="1800" b="1" i="0">
+                <a:solidFill>
+                  <a:srgbClr val="1E2761"/>
+                </a:solidFill>
+                <a:latin typeface="Montserrat"/>
+              </a:rPr>
+              <a:t>A todos los aparatos a gas, tengan marcado CE o no</a:t>
+            </a:r>
+          </a:p>
+        </p:txBody>
+      </p:sp>
+      <p:sp>
+        <p:nvSpPr>
+          <p:cNvPr id="10" name="TextBox 9"/>
+          <p:cNvSpPr txBox="1"/>
+          <p:nvPr/>
+        </p:nvSpPr>
+        <p:spPr>
+          <a:xfrm>
+            <a:off x="822960" y="3749039"/>
+            <a:ext cx="10515600" cy="2194560"/>
+          </a:xfrm>
+          <a:prstGeom prst="rect">
+            <a:avLst/>
+          </a:prstGeom>
+          <a:noFill/>
+        </p:spPr>
+        <p:txBody>
+          <a:bodyPr wrap="square">
+            <a:spAutoFit/>
+          </a:bodyPr>
+          <a:lstStyle/>
+          <a:p>
+            <a:r>
+              <a:rPr sz="1500" b="1" i="0">
+                <a:solidFill>
+                  <a:srgbClr val="E8801A"/>
+                </a:solidFill>
+                <a:latin typeface="Montserrat"/>
+              </a:rPr>
+              <a:t>Por qué:  </a:t>
+            </a:r>
+            <a:r>
+              <a:rPr sz="1500" b="0" i="0">
+                <a:solidFill>
+                  <a:srgbClr val="1B2330"/>
+                </a:solidFill>
+                <a:latin typeface="Montserrat"/>
+              </a:rPr>
+              <a:t>La ITC tiene dos puertas: la seguridad y la certificación solo alcanzan a los aparatos sin directiva propia, pero la documentación y la puesta en marcha se aplican a todos.</a:t>
             </a:r>
           </a:p>
         </p:txBody>
@@ -10138,6 +13349,18 @@
   <p:clrMapOvr>
     <a:masterClrMapping/>
   </p:clrMapOvr>
+  <mc:AlternateContent xmlns:mc="http://schemas.openxmlformats.org/markup-compatibility/2006">
+    <mc:Choice xmlns:p14="http://schemas.microsoft.com/office/powerpoint/2010/main" Requires="p14">
+      <p:transition spd="med" p14:dur="700">
+        <p14:cube dir="l"/>
+      </p:transition>
+    </mc:Choice>
+    <mc:Fallback>
+      <p:transition spd="med">
+        <p:push dir="l"/>
+      </p:transition>
+    </mc:Fallback>
+  </mc:AlternateContent>
 </p:sld>
 </file>
 
@@ -10225,7 +13448,7 @@
                 </a:solidFill>
                 <a:latin typeface="Montserrat"/>
               </a:rPr>
-              <a:t>008 / 015</a:t>
+              <a:t>008 / 019</a:t>
             </a:r>
           </a:p>
         </p:txBody>
@@ -10293,7 +13516,7 @@
                 </a:solidFill>
                 <a:latin typeface="Montserrat"/>
               </a:rPr>
-              <a:t>APARTADO 2.2 · PUESTA EN EL MERCADO</a:t>
+              <a:t>APARTADO 2 · COMERCIALIZACIÓN</a:t>
             </a:r>
           </a:p>
         </p:txBody>
@@ -10327,14 +13550,14 @@
                 </a:solidFill>
                 <a:latin typeface="Montserrat"/>
               </a:rPr>
-              <a:t>Dos manuales y advertencias</a:t>
-            </a:r>
-          </a:p>
-        </p:txBody>
-      </p:sp>
-      <p:sp>
-        <p:nvSpPr>
-          <p:cNvPr id="7" name="Rounded Rectangle 6"/>
+              <a:t>Qué aparatos pueden venderse</a:t>
+            </a:r>
+          </a:p>
+        </p:txBody>
+      </p:sp>
+      <p:sp>
+        <p:nvSpPr>
+          <p:cNvPr id="7" name="Rectangle 6"/>
           <p:cNvSpPr/>
           <p:nvPr/>
         </p:nvSpPr>
@@ -10343,7 +13566,7 @@
             <a:off x="868680" y="1627632"/>
             <a:ext cx="2011680" cy="73152"/>
           </a:xfrm>
-          <a:prstGeom prst="roundRect">
+          <a:prstGeom prst="rect">
             <a:avLst/>
           </a:prstGeom>
           <a:solidFill>
@@ -10385,7 +13608,7 @@
         <p:spPr>
           <a:xfrm>
             <a:off x="822960" y="1965960"/>
-            <a:ext cx="4983480" cy="4206240"/>
+            <a:ext cx="5029200" cy="4206240"/>
           </a:xfrm>
           <a:prstGeom prst="rect">
             <a:avLst/>
@@ -10419,7 +13642,7 @@
                 </a:solidFill>
                 <a:latin typeface="Montserrat"/>
               </a:rPr>
-              <a:t>Manual técnico (instalador)</a:t>
+              <a:t>Sin peligro para personas, animales y bienes</a:t>
             </a:r>
           </a:p>
           <a:p>
@@ -10444,7 +13667,7 @@
                 </a:solidFill>
                 <a:latin typeface="Montserrat"/>
               </a:rPr>
-              <a:t>Manual de uso (usuario)</a:t>
+              <a:t>Si cumple la ITC, no se puede vetar</a:t>
             </a:r>
           </a:p>
           <a:p>
@@ -10469,46 +13692,21 @@
                 </a:solidFill>
                 <a:latin typeface="Montserrat"/>
               </a:rPr>
-              <a:t>Advertencias en aparato y embalaje</a:t>
-            </a:r>
-          </a:p>
-          <a:p>
-            <a:pPr>
-              <a:spcAft>
-                <a:spcPts val="1100"/>
-              </a:spcAft>
-            </a:pPr>
-            <a:r>
-              <a:rPr sz="1600" b="1" i="0">
-                <a:solidFill>
-                  <a:srgbClr val="E8801A"/>
-                </a:solidFill>
-                <a:latin typeface="Montserrat"/>
-              </a:rPr>
-              <a:t>▸  </a:t>
-            </a:r>
-            <a:r>
-              <a:rPr sz="1600" b="0" i="0">
-                <a:solidFill>
-                  <a:srgbClr val="1B2330"/>
-                </a:solidFill>
-                <a:latin typeface="Montserrat"/>
-              </a:rPr>
-              <a:t>Todo, como mínimo, en español</a:t>
-            </a:r>
-          </a:p>
-        </p:txBody>
-      </p:sp>
-      <p:sp>
-        <p:nvSpPr>
-          <p:cNvPr id="9" name="imgph" descr="IMGQ:boiler instruction manual booklet"/>
+              <a:t>Con riesgo: la Administración lo retira</a:t>
+            </a:r>
+          </a:p>
+        </p:txBody>
+      </p:sp>
+      <p:sp>
+        <p:nvSpPr>
+          <p:cNvPr id="9" name="imgph" descr="IMGQ:gas appliances store shelf"/>
           <p:cNvSpPr/>
           <p:nvPr/>
         </p:nvSpPr>
         <p:spPr>
           <a:xfrm>
-            <a:off x="5806440" y="1051560"/>
-            <a:ext cx="5298947" cy="4629150"/>
+            <a:off x="6080760" y="1965960"/>
+            <a:ext cx="5303520" cy="4572000"/>
           </a:xfrm>
           <a:prstGeom prst="roundRect">
             <a:avLst/>
@@ -10553,8 +13751,8 @@
         </p:nvSpPr>
         <p:spPr>
           <a:xfrm>
-            <a:off x="6080760" y="2726055"/>
-            <a:ext cx="4750307" cy="1280160"/>
+            <a:off x="6355080" y="3611880"/>
+            <a:ext cx="4754880" cy="1280160"/>
           </a:xfrm>
           <a:prstGeom prst="rect">
             <a:avLst/>
@@ -10575,7 +13773,7 @@
                 </a:solidFill>
                 <a:latin typeface="Montserrat"/>
               </a:rPr>
-              <a:t>IMAGEN REALISTA</a:t>
+              <a:t>IMAGEN</a:t>
             </a:r>
           </a:p>
           <a:p>
@@ -10587,7 +13785,7 @@
                 </a:solidFill>
                 <a:latin typeface="Montserrat"/>
               </a:rPr>
-              <a:t>boiler instruction manual booklet</a:t>
+              <a:t>gas appliances store shelf</a:t>
             </a:r>
           </a:p>
         </p:txBody>
@@ -10597,6 +13795,18 @@
   <p:clrMapOvr>
     <a:masterClrMapping/>
   </p:clrMapOvr>
+  <mc:AlternateContent xmlns:mc="http://schemas.openxmlformats.org/markup-compatibility/2006">
+    <mc:Choice xmlns:p14="http://schemas.microsoft.com/office/powerpoint/2010/main" Requires="p14">
+      <p:transition spd="med" p14:dur="700">
+        <p14:cube dir="r"/>
+      </p:transition>
+    </mc:Choice>
+    <mc:Fallback>
+      <p:transition spd="med">
+        <p:push dir="r"/>
+      </p:transition>
+    </mc:Fallback>
+  </mc:AlternateContent>
 </p:sld>
 </file>
 
@@ -10684,7 +13894,7 @@
                 </a:solidFill>
                 <a:latin typeface="Montserrat"/>
               </a:rPr>
-              <a:t>009 / 015</a:t>
+              <a:t>009 / 019</a:t>
             </a:r>
           </a:p>
         </p:txBody>
@@ -10752,7 +13962,7 @@
                 </a:solidFill>
                 <a:latin typeface="Montserrat"/>
               </a:rPr>
-              <a:t>APARTADO 2.2.1 · MANUAL TÉCNICO</a:t>
+              <a:t>APARTADO 2 · CONDICIONES NORMALES</a:t>
             </a:r>
           </a:p>
         </p:txBody>
@@ -10786,14 +13996,14 @@
                 </a:solidFill>
                 <a:latin typeface="Montserrat"/>
               </a:rPr>
-              <a:t>El libro del profesional</a:t>
-            </a:r>
-          </a:p>
-        </p:txBody>
-      </p:sp>
-      <p:sp>
-        <p:nvSpPr>
-          <p:cNvPr id="7" name="Rounded Rectangle 6"/>
+              <a:t>Las tres patas del funcionamiento</a:t>
+            </a:r>
+          </a:p>
+        </p:txBody>
+      </p:sp>
+      <p:sp>
+        <p:nvSpPr>
+          <p:cNvPr id="7" name="Rectangle 6"/>
           <p:cNvSpPr/>
           <p:nvPr/>
         </p:nvSpPr>
@@ -10802,7 +14012,7 @@
             <a:off x="868680" y="1627632"/>
             <a:ext cx="2011680" cy="73152"/>
           </a:xfrm>
-          <a:prstGeom prst="roundRect">
+          <a:prstGeom prst="rect">
             <a:avLst/>
           </a:prstGeom>
           <a:solidFill>
@@ -10843,8 +14053,8 @@
         </p:nvSpPr>
         <p:spPr>
           <a:xfrm>
-            <a:off x="822960" y="1965960"/>
-            <a:ext cx="4983480" cy="4206240"/>
+            <a:off x="6355080" y="1965960"/>
+            <a:ext cx="5029200" cy="4206240"/>
           </a:xfrm>
           <a:prstGeom prst="rect">
             <a:avLst/>
@@ -10878,7 +14088,7 @@
                 </a:solidFill>
                 <a:latin typeface="Montserrat"/>
               </a:rPr>
-              <a:t>Tipo de gas y presión de suministro</a:t>
+              <a:t>Bien instalado y mantenido</a:t>
             </a:r>
           </a:p>
           <a:p>
@@ -10903,7 +14113,7 @@
                 </a:solidFill>
                 <a:latin typeface="Montserrat"/>
               </a:rPr>
-              <a:t>Consumo nominal</a:t>
+              <a:t>Gas correcto: Wobbe y presión</a:t>
             </a:r>
           </a:p>
           <a:p>
@@ -10928,71 +14138,21 @@
                 </a:solidFill>
                 <a:latin typeface="Montserrat"/>
               </a:rPr>
-              <a:t>Aire de combustión</a:t>
-            </a:r>
-          </a:p>
-          <a:p>
-            <a:pPr>
-              <a:spcAft>
-                <a:spcPts val="1100"/>
-              </a:spcAft>
-            </a:pPr>
-            <a:r>
-              <a:rPr sz="1600" b="1" i="0">
-                <a:solidFill>
-                  <a:srgbClr val="E8801A"/>
-                </a:solidFill>
-                <a:latin typeface="Montserrat"/>
-              </a:rPr>
-              <a:t>▸  </a:t>
-            </a:r>
-            <a:r>
-              <a:rPr sz="1600" b="0" i="0">
-                <a:solidFill>
-                  <a:srgbClr val="1B2330"/>
-                </a:solidFill>
-                <a:latin typeface="Montserrat"/>
-              </a:rPr>
-              <a:t>Evacuación de humos</a:t>
-            </a:r>
-          </a:p>
-          <a:p>
-            <a:pPr>
-              <a:spcAft>
-                <a:spcPts val="1100"/>
-              </a:spcAft>
-            </a:pPr>
-            <a:r>
-              <a:rPr sz="1600" b="1" i="0">
-                <a:solidFill>
-                  <a:srgbClr val="E8801A"/>
-                </a:solidFill>
-                <a:latin typeface="Montserrat"/>
-              </a:rPr>
-              <a:t>▸  </a:t>
-            </a:r>
-            <a:r>
-              <a:rPr sz="1600" b="0" i="0">
-                <a:solidFill>
-                  <a:srgbClr val="1B2330"/>
-                </a:solidFill>
-                <a:latin typeface="Montserrat"/>
-              </a:rPr>
-              <a:t>Datos eléctricos y bornes</a:t>
-            </a:r>
-          </a:p>
-        </p:txBody>
-      </p:sp>
-      <p:sp>
-        <p:nvSpPr>
-          <p:cNvPr id="9" name="imgph" descr="IMGQ:gas boiler wiring diagram"/>
+              <a:t>Usado para su fin</a:t>
+            </a:r>
+          </a:p>
+        </p:txBody>
+      </p:sp>
+      <p:sp>
+        <p:nvSpPr>
+          <p:cNvPr id="9" name="imgph" descr="IMGQ:blue gas flame burner"/>
           <p:cNvSpPr/>
           <p:nvPr/>
         </p:nvSpPr>
         <p:spPr>
           <a:xfrm>
-            <a:off x="5806440" y="1051560"/>
-            <a:ext cx="5298947" cy="4629150"/>
+            <a:off x="822960" y="1965960"/>
+            <a:ext cx="5303520" cy="4572000"/>
           </a:xfrm>
           <a:prstGeom prst="roundRect">
             <a:avLst/>
@@ -11037,8 +14197,8 @@
         </p:nvSpPr>
         <p:spPr>
           <a:xfrm>
-            <a:off x="6080760" y="2726055"/>
-            <a:ext cx="4750307" cy="1280160"/>
+            <a:off x="1097280" y="3611880"/>
+            <a:ext cx="4754880" cy="1280160"/>
           </a:xfrm>
           <a:prstGeom prst="rect">
             <a:avLst/>
@@ -11059,7 +14219,7 @@
                 </a:solidFill>
                 <a:latin typeface="Montserrat"/>
               </a:rPr>
-              <a:t>IMAGEN REALISTA</a:t>
+              <a:t>IMAGEN</a:t>
             </a:r>
           </a:p>
           <a:p>
@@ -11071,7 +14231,7 @@
                 </a:solidFill>
                 <a:latin typeface="Montserrat"/>
               </a:rPr>
-              <a:t>gas boiler wiring diagram</a:t>
+              <a:t>blue gas flame burner</a:t>
             </a:r>
           </a:p>
         </p:txBody>
@@ -11081,6 +14241,18 @@
   <p:clrMapOvr>
     <a:masterClrMapping/>
   </p:clrMapOvr>
+  <mc:AlternateContent xmlns:mc="http://schemas.openxmlformats.org/markup-compatibility/2006">
+    <mc:Choice xmlns:p14="http://schemas.microsoft.com/office/powerpoint/2010/main" Requires="p14">
+      <p:transition spd="med" p14:dur="700">
+        <p14:cube dir="l"/>
+      </p:transition>
+    </mc:Choice>
+    <mc:Fallback>
+      <p:transition spd="med">
+        <p:push dir="l"/>
+      </p:transition>
+    </mc:Fallback>
+  </mc:AlternateContent>
 </p:sld>
 </file>
 

--- a/Curso Gas B/05 - ITC-ICG 08 - Aparatos de gas/05 - ITC-ICG 08 - Aparatos de gas - Vídeo 1.pptx
+++ b/Curso Gas B/05 - ITC-ICG 08 - Aparatos de gas/05 - ITC-ICG 08 - Aparatos de gas - Vídeo 1.pptx
@@ -1045,12 +1045,7 @@
           <a:lstStyle/>
           <a:p>
             <a:r>
-              <a:t>N1: Una fórmula corta que hay que llevar grabada a fuego.</a:t>
-            </a:r>
-          </a:p>
-          <a:p>
-            <a:r>
-              <a:t>N2: Recuerda que hay dos caminos: el de la serie y el de la pieza única. ¿Cómo se escribía todo en una sola línea?</a:t>
+              <a:t>N1: Vamos con una fórmula corta que hay que llevar grabada a fuego. La pregunta es: ¿qué fórmula resume los procedimientos válidos para certificar un aparato? Opción a: a y be a la vez, siempre las dos juntas. Opción be: a más be, o bien ce como alternativa. Opción ce: solo ce, en todos los casos posibles. Opción de: be o ce, pero nunca la a. Tómate un segundo y piensa cuál era... Pista: había dos caminos, el de la serie y el de la pieza única.</a:t>
             </a:r>
           </a:p>
         </p:txBody>
@@ -1120,12 +1115,12 @@
           <a:lstStyle/>
           <a:p>
             <a:r>
-              <a:t>N1: ¿Por qué la be?</a:t>
-            </a:r>
-          </a:p>
-          <a:p>
-            <a:r>
-              <a:t>N2: Porque hay dos caminos, no tres sueltos: examen de tipo más verificación de la producción para la serie, o bien verificación por unidad para la pieza única. El truco: la a nunca va sola, siempre la acompaña la be; y la ce es la alternativa completa por sí misma.</a:t>
+              <a:t>N2: La respuesta correcta es la opción be: a más be, o bien ce como alternativa. El porqué: hay dos caminos, no tres sueltos. El de la serie es el examen de tipo, la a, más la verificación de la producción, la be; y el de la pieza única es la verificación por unidad, la ce, ella sola. El truco para no fallar: la a nunca va sola, siempre la acompaña la be; y la ce es la alternativa completa por sí misma.</a:t>
+            </a:r>
+          </a:p>
+          <a:p>
+            <a:r>
+              <a:t>N1: Repite conmigo: a más be, o bien ce.</a:t>
             </a:r>
           </a:p>
         </p:txBody>
@@ -1646,12 +1641,7 @@
           <a:lstStyle/>
           <a:p>
             <a:r>
-              <a:t>N1: Vamos con una de las trampas favoritas del examen sobre las dos puertas de la ITC.</a:t>
-            </a:r>
-          </a:p>
-          <a:p>
-            <a:r>
-              <a:t>N2: Recuerda la regla mental: seguridad de fábrica solo a unos; arrancar el aparato en casa del cliente, a todos. ¿Cuál de las dos era la universal?</a:t>
+              <a:t>N1: Pregunta de examen, y de las que más caen. Escucha con atención: la parte de documentación y puesta en marcha de la ITC-ICG cero ocho, ¿a qué aparatos se aplica? Opción a: solo a los que no tienen directiva europea propia. Opción be: a todos los aparatos a gas, tengan marcado ce o no. Opción ce: solo a los aparatos que ya llevan marcado ce. Opción de: solo a los aparatos de uso industrial. Si vas conduciendo, párala un momento y piénsalo... Recuerda la regla mental: seguridad de fábrica solo a unos; arrancar el aparato en casa del cliente, a todos.</a:t>
             </a:r>
           </a:p>
         </p:txBody>
@@ -1721,12 +1711,12 @@
           <a:lstStyle/>
           <a:p>
             <a:r>
-              <a:t>N1: ¿Por qué la be?</a:t>
-            </a:r>
-          </a:p>
-          <a:p>
-            <a:r>
-              <a:t>N2: Porque la seguridad y la certificación solo se exigen a los aparatos que no van por una directiva europea propia; en cambio, la documentación y la puesta en marcha alcanzan a todos, lleven o no marcado ce. El truco para no fallar: si la opción dice a todos, casi siempre habla de documentación y puesta en marcha.</a:t>
+              <a:t>N2: La respuesta correcta es la opción be: a todos los aparatos a gas, tengan marcado ce o no. ¿Por qué? Porque la ITC tiene dos puertas: la seguridad y la certificación solo alcanzan a los aparatos sin directiva europea propia, pero la documentación y la puesta en marcha se aplican a todos, lleven o no marcado ce. El truco para no fallar: si la opción dice 'a todos', casi siempre habla de documentación y puesta en marcha.</a:t>
+            </a:r>
+          </a:p>
+          <a:p>
+            <a:r>
+              <a:t>N1: Así que la be. Documentación y arranque, para todos sin excepción.</a:t>
             </a:r>
           </a:p>
         </p:txBody>
